--- a/Tuan 3/bao-cao-tuan-3.pptx
+++ b/Tuan 3/bao-cao-tuan-3.pptx
@@ -8,6 +8,8 @@
     <p:sldId id="256" r:id="rId2"/>
     <p:sldId id="257" r:id="rId3"/>
     <p:sldId id="267" r:id="rId18"/>
+    <p:sldId id="269" r:id="rId20"/>
+    <p:sldId id="270" r:id="rId21"/>
     <p:sldId id="258" r:id="rId4"/>
     <p:sldId id="259" r:id="rId5"/>
     <p:sldId id="260" r:id="rId6"/>
@@ -718,38 +720,6 @@
               <a:t>Em xin hết phần báo cáo tuần 3 và mong nhận được góp ý của anh. Em xin cảm ơn.</a:t>
             </a:r>
           </a:p>
-          <a:p/>
-          <a:p>
-            <a:r>
-              <a:t>CÂU HỎI CÓ THỂ GẶP:</a:t>
-            </a:r>
-          </a:p>
-          <a:p/>
-          <a:p>
-            <a:r>
-              <a:t>• "Kho ký ức khác Chroma ở chỗ nào?" Kho ký ức là nơi lưu bản ghi thật kèm seq và trạng thái, có ràng buộc toàn vẹn. Chroma chỉ là chỉ mục vector để tìm nhanh, xây lại được từ kho bất cứ lúc nào.</a:t>
-            </a:r>
-          </a:p>
-          <a:p>
-            <a:r>
-              <a:t>• "Sao chưa làm slot và seq?" Đó là việc của tuần 4. Làm sớm thì tuần 4 không còn gì để đo, và ràng buộc unique chưa thể bật khi chưa có UPDATE.</a:t>
-            </a:r>
-          </a:p>
-          <a:p>
-            <a:r>
-              <a:t>• "Số Recall là accuracy cuối?" Không. Đó là recall của tầng truy xuất; khoảng chênh với accuracy sẽ do baseline oracle đo ở tuần 7.</a:t>
-            </a:r>
-          </a:p>
-          <a:p>
-            <a:r>
-              <a:t>• "Sao chỉ chạy 100 câu?" Phiên rất dài nên trích xuất chậm và hạn mức Gemini có hạn; nhóm đo tốc độ rồi mới quyết định mở rộng, và 100 câu lấy từ dev để không chạm tập test.</a:t>
-            </a:r>
-          </a:p>
-          <a:p>
-            <a:r>
-              <a:t>• "Có bằng chứng bộ nhớ hơn không có bộ nhớ chưa?" Chưa trong tuần 3. Các baseline no-memory, random-k, oracle và bốn cấu hình đối chứng nằm ở kế hoạch tuần 7.</a:t>
-            </a:r>
-          </a:p>
         </p:txBody>
       </p:sp>
       <p:sp>
@@ -839,7 +809,7 @@
           <a:p/>
           <a:p>
             <a:r>
-              <a:t>[Chỉ cột trái tối.] Notebook 01 chạy trên CPU: đếm cấu trúc dữ liệu, độ dài lịch sử, vị trí bằng chứng, độ trùng từ giữa câu hỏi và câu chứa đáp án. Cuối notebook nhóm chia tập dev và test phân tầng theo loại câu hỏi, với seed cố định. Theo kỷ luật đã đặt ở tuần 2, dev khoảng 150 câu dùng để chỉnh tham số, test khoảng 350 câu được khóa đến tuần 7. Notebook 02 chạy GPU đúng một lần: nhúng toàn bộ lượt hội thoại bằng BGE-M3, lưu ma trận vector kèm manifest ghi rõ mô hình nào tạo ra file nào. Notebook 03 chạy CPU, không nhúng lại, so ba đường truy xuất là vector, BM25 và RRF, và chỉ chạy trên tập dev.</a:t>
+              <a:t>[Chỉ cột trái tối.] Notebook 01 chạy trên CPU: 500 câu hỏi, 6 loại, tổng cộng phải nạp 23.867 phiên — nếu đi qua API miễn phí sẽ mất khoảng 16 ngày, nên buộc phải nhúng bằng mô hình chạy local. 64,8% số câu cần bằng chứng ở nhiều hơn một phiên, và độ trùng từ vựng trung vị giữa câu hỏi với câu chứa đáp án là 50%. Cuối notebook, nhóm chia dev và test phân tầng theo loại câu hỏi với seed cố định: 150 câu dev để chỉnh tham số, 350 câu test khóa đến tuần 7. Notebook 02 chạy GPU Tesla T4 đúng một lần: nhúng toàn bộ 247.238 đoạn văn bản bằng BGE-M3, mất khoảng 22 phút, kiểm tra nhanh cho thấy cosine của câu chứa đáp án luôn cao hơn rõ rệt so với câu ngẫu nhiên. Notebook 03 chạy CPU, không nhúng lại, so ba đường truy xuất là vector, BM25 và RRF trên 149 câu của tập dev.</a:t>
             </a:r>
           </a:p>
           <a:p/>
@@ -848,29 +818,34 @@
               <a:t>[Chỉ bảng bên phải.] Mỗi phép đo trả lời một quyết định thiết kế.</a:t>
             </a:r>
           </a:p>
-          <a:p>
-            <a:r>
-              <a:t>Thứ nhất, ngưỡng từ chối: độ chồng lấn giữa cosine của câu chứa đáp án và của lượt ngẫu nhiên là […%], nên [kết luận: dùng điểm reranker thay vì cosine].</a:t>
-            </a:r>
-          </a:p>
-          <a:p>
-            <a:r>
-              <a:t>Thứ hai, BM25 và RRF: tại k bằng 30, RRF cao hơn chỉ dùng vector […] điểm, nên [giữ / bỏ truy xuất lai].</a:t>
-            </a:r>
-          </a:p>
-          <a:p>
-            <a:r>
-              <a:t>Thứ ba, tách truy vấn con: […%] số câu cần hơn một phiên bằng chứng.</a:t>
-            </a:r>
-          </a:p>
-          <a:p>
-            <a:r>
-              <a:t>Thứ tư, giá trị k: recall bão hòa quanh k bằng […].</a:t>
-            </a:r>
-          </a:p>
-          <a:p>
-            <a:r>
-              <a:t>Thứ năm, ưu tiên cải thiện: loại câu hỏi có recall@10 thấp nhất là […].</a:t>
+          <a:p/>
+          <a:p>
+            <a:r>
+              <a:t>Thứ nhất, ngưỡng từ chối: độ chồng lấn cosine giữa câu chứa đáp án và lượt ngẫu nhiên là 12,1% — trung bình 0,59 so với 0,34. Chồng lấn không lớn nhưng vẫn còn, nên nhóm giữ quyết định đặt ngưỡng từ chối lên điểm reranker ở tuần 6 thay vì lên cosine thô.</a:t>
+            </a:r>
+          </a:p>
+          <a:p/>
+          <a:p>
+            <a:r>
+              <a:t>Thứ hai, BM25 và RRF: tại k bằng 30, RRF thấp hơn chỉ dùng vector 1,4 điểm nhưng cao hơn chỉ dùng BM25 6,3 điểm. Ở k bằng 10, tức giá trị nhóm định dùng thực tế, RRF cao nhất: 88,3% so với 86,7% của vector và 79,7% của BM25. Vì vậy nhóm vẫn giữ truy xuất lai.</a:t>
+            </a:r>
+          </a:p>
+          <a:p/>
+          <a:p>
+            <a:r>
+              <a:t>Thứ ba, tách truy vấn con: 64,8% số câu cần hơn một phiên bằng chứng, nên QueryPlanner ở tuần 5 là cần thiết.</a:t>
+            </a:r>
+          </a:p>
+          <a:p/>
+          <a:p>
+            <a:r>
+              <a:t>Thứ tư, giá trị k: recall bão hòa quanh k từ 20 đến 30 — vector đạt 95,4% tại k bằng 20, RRF đạt 95% tại k bằng 30.</a:t>
+            </a:r>
+          </a:p>
+          <a:p/>
+          <a:p>
+            <a:r>
+              <a:t>Thứ năm, ưu tiên cải thiện: loại multi-session có recall@10 thấp nhất, 78,6% với RRF, trong khi các loại còn lại đều trên 87%.</a:t>
             </a:r>
           </a:p>
           <a:p/>
@@ -947,6 +922,182 @@
           <a:p>
             <a:r>
               <a:t>Về lộ trình tám tuần, tuần 1 và 2 đã xong, tuần 3 là chặng hiện tại. Tuần 4 là slot, seq và các thao tác cập nhật cùng cổng pending. Tuần 5 là BM25, RRF, tách truy vấn con, khoảng hiệu lực và ký ức pinned. Tuần 6 là reranker, hiệu chỉnh ngưỡng từ chối, tóm tắt phiên và bộ test tiếng Việt. Tuần 7 chạy các cấu hình đánh giá và phân tích lỗi. Tuần 8 viết báo cáo và đóng gói. Lộ trình này giữ nguyên so với tuần 2.</a:t>
+            </a:r>
+          </a:p>
+        </p:txBody>
+      </p:sp>
+      <p:sp>
+        <p:nvSpPr>
+          <p:cNvPr id="4" name="Slide Number Placeholder 3"/>
+          <p:cNvSpPr>
+            <a:spLocks noGrp="1"/>
+          </p:cNvSpPr>
+          <p:nvPr>
+            <p:ph type="sldNum" idx="5" sz="quarter"/>
+          </p:nvPr>
+        </p:nvSpPr>
+        <p:spPr/>
+      </p:sp>
+    </p:spTree>
+  </p:cSld>
+  <p:clrMapOvr>
+    <a:masterClrMapping/>
+  </p:clrMapOvr>
+</p:notes>
+</file>
+
+<file path=ppt/notesSlides/notesSlide14.xml><?xml version="1.0" encoding="utf-8"?>
+<p:notes xmlns:a="http://schemas.openxmlformats.org/drawingml/2006/main" xmlns:p="http://schemas.openxmlformats.org/presentationml/2006/main" xmlns:r="http://schemas.openxmlformats.org/officeDocument/2006/relationships">
+  <p:cSld>
+    <p:spTree>
+      <p:nvGrpSpPr>
+        <p:cNvPr id="1" name=""/>
+        <p:cNvGrpSpPr/>
+        <p:nvPr/>
+      </p:nvGrpSpPr>
+      <p:grpSpPr>
+        <a:xfrm>
+          <a:off x="0" y="0"/>
+          <a:ext cx="0" cy="0"/>
+          <a:chOff x="0" y="0"/>
+          <a:chExt cx="0" cy="0"/>
+        </a:xfrm>
+      </p:grpSpPr>
+      <p:sp>
+        <p:nvSpPr>
+          <p:cNvPr id="2" name="Slide Image Placeholder 1"/>
+          <p:cNvSpPr>
+            <a:spLocks noGrp="1"/>
+          </p:cNvSpPr>
+          <p:nvPr>
+            <p:ph type="sldImg" idx="2"/>
+          </p:nvPr>
+        </p:nvSpPr>
+        <p:spPr/>
+      </p:sp>
+      <p:sp>
+        <p:nvSpPr>
+          <p:cNvPr id="3" name="Notes Placeholder 2"/>
+          <p:cNvSpPr>
+            <a:spLocks noGrp="1"/>
+          </p:cNvSpPr>
+          <p:nvPr>
+            <p:ph type="body" idx="3" sz="quarter"/>
+          </p:nvPr>
+        </p:nvSpPr>
+        <p:spPr/>
+        <p:txBody>
+          <a:bodyPr/>
+          <a:lstStyle/>
+          <a:p>
+            <a:r>
+              <a:t>[Slide bổ sung, không có trong kịch bản gốc — dùng khi mentor muốn xem số liệu thô.]</a:t>
+            </a:r>
+          </a:p>
+          <a:p/>
+          <a:p>
+            <a:r>
+              <a:t>Đây là hai biểu đồ thật, xuất trực tiếp từ notebook 03, không phải số minh họa.</a:t>
+            </a:r>
+          </a:p>
+          <a:p/>
+          <a:p>
+            <a:r>
+              <a:t>[Chỉ ảnh trái.] Phân bố cosine giữa câu hỏi và đoạn văn bản: cột tím là câu chứa đáp án, cột xám là lượt ngẫu nhiên. Hai phân bố có tách nhau nhưng vẫn chồng lấn 12,1%, nghĩa là không có một ngưỡng cosine nào cắt hoàn toàn đúng — sai ở phần đuôi là không tránh được. Đây là lý do nhóm dùng điểm reranker ở tuần 6 thay vì đặt ngưỡng cứng lên cosine.</a:t>
+            </a:r>
+          </a:p>
+          <a:p/>
+          <a:p>
+            <a:r>
+              <a:t>[Chỉ ảnh phải.] Recall@k của ba đường: vector, BM25, và hợp nhất RRF, trên 149 câu hỏi tập dev. Đường RRF (xanh ngọc) nằm trên cùng ở vùng k nhỏ — đúng vùng nhóm dùng thực tế (đường kẻ chấm đánh dấu k=10): 88,3% so với 86,7% của vector và 79,7% của BM25. Ở k lớn hơn (30 trở lên), vector bắt kịp và nhỉnh hơn RRF một chút, nhưng ở giá trị k thực dùng thì RRF vẫn tốt nhất.</a:t>
+            </a:r>
+          </a:p>
+        </p:txBody>
+      </p:sp>
+      <p:sp>
+        <p:nvSpPr>
+          <p:cNvPr id="4" name="Slide Number Placeholder 3"/>
+          <p:cNvSpPr>
+            <a:spLocks noGrp="1"/>
+          </p:cNvSpPr>
+          <p:nvPr>
+            <p:ph type="sldNum" idx="5" sz="quarter"/>
+          </p:nvPr>
+        </p:nvSpPr>
+        <p:spPr/>
+      </p:sp>
+    </p:spTree>
+  </p:cSld>
+  <p:clrMapOvr>
+    <a:masterClrMapping/>
+  </p:clrMapOvr>
+</p:notes>
+</file>
+
+<file path=ppt/notesSlides/notesSlide15.xml><?xml version="1.0" encoding="utf-8"?>
+<p:notes xmlns:a="http://schemas.openxmlformats.org/drawingml/2006/main" xmlns:p="http://schemas.openxmlformats.org/presentationml/2006/main" xmlns:r="http://schemas.openxmlformats.org/officeDocument/2006/relationships">
+  <p:cSld>
+    <p:spTree>
+      <p:nvGrpSpPr>
+        <p:cNvPr id="1" name=""/>
+        <p:cNvGrpSpPr/>
+        <p:nvPr/>
+      </p:nvGrpSpPr>
+      <p:grpSpPr>
+        <a:xfrm>
+          <a:off x="0" y="0"/>
+          <a:ext cx="0" cy="0"/>
+          <a:chOff x="0" y="0"/>
+          <a:chExt cx="0" cy="0"/>
+        </a:xfrm>
+      </p:grpSpPr>
+      <p:sp>
+        <p:nvSpPr>
+          <p:cNvPr id="2" name="Slide Image Placeholder 1"/>
+          <p:cNvSpPr>
+            <a:spLocks noGrp="1"/>
+          </p:cNvSpPr>
+          <p:nvPr>
+            <p:ph type="sldImg" idx="2"/>
+          </p:nvPr>
+        </p:nvSpPr>
+        <p:spPr/>
+      </p:sp>
+      <p:sp>
+        <p:nvSpPr>
+          <p:cNvPr id="3" name="Notes Placeholder 2"/>
+          <p:cNvSpPr>
+            <a:spLocks noGrp="1"/>
+          </p:cNvSpPr>
+          <p:nvPr>
+            <p:ph type="body" idx="3" sz="quarter"/>
+          </p:nvPr>
+        </p:nvSpPr>
+        <p:spPr/>
+        <p:txBody>
+          <a:bodyPr/>
+          <a:lstStyle/>
+          <a:p>
+            <a:r>
+              <a:t>[Slide bổ sung, không có trong kịch bản gốc.]</a:t>
+            </a:r>
+          </a:p>
+          <a:p/>
+          <a:p>
+            <a:r>
+              <a:t>Hai biểu đồ này giải thích cho hai quyết định thiết kế nhóm đã nói ở slide trước.</a:t>
+            </a:r>
+          </a:p>
+          <a:p/>
+          <a:p>
+            <a:r>
+              <a:t>[Chỉ ảnh trái.] Phân bố 500 câu hỏi theo 6 loại: từ 6% (single-session-preference) đến 27% (temporal-reasoning và multi-session). Nếu tính một accuracy gộp, hai loại đông nhất sẽ quyết định phần lớn điểm số, che mất các loại ít câu hơn. Đó là lý do báo cáo dùng macro-average theo loại câu hỏi thay vì một con số chung.</a:t>
+            </a:r>
+          </a:p>
+          <a:p/>
+          <a:p>
+            <a:r>
+              <a:t>[Chỉ ảnh phải.] Recall@10 tách theo loại: năm trong sáu loại đạt trên 87%, riêng multi-session chỉ 78,6% với RRF — thấp nhất rõ rệt. Đây là căn cứ để nhóm ưu tiên cải thiện truy xuất cho loại câu hỏi đa phiên trong các tuần tới, thay vì cải thiện đều tay cho cả sáu loại.</a:t>
             </a:r>
           </a:p>
         </p:txBody>
@@ -2407,6 +2558,2454 @@
 
 <file path=ppt/slides/slide10.xml><?xml version="1.0" encoding="utf-8"?>
 <p:sld xmlns:a="http://schemas.openxmlformats.org/drawingml/2006/main" xmlns:r="http://schemas.openxmlformats.org/officeDocument/2006/relationships" xmlns:p="http://schemas.openxmlformats.org/presentationml/2006/main">
+  <p:cSld name="Slide 7">
+    <p:bg>
+      <p:bgPr>
+        <a:solidFill>
+          <a:srgbClr val="FFFFFF"/>
+        </a:solidFill>
+      </p:bgPr>
+    </p:bg>
+    <p:spTree>
+      <p:nvGrpSpPr>
+        <p:cNvPr id="1" name=""/>
+        <p:cNvGrpSpPr/>
+        <p:nvPr/>
+      </p:nvGrpSpPr>
+      <p:grpSpPr>
+        <a:xfrm>
+          <a:off x="0" y="0"/>
+          <a:ext cx="0" cy="0"/>
+          <a:chOff x="0" y="0"/>
+          <a:chExt cx="0" cy="0"/>
+        </a:xfrm>
+      </p:grpSpPr>
+      <p:sp>
+        <p:nvSpPr>
+          <p:cNvPr id="2" name="Text 0"/>
+          <p:cNvSpPr txBox="1"/>
+          <p:nvPr/>
+        </p:nvSpPr>
+        <p:spPr>
+          <a:xfrm>
+            <a:off x="566928" y="502920"/>
+            <a:ext cx="8229600" cy="283464"/>
+          </a:xfrm>
+          <a:prstGeom prst="rect">
+            <a:avLst/>
+          </a:prstGeom>
+          <a:noFill/>
+          <a:ln/>
+        </p:spPr>
+        <p:txBody>
+          <a:bodyPr wrap="square" lIns="0" tIns="0" rIns="0" bIns="0" rtlCol="0" anchor="t"/>
+          <a:lstStyle/>
+          <a:p>
+            <a:pPr indent="0" marL="0">
+              <a:buNone/>
+            </a:pPr>
+            <a:r>
+              <a:rPr lang="en-US" sz="1550" b="1" dirty="0">
+                <a:solidFill>
+                  <a:srgbClr val="3A36A0"/>
+                </a:solidFill>
+                <a:latin typeface="Calibri" pitchFamily="34" charset="0"/>
+                <a:ea typeface="Calibri" pitchFamily="34" charset="-122"/>
+                <a:cs typeface="Calibri" pitchFamily="34" charset="-120"/>
+              </a:rPr>
+              <a:t>KẾT QUẢ KIỂM THỬ</a:t>
+            </a:r>
+            <a:endParaRPr lang="en-US" sz="1200" dirty="0"/>
+          </a:p>
+        </p:txBody>
+      </p:sp>
+      <p:sp>
+        <p:nvSpPr>
+          <p:cNvPr id="3" name="Text 1"/>
+          <p:cNvSpPr txBox="1"/>
+          <p:nvPr/>
+        </p:nvSpPr>
+        <p:spPr>
+          <a:xfrm>
+            <a:off x="566928" y="822960"/>
+            <a:ext cx="11045952" cy="640080"/>
+          </a:xfrm>
+          <a:prstGeom prst="rect">
+            <a:avLst/>
+          </a:prstGeom>
+          <a:noFill/>
+          <a:ln/>
+        </p:spPr>
+        <p:txBody>
+          <a:bodyPr wrap="square" lIns="0" tIns="0" rIns="0" bIns="0" rtlCol="0" anchor="t"/>
+          <a:lstStyle/>
+          <a:p>
+            <a:pPr indent="0" marL="0">
+              <a:buNone/>
+            </a:pPr>
+            <a:r>
+              <a:rPr lang="en-US" sz="3000" b="1" dirty="0">
+                <a:solidFill>
+                  <a:srgbClr val="13123A"/>
+                </a:solidFill>
+                <a:latin typeface="Cambria" pitchFamily="34" charset="0"/>
+                <a:ea typeface="Cambria" pitchFamily="34" charset="-122"/>
+                <a:cs typeface="Cambria" pitchFamily="34" charset="-120"/>
+              </a:rPr>
+              <a:t>Kết quả kiểm thử: 16/16 test đạt</a:t>
+            </a:r>
+            <a:endParaRPr lang="en-US" sz="3000" dirty="0"/>
+          </a:p>
+        </p:txBody>
+      </p:sp>
+      <p:sp>
+        <p:nvSpPr>
+          <p:cNvPr id="4" name="Text 2"/>
+          <p:cNvSpPr txBox="1"/>
+          <p:nvPr/>
+        </p:nvSpPr>
+        <p:spPr>
+          <a:xfrm>
+            <a:off x="566928" y="6464808"/>
+            <a:ext cx="11045952" cy="329184"/>
+          </a:xfrm>
+          <a:prstGeom prst="rect">
+            <a:avLst/>
+          </a:prstGeom>
+          <a:noFill/>
+          <a:ln/>
+        </p:spPr>
+        <p:txBody>
+          <a:bodyPr wrap="square" lIns="0" tIns="0" rIns="0" bIns="0" rtlCol="0" anchor="t"/>
+          <a:lstStyle/>
+          <a:p>
+            <a:pPr indent="0" marL="0">
+              <a:buNone/>
+            </a:pPr>
+            <a:r>
+              <a:rPr lang="en-US" sz="1350" dirty="0">
+                <a:solidFill>
+                  <a:srgbClr val="6B6F82"/>
+                </a:solidFill>
+                <a:latin typeface="Calibri" pitchFamily="34" charset="0"/>
+                <a:ea typeface="Calibri" pitchFamily="34" charset="-122"/>
+                <a:cs typeface="Calibri" pitchFamily="34" charset="-120"/>
+              </a:rPr>
+              <a:t>Số liệu từ test_ledger.py: 16 test, dưới 1 giây, không gọi mạng. 16 test kiểm tra các bất biến chính của kho ký ức.</a:t>
+            </a:r>
+            <a:endParaRPr lang="en-US" sz="1050" dirty="0"/>
+          </a:p>
+        </p:txBody>
+      </p:sp>
+      <p:sp>
+        <p:nvSpPr>
+          <p:cNvPr id="6" name="Shape 3"/>
+          <p:cNvSpPr/>
+          <p:nvPr/>
+        </p:nvSpPr>
+        <p:spPr>
+          <a:xfrm>
+            <a:off x="566928" y="1691640"/>
+            <a:ext cx="3291840" cy="4480560"/>
+          </a:xfrm>
+          <a:prstGeom prst="rect">
+            <a:avLst/>
+          </a:prstGeom>
+          <a:solidFill>
+            <a:srgbClr val="13123A"/>
+          </a:solidFill>
+          <a:ln w="12700">
+            <a:solidFill>
+              <a:srgbClr val="13123A"/>
+            </a:solidFill>
+            <a:prstDash val="solid"/>
+          </a:ln>
+        </p:spPr>
+        <p:txBody>
+          <a:bodyPr/>
+          <a:p/>
+        </p:txBody>
+      </p:sp>
+      <p:sp>
+        <p:nvSpPr>
+          <p:cNvPr id="7" name="Text 4"/>
+          <p:cNvSpPr txBox="1"/>
+          <p:nvPr/>
+        </p:nvSpPr>
+        <p:spPr>
+          <a:xfrm>
+            <a:off x="566928" y="2103120"/>
+            <a:ext cx="3291840" cy="1280160"/>
+          </a:xfrm>
+          <a:prstGeom prst="rect">
+            <a:avLst/>
+          </a:prstGeom>
+          <a:noFill/>
+          <a:ln/>
+        </p:spPr>
+        <p:txBody>
+          <a:bodyPr wrap="square" lIns="0" tIns="0" rIns="0" bIns="0" rtlCol="0" anchor="t"/>
+          <a:lstStyle/>
+          <a:p>
+            <a:pPr algn="ctr" indent="0" marL="0">
+              <a:buNone/>
+            </a:pPr>
+            <a:r>
+              <a:rPr lang="en-US" sz="8100" b="1" dirty="0">
+                <a:solidFill>
+                  <a:srgbClr val="FFFFFF"/>
+                </a:solidFill>
+                <a:latin typeface="Cambria" pitchFamily="34" charset="0"/>
+                <a:ea typeface="Cambria" pitchFamily="34" charset="-122"/>
+                <a:cs typeface="Cambria" pitchFamily="34" charset="-120"/>
+              </a:rPr>
+              <a:t>16</a:t>
+            </a:r>
+            <a:endParaRPr lang="en-US" sz="8800" dirty="0"/>
+          </a:p>
+        </p:txBody>
+      </p:sp>
+      <p:sp>
+        <p:nvSpPr>
+          <p:cNvPr id="8" name="Text 5"/>
+          <p:cNvSpPr txBox="1"/>
+          <p:nvPr/>
+        </p:nvSpPr>
+        <p:spPr>
+          <a:xfrm>
+            <a:off x="566928" y="3566160"/>
+            <a:ext cx="3291840" cy="365760"/>
+          </a:xfrm>
+          <a:prstGeom prst="rect">
+            <a:avLst/>
+          </a:prstGeom>
+          <a:noFill/>
+          <a:ln/>
+        </p:spPr>
+        <p:txBody>
+          <a:bodyPr wrap="square" lIns="0" tIns="0" rIns="0" bIns="0" rtlCol="0" anchor="t"/>
+          <a:lstStyle/>
+          <a:p>
+            <a:pPr algn="ctr" indent="0" marL="0">
+              <a:buNone/>
+            </a:pPr>
+            <a:r>
+              <a:rPr lang="en-US" sz="1700" b="1" dirty="0">
+                <a:solidFill>
+                  <a:srgbClr val="E9970B"/>
+                </a:solidFill>
+                <a:latin typeface="Calibri" pitchFamily="34" charset="0"/>
+                <a:ea typeface="Calibri" pitchFamily="34" charset="-122"/>
+                <a:cs typeface="Calibri" pitchFamily="34" charset="-120"/>
+              </a:rPr>
+              <a:t>test đạt toàn bộ</a:t>
+            </a:r>
+            <a:endParaRPr lang="en-US" sz="1600" dirty="0"/>
+          </a:p>
+        </p:txBody>
+      </p:sp>
+      <p:sp>
+        <p:nvSpPr>
+          <p:cNvPr id="9" name="Text 6"/>
+          <p:cNvSpPr txBox="1"/>
+          <p:nvPr/>
+        </p:nvSpPr>
+        <p:spPr>
+          <a:xfrm>
+            <a:off x="566928" y="4023360"/>
+            <a:ext cx="3291840" cy="320040"/>
+          </a:xfrm>
+          <a:prstGeom prst="rect">
+            <a:avLst/>
+          </a:prstGeom>
+          <a:noFill/>
+          <a:ln/>
+        </p:spPr>
+        <p:txBody>
+          <a:bodyPr wrap="square" lIns="0" tIns="0" rIns="0" bIns="0" rtlCol="0" anchor="t"/>
+          <a:lstStyle/>
+          <a:p>
+            <a:pPr algn="ctr" indent="0" marL="0">
+              <a:buNone/>
+            </a:pPr>
+            <a:r>
+              <a:rPr lang="en-US" sz="1700" dirty="0">
+                <a:solidFill>
+                  <a:srgbClr val="C7C9E6"/>
+                </a:solidFill>
+                <a:latin typeface="Calibri" pitchFamily="34" charset="0"/>
+                <a:ea typeface="Calibri" pitchFamily="34" charset="-122"/>
+                <a:cs typeface="Calibri" pitchFamily="34" charset="-120"/>
+              </a:rPr>
+              <a:t>dưới 1 giây · không gọi mạng</a:t>
+            </a:r>
+            <a:endParaRPr lang="en-US" sz="1300" dirty="0"/>
+          </a:p>
+        </p:txBody>
+      </p:sp>
+      <p:sp>
+        <p:nvSpPr>
+          <p:cNvPr id="10" name="Text 7"/>
+          <p:cNvSpPr txBox="1"/>
+          <p:nvPr/>
+        </p:nvSpPr>
+        <p:spPr>
+          <a:xfrm>
+            <a:off x="822960" y="5029200"/>
+            <a:ext cx="2779776" cy="822960"/>
+          </a:xfrm>
+          <a:prstGeom prst="rect">
+            <a:avLst/>
+          </a:prstGeom>
+          <a:noFill/>
+          <a:ln/>
+        </p:spPr>
+        <p:txBody>
+          <a:bodyPr wrap="square" lIns="0" tIns="0" rIns="0" bIns="0" rtlCol="0" anchor="t"/>
+          <a:lstStyle/>
+          <a:p>
+            <a:pPr algn="ctr" indent="0" marL="0">
+              <a:buNone/>
+            </a:pPr>
+            <a:r>
+              <a:rPr lang="en-US" sz="1550" dirty="0">
+                <a:solidFill>
+                  <a:srgbClr val="EFEFFA"/>
+                </a:solidFill>
+                <a:latin typeface="Calibri" pitchFamily="34" charset="0"/>
+                <a:ea typeface="Calibri" pitchFamily="34" charset="-122"/>
+                <a:cs typeface="Calibri" pitchFamily="34" charset="-120"/>
+              </a:rPr>
+              <a:t>Mỗi test kiểm chứng một bất biến đã cam kết trong tài liệu kiến trúc</a:t>
+            </a:r>
+            <a:endParaRPr lang="en-US" sz="1200" dirty="0"/>
+          </a:p>
+        </p:txBody>
+      </p:sp>
+      <p:sp>
+        <p:nvSpPr>
+          <p:cNvPr id="11" name="Shape 8"/>
+          <p:cNvSpPr/>
+          <p:nvPr/>
+        </p:nvSpPr>
+        <p:spPr>
+          <a:xfrm>
+            <a:off x="4114800" y="1691640"/>
+            <a:ext cx="7498080" cy="667512"/>
+          </a:xfrm>
+          <a:prstGeom prst="rect">
+            <a:avLst/>
+          </a:prstGeom>
+          <a:solidFill>
+            <a:srgbClr val="ECEBF7"/>
+          </a:solidFill>
+          <a:ln w="12700">
+            <a:solidFill>
+              <a:srgbClr val="ECEBF7"/>
+            </a:solidFill>
+            <a:prstDash val="solid"/>
+          </a:ln>
+        </p:spPr>
+        <p:txBody>
+          <a:bodyPr/>
+          <a:p/>
+        </p:txBody>
+      </p:sp>
+      <p:sp>
+        <p:nvSpPr>
+          <p:cNvPr id="12" name="Text 9"/>
+          <p:cNvSpPr txBox="1"/>
+          <p:nvPr/>
+        </p:nvSpPr>
+        <p:spPr>
+          <a:xfrm>
+            <a:off x="4297680" y="1691640"/>
+            <a:ext cx="1600200" cy="667512"/>
+          </a:xfrm>
+          <a:prstGeom prst="rect">
+            <a:avLst/>
+          </a:prstGeom>
+          <a:noFill/>
+          <a:ln/>
+        </p:spPr>
+        <p:txBody>
+          <a:bodyPr wrap="square" lIns="0" tIns="0" rIns="0" bIns="0" rtlCol="0" anchor="ctr"/>
+          <a:lstStyle/>
+          <a:p>
+            <a:pPr indent="0" marL="0">
+              <a:buNone/>
+            </a:pPr>
+            <a:r>
+              <a:rPr lang="en-US" sz="1600" b="1" dirty="0">
+                <a:solidFill>
+                  <a:srgbClr val="3A36A0"/>
+                </a:solidFill>
+                <a:latin typeface="Cambria" pitchFamily="34" charset="0"/>
+                <a:ea typeface="Cambria" pitchFamily="34" charset="-122"/>
+                <a:cs typeface="Cambria" pitchFamily="34" charset="-120"/>
+              </a:rPr>
+              <a:t>seq</a:t>
+            </a:r>
+            <a:endParaRPr lang="en-US" sz="1250" dirty="0"/>
+          </a:p>
+        </p:txBody>
+      </p:sp>
+      <p:sp>
+        <p:nvSpPr>
+          <p:cNvPr id="13" name="Text 10"/>
+          <p:cNvSpPr txBox="1"/>
+          <p:nvPr/>
+        </p:nvSpPr>
+        <p:spPr>
+          <a:xfrm>
+            <a:off x="5943600" y="1691640"/>
+            <a:ext cx="5532120" cy="667512"/>
+          </a:xfrm>
+          <a:prstGeom prst="rect">
+            <a:avLst/>
+          </a:prstGeom>
+          <a:noFill/>
+          <a:ln/>
+        </p:spPr>
+        <p:txBody>
+          <a:bodyPr wrap="square" lIns="0" tIns="0" rIns="0" bIns="0" rtlCol="0" anchor="ctr"/>
+          <a:lstStyle/>
+          <a:p>
+            <a:pPr indent="0" marL="0">
+              <a:buNone/>
+            </a:pPr>
+            <a:r>
+              <a:rPr lang="en-US" sz="1550" dirty="0">
+                <a:solidFill>
+                  <a:srgbClr val="4A4E63"/>
+                </a:solidFill>
+                <a:latin typeface="Calibri" pitchFamily="34" charset="0"/>
+                <a:ea typeface="Calibri" pitchFamily="34" charset="-122"/>
+                <a:cs typeface="Calibri" pitchFamily="34" charset="-120"/>
+              </a:rPr>
+              <a:t>tăng đơn điệu, không trùng lặp</a:t>
+            </a:r>
+            <a:endParaRPr lang="en-US" sz="1200" dirty="0"/>
+          </a:p>
+        </p:txBody>
+      </p:sp>
+      <p:sp>
+        <p:nvSpPr>
+          <p:cNvPr id="14" name="Shape 11"/>
+          <p:cNvSpPr/>
+          <p:nvPr/>
+        </p:nvSpPr>
+        <p:spPr>
+          <a:xfrm>
+            <a:off x="4114800" y="2450592"/>
+            <a:ext cx="7498080" cy="667512"/>
+          </a:xfrm>
+          <a:prstGeom prst="rect">
+            <a:avLst/>
+          </a:prstGeom>
+          <a:solidFill>
+            <a:srgbClr val="F7F7FB"/>
+          </a:solidFill>
+          <a:ln w="12700">
+            <a:solidFill>
+              <a:srgbClr val="F7F7FB"/>
+            </a:solidFill>
+            <a:prstDash val="solid"/>
+          </a:ln>
+        </p:spPr>
+        <p:txBody>
+          <a:bodyPr/>
+          <a:p/>
+        </p:txBody>
+      </p:sp>
+      <p:sp>
+        <p:nvSpPr>
+          <p:cNvPr id="15" name="Text 12"/>
+          <p:cNvSpPr txBox="1"/>
+          <p:nvPr/>
+        </p:nvSpPr>
+        <p:spPr>
+          <a:xfrm>
+            <a:off x="4297680" y="2450592"/>
+            <a:ext cx="1600200" cy="667512"/>
+          </a:xfrm>
+          <a:prstGeom prst="rect">
+            <a:avLst/>
+          </a:prstGeom>
+          <a:noFill/>
+          <a:ln/>
+        </p:spPr>
+        <p:txBody>
+          <a:bodyPr wrap="square" lIns="0" tIns="0" rIns="0" bIns="0" rtlCol="0" anchor="ctr"/>
+          <a:lstStyle/>
+          <a:p>
+            <a:pPr indent="0" marL="0">
+              <a:buNone/>
+            </a:pPr>
+            <a:r>
+              <a:rPr lang="en-US" sz="1600" b="1" dirty="0">
+                <a:solidFill>
+                  <a:srgbClr val="3A36A0"/>
+                </a:solidFill>
+                <a:latin typeface="Cambria" pitchFamily="34" charset="0"/>
+                <a:ea typeface="Cambria" pitchFamily="34" charset="-122"/>
+                <a:cs typeface="Cambria" pitchFamily="34" charset="-120"/>
+              </a:rPr>
+              <a:t>pending</a:t>
+            </a:r>
+            <a:endParaRPr lang="en-US" sz="1250" dirty="0"/>
+          </a:p>
+        </p:txBody>
+      </p:sp>
+      <p:sp>
+        <p:nvSpPr>
+          <p:cNvPr id="16" name="Text 13"/>
+          <p:cNvSpPr txBox="1"/>
+          <p:nvPr/>
+        </p:nvSpPr>
+        <p:spPr>
+          <a:xfrm>
+            <a:off x="5943600" y="2450592"/>
+            <a:ext cx="5532120" cy="667512"/>
+          </a:xfrm>
+          <a:prstGeom prst="rect">
+            <a:avLst/>
+          </a:prstGeom>
+          <a:noFill/>
+          <a:ln/>
+        </p:spPr>
+        <p:txBody>
+          <a:bodyPr wrap="square" lIns="0" tIns="0" rIns="0" bIns="0" rtlCol="0" anchor="ctr"/>
+          <a:lstStyle/>
+          <a:p>
+            <a:pPr indent="0" marL="0">
+              <a:buNone/>
+            </a:pPr>
+            <a:r>
+              <a:rPr lang="en-US" sz="1550" dirty="0">
+                <a:solidFill>
+                  <a:srgbClr val="4A4E63"/>
+                </a:solidFill>
+                <a:latin typeface="Calibri" pitchFamily="34" charset="0"/>
+                <a:ea typeface="Calibri" pitchFamily="34" charset="-122"/>
+                <a:cs typeface="Calibri" pitchFamily="34" charset="-120"/>
+              </a:rPr>
+              <a:t>fact từ lượt trợ lý không vào chỉ mục; chỉ hiển thị sau khi người dùng xác nhận</a:t>
+            </a:r>
+            <a:endParaRPr lang="en-US" sz="1200" dirty="0"/>
+          </a:p>
+        </p:txBody>
+      </p:sp>
+      <p:sp>
+        <p:nvSpPr>
+          <p:cNvPr id="17" name="Shape 14"/>
+          <p:cNvSpPr/>
+          <p:nvPr/>
+        </p:nvSpPr>
+        <p:spPr>
+          <a:xfrm>
+            <a:off x="4114800" y="3209544"/>
+            <a:ext cx="7498080" cy="667512"/>
+          </a:xfrm>
+          <a:prstGeom prst="rect">
+            <a:avLst/>
+          </a:prstGeom>
+          <a:solidFill>
+            <a:srgbClr val="ECEBF7"/>
+          </a:solidFill>
+          <a:ln w="12700">
+            <a:solidFill>
+              <a:srgbClr val="ECEBF7"/>
+            </a:solidFill>
+            <a:prstDash val="solid"/>
+          </a:ln>
+        </p:spPr>
+        <p:txBody>
+          <a:bodyPr/>
+          <a:p/>
+        </p:txBody>
+      </p:sp>
+      <p:sp>
+        <p:nvSpPr>
+          <p:cNvPr id="18" name="Text 15"/>
+          <p:cNvSpPr txBox="1"/>
+          <p:nvPr/>
+        </p:nvSpPr>
+        <p:spPr>
+          <a:xfrm>
+            <a:off x="4297680" y="3209544"/>
+            <a:ext cx="1600200" cy="667512"/>
+          </a:xfrm>
+          <a:prstGeom prst="rect">
+            <a:avLst/>
+          </a:prstGeom>
+          <a:noFill/>
+          <a:ln/>
+        </p:spPr>
+        <p:txBody>
+          <a:bodyPr wrap="square" lIns="0" tIns="0" rIns="0" bIns="0" rtlCol="0" anchor="ctr"/>
+          <a:lstStyle/>
+          <a:p>
+            <a:pPr indent="0" marL="0">
+              <a:buNone/>
+            </a:pPr>
+            <a:r>
+              <a:rPr lang="en-US" sz="1600" b="1" dirty="0">
+                <a:solidFill>
+                  <a:srgbClr val="3A36A0"/>
+                </a:solidFill>
+                <a:latin typeface="Cambria" pitchFamily="34" charset="0"/>
+                <a:ea typeface="Cambria" pitchFamily="34" charset="-122"/>
+                <a:cs typeface="Cambria" pitchFamily="34" charset="-120"/>
+              </a:rPr>
+              <a:t>max(seq)</a:t>
+            </a:r>
+            <a:endParaRPr lang="en-US" sz="1250" dirty="0"/>
+          </a:p>
+        </p:txBody>
+      </p:sp>
+      <p:sp>
+        <p:nvSpPr>
+          <p:cNvPr id="19" name="Text 16"/>
+          <p:cNvSpPr txBox="1"/>
+          <p:nvPr/>
+        </p:nvSpPr>
+        <p:spPr>
+          <a:xfrm>
+            <a:off x="5943600" y="3209544"/>
+            <a:ext cx="5532120" cy="667512"/>
+          </a:xfrm>
+          <a:prstGeom prst="rect">
+            <a:avLst/>
+          </a:prstGeom>
+          <a:noFill/>
+          <a:ln/>
+        </p:spPr>
+        <p:txBody>
+          <a:bodyPr wrap="square" lIns="0" tIns="0" rIns="0" bIns="0" rtlCol="0" anchor="ctr"/>
+          <a:lstStyle/>
+          <a:p>
+            <a:pPr indent="0" marL="0">
+              <a:buNone/>
+            </a:pPr>
+            <a:r>
+              <a:rPr lang="en-US" sz="1550" dirty="0">
+                <a:solidFill>
+                  <a:srgbClr val="4A4E63"/>
+                </a:solidFill>
+                <a:latin typeface="Calibri" pitchFamily="34" charset="0"/>
+                <a:ea typeface="Calibri" pitchFamily="34" charset="-122"/>
+                <a:cs typeface="Calibri" pitchFamily="34" charset="-120"/>
+              </a:rPr>
+              <a:t>mỗi slot chỉ trả một bản, loại bản deleted</a:t>
+            </a:r>
+            <a:endParaRPr lang="en-US" sz="1200" dirty="0"/>
+          </a:p>
+        </p:txBody>
+      </p:sp>
+      <p:sp>
+        <p:nvSpPr>
+          <p:cNvPr id="20" name="Shape 17"/>
+          <p:cNvSpPr/>
+          <p:nvPr/>
+        </p:nvSpPr>
+        <p:spPr>
+          <a:xfrm>
+            <a:off x="4114800" y="3968496"/>
+            <a:ext cx="7498080" cy="667512"/>
+          </a:xfrm>
+          <a:prstGeom prst="rect">
+            <a:avLst/>
+          </a:prstGeom>
+          <a:solidFill>
+            <a:srgbClr val="F7F7FB"/>
+          </a:solidFill>
+          <a:ln w="12700">
+            <a:solidFill>
+              <a:srgbClr val="F7F7FB"/>
+            </a:solidFill>
+            <a:prstDash val="solid"/>
+          </a:ln>
+        </p:spPr>
+        <p:txBody>
+          <a:bodyPr/>
+          <a:p/>
+        </p:txBody>
+      </p:sp>
+      <p:sp>
+        <p:nvSpPr>
+          <p:cNvPr id="21" name="Text 18"/>
+          <p:cNvSpPr txBox="1"/>
+          <p:nvPr/>
+        </p:nvSpPr>
+        <p:spPr>
+          <a:xfrm>
+            <a:off x="4297680" y="3968496"/>
+            <a:ext cx="1600200" cy="667512"/>
+          </a:xfrm>
+          <a:prstGeom prst="rect">
+            <a:avLst/>
+          </a:prstGeom>
+          <a:noFill/>
+          <a:ln/>
+        </p:spPr>
+        <p:txBody>
+          <a:bodyPr wrap="square" lIns="0" tIns="0" rIns="0" bIns="0" rtlCol="0" anchor="ctr"/>
+          <a:lstStyle/>
+          <a:p>
+            <a:pPr indent="0" marL="0">
+              <a:buNone/>
+            </a:pPr>
+            <a:r>
+              <a:rPr lang="en-US" sz="1600" b="1" dirty="0">
+                <a:solidFill>
+                  <a:srgbClr val="3A36A0"/>
+                </a:solidFill>
+                <a:latin typeface="Cambria" pitchFamily="34" charset="0"/>
+                <a:ea typeface="Cambria" pitchFamily="34" charset="-122"/>
+                <a:cs typeface="Cambria" pitchFamily="34" charset="-120"/>
+              </a:rPr>
+              <a:t>Khóa slot</a:t>
+            </a:r>
+            <a:endParaRPr lang="en-US" sz="1250" dirty="0"/>
+          </a:p>
+        </p:txBody>
+      </p:sp>
+      <p:sp>
+        <p:nvSpPr>
+          <p:cNvPr id="22" name="Text 19"/>
+          <p:cNvSpPr txBox="1"/>
+          <p:nvPr/>
+        </p:nvSpPr>
+        <p:spPr>
+          <a:xfrm>
+            <a:off x="5943600" y="3968496"/>
+            <a:ext cx="5532120" cy="667512"/>
+          </a:xfrm>
+          <a:prstGeom prst="rect">
+            <a:avLst/>
+          </a:prstGeom>
+          <a:noFill/>
+          <a:ln/>
+        </p:spPr>
+        <p:txBody>
+          <a:bodyPr wrap="square" lIns="0" tIns="0" rIns="0" bIns="0" rtlCol="0" anchor="ctr"/>
+          <a:lstStyle/>
+          <a:p>
+            <a:pPr indent="0" marL="0">
+              <a:buNone/>
+            </a:pPr>
+            <a:r>
+              <a:rPr lang="en-US" sz="1550" dirty="0">
+                <a:solidFill>
+                  <a:srgbClr val="4A4E63"/>
+                </a:solidFill>
+                <a:latin typeface="Calibri" pitchFamily="34" charset="0"/>
+                <a:ea typeface="Calibri" pitchFamily="34" charset="-122"/>
+                <a:cs typeface="Calibri" pitchFamily="34" charset="-120"/>
+              </a:rPr>
+              <a:t>trình_độ_tiếng_nhật → attribute_not_ascii; 2nd_language, Japanese Level → attribute_bad_format</a:t>
+            </a:r>
+            <a:endParaRPr lang="en-US" sz="1200" dirty="0"/>
+          </a:p>
+        </p:txBody>
+      </p:sp>
+      <p:sp>
+        <p:nvSpPr>
+          <p:cNvPr id="23" name="Shape 20"/>
+          <p:cNvSpPr/>
+          <p:nvPr/>
+        </p:nvSpPr>
+        <p:spPr>
+          <a:xfrm>
+            <a:off x="4114800" y="4727448"/>
+            <a:ext cx="7498080" cy="667512"/>
+          </a:xfrm>
+          <a:prstGeom prst="rect">
+            <a:avLst/>
+          </a:prstGeom>
+          <a:solidFill>
+            <a:srgbClr val="ECEBF7"/>
+          </a:solidFill>
+          <a:ln w="12700">
+            <a:solidFill>
+              <a:srgbClr val="ECEBF7"/>
+            </a:solidFill>
+            <a:prstDash val="solid"/>
+          </a:ln>
+        </p:spPr>
+        <p:txBody>
+          <a:bodyPr/>
+          <a:p/>
+        </p:txBody>
+      </p:sp>
+      <p:sp>
+        <p:nvSpPr>
+          <p:cNvPr id="24" name="Text 21"/>
+          <p:cNvSpPr txBox="1"/>
+          <p:nvPr/>
+        </p:nvSpPr>
+        <p:spPr>
+          <a:xfrm>
+            <a:off x="4297680" y="4727448"/>
+            <a:ext cx="1600200" cy="667512"/>
+          </a:xfrm>
+          <a:prstGeom prst="rect">
+            <a:avLst/>
+          </a:prstGeom>
+          <a:noFill/>
+          <a:ln/>
+        </p:spPr>
+        <p:txBody>
+          <a:bodyPr wrap="square" lIns="0" tIns="0" rIns="0" bIns="0" rtlCol="0" anchor="ctr"/>
+          <a:lstStyle/>
+          <a:p>
+            <a:pPr indent="0" marL="0">
+              <a:buNone/>
+            </a:pPr>
+            <a:r>
+              <a:rPr lang="en-US" sz="1600" b="1" dirty="0">
+                <a:solidFill>
+                  <a:srgbClr val="3A36A0"/>
+                </a:solidFill>
+                <a:latin typeface="Cambria" pitchFamily="34" charset="0"/>
+                <a:ea typeface="Cambria" pitchFamily="34" charset="-122"/>
+                <a:cs typeface="Cambria" pitchFamily="34" charset="-120"/>
+              </a:rPr>
+              <a:t>Nhật ký vết</a:t>
+            </a:r>
+            <a:endParaRPr lang="en-US" sz="1250" dirty="0"/>
+          </a:p>
+        </p:txBody>
+      </p:sp>
+      <p:sp>
+        <p:nvSpPr>
+          <p:cNvPr id="25" name="Text 22"/>
+          <p:cNvSpPr txBox="1"/>
+          <p:nvPr/>
+        </p:nvSpPr>
+        <p:spPr>
+          <a:xfrm>
+            <a:off x="5943600" y="4727448"/>
+            <a:ext cx="5532120" cy="667512"/>
+          </a:xfrm>
+          <a:prstGeom prst="rect">
+            <a:avLst/>
+          </a:prstGeom>
+          <a:noFill/>
+          <a:ln/>
+        </p:spPr>
+        <p:txBody>
+          <a:bodyPr wrap="square" lIns="0" tIns="0" rIns="0" bIns="0" rtlCol="0" anchor="ctr"/>
+          <a:lstStyle/>
+          <a:p>
+            <a:pPr indent="0" marL="0">
+              <a:buNone/>
+            </a:pPr>
+            <a:r>
+              <a:rPr lang="en-US" sz="1550" dirty="0">
+                <a:solidFill>
+                  <a:srgbClr val="4A4E63"/>
+                </a:solidFill>
+                <a:latin typeface="Calibri" pitchFamily="34" charset="0"/>
+                <a:ea typeface="Calibri" pitchFamily="34" charset="-122"/>
+                <a:cs typeface="Calibri" pitchFamily="34" charset="-120"/>
+              </a:rPr>
+              <a:t>mọi lần từ chối đều được ghi lại → tính được tỉ lệ khóa lỗi</a:t>
+            </a:r>
+            <a:endParaRPr lang="en-US" sz="1200" dirty="0"/>
+          </a:p>
+        </p:txBody>
+      </p:sp>
+      <p:sp>
+        <p:nvSpPr>
+          <p:cNvPr id="26" name="Shape 23"/>
+          <p:cNvSpPr/>
+          <p:nvPr/>
+        </p:nvSpPr>
+        <p:spPr>
+          <a:xfrm>
+            <a:off x="4114800" y="5486400"/>
+            <a:ext cx="7498080" cy="667512"/>
+          </a:xfrm>
+          <a:prstGeom prst="rect">
+            <a:avLst/>
+          </a:prstGeom>
+          <a:solidFill>
+            <a:srgbClr val="F7F7FB"/>
+          </a:solidFill>
+          <a:ln w="12700">
+            <a:solidFill>
+              <a:srgbClr val="F7F7FB"/>
+            </a:solidFill>
+            <a:prstDash val="solid"/>
+          </a:ln>
+        </p:spPr>
+        <p:txBody>
+          <a:bodyPr/>
+          <a:p/>
+        </p:txBody>
+      </p:sp>
+      <p:sp>
+        <p:nvSpPr>
+          <p:cNvPr id="27" name="Text 24"/>
+          <p:cNvSpPr txBox="1"/>
+          <p:nvPr/>
+        </p:nvSpPr>
+        <p:spPr>
+          <a:xfrm>
+            <a:off x="4297680" y="5486400"/>
+            <a:ext cx="1600200" cy="667512"/>
+          </a:xfrm>
+          <a:prstGeom prst="rect">
+            <a:avLst/>
+          </a:prstGeom>
+          <a:noFill/>
+          <a:ln/>
+        </p:spPr>
+        <p:txBody>
+          <a:bodyPr wrap="square" lIns="0" tIns="0" rIns="0" bIns="0" rtlCol="0" anchor="ctr"/>
+          <a:lstStyle/>
+          <a:p>
+            <a:pPr indent="0" marL="0">
+              <a:buNone/>
+            </a:pPr>
+            <a:r>
+              <a:rPr lang="en-US" sz="1600" b="1" dirty="0">
+                <a:solidFill>
+                  <a:srgbClr val="3A36A0"/>
+                </a:solidFill>
+                <a:latin typeface="Cambria" pitchFamily="34" charset="0"/>
+                <a:ea typeface="Cambria" pitchFamily="34" charset="-122"/>
+                <a:cs typeface="Cambria" pitchFamily="34" charset="-120"/>
+              </a:rPr>
+              <a:t>Song ngữ</a:t>
+            </a:r>
+            <a:endParaRPr lang="en-US" sz="1250" dirty="0"/>
+          </a:p>
+        </p:txBody>
+      </p:sp>
+      <p:sp>
+        <p:nvSpPr>
+          <p:cNvPr id="28" name="Text 25"/>
+          <p:cNvSpPr txBox="1"/>
+          <p:nvPr/>
+        </p:nvSpPr>
+        <p:spPr>
+          <a:xfrm>
+            <a:off x="5943600" y="5486400"/>
+            <a:ext cx="5532120" cy="667512"/>
+          </a:xfrm>
+          <a:prstGeom prst="rect">
+            <a:avLst/>
+          </a:prstGeom>
+          <a:noFill/>
+          <a:ln/>
+        </p:spPr>
+        <p:txBody>
+          <a:bodyPr wrap="square" lIns="0" tIns="0" rIns="0" bIns="0" rtlCol="0" anchor="ctr"/>
+          <a:lstStyle/>
+          <a:p>
+            <a:pPr indent="0" marL="0">
+              <a:buNone/>
+            </a:pPr>
+            <a:r>
+              <a:rPr lang="en-US" sz="1550" dirty="0">
+                <a:solidFill>
+                  <a:srgbClr val="4A4E63"/>
+                </a:solidFill>
+                <a:latin typeface="Calibri" pitchFamily="34" charset="0"/>
+                <a:ea typeface="Calibri" pitchFamily="34" charset="-122"/>
+                <a:cs typeface="Calibri" pitchFamily="34" charset="-120"/>
+              </a:rPr>
+              <a:t>chỉ mục nhúng text_canon (tiếng Anh), metadata vẫn giữ lang='vi'</a:t>
+            </a:r>
+            <a:endParaRPr lang="en-US" sz="1200" dirty="0"/>
+          </a:p>
+        </p:txBody>
+      </p:sp>
+    </p:spTree>
+  </p:cSld>
+  <p:clrMapOvr>
+    <a:masterClrMapping/>
+  </p:clrMapOvr>
+</p:sld>
+</file>
+
+<file path=ppt/slides/slide11.xml><?xml version="1.0" encoding="utf-8"?>
+<p:sld xmlns:a="http://schemas.openxmlformats.org/drawingml/2006/main" xmlns:r="http://schemas.openxmlformats.org/officeDocument/2006/relationships" xmlns:p="http://schemas.openxmlformats.org/presentationml/2006/main">
+  <p:cSld name="Slide 8">
+    <p:bg>
+      <p:bgPr>
+        <a:solidFill>
+          <a:srgbClr val="FFFFFF"/>
+        </a:solidFill>
+      </p:bgPr>
+    </p:bg>
+    <p:spTree>
+      <p:nvGrpSpPr>
+        <p:cNvPr id="1" name=""/>
+        <p:cNvGrpSpPr/>
+        <p:nvPr/>
+      </p:nvGrpSpPr>
+      <p:grpSpPr>
+        <a:xfrm>
+          <a:off x="0" y="0"/>
+          <a:ext cx="0" cy="0"/>
+          <a:chOff x="0" y="0"/>
+          <a:chExt cx="0" cy="0"/>
+        </a:xfrm>
+      </p:grpSpPr>
+      <p:sp>
+        <p:nvSpPr>
+          <p:cNvPr id="2" name="Text 0"/>
+          <p:cNvSpPr txBox="1"/>
+          <p:nvPr/>
+        </p:nvSpPr>
+        <p:spPr>
+          <a:xfrm>
+            <a:off x="566928" y="502920"/>
+            <a:ext cx="8229600" cy="283464"/>
+          </a:xfrm>
+          <a:prstGeom prst="rect">
+            <a:avLst/>
+          </a:prstGeom>
+          <a:noFill/>
+          <a:ln/>
+        </p:spPr>
+        <p:txBody>
+          <a:bodyPr wrap="square" lIns="0" tIns="0" rIns="0" bIns="0" rtlCol="0" anchor="t"/>
+          <a:lstStyle/>
+          <a:p>
+            <a:pPr indent="0" marL="0">
+              <a:buNone/>
+            </a:pPr>
+            <a:r>
+              <a:rPr lang="en-US" sz="1550" b="1" dirty="0">
+                <a:solidFill>
+                  <a:srgbClr val="3A36A0"/>
+                </a:solidFill>
+                <a:latin typeface="Calibri" pitchFamily="34" charset="0"/>
+                <a:ea typeface="Calibri" pitchFamily="34" charset="-122"/>
+                <a:cs typeface="Calibri" pitchFamily="34" charset="-120"/>
+              </a:rPr>
+              <a:t>KẾ HOẠCH THỰC THI</a:t>
+            </a:r>
+            <a:endParaRPr lang="en-US" sz="1200" dirty="0"/>
+          </a:p>
+        </p:txBody>
+      </p:sp>
+      <p:sp>
+        <p:nvSpPr>
+          <p:cNvPr id="3" name="Text 1"/>
+          <p:cNvSpPr txBox="1"/>
+          <p:nvPr/>
+        </p:nvSpPr>
+        <p:spPr>
+          <a:xfrm>
+            <a:off x="566928" y="822960"/>
+            <a:ext cx="11045952" cy="640080"/>
+          </a:xfrm>
+          <a:prstGeom prst="rect">
+            <a:avLst/>
+          </a:prstGeom>
+          <a:noFill/>
+          <a:ln/>
+        </p:spPr>
+        <p:txBody>
+          <a:bodyPr wrap="square" lIns="0" tIns="0" rIns="0" bIns="0" rtlCol="0" anchor="t"/>
+          <a:lstStyle/>
+          <a:p>
+            <a:pPr indent="0" marL="0">
+              <a:buNone/>
+            </a:pPr>
+            <a:r>
+              <a:rPr lang="en-US" sz="3000" b="1" dirty="0">
+                <a:solidFill>
+                  <a:srgbClr val="13123A"/>
+                </a:solidFill>
+                <a:latin typeface="Cambria" pitchFamily="34" charset="0"/>
+                <a:ea typeface="Cambria" pitchFamily="34" charset="-122"/>
+                <a:cs typeface="Cambria" pitchFamily="34" charset="-120"/>
+              </a:rPr>
+              <a:t>Kế hoạch thực thi 7 ngày</a:t>
+            </a:r>
+            <a:endParaRPr lang="en-US" sz="3000" dirty="0"/>
+          </a:p>
+        </p:txBody>
+      </p:sp>
+      <p:sp>
+        <p:nvSpPr>
+          <p:cNvPr id="4" name="Text 2"/>
+          <p:cNvSpPr txBox="1"/>
+          <p:nvPr/>
+        </p:nvSpPr>
+        <p:spPr>
+          <a:xfrm>
+            <a:off x="566928" y="6464808"/>
+            <a:ext cx="11045952" cy="329184"/>
+          </a:xfrm>
+          <a:prstGeom prst="rect">
+            <a:avLst/>
+          </a:prstGeom>
+          <a:noFill/>
+          <a:ln/>
+        </p:spPr>
+        <p:txBody>
+          <a:bodyPr wrap="square" lIns="0" tIns="0" rIns="0" bIns="0" rtlCol="0" anchor="t"/>
+          <a:lstStyle/>
+          <a:p>
+            <a:pPr indent="0" marL="0">
+              <a:buNone/>
+            </a:pPr>
+            <a:r>
+              <a:rPr lang="en-US" sz="1150" dirty="0">
+                <a:solidFill>
+                  <a:srgbClr val="6B6F82"/>
+                </a:solidFill>
+                <a:latin typeface="Calibri" pitchFamily="34" charset="0"/>
+                <a:ea typeface="Calibri" pitchFamily="34" charset="-122"/>
+                <a:cs typeface="Calibri" pitchFamily="34" charset="-120"/>
+              </a:rPr>
+              <a:t>Mục tiêu cuối tuần: 11 file mã nguồn — config, adapters (llm, embed, fake), vector, extractor, assembler, agent, eval (datasets, judge, run).</a:t>
+            </a:r>
+            <a:endParaRPr lang="en-US" sz="1050" dirty="0"/>
+          </a:p>
+        </p:txBody>
+      </p:sp>
+      <p:sp>
+        <p:nvSpPr>
+          <p:cNvPr id="6" name="Shape 3"/>
+          <p:cNvSpPr/>
+          <p:nvPr/>
+        </p:nvSpPr>
+        <p:spPr>
+          <a:xfrm>
+            <a:off x="566928" y="1645920"/>
+            <a:ext cx="11045952" cy="658368"/>
+          </a:xfrm>
+          <a:prstGeom prst="rect">
+            <a:avLst/>
+          </a:prstGeom>
+          <a:solidFill>
+            <a:srgbClr val="ECEBF7"/>
+          </a:solidFill>
+          <a:ln w="12700">
+            <a:solidFill>
+              <a:srgbClr val="ECEBF7"/>
+            </a:solidFill>
+            <a:prstDash val="solid"/>
+          </a:ln>
+        </p:spPr>
+        <p:txBody>
+          <a:bodyPr/>
+          <a:p/>
+        </p:txBody>
+      </p:sp>
+      <p:sp>
+        <p:nvSpPr>
+          <p:cNvPr id="7" name="Shape 4"/>
+          <p:cNvSpPr/>
+          <p:nvPr/>
+        </p:nvSpPr>
+        <p:spPr>
+          <a:xfrm>
+            <a:off x="566928" y="1645920"/>
+            <a:ext cx="1371600" cy="658368"/>
+          </a:xfrm>
+          <a:prstGeom prst="rect">
+            <a:avLst/>
+          </a:prstGeom>
+          <a:solidFill>
+            <a:srgbClr val="13123A"/>
+          </a:solidFill>
+          <a:ln w="12700">
+            <a:solidFill>
+              <a:srgbClr val="13123A"/>
+            </a:solidFill>
+            <a:prstDash val="solid"/>
+          </a:ln>
+        </p:spPr>
+        <p:txBody>
+          <a:bodyPr/>
+          <a:p/>
+        </p:txBody>
+      </p:sp>
+      <p:sp>
+        <p:nvSpPr>
+          <p:cNvPr id="8" name="Text 5"/>
+          <p:cNvSpPr txBox="1"/>
+          <p:nvPr/>
+        </p:nvSpPr>
+        <p:spPr>
+          <a:xfrm>
+            <a:off x="566928" y="1645920"/>
+            <a:ext cx="1371600" cy="658368"/>
+          </a:xfrm>
+          <a:prstGeom prst="rect">
+            <a:avLst/>
+          </a:prstGeom>
+          <a:noFill/>
+          <a:ln/>
+        </p:spPr>
+        <p:txBody>
+          <a:bodyPr wrap="square" lIns="0" tIns="0" rIns="0" bIns="0" rtlCol="0" anchor="ctr"/>
+          <a:lstStyle/>
+          <a:p>
+            <a:pPr algn="ctr" indent="0" marL="0">
+              <a:buNone/>
+            </a:pPr>
+            <a:r>
+              <a:rPr lang="en-US" sz="1550" b="1" dirty="0">
+                <a:solidFill>
+                  <a:srgbClr val="FFFFFF"/>
+                </a:solidFill>
+                <a:latin typeface="Calibri" pitchFamily="34" charset="0"/>
+                <a:ea typeface="Calibri" pitchFamily="34" charset="-122"/>
+                <a:cs typeface="Calibri" pitchFamily="34" charset="-120"/>
+              </a:rPr>
+              <a:t>NGÀY 1</a:t>
+            </a:r>
+            <a:endParaRPr lang="en-US" sz="1200" dirty="0"/>
+          </a:p>
+        </p:txBody>
+      </p:sp>
+      <p:sp>
+        <p:nvSpPr>
+          <p:cNvPr id="9" name="Text 6"/>
+          <p:cNvSpPr txBox="1"/>
+          <p:nvPr/>
+        </p:nvSpPr>
+        <p:spPr>
+          <a:xfrm>
+            <a:off x="2103120" y="1645920"/>
+            <a:ext cx="548640" cy="658368"/>
+          </a:xfrm>
+          <a:prstGeom prst="rect">
+            <a:avLst/>
+          </a:prstGeom>
+          <a:noFill/>
+          <a:ln/>
+        </p:spPr>
+        <p:txBody>
+          <a:bodyPr wrap="square" lIns="0" tIns="0" rIns="0" bIns="0" rtlCol="0" anchor="ctr"/>
+          <a:lstStyle/>
+          <a:p>
+            <a:pPr indent="0" marL="0">
+              <a:buNone/>
+            </a:pPr>
+            <a:r>
+              <a:rPr lang="en-US" sz="1700" b="1" dirty="0">
+                <a:solidFill>
+                  <a:srgbClr val="E9970B"/>
+                </a:solidFill>
+                <a:latin typeface="Calibri" pitchFamily="34" charset="0"/>
+                <a:ea typeface="Calibri" pitchFamily="34" charset="-122"/>
+                <a:cs typeface="Calibri" pitchFamily="34" charset="-120"/>
+              </a:rPr>
+              <a:t>A+B</a:t>
+            </a:r>
+            <a:endParaRPr lang="en-US" sz="1300" dirty="0"/>
+          </a:p>
+        </p:txBody>
+      </p:sp>
+      <p:sp>
+        <p:nvSpPr>
+          <p:cNvPr id="10" name="Text 7"/>
+          <p:cNvSpPr txBox="1"/>
+          <p:nvPr/>
+        </p:nvSpPr>
+        <p:spPr>
+          <a:xfrm>
+            <a:off x="2697480" y="1645920"/>
+            <a:ext cx="2651760" cy="658368"/>
+          </a:xfrm>
+          <a:prstGeom prst="rect">
+            <a:avLst/>
+          </a:prstGeom>
+          <a:noFill/>
+          <a:ln/>
+        </p:spPr>
+        <p:txBody>
+          <a:bodyPr wrap="square" lIns="0" tIns="0" rIns="0" bIns="0" rtlCol="0" anchor="ctr"/>
+          <a:lstStyle/>
+          <a:p>
+            <a:pPr indent="0" marL="0">
+              <a:buNone/>
+            </a:pPr>
+            <a:r>
+              <a:rPr lang="en-US" sz="1700" b="1" dirty="0">
+                <a:solidFill>
+                  <a:srgbClr val="13123A"/>
+                </a:solidFill>
+                <a:latin typeface="Cambria" pitchFamily="34" charset="0"/>
+                <a:ea typeface="Cambria" pitchFamily="34" charset="-122"/>
+                <a:cs typeface="Cambria" pitchFamily="34" charset="-120"/>
+              </a:rPr>
+              <a:t>Khung, adapter, chỉ mục</a:t>
+            </a:r>
+            <a:endParaRPr lang="en-US" sz="1300" dirty="0"/>
+          </a:p>
+        </p:txBody>
+      </p:sp>
+      <p:sp>
+        <p:nvSpPr>
+          <p:cNvPr id="11" name="Text 8"/>
+          <p:cNvSpPr txBox="1"/>
+          <p:nvPr/>
+        </p:nvSpPr>
+        <p:spPr>
+          <a:xfrm>
+            <a:off x="5394960" y="1645920"/>
+            <a:ext cx="6080760" cy="658368"/>
+          </a:xfrm>
+          <a:prstGeom prst="rect">
+            <a:avLst/>
+          </a:prstGeom>
+          <a:noFill/>
+          <a:ln/>
+        </p:spPr>
+        <p:txBody>
+          <a:bodyPr wrap="square" lIns="0" tIns="0" rIns="0" bIns="0" rtlCol="0" anchor="ctr"/>
+          <a:lstStyle/>
+          <a:p>
+            <a:pPr indent="0" marL="0">
+              <a:buNone/>
+            </a:pPr>
+            <a:r>
+              <a:rPr lang="en-US" sz="1500" dirty="0">
+                <a:solidFill>
+                  <a:srgbClr val="4A4E63"/>
+                </a:solidFill>
+                <a:latin typeface="Calibri" pitchFamily="34" charset="0"/>
+                <a:ea typeface="Calibri" pitchFamily="34" charset="-122"/>
+                <a:cs typeface="Calibri" pitchFamily="34" charset="-120"/>
+              </a:rPr>
+              <a:t>A: config · LLMAdapter · BGE-M3 có cache · FakeLLM   |   B: vector.py + rebuild()</a:t>
+            </a:r>
+            <a:endParaRPr lang="en-US" sz="1150" dirty="0"/>
+          </a:p>
+        </p:txBody>
+      </p:sp>
+      <p:sp>
+        <p:nvSpPr>
+          <p:cNvPr id="12" name="Shape 9"/>
+          <p:cNvSpPr/>
+          <p:nvPr/>
+        </p:nvSpPr>
+        <p:spPr>
+          <a:xfrm>
+            <a:off x="566928" y="2395728"/>
+            <a:ext cx="11045952" cy="658368"/>
+          </a:xfrm>
+          <a:prstGeom prst="rect">
+            <a:avLst/>
+          </a:prstGeom>
+          <a:solidFill>
+            <a:srgbClr val="F7F7FB"/>
+          </a:solidFill>
+          <a:ln w="12700">
+            <a:solidFill>
+              <a:srgbClr val="F7F7FB"/>
+            </a:solidFill>
+            <a:prstDash val="solid"/>
+          </a:ln>
+        </p:spPr>
+        <p:txBody>
+          <a:bodyPr/>
+          <a:p/>
+        </p:txBody>
+      </p:sp>
+      <p:sp>
+        <p:nvSpPr>
+          <p:cNvPr id="13" name="Shape 10"/>
+          <p:cNvSpPr/>
+          <p:nvPr/>
+        </p:nvSpPr>
+        <p:spPr>
+          <a:xfrm>
+            <a:off x="566928" y="2395728"/>
+            <a:ext cx="1371600" cy="658368"/>
+          </a:xfrm>
+          <a:prstGeom prst="rect">
+            <a:avLst/>
+          </a:prstGeom>
+          <a:solidFill>
+            <a:srgbClr val="13123A"/>
+          </a:solidFill>
+          <a:ln w="12700">
+            <a:solidFill>
+              <a:srgbClr val="13123A"/>
+            </a:solidFill>
+            <a:prstDash val="solid"/>
+          </a:ln>
+        </p:spPr>
+        <p:txBody>
+          <a:bodyPr/>
+          <a:p/>
+        </p:txBody>
+      </p:sp>
+      <p:sp>
+        <p:nvSpPr>
+          <p:cNvPr id="14" name="Text 11"/>
+          <p:cNvSpPr txBox="1"/>
+          <p:nvPr/>
+        </p:nvSpPr>
+        <p:spPr>
+          <a:xfrm>
+            <a:off x="566928" y="2395728"/>
+            <a:ext cx="1371600" cy="658368"/>
+          </a:xfrm>
+          <a:prstGeom prst="rect">
+            <a:avLst/>
+          </a:prstGeom>
+          <a:noFill/>
+          <a:ln/>
+        </p:spPr>
+        <p:txBody>
+          <a:bodyPr wrap="square" lIns="0" tIns="0" rIns="0" bIns="0" rtlCol="0" anchor="ctr"/>
+          <a:lstStyle/>
+          <a:p>
+            <a:pPr algn="ctr" indent="0" marL="0">
+              <a:buNone/>
+            </a:pPr>
+            <a:r>
+              <a:rPr lang="en-US" sz="1550" b="1" dirty="0">
+                <a:solidFill>
+                  <a:srgbClr val="FFFFFF"/>
+                </a:solidFill>
+                <a:latin typeface="Calibri" pitchFamily="34" charset="0"/>
+                <a:ea typeface="Calibri" pitchFamily="34" charset="-122"/>
+                <a:cs typeface="Calibri" pitchFamily="34" charset="-120"/>
+              </a:rPr>
+              <a:t>NGÀY 2–3</a:t>
+            </a:r>
+            <a:endParaRPr lang="en-US" sz="1200" dirty="0"/>
+          </a:p>
+        </p:txBody>
+      </p:sp>
+      <p:sp>
+        <p:nvSpPr>
+          <p:cNvPr id="15" name="Text 12"/>
+          <p:cNvSpPr txBox="1"/>
+          <p:nvPr/>
+        </p:nvSpPr>
+        <p:spPr>
+          <a:xfrm>
+            <a:off x="2103120" y="2395728"/>
+            <a:ext cx="548640" cy="658368"/>
+          </a:xfrm>
+          <a:prstGeom prst="rect">
+            <a:avLst/>
+          </a:prstGeom>
+          <a:noFill/>
+          <a:ln/>
+        </p:spPr>
+        <p:txBody>
+          <a:bodyPr wrap="square" lIns="0" tIns="0" rIns="0" bIns="0" rtlCol="0" anchor="ctr"/>
+          <a:lstStyle/>
+          <a:p>
+            <a:pPr indent="0" marL="0">
+              <a:buNone/>
+            </a:pPr>
+            <a:r>
+              <a:rPr lang="en-US" sz="1700" b="1" dirty="0">
+                <a:solidFill>
+                  <a:srgbClr val="E9970B"/>
+                </a:solidFill>
+                <a:latin typeface="Calibri" pitchFamily="34" charset="0"/>
+                <a:ea typeface="Calibri" pitchFamily="34" charset="-122"/>
+                <a:cs typeface="Calibri" pitchFamily="34" charset="-120"/>
+              </a:rPr>
+              <a:t>A</a:t>
+            </a:r>
+            <a:endParaRPr lang="en-US" sz="1300" dirty="0"/>
+          </a:p>
+        </p:txBody>
+      </p:sp>
+      <p:sp>
+        <p:nvSpPr>
+          <p:cNvPr id="16" name="Text 13"/>
+          <p:cNvSpPr txBox="1"/>
+          <p:nvPr/>
+        </p:nvSpPr>
+        <p:spPr>
+          <a:xfrm>
+            <a:off x="2697480" y="2395728"/>
+            <a:ext cx="2651760" cy="658368"/>
+          </a:xfrm>
+          <a:prstGeom prst="rect">
+            <a:avLst/>
+          </a:prstGeom>
+          <a:noFill/>
+          <a:ln/>
+        </p:spPr>
+        <p:txBody>
+          <a:bodyPr wrap="square" lIns="0" tIns="0" rIns="0" bIns="0" rtlCol="0" anchor="ctr"/>
+          <a:lstStyle/>
+          <a:p>
+            <a:pPr indent="0" marL="0">
+              <a:buNone/>
+            </a:pPr>
+            <a:r>
+              <a:rPr lang="en-US" sz="1700" b="1" dirty="0">
+                <a:solidFill>
+                  <a:srgbClr val="13123A"/>
+                </a:solidFill>
+                <a:latin typeface="Cambria" pitchFamily="34" charset="0"/>
+                <a:ea typeface="Cambria" pitchFamily="34" charset="-122"/>
+                <a:cs typeface="Cambria" pitchFamily="34" charset="-120"/>
+              </a:rPr>
+              <a:t>FactExtractor</a:t>
+            </a:r>
+            <a:endParaRPr lang="en-US" sz="1300" dirty="0"/>
+          </a:p>
+        </p:txBody>
+      </p:sp>
+      <p:sp>
+        <p:nvSpPr>
+          <p:cNvPr id="17" name="Text 14"/>
+          <p:cNvSpPr txBox="1"/>
+          <p:nvPr/>
+        </p:nvSpPr>
+        <p:spPr>
+          <a:xfrm>
+            <a:off x="5394960" y="2395728"/>
+            <a:ext cx="6080760" cy="658368"/>
+          </a:xfrm>
+          <a:prstGeom prst="rect">
+            <a:avLst/>
+          </a:prstGeom>
+          <a:noFill/>
+          <a:ln/>
+        </p:spPr>
+        <p:txBody>
+          <a:bodyPr wrap="square" lIns="0" tIns="0" rIns="0" bIns="0" rtlCol="0" anchor="ctr"/>
+          <a:lstStyle/>
+          <a:p>
+            <a:pPr indent="0" marL="0">
+              <a:buNone/>
+            </a:pPr>
+            <a:r>
+              <a:rPr lang="en-US" sz="1500" dirty="0">
+                <a:solidFill>
+                  <a:srgbClr val="4A4E63"/>
+                </a:solidFill>
+                <a:latin typeface="Calibri" pitchFamily="34" charset="0"/>
+                <a:ea typeface="Calibri" pitchFamily="34" charset="-122"/>
+                <a:cs typeface="Calibri" pitchFamily="34" charset="-120"/>
+              </a:rPr>
+              <a:t>1 lời gọi/lượt · cache sha1 · thử lại 1 lần · hoàn thành khi khóa đúng ≥ 90% trên 20 lượt</a:t>
+            </a:r>
+            <a:endParaRPr lang="en-US" sz="1150" dirty="0"/>
+          </a:p>
+        </p:txBody>
+      </p:sp>
+      <p:sp>
+        <p:nvSpPr>
+          <p:cNvPr id="18" name="Shape 15"/>
+          <p:cNvSpPr/>
+          <p:nvPr/>
+        </p:nvSpPr>
+        <p:spPr>
+          <a:xfrm>
+            <a:off x="566928" y="3145536"/>
+            <a:ext cx="11045952" cy="658368"/>
+          </a:xfrm>
+          <a:prstGeom prst="rect">
+            <a:avLst/>
+          </a:prstGeom>
+          <a:solidFill>
+            <a:srgbClr val="ECEBF7"/>
+          </a:solidFill>
+          <a:ln w="12700">
+            <a:solidFill>
+              <a:srgbClr val="ECEBF7"/>
+            </a:solidFill>
+            <a:prstDash val="solid"/>
+          </a:ln>
+        </p:spPr>
+        <p:txBody>
+          <a:bodyPr/>
+          <a:p/>
+        </p:txBody>
+      </p:sp>
+      <p:sp>
+        <p:nvSpPr>
+          <p:cNvPr id="19" name="Shape 16"/>
+          <p:cNvSpPr/>
+          <p:nvPr/>
+        </p:nvSpPr>
+        <p:spPr>
+          <a:xfrm>
+            <a:off x="566928" y="3145536"/>
+            <a:ext cx="1371600" cy="658368"/>
+          </a:xfrm>
+          <a:prstGeom prst="rect">
+            <a:avLst/>
+          </a:prstGeom>
+          <a:solidFill>
+            <a:srgbClr val="13123A"/>
+          </a:solidFill>
+          <a:ln w="12700">
+            <a:solidFill>
+              <a:srgbClr val="13123A"/>
+            </a:solidFill>
+            <a:prstDash val="solid"/>
+          </a:ln>
+        </p:spPr>
+        <p:txBody>
+          <a:bodyPr/>
+          <a:p/>
+        </p:txBody>
+      </p:sp>
+      <p:sp>
+        <p:nvSpPr>
+          <p:cNvPr id="20" name="Text 17"/>
+          <p:cNvSpPr txBox="1"/>
+          <p:nvPr/>
+        </p:nvSpPr>
+        <p:spPr>
+          <a:xfrm>
+            <a:off x="566928" y="3145536"/>
+            <a:ext cx="1371600" cy="658368"/>
+          </a:xfrm>
+          <a:prstGeom prst="rect">
+            <a:avLst/>
+          </a:prstGeom>
+          <a:noFill/>
+          <a:ln/>
+        </p:spPr>
+        <p:txBody>
+          <a:bodyPr wrap="square" lIns="0" tIns="0" rIns="0" bIns="0" rtlCol="0" anchor="ctr"/>
+          <a:lstStyle/>
+          <a:p>
+            <a:pPr algn="ctr" indent="0" marL="0">
+              <a:buNone/>
+            </a:pPr>
+            <a:r>
+              <a:rPr lang="en-US" sz="1550" b="1" dirty="0">
+                <a:solidFill>
+                  <a:srgbClr val="FFFFFF"/>
+                </a:solidFill>
+                <a:latin typeface="Calibri" pitchFamily="34" charset="0"/>
+                <a:ea typeface="Calibri" pitchFamily="34" charset="-122"/>
+                <a:cs typeface="Calibri" pitchFamily="34" charset="-120"/>
+              </a:rPr>
+              <a:t>NGÀY 3–4</a:t>
+            </a:r>
+            <a:endParaRPr lang="en-US" sz="1200" dirty="0"/>
+          </a:p>
+        </p:txBody>
+      </p:sp>
+      <p:sp>
+        <p:nvSpPr>
+          <p:cNvPr id="21" name="Text 18"/>
+          <p:cNvSpPr txBox="1"/>
+          <p:nvPr/>
+        </p:nvSpPr>
+        <p:spPr>
+          <a:xfrm>
+            <a:off x="2103120" y="3145536"/>
+            <a:ext cx="548640" cy="658368"/>
+          </a:xfrm>
+          <a:prstGeom prst="rect">
+            <a:avLst/>
+          </a:prstGeom>
+          <a:noFill/>
+          <a:ln/>
+        </p:spPr>
+        <p:txBody>
+          <a:bodyPr wrap="square" lIns="0" tIns="0" rIns="0" bIns="0" rtlCol="0" anchor="ctr"/>
+          <a:lstStyle/>
+          <a:p>
+            <a:pPr indent="0" marL="0">
+              <a:buNone/>
+            </a:pPr>
+            <a:r>
+              <a:rPr lang="en-US" sz="1700" b="1" dirty="0">
+                <a:solidFill>
+                  <a:srgbClr val="E9970B"/>
+                </a:solidFill>
+                <a:latin typeface="Calibri" pitchFamily="34" charset="0"/>
+                <a:ea typeface="Calibri" pitchFamily="34" charset="-122"/>
+                <a:cs typeface="Calibri" pitchFamily="34" charset="-120"/>
+              </a:rPr>
+              <a:t>B</a:t>
+            </a:r>
+            <a:endParaRPr lang="en-US" sz="1300" dirty="0"/>
+          </a:p>
+        </p:txBody>
+      </p:sp>
+      <p:sp>
+        <p:nvSpPr>
+          <p:cNvPr id="22" name="Text 19"/>
+          <p:cNvSpPr txBox="1"/>
+          <p:nvPr/>
+        </p:nvSpPr>
+        <p:spPr>
+          <a:xfrm>
+            <a:off x="2697480" y="3145536"/>
+            <a:ext cx="2651760" cy="658368"/>
+          </a:xfrm>
+          <a:prstGeom prst="rect">
+            <a:avLst/>
+          </a:prstGeom>
+          <a:noFill/>
+          <a:ln/>
+        </p:spPr>
+        <p:txBody>
+          <a:bodyPr wrap="square" lIns="0" tIns="0" rIns="0" bIns="0" rtlCol="0" anchor="ctr"/>
+          <a:lstStyle/>
+          <a:p>
+            <a:pPr indent="0" marL="0">
+              <a:buNone/>
+            </a:pPr>
+            <a:r>
+              <a:rPr lang="en-US" sz="1700" b="1" dirty="0">
+                <a:solidFill>
+                  <a:srgbClr val="13123A"/>
+                </a:solidFill>
+                <a:latin typeface="Cambria" pitchFamily="34" charset="0"/>
+                <a:ea typeface="Cambria" pitchFamily="34" charset="-122"/>
+                <a:cs typeface="Cambria" pitchFamily="34" charset="-120"/>
+              </a:rPr>
+              <a:t>Assembler &amp; agent</a:t>
+            </a:r>
+            <a:endParaRPr lang="en-US" sz="1300" dirty="0"/>
+          </a:p>
+        </p:txBody>
+      </p:sp>
+      <p:sp>
+        <p:nvSpPr>
+          <p:cNvPr id="23" name="Text 20"/>
+          <p:cNvSpPr txBox="1"/>
+          <p:nvPr/>
+        </p:nvSpPr>
+        <p:spPr>
+          <a:xfrm>
+            <a:off x="5394960" y="3145536"/>
+            <a:ext cx="6080760" cy="658368"/>
+          </a:xfrm>
+          <a:prstGeom prst="rect">
+            <a:avLst/>
+          </a:prstGeom>
+          <a:noFill/>
+          <a:ln/>
+        </p:spPr>
+        <p:txBody>
+          <a:bodyPr wrap="square" lIns="0" tIns="0" rIns="0" bIns="0" rtlCol="0" anchor="ctr"/>
+          <a:lstStyle/>
+          <a:p>
+            <a:pPr indent="0" marL="0">
+              <a:buNone/>
+            </a:pPr>
+            <a:r>
+              <a:rPr lang="en-US" sz="1500" dirty="0">
+                <a:solidFill>
+                  <a:srgbClr val="4A4E63"/>
+                </a:solidFill>
+                <a:latin typeface="Calibri" pitchFamily="34" charset="0"/>
+                <a:ea typeface="Calibri" pitchFamily="34" charset="-122"/>
+                <a:cs typeface="Calibri" pitchFamily="34" charset="-120"/>
+              </a:rPr>
+              <a:t>assembler chia hạn ngạch (đếm token bằng tokenizer thật) · agent.py với ingest_turn và answer</a:t>
+            </a:r>
+            <a:endParaRPr lang="en-US" sz="1150" dirty="0"/>
+          </a:p>
+        </p:txBody>
+      </p:sp>
+      <p:sp>
+        <p:nvSpPr>
+          <p:cNvPr id="24" name="Shape 21"/>
+          <p:cNvSpPr/>
+          <p:nvPr/>
+        </p:nvSpPr>
+        <p:spPr>
+          <a:xfrm>
+            <a:off x="566928" y="3895344"/>
+            <a:ext cx="11045952" cy="658368"/>
+          </a:xfrm>
+          <a:prstGeom prst="rect">
+            <a:avLst/>
+          </a:prstGeom>
+          <a:solidFill>
+            <a:srgbClr val="F7F7FB"/>
+          </a:solidFill>
+          <a:ln w="12700">
+            <a:solidFill>
+              <a:srgbClr val="F7F7FB"/>
+            </a:solidFill>
+            <a:prstDash val="solid"/>
+          </a:ln>
+        </p:spPr>
+        <p:txBody>
+          <a:bodyPr/>
+          <a:p/>
+        </p:txBody>
+      </p:sp>
+      <p:sp>
+        <p:nvSpPr>
+          <p:cNvPr id="25" name="Shape 22"/>
+          <p:cNvSpPr/>
+          <p:nvPr/>
+        </p:nvSpPr>
+        <p:spPr>
+          <a:xfrm>
+            <a:off x="566928" y="3895344"/>
+            <a:ext cx="1371600" cy="658368"/>
+          </a:xfrm>
+          <a:prstGeom prst="rect">
+            <a:avLst/>
+          </a:prstGeom>
+          <a:solidFill>
+            <a:srgbClr val="13123A"/>
+          </a:solidFill>
+          <a:ln w="12700">
+            <a:solidFill>
+              <a:srgbClr val="13123A"/>
+            </a:solidFill>
+            <a:prstDash val="solid"/>
+          </a:ln>
+        </p:spPr>
+        <p:txBody>
+          <a:bodyPr/>
+          <a:p/>
+        </p:txBody>
+      </p:sp>
+      <p:sp>
+        <p:nvSpPr>
+          <p:cNvPr id="26" name="Text 23"/>
+          <p:cNvSpPr txBox="1"/>
+          <p:nvPr/>
+        </p:nvSpPr>
+        <p:spPr>
+          <a:xfrm>
+            <a:off x="566928" y="3895344"/>
+            <a:ext cx="1371600" cy="658368"/>
+          </a:xfrm>
+          <a:prstGeom prst="rect">
+            <a:avLst/>
+          </a:prstGeom>
+          <a:noFill/>
+          <a:ln/>
+        </p:spPr>
+        <p:txBody>
+          <a:bodyPr wrap="square" lIns="0" tIns="0" rIns="0" bIns="0" rtlCol="0" anchor="ctr"/>
+          <a:lstStyle/>
+          <a:p>
+            <a:pPr algn="ctr" indent="0" marL="0">
+              <a:buNone/>
+            </a:pPr>
+            <a:r>
+              <a:rPr lang="en-US" sz="1550" b="1" dirty="0">
+                <a:solidFill>
+                  <a:srgbClr val="FFFFFF"/>
+                </a:solidFill>
+                <a:latin typeface="Calibri" pitchFamily="34" charset="0"/>
+                <a:ea typeface="Calibri" pitchFamily="34" charset="-122"/>
+                <a:cs typeface="Calibri" pitchFamily="34" charset="-120"/>
+              </a:rPr>
+              <a:t>NGÀY 4–5</a:t>
+            </a:r>
+            <a:endParaRPr lang="en-US" sz="1200" dirty="0"/>
+          </a:p>
+        </p:txBody>
+      </p:sp>
+      <p:sp>
+        <p:nvSpPr>
+          <p:cNvPr id="27" name="Text 24"/>
+          <p:cNvSpPr txBox="1"/>
+          <p:nvPr/>
+        </p:nvSpPr>
+        <p:spPr>
+          <a:xfrm>
+            <a:off x="2103120" y="3895344"/>
+            <a:ext cx="548640" cy="658368"/>
+          </a:xfrm>
+          <a:prstGeom prst="rect">
+            <a:avLst/>
+          </a:prstGeom>
+          <a:noFill/>
+          <a:ln/>
+        </p:spPr>
+        <p:txBody>
+          <a:bodyPr wrap="square" lIns="0" tIns="0" rIns="0" bIns="0" rtlCol="0" anchor="ctr"/>
+          <a:lstStyle/>
+          <a:p>
+            <a:pPr indent="0" marL="0">
+              <a:buNone/>
+            </a:pPr>
+            <a:r>
+              <a:rPr lang="en-US" sz="1700" b="1" dirty="0">
+                <a:solidFill>
+                  <a:srgbClr val="E9970B"/>
+                </a:solidFill>
+                <a:latin typeface="Calibri" pitchFamily="34" charset="0"/>
+                <a:ea typeface="Calibri" pitchFamily="34" charset="-122"/>
+                <a:cs typeface="Calibri" pitchFamily="34" charset="-120"/>
+              </a:rPr>
+              <a:t>A</a:t>
+            </a:r>
+            <a:endParaRPr lang="en-US" sz="1300" dirty="0"/>
+          </a:p>
+        </p:txBody>
+      </p:sp>
+      <p:sp>
+        <p:nvSpPr>
+          <p:cNvPr id="28" name="Text 25"/>
+          <p:cNvSpPr txBox="1"/>
+          <p:nvPr/>
+        </p:nvSpPr>
+        <p:spPr>
+          <a:xfrm>
+            <a:off x="2697480" y="3895344"/>
+            <a:ext cx="2651760" cy="658368"/>
+          </a:xfrm>
+          <a:prstGeom prst="rect">
+            <a:avLst/>
+          </a:prstGeom>
+          <a:noFill/>
+          <a:ln/>
+        </p:spPr>
+        <p:txBody>
+          <a:bodyPr wrap="square" lIns="0" tIns="0" rIns="0" bIns="0" rtlCol="0" anchor="ctr"/>
+          <a:lstStyle/>
+          <a:p>
+            <a:pPr indent="0" marL="0">
+              <a:buNone/>
+            </a:pPr>
+            <a:r>
+              <a:rPr lang="en-US" sz="1700" b="1" dirty="0">
+                <a:solidFill>
+                  <a:srgbClr val="13123A"/>
+                </a:solidFill>
+                <a:latin typeface="Cambria" pitchFamily="34" charset="0"/>
+                <a:ea typeface="Cambria" pitchFamily="34" charset="-122"/>
+                <a:cs typeface="Cambria" pitchFamily="34" charset="-120"/>
+              </a:rPr>
+              <a:t>Bộ đánh giá</a:t>
+            </a:r>
+            <a:endParaRPr lang="en-US" sz="1300" dirty="0"/>
+          </a:p>
+        </p:txBody>
+      </p:sp>
+      <p:sp>
+        <p:nvSpPr>
+          <p:cNvPr id="29" name="Text 26"/>
+          <p:cNvSpPr txBox="1"/>
+          <p:nvPr/>
+        </p:nvSpPr>
+        <p:spPr>
+          <a:xfrm>
+            <a:off x="5394960" y="3895344"/>
+            <a:ext cx="6080760" cy="658368"/>
+          </a:xfrm>
+          <a:prstGeom prst="rect">
+            <a:avLst/>
+          </a:prstGeom>
+          <a:noFill/>
+          <a:ln/>
+        </p:spPr>
+        <p:txBody>
+          <a:bodyPr wrap="square" lIns="0" tIns="0" rIns="0" bIns="0" rtlCol="0" anchor="ctr"/>
+          <a:lstStyle/>
+          <a:p>
+            <a:pPr indent="0" marL="0">
+              <a:buNone/>
+            </a:pPr>
+            <a:r>
+              <a:rPr lang="en-US" sz="1500" dirty="0">
+                <a:solidFill>
+                  <a:srgbClr val="4A4E63"/>
+                </a:solidFill>
+                <a:latin typeface="Calibri" pitchFamily="34" charset="0"/>
+                <a:ea typeface="Calibri" pitchFamily="34" charset="-122"/>
+                <a:cs typeface="Calibri" pitchFamily="34" charset="-120"/>
+              </a:rPr>
+              <a:t>datasets.py · judge.py (chốt prompt chấm) · run.py</a:t>
+            </a:r>
+            <a:endParaRPr lang="en-US" sz="1150" dirty="0"/>
+          </a:p>
+        </p:txBody>
+      </p:sp>
+      <p:sp>
+        <p:nvSpPr>
+          <p:cNvPr id="30" name="Shape 27"/>
+          <p:cNvSpPr/>
+          <p:nvPr/>
+        </p:nvSpPr>
+        <p:spPr>
+          <a:xfrm>
+            <a:off x="566928" y="4645152"/>
+            <a:ext cx="11045952" cy="658368"/>
+          </a:xfrm>
+          <a:prstGeom prst="rect">
+            <a:avLst/>
+          </a:prstGeom>
+          <a:solidFill>
+            <a:srgbClr val="ECEBF7"/>
+          </a:solidFill>
+          <a:ln w="12700">
+            <a:solidFill>
+              <a:srgbClr val="ECEBF7"/>
+            </a:solidFill>
+            <a:prstDash val="solid"/>
+          </a:ln>
+        </p:spPr>
+        <p:txBody>
+          <a:bodyPr/>
+          <a:p/>
+        </p:txBody>
+      </p:sp>
+      <p:sp>
+        <p:nvSpPr>
+          <p:cNvPr id="31" name="Shape 28"/>
+          <p:cNvSpPr/>
+          <p:nvPr/>
+        </p:nvSpPr>
+        <p:spPr>
+          <a:xfrm>
+            <a:off x="566928" y="4645152"/>
+            <a:ext cx="1371600" cy="658368"/>
+          </a:xfrm>
+          <a:prstGeom prst="rect">
+            <a:avLst/>
+          </a:prstGeom>
+          <a:solidFill>
+            <a:srgbClr val="13123A"/>
+          </a:solidFill>
+          <a:ln w="12700">
+            <a:solidFill>
+              <a:srgbClr val="13123A"/>
+            </a:solidFill>
+            <a:prstDash val="solid"/>
+          </a:ln>
+        </p:spPr>
+        <p:txBody>
+          <a:bodyPr/>
+          <a:p/>
+        </p:txBody>
+      </p:sp>
+      <p:sp>
+        <p:nvSpPr>
+          <p:cNvPr id="32" name="Text 29"/>
+          <p:cNvSpPr txBox="1"/>
+          <p:nvPr/>
+        </p:nvSpPr>
+        <p:spPr>
+          <a:xfrm>
+            <a:off x="566928" y="4645152"/>
+            <a:ext cx="1371600" cy="658368"/>
+          </a:xfrm>
+          <a:prstGeom prst="rect">
+            <a:avLst/>
+          </a:prstGeom>
+          <a:noFill/>
+          <a:ln/>
+        </p:spPr>
+        <p:txBody>
+          <a:bodyPr wrap="square" lIns="0" tIns="0" rIns="0" bIns="0" rtlCol="0" anchor="ctr"/>
+          <a:lstStyle/>
+          <a:p>
+            <a:pPr algn="ctr" indent="0" marL="0">
+              <a:buNone/>
+            </a:pPr>
+            <a:r>
+              <a:rPr lang="en-US" sz="1550" b="1" dirty="0">
+                <a:solidFill>
+                  <a:srgbClr val="FFFFFF"/>
+                </a:solidFill>
+                <a:latin typeface="Calibri" pitchFamily="34" charset="0"/>
+                <a:ea typeface="Calibri" pitchFamily="34" charset="-122"/>
+                <a:cs typeface="Calibri" pitchFamily="34" charset="-120"/>
+              </a:rPr>
+              <a:t>NGÀY 5–6</a:t>
+            </a:r>
+            <a:endParaRPr lang="en-US" sz="1200" dirty="0"/>
+          </a:p>
+        </p:txBody>
+      </p:sp>
+      <p:sp>
+        <p:nvSpPr>
+          <p:cNvPr id="33" name="Text 30"/>
+          <p:cNvSpPr txBox="1"/>
+          <p:nvPr/>
+        </p:nvSpPr>
+        <p:spPr>
+          <a:xfrm>
+            <a:off x="2103120" y="4645152"/>
+            <a:ext cx="548640" cy="658368"/>
+          </a:xfrm>
+          <a:prstGeom prst="rect">
+            <a:avLst/>
+          </a:prstGeom>
+          <a:noFill/>
+          <a:ln/>
+        </p:spPr>
+        <p:txBody>
+          <a:bodyPr wrap="square" lIns="0" tIns="0" rIns="0" bIns="0" rtlCol="0" anchor="ctr"/>
+          <a:lstStyle/>
+          <a:p>
+            <a:pPr indent="0" marL="0">
+              <a:buNone/>
+            </a:pPr>
+            <a:r>
+              <a:rPr lang="en-US" sz="1700" b="1" dirty="0">
+                <a:solidFill>
+                  <a:srgbClr val="E9970B"/>
+                </a:solidFill>
+                <a:latin typeface="Calibri" pitchFamily="34" charset="0"/>
+                <a:ea typeface="Calibri" pitchFamily="34" charset="-122"/>
+                <a:cs typeface="Calibri" pitchFamily="34" charset="-120"/>
+              </a:rPr>
+              <a:t>A+B</a:t>
+            </a:r>
+            <a:endParaRPr lang="en-US" sz="1300" dirty="0"/>
+          </a:p>
+        </p:txBody>
+      </p:sp>
+      <p:sp>
+        <p:nvSpPr>
+          <p:cNvPr id="34" name="Text 31"/>
+          <p:cNvSpPr txBox="1"/>
+          <p:nvPr/>
+        </p:nvSpPr>
+        <p:spPr>
+          <a:xfrm>
+            <a:off x="2697480" y="4645152"/>
+            <a:ext cx="2651760" cy="658368"/>
+          </a:xfrm>
+          <a:prstGeom prst="rect">
+            <a:avLst/>
+          </a:prstGeom>
+          <a:noFill/>
+          <a:ln/>
+        </p:spPr>
+        <p:txBody>
+          <a:bodyPr wrap="square" lIns="0" tIns="0" rIns="0" bIns="0" rtlCol="0" anchor="ctr"/>
+          <a:lstStyle/>
+          <a:p>
+            <a:pPr indent="0" marL="0">
+              <a:buNone/>
+            </a:pPr>
+            <a:r>
+              <a:rPr lang="en-US" sz="1700" b="1" dirty="0">
+                <a:solidFill>
+                  <a:srgbClr val="13123A"/>
+                </a:solidFill>
+                <a:latin typeface="Cambria" pitchFamily="34" charset="0"/>
+                <a:ea typeface="Cambria" pitchFamily="34" charset="-122"/>
+                <a:cs typeface="Cambria" pitchFamily="34" charset="-120"/>
+              </a:rPr>
+              <a:t>Thực nghiệm &amp; phân tích lỗi</a:t>
+            </a:r>
+            <a:endParaRPr lang="en-US" sz="1300" dirty="0"/>
+          </a:p>
+        </p:txBody>
+      </p:sp>
+      <p:sp>
+        <p:nvSpPr>
+          <p:cNvPr id="35" name="Text 32"/>
+          <p:cNvSpPr txBox="1"/>
+          <p:nvPr/>
+        </p:nvSpPr>
+        <p:spPr>
+          <a:xfrm>
+            <a:off x="5394960" y="4645152"/>
+            <a:ext cx="6080760" cy="658368"/>
+          </a:xfrm>
+          <a:prstGeom prst="rect">
+            <a:avLst/>
+          </a:prstGeom>
+          <a:noFill/>
+          <a:ln/>
+        </p:spPr>
+        <p:txBody>
+          <a:bodyPr wrap="square" lIns="0" tIns="0" rIns="0" bIns="0" rtlCol="0" anchor="ctr"/>
+          <a:lstStyle/>
+          <a:p>
+            <a:pPr indent="0" marL="0">
+              <a:buNone/>
+            </a:pPr>
+            <a:r>
+              <a:rPr lang="en-US" sz="1500" dirty="0">
+                <a:solidFill>
+                  <a:srgbClr val="4A4E63"/>
+                </a:solidFill>
+                <a:latin typeface="Calibri" pitchFamily="34" charset="0"/>
+                <a:ea typeface="Calibri" pitchFamily="34" charset="-122"/>
+                <a:cs typeface="Calibri" pitchFamily="34" charset="-120"/>
+              </a:rPr>
+              <a:t>chạy --n 100 trên dev · phân tích 10 câu sai đầu tiên · đo tỉ lệ token Việt/Anh bằng tokenizer thật</a:t>
+            </a:r>
+            <a:endParaRPr lang="en-US" sz="1150" dirty="0"/>
+          </a:p>
+        </p:txBody>
+      </p:sp>
+      <p:sp>
+        <p:nvSpPr>
+          <p:cNvPr id="36" name="Shape 33"/>
+          <p:cNvSpPr/>
+          <p:nvPr/>
+        </p:nvSpPr>
+        <p:spPr>
+          <a:xfrm>
+            <a:off x="566928" y="5394960"/>
+            <a:ext cx="11045952" cy="658368"/>
+          </a:xfrm>
+          <a:prstGeom prst="rect">
+            <a:avLst/>
+          </a:prstGeom>
+          <a:solidFill>
+            <a:srgbClr val="F7F7FB"/>
+          </a:solidFill>
+          <a:ln w="12700">
+            <a:solidFill>
+              <a:srgbClr val="F7F7FB"/>
+            </a:solidFill>
+            <a:prstDash val="solid"/>
+          </a:ln>
+        </p:spPr>
+        <p:txBody>
+          <a:bodyPr/>
+          <a:p/>
+        </p:txBody>
+      </p:sp>
+      <p:sp>
+        <p:nvSpPr>
+          <p:cNvPr id="37" name="Shape 34"/>
+          <p:cNvSpPr/>
+          <p:nvPr/>
+        </p:nvSpPr>
+        <p:spPr>
+          <a:xfrm>
+            <a:off x="566928" y="5394960"/>
+            <a:ext cx="1371600" cy="658368"/>
+          </a:xfrm>
+          <a:prstGeom prst="rect">
+            <a:avLst/>
+          </a:prstGeom>
+          <a:solidFill>
+            <a:srgbClr val="13123A"/>
+          </a:solidFill>
+          <a:ln w="12700">
+            <a:solidFill>
+              <a:srgbClr val="13123A"/>
+            </a:solidFill>
+            <a:prstDash val="solid"/>
+          </a:ln>
+        </p:spPr>
+        <p:txBody>
+          <a:bodyPr/>
+          <a:p/>
+        </p:txBody>
+      </p:sp>
+      <p:sp>
+        <p:nvSpPr>
+          <p:cNvPr id="38" name="Text 35"/>
+          <p:cNvSpPr txBox="1"/>
+          <p:nvPr/>
+        </p:nvSpPr>
+        <p:spPr>
+          <a:xfrm>
+            <a:off x="566928" y="5394960"/>
+            <a:ext cx="1371600" cy="658368"/>
+          </a:xfrm>
+          <a:prstGeom prst="rect">
+            <a:avLst/>
+          </a:prstGeom>
+          <a:noFill/>
+          <a:ln/>
+        </p:spPr>
+        <p:txBody>
+          <a:bodyPr wrap="square" lIns="0" tIns="0" rIns="0" bIns="0" rtlCol="0" anchor="ctr"/>
+          <a:lstStyle/>
+          <a:p>
+            <a:pPr algn="ctr" indent="0" marL="0">
+              <a:buNone/>
+            </a:pPr>
+            <a:r>
+              <a:rPr lang="en-US" sz="1550" b="1" dirty="0">
+                <a:solidFill>
+                  <a:srgbClr val="FFFFFF"/>
+                </a:solidFill>
+                <a:latin typeface="Calibri" pitchFamily="34" charset="0"/>
+                <a:ea typeface="Calibri" pitchFamily="34" charset="-122"/>
+                <a:cs typeface="Calibri" pitchFamily="34" charset="-120"/>
+              </a:rPr>
+              <a:t>NGÀY 7</a:t>
+            </a:r>
+            <a:endParaRPr lang="en-US" sz="1200" dirty="0"/>
+          </a:p>
+        </p:txBody>
+      </p:sp>
+      <p:sp>
+        <p:nvSpPr>
+          <p:cNvPr id="39" name="Text 36"/>
+          <p:cNvSpPr txBox="1"/>
+          <p:nvPr/>
+        </p:nvSpPr>
+        <p:spPr>
+          <a:xfrm>
+            <a:off x="2103120" y="5394960"/>
+            <a:ext cx="548640" cy="658368"/>
+          </a:xfrm>
+          <a:prstGeom prst="rect">
+            <a:avLst/>
+          </a:prstGeom>
+          <a:noFill/>
+          <a:ln/>
+        </p:spPr>
+        <p:txBody>
+          <a:bodyPr wrap="square" lIns="0" tIns="0" rIns="0" bIns="0" rtlCol="0" anchor="ctr"/>
+          <a:lstStyle/>
+          <a:p>
+            <a:pPr indent="0" marL="0">
+              <a:buNone/>
+            </a:pPr>
+            <a:r>
+              <a:rPr lang="en-US" sz="1700" b="1" dirty="0">
+                <a:solidFill>
+                  <a:srgbClr val="E9970B"/>
+                </a:solidFill>
+                <a:latin typeface="Calibri" pitchFamily="34" charset="0"/>
+                <a:ea typeface="Calibri" pitchFamily="34" charset="-122"/>
+                <a:cs typeface="Calibri" pitchFamily="34" charset="-120"/>
+              </a:rPr>
+              <a:t>A+B</a:t>
+            </a:r>
+            <a:endParaRPr lang="en-US" sz="1300" dirty="0"/>
+          </a:p>
+        </p:txBody>
+      </p:sp>
+      <p:sp>
+        <p:nvSpPr>
+          <p:cNvPr id="40" name="Text 37"/>
+          <p:cNvSpPr txBox="1"/>
+          <p:nvPr/>
+        </p:nvSpPr>
+        <p:spPr>
+          <a:xfrm>
+            <a:off x="2697480" y="5394960"/>
+            <a:ext cx="2651760" cy="658368"/>
+          </a:xfrm>
+          <a:prstGeom prst="rect">
+            <a:avLst/>
+          </a:prstGeom>
+          <a:noFill/>
+          <a:ln/>
+        </p:spPr>
+        <p:txBody>
+          <a:bodyPr wrap="square" lIns="0" tIns="0" rIns="0" bIns="0" rtlCol="0" anchor="ctr"/>
+          <a:lstStyle/>
+          <a:p>
+            <a:pPr indent="0" marL="0">
+              <a:buNone/>
+            </a:pPr>
+            <a:r>
+              <a:rPr lang="en-US" sz="1700" b="1" dirty="0">
+                <a:solidFill>
+                  <a:srgbClr val="13123A"/>
+                </a:solidFill>
+                <a:latin typeface="Cambria" pitchFamily="34" charset="0"/>
+                <a:ea typeface="Cambria" pitchFamily="34" charset="-122"/>
+                <a:cs typeface="Cambria" pitchFamily="34" charset="-120"/>
+              </a:rPr>
+              <a:t>Tổng hợp &amp; báo cáo</a:t>
+            </a:r>
+            <a:endParaRPr lang="en-US" sz="1300" dirty="0"/>
+          </a:p>
+        </p:txBody>
+      </p:sp>
+      <p:sp>
+        <p:nvSpPr>
+          <p:cNvPr id="41" name="Text 38"/>
+          <p:cNvSpPr txBox="1"/>
+          <p:nvPr/>
+        </p:nvSpPr>
+        <p:spPr>
+          <a:xfrm>
+            <a:off x="5394960" y="5394960"/>
+            <a:ext cx="6080760" cy="658368"/>
+          </a:xfrm>
+          <a:prstGeom prst="rect">
+            <a:avLst/>
+          </a:prstGeom>
+          <a:noFill/>
+          <a:ln/>
+        </p:spPr>
+        <p:txBody>
+          <a:bodyPr wrap="square" lIns="0" tIns="0" rIns="0" bIns="0" rtlCol="0" anchor="ctr"/>
+          <a:lstStyle/>
+          <a:p>
+            <a:pPr indent="0" marL="0">
+              <a:buNone/>
+            </a:pPr>
+            <a:r>
+              <a:rPr lang="en-US" sz="1500" dirty="0">
+                <a:solidFill>
+                  <a:srgbClr val="4A4E63"/>
+                </a:solidFill>
+                <a:latin typeface="Calibri" pitchFamily="34" charset="0"/>
+                <a:ea typeface="Calibri" pitchFamily="34" charset="-122"/>
+                <a:cs typeface="Calibri" pitchFamily="34" charset="-120"/>
+              </a:rPr>
+              <a:t>điền bảng số · báo cáo 1 trang · bảng phân loại lỗi</a:t>
+            </a:r>
+            <a:endParaRPr lang="en-US" sz="1150" dirty="0"/>
+          </a:p>
+        </p:txBody>
+      </p:sp>
+      <p:sp>
+        <p:nvSpPr>
+          <p:cNvPr id="42" name="Text 39"/>
+          <p:cNvSpPr txBox="1"/>
+          <p:nvPr/>
+        </p:nvSpPr>
+        <p:spPr>
+          <a:xfrm>
+            <a:off x="566928" y="6172200"/>
+            <a:ext cx="11045952" cy="256032"/>
+          </a:xfrm>
+          <a:prstGeom prst="rect">
+            <a:avLst/>
+          </a:prstGeom>
+          <a:noFill/>
+          <a:ln/>
+        </p:spPr>
+        <p:txBody>
+          <a:bodyPr wrap="square" lIns="0" tIns="0" rIns="0" bIns="0" rtlCol="0" anchor="t"/>
+          <a:lstStyle/>
+          <a:p>
+            <a:pPr indent="0" marL="0">
+              <a:buNone/>
+            </a:pPr>
+            <a:r>
+              <a:rPr lang="en-US" sz="1350" i="1" dirty="0">
+                <a:solidFill>
+                  <a:srgbClr val="6B6F82"/>
+                </a:solidFill>
+                <a:latin typeface="Calibri" pitchFamily="34" charset="0"/>
+                <a:ea typeface="Calibri" pitchFamily="34" charset="-122"/>
+                <a:cs typeface="Calibri" pitchFamily="34" charset="-120"/>
+              </a:rPr>
+              <a:t>A = trích xuất &amp; đánh giá · B = chỉ mục &amp; agent · giao diện giữa hai bên là dataclass Fact (đã cố định trong ledger.py)</a:t>
+            </a:r>
+            <a:endParaRPr lang="en-US" sz="1050" dirty="0"/>
+          </a:p>
+        </p:txBody>
+      </p:sp>
+    </p:spTree>
+  </p:cSld>
+  <p:clrMapOvr>
+    <a:masterClrMapping/>
+  </p:clrMapOvr>
+</p:sld>
+</file>
+
+<file path=ppt/slides/slide12.xml><?xml version="1.0" encoding="utf-8"?>
+<p:sld xmlns:a="http://schemas.openxmlformats.org/drawingml/2006/main" xmlns:r="http://schemas.openxmlformats.org/officeDocument/2006/relationships" xmlns:p="http://schemas.openxmlformats.org/presentationml/2006/main">
   <p:cSld name="Slide 9">
     <p:bg>
       <p:bgPr>
@@ -2902,7 +5501,7 @@
                 <a:ea typeface="Cambria" pitchFamily="34" charset="-122"/>
                 <a:cs typeface="Cambria" pitchFamily="34" charset="-120"/>
               </a:rPr>
-              <a:t>Không triển khai slot/seq trong tuần 3</a:t>
+              <a:t>Tuần 3 chưa có logic cập nhật</a:t>
             </a:r>
             <a:endParaRPr lang="en-US" sz="1300" dirty="0"/>
           </a:p>
@@ -2933,7 +5532,7 @@
               <a:buNone/>
             </a:pPr>
             <a:r>
-              <a:rPr lang="en-US" sz="1550" dirty="0">
+              <a:rPr lang="en-US" sz="1250" dirty="0">
                 <a:solidFill>
                   <a:srgbClr val="4A4E63"/>
                 </a:solidFill>
@@ -2941,7 +5540,7 @@
                 <a:ea typeface="Calibri" pitchFamily="34" charset="-122"/>
                 <a:cs typeface="Calibri" pitchFamily="34" charset="-120"/>
               </a:rPr>
-              <a:t>Schema đã có sẵn cột nên dễ làm sớm; làm sớm thì tuần 4 không còn gì để so sánh.</a:t>
+              <a:t>Tuần 3 đã có schema, cấp phát seq và cách đọc bản mới nhất. Tuần 4 mới triển khai logic ADD/UPDATE/DELETE/NOOP/CONFLICT và ràng buộc mỗi slot một bản active.</a:t>
             </a:r>
             <a:endParaRPr lang="en-US" sz="1200" dirty="0"/>
           </a:p>
@@ -3247,7 +5846,7 @@
 </p:sld>
 </file>
 
-<file path=ppt/slides/slide11.xml><?xml version="1.0" encoding="utf-8"?>
+<file path=ppt/slides/slide13.xml><?xml version="1.0" encoding="utf-8"?>
 <p:sld xmlns:a="http://schemas.openxmlformats.org/drawingml/2006/main" xmlns:r="http://schemas.openxmlformats.org/officeDocument/2006/relationships" xmlns:p="http://schemas.openxmlformats.org/presentationml/2006/main">
   <p:cSld name="Slide 10">
     <p:bg>
@@ -4018,7 +6617,7 @@
 </p:sld>
 </file>
 
-<file path=ppt/slides/slide12.xml><?xml version="1.0" encoding="utf-8"?>
+<file path=ppt/slides/slide14.xml><?xml version="1.0" encoding="utf-8"?>
 <p:sld xmlns:a="http://schemas.openxmlformats.org/drawingml/2006/main" xmlns:p="http://schemas.openxmlformats.org/presentationml/2006/main" xmlns:r="http://schemas.openxmlformats.org/officeDocument/2006/relationships">
   <p:cSld>
     <p:bg>
@@ -4857,13 +7456,13 @@
           <a:lstStyle/>
           <a:p>
             <a:r>
-              <a:rPr sz="1500" b="0">
+              <a:rPr sz="1300" b="0">
                 <a:solidFill>
                   <a:srgbClr val="20223A"/>
                 </a:solidFill>
                 <a:latin typeface="Calibri"/>
               </a:rPr>
-              <a:t>Slot + seq; ADD/UPDATE/DELETE/NOOP/CONFLICT; cổng nguồn gốc pending.</a:t>
+              <a:t>Logic cập nhật ADD/UPDATE/DELETE/NOOP/CONFLICT; bật ràng buộc một bản active mỗi slot; cổng nguồn gốc pending.</a:t>
             </a:r>
           </a:p>
         </p:txBody>
@@ -5504,7 +8103,7 @@
 </p:sld>
 </file>
 
-<file path=ppt/slides/slide13.xml><?xml version="1.0" encoding="utf-8"?>
+<file path=ppt/slides/slide15.xml><?xml version="1.0" encoding="utf-8"?>
 <p:sld xmlns:a="http://schemas.openxmlformats.org/drawingml/2006/main" xmlns:r="http://schemas.openxmlformats.org/officeDocument/2006/relationships" xmlns:p="http://schemas.openxmlformats.org/presentationml/2006/main">
   <p:cSld name="Slide 11">
     <p:bg>
@@ -5561,7 +8160,7 @@
                 <a:ea typeface="Calibri" pitchFamily="34" charset="-122"/>
                 <a:cs typeface="Calibri" pitchFamily="34" charset="-120"/>
               </a:rPr>
-              <a:t>TIẾN ĐỘ · XIN Ý KIẾN MENTOR</a:t>
+              <a:t>TIẾN ĐỘ TUẦN 3</a:t>
             </a:r>
             <a:endParaRPr lang="en-US" sz="1200" dirty="0"/>
           </a:p>
@@ -5600,48 +8199,9 @@
                 <a:ea typeface="Cambria" pitchFamily="34" charset="-122"/>
                 <a:cs typeface="Cambria" pitchFamily="34" charset="-120"/>
               </a:rPr>
-              <a:t>Tiến độ và hai vấn đề xin ý kiến</a:t>
+              <a:t>Tổng kết tiến độ tuần 3</a:t>
             </a:r>
             <a:endParaRPr lang="en-US" sz="3000" dirty="0"/>
-          </a:p>
-        </p:txBody>
-      </p:sp>
-      <p:sp>
-        <p:nvSpPr>
-          <p:cNvPr id="4" name="Text 2"/>
-          <p:cNvSpPr txBox="1"/>
-          <p:nvPr/>
-        </p:nvSpPr>
-        <p:spPr>
-          <a:xfrm>
-            <a:off x="566928" y="6464808"/>
-            <a:ext cx="11045952" cy="329184"/>
-          </a:xfrm>
-          <a:prstGeom prst="rect">
-            <a:avLst/>
-          </a:prstGeom>
-          <a:noFill/>
-          <a:ln/>
-        </p:spPr>
-        <p:txBody>
-          <a:bodyPr wrap="square" lIns="0" tIns="0" rIns="0" bIns="0" rtlCol="0" anchor="t"/>
-          <a:lstStyle/>
-          <a:p>
-            <a:pPr indent="0" marL="0">
-              <a:buNone/>
-            </a:pPr>
-            <a:r>
-              <a:rPr lang="en-US" sz="1200" dirty="0">
-                <a:solidFill>
-                  <a:srgbClr val="6B6F82"/>
-                </a:solidFill>
-                <a:latin typeface="Calibri" pitchFamily="34" charset="0"/>
-                <a:ea typeface="Calibri" pitchFamily="34" charset="-122"/>
-                <a:cs typeface="Calibri" pitchFamily="34" charset="-120"/>
-              </a:rPr>
-              <a:t>Kho ký ức, schema, test, ghi chú kế hoạch (Tuan 3/Step1Structure) và ba notebook (Tuan 3/DataExplore) đã được đưa lên kho chung của nhóm.</a:t>
-            </a:r>
-            <a:endParaRPr lang="en-US" sz="1050" dirty="0"/>
           </a:p>
         </p:txBody>
       </p:sp>
@@ -5653,8 +8213,8 @@
         </p:nvSpPr>
         <p:spPr>
           <a:xfrm>
-            <a:off x="566928" y="1673352"/>
-            <a:ext cx="5358384" cy="2011680"/>
+            <a:off x="566928" y="2184400"/>
+            <a:ext cx="5358384" cy="3810000"/>
           </a:xfrm>
           <a:prstGeom prst="rect">
             <a:avLst/>
@@ -5682,7 +8242,7 @@
         </p:nvSpPr>
         <p:spPr>
           <a:xfrm>
-            <a:off x="822960" y="1828800"/>
+            <a:off x="822960" y="2336800"/>
             <a:ext cx="4846320" cy="237744"/>
           </a:xfrm>
           <a:prstGeom prst="rect">
@@ -5721,8 +8281,8 @@
         </p:nvSpPr>
         <p:spPr>
           <a:xfrm>
-            <a:off x="822960" y="2121408"/>
-            <a:ext cx="4846320" cy="1463040"/>
+            <a:off x="822960" y="2628900"/>
+            <a:ext cx="4846320" cy="3175000"/>
           </a:xfrm>
           <a:prstGeom prst="rect">
             <a:avLst/>
@@ -5735,6 +8295,9 @@
           <a:lstStyle/>
           <a:p>
             <a:pPr marL="342900" indent="-342900">
+              <a:spcBef>
+                <a:spcPts val="1000"/>
+              </a:spcBef>
               <a:spcAft>
                 <a:spcPts val="600"/>
               </a:spcAft>
@@ -5742,7 +8305,7 @@
               <a:buChar char="•"/>
             </a:pPr>
             <a:r>
-              <a:rPr lang="en-US" sz="1600" dirty="0">
+              <a:rPr lang="en-US" sz="1700" dirty="0">
                 <a:solidFill>
                   <a:srgbClr val="4A4E63"/>
                 </a:solidFill>
@@ -5756,6 +8319,9 @@
           </a:p>
           <a:p>
             <a:pPr marL="342900" indent="-342900">
+              <a:spcBef>
+                <a:spcPts val="1000"/>
+              </a:spcBef>
               <a:spcAft>
                 <a:spcPts val="600"/>
               </a:spcAft>
@@ -5763,7 +8329,7 @@
               <a:buChar char="•"/>
             </a:pPr>
             <a:r>
-              <a:rPr lang="en-US" sz="1600" dirty="0">
+              <a:rPr lang="en-US" sz="1700" dirty="0">
                 <a:solidFill>
                   <a:srgbClr val="4A4E63"/>
                 </a:solidFill>
@@ -5777,6 +8343,9 @@
           </a:p>
           <a:p>
             <a:pPr marL="342900" indent="-342900">
+              <a:spcBef>
+                <a:spcPts val="1000"/>
+              </a:spcBef>
               <a:spcAft>
                 <a:spcPts val="600"/>
               </a:spcAft>
@@ -5784,7 +8353,7 @@
               <a:buChar char="•"/>
             </a:pPr>
             <a:r>
-              <a:rPr lang="en-US" sz="1600" dirty="0">
+              <a:rPr lang="en-US" sz="1700" dirty="0">
                 <a:solidFill>
                   <a:srgbClr val="4A4E63"/>
                 </a:solidFill>
@@ -5806,8 +8375,8 @@
         </p:nvSpPr>
         <p:spPr>
           <a:xfrm>
-            <a:off x="6254496" y="1673352"/>
-            <a:ext cx="5358384" cy="2011680"/>
+            <a:off x="6254496" y="2184400"/>
+            <a:ext cx="5358384" cy="3810000"/>
           </a:xfrm>
           <a:prstGeom prst="rect">
             <a:avLst/>
@@ -5835,7 +8404,7 @@
         </p:nvSpPr>
         <p:spPr>
           <a:xfrm>
-            <a:off x="6510528" y="1828800"/>
+            <a:off x="6510528" y="2336800"/>
             <a:ext cx="4846320" cy="237744"/>
           </a:xfrm>
           <a:prstGeom prst="rect">
@@ -5874,8 +8443,8 @@
         </p:nvSpPr>
         <p:spPr>
           <a:xfrm>
-            <a:off x="6510528" y="2121408"/>
-            <a:ext cx="4846320" cy="1463040"/>
+            <a:off x="6510528" y="2628900"/>
+            <a:ext cx="4846320" cy="3175000"/>
           </a:xfrm>
           <a:prstGeom prst="rect">
             <a:avLst/>
@@ -5888,6 +8457,9 @@
           <a:lstStyle/>
           <a:p>
             <a:pPr marL="342900" indent="-342900">
+              <a:spcBef>
+                <a:spcPts val="1000"/>
+              </a:spcBef>
               <a:spcAft>
                 <a:spcPts val="600"/>
               </a:spcAft>
@@ -5895,7 +8467,7 @@
               <a:buChar char="•"/>
             </a:pPr>
             <a:r>
-              <a:rPr lang="en-US" sz="1600" dirty="0">
+              <a:rPr lang="en-US" sz="1700" dirty="0">
                 <a:solidFill>
                   <a:srgbClr val="4A4E63"/>
                 </a:solidFill>
@@ -5909,6 +8481,9 @@
           </a:p>
           <a:p>
             <a:pPr marL="342900" indent="-342900">
+              <a:spcBef>
+                <a:spcPts val="1000"/>
+              </a:spcBef>
               <a:spcAft>
                 <a:spcPts val="600"/>
               </a:spcAft>
@@ -5916,7 +8491,7 @@
               <a:buChar char="•"/>
             </a:pPr>
             <a:r>
-              <a:rPr lang="en-US" sz="1600" dirty="0">
+              <a:rPr lang="en-US" sz="1700" dirty="0">
                 <a:solidFill>
                   <a:srgbClr val="4A4E63"/>
                 </a:solidFill>
@@ -5930,6 +8505,9 @@
           </a:p>
           <a:p>
             <a:pPr marL="342900" indent="-342900">
+              <a:spcBef>
+                <a:spcPts val="1000"/>
+              </a:spcBef>
               <a:spcAft>
                 <a:spcPts val="600"/>
               </a:spcAft>
@@ -5937,7 +8515,7 @@
               <a:buChar char="•"/>
             </a:pPr>
             <a:r>
-              <a:rPr lang="en-US" sz="1600" dirty="0">
+              <a:rPr lang="en-US" sz="1700" dirty="0">
                 <a:solidFill>
                   <a:srgbClr val="4A4E63"/>
                 </a:solidFill>
@@ -5948,133 +8526,6 @@
               <a:t>Chạy 100 câu và phân loại lỗi → đường cơ sở đầu tiên</a:t>
             </a:r>
             <a:endParaRPr lang="en-US" sz="1250" dirty="0"/>
-          </a:p>
-        </p:txBody>
-      </p:sp>
-      <p:sp>
-        <p:nvSpPr>
-          <p:cNvPr id="12" name="Shape 9"/>
-          <p:cNvSpPr/>
-          <p:nvPr/>
-        </p:nvSpPr>
-        <p:spPr>
-          <a:xfrm>
-            <a:off x="566928" y="3931920"/>
-            <a:ext cx="11045952" cy="2286000"/>
-          </a:xfrm>
-          <a:prstGeom prst="rect">
-            <a:avLst/>
-          </a:prstGeom>
-          <a:solidFill>
-            <a:srgbClr val="13123A"/>
-          </a:solidFill>
-          <a:ln w="12700">
-            <a:solidFill>
-              <a:srgbClr val="13123A"/>
-            </a:solidFill>
-            <a:prstDash val="solid"/>
-          </a:ln>
-        </p:spPr>
-        <p:txBody>
-          <a:bodyPr/>
-          <a:p/>
-        </p:txBody>
-      </p:sp>
-      <p:sp>
-        <p:nvSpPr>
-          <p:cNvPr id="13" name="Text 10"/>
-          <p:cNvSpPr txBox="1"/>
-          <p:nvPr/>
-        </p:nvSpPr>
-        <p:spPr>
-          <a:xfrm>
-            <a:off x="822960" y="4114800"/>
-            <a:ext cx="5486400" cy="237744"/>
-          </a:xfrm>
-          <a:prstGeom prst="rect">
-            <a:avLst/>
-          </a:prstGeom>
-          <a:noFill/>
-          <a:ln/>
-        </p:spPr>
-        <p:txBody>
-          <a:bodyPr wrap="square" lIns="0" tIns="0" rIns="0" bIns="0" rtlCol="0" anchor="t"/>
-          <a:lstStyle/>
-          <a:p>
-            <a:pPr indent="0" marL="0">
-              <a:buNone/>
-            </a:pPr>
-            <a:r>
-              <a:rPr lang="en-US" sz="1450" b="1" dirty="0">
-                <a:solidFill>
-                  <a:srgbClr val="1FA6A6"/>
-                </a:solidFill>
-                <a:latin typeface="Calibri" pitchFamily="34" charset="0"/>
-                <a:ea typeface="Calibri" pitchFamily="34" charset="-122"/>
-                <a:cs typeface="Calibri" pitchFamily="34" charset="-120"/>
-              </a:rPr>
-              <a:t>HAI VẤN ĐỀ XIN Ý KIẾN MENTOR</a:t>
-            </a:r>
-            <a:endParaRPr lang="en-US" sz="1100" dirty="0"/>
-          </a:p>
-        </p:txBody>
-      </p:sp>
-      <p:sp>
-        <p:nvSpPr>
-          <p:cNvPr id="14" name="Text 11"/>
-          <p:cNvSpPr txBox="1"/>
-          <p:nvPr/>
-        </p:nvSpPr>
-        <p:spPr>
-          <a:xfrm>
-            <a:off x="822960" y="4434840"/>
-            <a:ext cx="10515600" cy="1645920"/>
-          </a:xfrm>
-          <a:prstGeom prst="rect">
-            <a:avLst/>
-          </a:prstGeom>
-          <a:noFill/>
-          <a:ln/>
-        </p:spPr>
-        <p:txBody>
-          <a:bodyPr wrap="square" lIns="0" tIns="0" rIns="0" bIns="0" rtlCol="0" anchor="t"/>
-          <a:lstStyle/>
-          <a:p>
-            <a:pPr indent="0" marL="0">
-              <a:spcAft>
-                <a:spcPts val="1000"/>
-              </a:spcAft>
-              <a:buNone/>
-            </a:pPr>
-            <a:r>
-              <a:rPr lang="en-US" sz="1700" dirty="0">
-                <a:solidFill>
-                  <a:srgbClr val="EFEFFA"/>
-                </a:solidFill>
-                <a:latin typeface="Calibri" pitchFamily="34" charset="0"/>
-                <a:ea typeface="Calibri" pitchFamily="34" charset="-122"/>
-                <a:cs typeface="Calibri" pitchFamily="34" charset="-120"/>
-              </a:rPr>
-              <a:t>1. Với đường cơ sở LongMemEval-S (100 câu dev): nên mở rộng ngay lên toàn bộ tập, hay giữ 100 câu đến khi có reranker (tuần 6) rồi mới chạy toàn bộ?</a:t>
-            </a:r>
-            <a:endParaRPr lang="en-US" sz="1300" dirty="0"/>
-          </a:p>
-          <a:p>
-            <a:pPr indent="0" marL="0">
-              <a:buNone/>
-            </a:pPr>
-            <a:r>
-              <a:rPr lang="en-US" sz="1700" dirty="0">
-                <a:solidFill>
-                  <a:srgbClr val="EFEFFA"/>
-                </a:solidFill>
-                <a:latin typeface="Calibri" pitchFamily="34" charset="0"/>
-                <a:ea typeface="Calibri" pitchFamily="34" charset="-122"/>
-                <a:cs typeface="Calibri" pitchFamily="34" charset="-120"/>
-              </a:rPr>
-              <a:t>2. Với cấu hình đối chứng llm-judge (LLM tự chọn bản mới nhất thay cho max(seq)): có đáng dành thời gian chạy, hay coi cơ chế tất định là hiển nhiên đúng và bỏ cấu hình này?</a:t>
-            </a:r>
-            <a:endParaRPr lang="en-US" sz="1300" dirty="0"/>
           </a:p>
         </p:txBody>
       </p:sp>
@@ -7600,7 +10051,7 @@
                 </a:solidFill>
                 <a:latin typeface="Calibri"/>
               </a:rPr>
-              <a:t>Độ chồng lấn cosine giữa câu chứa đáp án và lượt ngẫu nhiên: [__%]. Chồng lấn lớn → dùng điểm reranker (tuần 6).</a:t>
+              <a:t>Độ chồng lấn cosine giữa câu chứa đáp án và lượt ngẫu nhiên: 12,1% (TB bằng chứng 0,59 so với TB ngẫu nhiên 0,34). Vẫn cần điểm reranker (tuần 6) thay vì đặt ngưỡng cứng lên cosine.</a:t>
             </a:r>
           </a:p>
         </p:txBody>
@@ -7712,7 +10163,7 @@
                 </a:solidFill>
                 <a:latin typeface="Calibri"/>
               </a:rPr>
-              <a:t>Recall@30 của RRF cao hơn chỉ-vector [__] điểm. Dưới 2–3 điểm thì loại bỏ truy xuất lai.</a:t>
+              <a:t>Ở k=30, RRF thấp hơn vector 1,4 điểm nhưng cao hơn BM25 6,3 điểm; ở k=10 — giá trị dùng thực tế — RRF cao nhất: 88,3% so với 86,7% (vector), 79,7% (BM25). → Giữ truy xuất lai.</a:t>
             </a:r>
           </a:p>
         </p:txBody>
@@ -7824,7 +10275,7 @@
                 </a:solidFill>
                 <a:latin typeface="Calibri"/>
               </a:rPr>
-              <a:t>Tỉ lệ câu hỏi cần nhiều hơn một phiên bằng chứng: [__%].</a:t>
+              <a:t>Tỉ lệ câu hỏi cần nhiều hơn một phiên bằng chứng: 64,8%. → Ưu tiên thử QueryPlanner ở tuần 5 và đo mức cải thiện.</a:t>
             </a:r>
           </a:p>
         </p:txBody>
@@ -7936,7 +10387,7 @@
                 </a:solidFill>
                 <a:latin typeface="Calibri"/>
               </a:rPr>
-              <a:t>Recall bão hòa tại k ≈ [__].</a:t>
+              <a:t>Recall bão hòa quanh k ≈ 20–30 (vector 95,4% tại k=20; RRF 95,0% tại k=30). → Chọn pool 30 ứng viên cho RRF, lấy 10 vào ngữ cảnh.</a:t>
             </a:r>
           </a:p>
         </p:txBody>
@@ -8048,7 +10499,7 @@
                 </a:solidFill>
                 <a:latin typeface="Calibri"/>
               </a:rPr>
-              <a:t>Loại có Recall@10 thấp nhất: [__].</a:t>
+              <a:t>Loại thấp nhất: multi-session, Recall@10 = 78,6% (RRF) so với 87–95% ở loại khác. → Tuần 5 ưu tiên cải thiện truy xuất đa phiên.</a:t>
             </a:r>
           </a:p>
         </p:txBody>
@@ -8096,6 +10547,562 @@
 </file>
 
 <file path=ppt/slides/slide4.xml><?xml version="1.0" encoding="utf-8"?>
+<p:sld xmlns:a="http://schemas.openxmlformats.org/drawingml/2006/main" xmlns:p="http://schemas.openxmlformats.org/presentationml/2006/main" xmlns:r="http://schemas.openxmlformats.org/officeDocument/2006/relationships">
+  <p:cSld>
+    <p:bg>
+      <p:bgPr>
+        <a:solidFill>
+          <a:srgbClr val="FFFFFF"/>
+        </a:solidFill>
+        <a:effectLst/>
+      </p:bgPr>
+    </p:bg>
+    <p:spTree>
+      <p:nvGrpSpPr>
+        <p:cNvPr id="1" name=""/>
+        <p:cNvGrpSpPr/>
+        <p:nvPr/>
+      </p:nvGrpSpPr>
+      <p:grpSpPr/>
+      <p:sp>
+        <p:nvSpPr>
+          <p:cNvPr id="2" name="TextBox 1"/>
+          <p:cNvSpPr txBox="1"/>
+          <p:nvPr/>
+        </p:nvSpPr>
+        <p:spPr>
+          <a:xfrm>
+            <a:off x="571500" y="508000"/>
+            <a:ext cx="11049000" cy="279400"/>
+          </a:xfrm>
+          <a:prstGeom prst="rect">
+            <a:avLst/>
+          </a:prstGeom>
+          <a:noFill/>
+        </p:spPr>
+        <p:txBody>
+          <a:bodyPr wrap="square" lIns="0" rIns="0" tIns="0" bIns="0" anchor="t">
+            <a:spAutoFit/>
+          </a:bodyPr>
+          <a:lstStyle/>
+          <a:p>
+            <a:r>
+              <a:rPr sz="1200" b="1">
+                <a:solidFill>
+                  <a:srgbClr val="3A36A0"/>
+                </a:solidFill>
+                <a:latin typeface="Calibri"/>
+              </a:rPr>
+              <a:t>PHỤ LỤC 1/2 · SỐ LIỆU THÔ TỪ NOTEBOOK 03</a:t>
+            </a:r>
+          </a:p>
+        </p:txBody>
+      </p:sp>
+      <p:sp>
+        <p:nvSpPr>
+          <p:cNvPr id="3" name="TextBox 2"/>
+          <p:cNvSpPr txBox="1"/>
+          <p:nvPr/>
+        </p:nvSpPr>
+        <p:spPr>
+          <a:xfrm>
+            <a:off x="571500" y="825500"/>
+            <a:ext cx="11049000" cy="635000"/>
+          </a:xfrm>
+          <a:prstGeom prst="rect">
+            <a:avLst/>
+          </a:prstGeom>
+          <a:noFill/>
+        </p:spPr>
+        <p:txBody>
+          <a:bodyPr wrap="square" lIns="0" rIns="0" tIns="0" bIns="0" anchor="t">
+            <a:spAutoFit/>
+          </a:bodyPr>
+          <a:lstStyle/>
+          <a:p>
+            <a:r>
+              <a:rPr sz="3000" b="1">
+                <a:solidFill>
+                  <a:srgbClr val="13123A"/>
+                </a:solidFill>
+                <a:latin typeface="Cambria"/>
+              </a:rPr>
+              <a:t>Nhìn trực tiếp vào dữ liệu, không qua diễn giải</a:t>
+            </a:r>
+          </a:p>
+        </p:txBody>
+      </p:sp>
+      <p:sp>
+        <p:nvSpPr>
+          <p:cNvPr id="4" name="TextBox 3"/>
+          <p:cNvSpPr txBox="1"/>
+          <p:nvPr/>
+        </p:nvSpPr>
+        <p:spPr>
+          <a:xfrm>
+            <a:off x="571500" y="1778000"/>
+            <a:ext cx="5334000" cy="279400"/>
+          </a:xfrm>
+          <a:prstGeom prst="rect">
+            <a:avLst/>
+          </a:prstGeom>
+          <a:noFill/>
+        </p:spPr>
+        <p:txBody>
+          <a:bodyPr wrap="square" lIns="0" rIns="0" tIns="0" bIns="0" anchor="t">
+            <a:spAutoFit/>
+          </a:bodyPr>
+          <a:lstStyle/>
+          <a:p>
+            <a:r>
+              <a:rPr sz="1350" b="1">
+                <a:solidFill>
+                  <a:srgbClr val="13123A"/>
+                </a:solidFill>
+                <a:latin typeface="Calibri"/>
+              </a:rPr>
+              <a:t>Cosine không tách được liên quan khỏi không liên quan</a:t>
+            </a:r>
+          </a:p>
+        </p:txBody>
+      </p:sp>
+      <p:sp>
+        <p:nvSpPr>
+          <p:cNvPr id="5" name="TextBox 4"/>
+          <p:cNvSpPr txBox="1"/>
+          <p:nvPr/>
+        </p:nvSpPr>
+        <p:spPr>
+          <a:xfrm>
+            <a:off x="571500" y="2070100"/>
+            <a:ext cx="5334000" cy="203200"/>
+          </a:xfrm>
+          <a:prstGeom prst="rect">
+            <a:avLst/>
+          </a:prstGeom>
+          <a:noFill/>
+        </p:spPr>
+        <p:txBody>
+          <a:bodyPr wrap="square" lIns="0" rIns="0" tIns="0" bIns="0" anchor="t">
+            <a:spAutoFit/>
+          </a:bodyPr>
+          <a:lstStyle/>
+          <a:p>
+            <a:r>
+              <a:rPr sz="950" b="0">
+                <a:solidFill>
+                  <a:srgbClr val="767676"/>
+                </a:solidFill>
+                <a:latin typeface="Calibri"/>
+              </a:rPr>
+              <a:t>Một ngưỡng cosine đơn lẻ khó tách hoàn toàn hai nhóm</a:t>
+            </a:r>
+          </a:p>
+        </p:txBody>
+      </p:sp>
+      <p:pic>
+        <p:nvPicPr>
+          <p:cNvPr id="6" name="Picture 5" descr="c1_phan_bo_cosine.png"/>
+          <p:cNvPicPr>
+            <a:picLocks noChangeAspect="1"/>
+          </p:cNvPicPr>
+          <p:nvPr/>
+        </p:nvPicPr>
+        <p:blipFill>
+          <a:blip r:embed="rId6"/>
+          <a:stretch>
+            <a:fillRect/>
+          </a:stretch>
+        </p:blipFill>
+        <p:spPr>
+          <a:xfrm>
+            <a:off x="571500" y="2336800"/>
+            <a:ext cx="5334000" cy="2119603"/>
+          </a:xfrm>
+          <a:prstGeom prst="rect">
+            <a:avLst/>
+          </a:prstGeom>
+        </p:spPr>
+      </p:pic>
+      <p:sp>
+        <p:nvSpPr>
+          <p:cNvPr id="7" name="TextBox 6"/>
+          <p:cNvSpPr txBox="1"/>
+          <p:nvPr/>
+        </p:nvSpPr>
+        <p:spPr>
+          <a:xfrm>
+            <a:off x="571500" y="4558003"/>
+            <a:ext cx="5334000" cy="508000"/>
+          </a:xfrm>
+          <a:prstGeom prst="rect">
+            <a:avLst/>
+          </a:prstGeom>
+          <a:noFill/>
+        </p:spPr>
+        <p:txBody>
+          <a:bodyPr wrap="square" lIns="0" rIns="0" tIns="0" bIns="0" anchor="t">
+            <a:spAutoFit/>
+          </a:bodyPr>
+          <a:lstStyle/>
+          <a:p>
+            <a:r>
+              <a:rPr sz="1100" b="0">
+                <a:solidFill>
+                  <a:srgbClr val="4A4E63"/>
+                </a:solidFill>
+                <a:latin typeface="Calibri"/>
+              </a:rPr>
+              <a:t>Chồng lấn cosine 12,1% (TB 0,59 so với 0,34) — vẫn cần điểm reranker ở tuần 6 thay vì đặt ngưỡng cứng lên cosine.</a:t>
+            </a:r>
+          </a:p>
+        </p:txBody>
+      </p:sp>
+      <p:pic>
+        <p:nvPicPr>
+          <p:cNvPr id="8" name="Picture 7" descr="image.png"/>
+          <p:cNvPicPr>
+            <a:picLocks noChangeAspect="1"/>
+          </p:cNvPicPr>
+          <p:nvPr/>
+        </p:nvPicPr>
+        <p:blipFill>
+          <a:blip r:embed="rId4"/>
+          <a:stretch>
+            <a:fillRect/>
+          </a:stretch>
+        </p:blipFill>
+        <p:spPr>
+          <a:xfrm>
+            <a:off x="6286500" y="1778000"/>
+            <a:ext cx="5334000" cy="2756647"/>
+          </a:xfrm>
+          <a:prstGeom prst="rect">
+            <a:avLst/>
+          </a:prstGeom>
+        </p:spPr>
+      </p:pic>
+      <p:sp>
+        <p:nvSpPr>
+          <p:cNvPr id="9" name="TextBox 8"/>
+          <p:cNvSpPr txBox="1"/>
+          <p:nvPr/>
+        </p:nvSpPr>
+        <p:spPr>
+          <a:xfrm>
+            <a:off x="6286500" y="4636247"/>
+            <a:ext cx="5334000" cy="508000"/>
+          </a:xfrm>
+          <a:prstGeom prst="rect">
+            <a:avLst/>
+          </a:prstGeom>
+          <a:noFill/>
+        </p:spPr>
+        <p:txBody>
+          <a:bodyPr wrap="square" lIns="0" rIns="0" tIns="0" bIns="0" anchor="t">
+            <a:spAutoFit/>
+          </a:bodyPr>
+          <a:lstStyle/>
+          <a:p>
+            <a:r>
+              <a:rPr sz="1100" b="0">
+                <a:solidFill>
+                  <a:srgbClr val="4A4E63"/>
+                </a:solidFill>
+                <a:latin typeface="Calibri"/>
+              </a:rPr>
+              <a:t>Ở k=10, RRF đạt 88,3% — cao nhất trong ba đường, đúng giá trị k nhóm định dùng thực tế.</a:t>
+            </a:r>
+          </a:p>
+        </p:txBody>
+      </p:sp>
+      <p:sp>
+        <p:nvSpPr>
+          <p:cNvPr id="10" name="TextBox 9"/>
+          <p:cNvSpPr txBox="1"/>
+          <p:nvPr/>
+        </p:nvSpPr>
+        <p:spPr>
+          <a:xfrm>
+            <a:off x="571500" y="6464300"/>
+            <a:ext cx="11049000" cy="330200"/>
+          </a:xfrm>
+          <a:prstGeom prst="rect">
+            <a:avLst/>
+          </a:prstGeom>
+          <a:noFill/>
+        </p:spPr>
+        <p:txBody>
+          <a:bodyPr wrap="square" lIns="0" rIns="0" tIns="0" bIns="0" anchor="t">
+            <a:spAutoFit/>
+          </a:bodyPr>
+          <a:lstStyle/>
+          <a:p>
+            <a:r>
+              <a:rPr sz="1050" b="0">
+                <a:solidFill>
+                  <a:srgbClr val="6B6F82"/>
+                </a:solidFill>
+                <a:latin typeface="Calibri"/>
+              </a:rPr>
+              <a:t>Ảnh xuất trực tiếp từ notebook longmemretrival.ipynb (149 câu, tập dev). File gốc: Tuan 3/DataExplore/exports/.</a:t>
+            </a:r>
+          </a:p>
+        </p:txBody>
+      </p:sp>
+    </p:spTree>
+  </p:cSld>
+  <p:clrMapOvr>
+    <a:masterClrMapping/>
+  </p:clrMapOvr>
+</p:sld>
+</file>
+
+<file path=ppt/slides/slide5.xml><?xml version="1.0" encoding="utf-8"?>
+<p:sld xmlns:a="http://schemas.openxmlformats.org/drawingml/2006/main" xmlns:p="http://schemas.openxmlformats.org/presentationml/2006/main" xmlns:r="http://schemas.openxmlformats.org/officeDocument/2006/relationships">
+  <p:cSld>
+    <p:bg>
+      <p:bgPr>
+        <a:solidFill>
+          <a:srgbClr val="FFFFFF"/>
+        </a:solidFill>
+        <a:effectLst/>
+      </p:bgPr>
+    </p:bg>
+    <p:spTree>
+      <p:nvGrpSpPr>
+        <p:cNvPr id="1" name=""/>
+        <p:cNvGrpSpPr/>
+        <p:nvPr/>
+      </p:nvGrpSpPr>
+      <p:grpSpPr/>
+      <p:sp>
+        <p:nvSpPr>
+          <p:cNvPr id="2" name="TextBox 1"/>
+          <p:cNvSpPr txBox="1"/>
+          <p:nvPr/>
+        </p:nvSpPr>
+        <p:spPr>
+          <a:xfrm>
+            <a:off x="571500" y="508000"/>
+            <a:ext cx="11049000" cy="279400"/>
+          </a:xfrm>
+          <a:prstGeom prst="rect">
+            <a:avLst/>
+          </a:prstGeom>
+          <a:noFill/>
+        </p:spPr>
+        <p:txBody>
+          <a:bodyPr wrap="square" lIns="0" rIns="0" tIns="0" bIns="0" anchor="t">
+            <a:spAutoFit/>
+          </a:bodyPr>
+          <a:lstStyle/>
+          <a:p>
+            <a:r>
+              <a:rPr sz="1200" b="1">
+                <a:solidFill>
+                  <a:srgbClr val="3A36A0"/>
+                </a:solidFill>
+                <a:latin typeface="Calibri"/>
+              </a:rPr>
+              <a:t>PHỤ LỤC 2/2 · SỐ LIỆU THÔ TỪ NOTEBOOK 01 VÀ 03</a:t>
+            </a:r>
+          </a:p>
+        </p:txBody>
+      </p:sp>
+      <p:sp>
+        <p:nvSpPr>
+          <p:cNvPr id="3" name="TextBox 2"/>
+          <p:cNvSpPr txBox="1"/>
+          <p:nvPr/>
+        </p:nvSpPr>
+        <p:spPr>
+          <a:xfrm>
+            <a:off x="571500" y="825500"/>
+            <a:ext cx="11049000" cy="635000"/>
+          </a:xfrm>
+          <a:prstGeom prst="rect">
+            <a:avLst/>
+          </a:prstGeom>
+          <a:noFill/>
+        </p:spPr>
+        <p:txBody>
+          <a:bodyPr wrap="square" lIns="0" rIns="0" tIns="0" bIns="0" anchor="t">
+            <a:spAutoFit/>
+          </a:bodyPr>
+          <a:lstStyle/>
+          <a:p>
+            <a:r>
+              <a:rPr sz="3000" b="1">
+                <a:solidFill>
+                  <a:srgbClr val="13123A"/>
+                </a:solidFill>
+                <a:latin typeface="Cambria"/>
+              </a:rPr>
+              <a:t>Căn cứ cho hai quyết định thiết kế ở trên</a:t>
+            </a:r>
+          </a:p>
+        </p:txBody>
+      </p:sp>
+      <p:pic>
+        <p:nvPicPr>
+          <p:cNvPr id="4" name="Picture 3" descr="a1_phan_bo_loai.png"/>
+          <p:cNvPicPr>
+            <a:picLocks noChangeAspect="1"/>
+          </p:cNvPicPr>
+          <p:nvPr/>
+        </p:nvPicPr>
+        <p:blipFill>
+          <a:blip r:embed="rId5"/>
+          <a:stretch>
+            <a:fillRect/>
+          </a:stretch>
+        </p:blipFill>
+        <p:spPr>
+          <a:xfrm>
+            <a:off x="571500" y="1778000"/>
+            <a:ext cx="5334000" cy="3069389"/>
+          </a:xfrm>
+          <a:prstGeom prst="rect">
+            <a:avLst/>
+          </a:prstGeom>
+        </p:spPr>
+      </p:pic>
+      <p:sp>
+        <p:nvSpPr>
+          <p:cNvPr id="5" name="TextBox 4"/>
+          <p:cNvSpPr txBox="1"/>
+          <p:nvPr/>
+        </p:nvSpPr>
+        <p:spPr>
+          <a:xfrm>
+            <a:off x="571500" y="4948989"/>
+            <a:ext cx="5334000" cy="508000"/>
+          </a:xfrm>
+          <a:prstGeom prst="rect">
+            <a:avLst/>
+          </a:prstGeom>
+          <a:noFill/>
+        </p:spPr>
+        <p:txBody>
+          <a:bodyPr wrap="square" lIns="0" rIns="0" tIns="0" bIns="0" anchor="t">
+            <a:spAutoFit/>
+          </a:bodyPr>
+          <a:lstStyle/>
+          <a:p>
+            <a:r>
+              <a:rPr sz="1100" b="0">
+                <a:solidFill>
+                  <a:srgbClr val="4A4E63"/>
+                </a:solidFill>
+                <a:latin typeface="Calibri"/>
+              </a:rPr>
+              <a:t>6 loại câu hỏi lệch nhau khá nhiều (6%–27%) — nếu gộp một accuracy chung, loại đông nhất sẽ lấn át; đây là lý do dùng macro-average.</a:t>
+            </a:r>
+          </a:p>
+        </p:txBody>
+      </p:sp>
+      <p:pic>
+        <p:nvPicPr>
+          <p:cNvPr id="6" name="Picture 5" descr="c3_recall_theo_loai.png"/>
+          <p:cNvPicPr>
+            <a:picLocks noChangeAspect="1"/>
+          </p:cNvPicPr>
+          <p:nvPr/>
+        </p:nvPicPr>
+        <p:blipFill>
+          <a:blip r:embed="rId6"/>
+          <a:stretch>
+            <a:fillRect/>
+          </a:stretch>
+        </p:blipFill>
+        <p:spPr>
+          <a:xfrm>
+            <a:off x="6286500" y="1778000"/>
+            <a:ext cx="5334000" cy="3147264"/>
+          </a:xfrm>
+          <a:prstGeom prst="rect">
+            <a:avLst/>
+          </a:prstGeom>
+        </p:spPr>
+      </p:pic>
+      <p:sp>
+        <p:nvSpPr>
+          <p:cNvPr id="7" name="TextBox 6"/>
+          <p:cNvSpPr txBox="1"/>
+          <p:nvPr/>
+        </p:nvSpPr>
+        <p:spPr>
+          <a:xfrm>
+            <a:off x="6286500" y="5026864"/>
+            <a:ext cx="5334000" cy="508000"/>
+          </a:xfrm>
+          <a:prstGeom prst="rect">
+            <a:avLst/>
+          </a:prstGeom>
+          <a:noFill/>
+        </p:spPr>
+        <p:txBody>
+          <a:bodyPr wrap="square" lIns="0" rIns="0" tIns="0" bIns="0" anchor="t">
+            <a:spAutoFit/>
+          </a:bodyPr>
+          <a:lstStyle/>
+          <a:p>
+            <a:r>
+              <a:rPr sz="1100" b="0">
+                <a:solidFill>
+                  <a:srgbClr val="4A4E63"/>
+                </a:solidFill>
+                <a:latin typeface="Calibri"/>
+              </a:rPr>
+              <a:t>Recall@10 theo loại: multi-session thấp nhất (78,6% RRF), các loại còn lại đều trên 87% — ưu tiên cải thiện đúng chỗ yếu nhất.</a:t>
+            </a:r>
+          </a:p>
+        </p:txBody>
+      </p:sp>
+      <p:sp>
+        <p:nvSpPr>
+          <p:cNvPr id="8" name="TextBox 7"/>
+          <p:cNvSpPr txBox="1"/>
+          <p:nvPr/>
+        </p:nvSpPr>
+        <p:spPr>
+          <a:xfrm>
+            <a:off x="571500" y="6464300"/>
+            <a:ext cx="11049000" cy="330200"/>
+          </a:xfrm>
+          <a:prstGeom prst="rect">
+            <a:avLst/>
+          </a:prstGeom>
+          <a:noFill/>
+        </p:spPr>
+        <p:txBody>
+          <a:bodyPr wrap="square" lIns="0" rIns="0" tIns="0" bIns="0" anchor="t">
+            <a:spAutoFit/>
+          </a:bodyPr>
+          <a:lstStyle/>
+          <a:p>
+            <a:r>
+              <a:rPr sz="1050" b="0">
+                <a:solidFill>
+                  <a:srgbClr val="6B6F82"/>
+                </a:solidFill>
+                <a:latin typeface="Calibri"/>
+              </a:rPr>
+              <a:t>Ảnh xuất trực tiếp từ notebook explore-longmemeval.ipynb và longmemretrival.ipynb. File gốc: Tuan 3/DataExplore/exports/.</a:t>
+            </a:r>
+          </a:p>
+        </p:txBody>
+      </p:sp>
+    </p:spTree>
+  </p:cSld>
+  <p:clrMapOvr>
+    <a:masterClrMapping/>
+  </p:clrMapOvr>
+</p:sld>
+</file>
+
+<file path=ppt/slides/slide6.xml><?xml version="1.0" encoding="utf-8"?>
 <p:sld xmlns:a="http://schemas.openxmlformats.org/drawingml/2006/main" xmlns:r="http://schemas.openxmlformats.org/officeDocument/2006/relationships" xmlns:p="http://schemas.openxmlformats.org/presentationml/2006/main">
   <p:cSld name="Slide 3">
     <p:bg>
@@ -9343,7 +12350,7 @@
 </p:sld>
 </file>
 
-<file path=ppt/slides/slide5.xml><?xml version="1.0" encoding="utf-8"?>
+<file path=ppt/slides/slide7.xml><?xml version="1.0" encoding="utf-8"?>
 <p:sld xmlns:a="http://schemas.openxmlformats.org/drawingml/2006/main" xmlns:r="http://schemas.openxmlformats.org/officeDocument/2006/relationships" xmlns:p="http://schemas.openxmlformats.org/presentationml/2006/main">
   <p:cSld name="Slide 4">
     <p:bg>
@@ -9585,7 +12592,7 @@
                 <a:ea typeface="Cambria" pitchFamily="34" charset="-122"/>
                 <a:cs typeface="Cambria" pitchFamily="34" charset="-120"/>
               </a:rPr>
-              <a:t>Độ chính xác tuyệt đối</a:t>
+              <a:t>Sai ở đây khó phát hiện nhất</a:t>
             </a:r>
             <a:endParaRPr lang="en-US" sz="1300" dirty="0"/>
           </a:p>
@@ -9624,7 +12631,7 @@
                 <a:ea typeface="Calibri" pitchFamily="34" charset="-122"/>
                 <a:cs typeface="Calibri" pitchFamily="34" charset="-120"/>
               </a:rPr>
-              <a:t>Chroma trả sai một ứng viên vẫn có thể được reranker loại bỏ. Kho ký ức ghi sai một bản active thì mọi bước sau đều sai mà không có cách phát hiện.</a:t>
+              <a:t>Chroma trả sai một ứng viên, reranker còn có cơ hội loại bỏ. Kho ký ức ghi sai một bản active thì lỗi lan sang toàn bộ truy xuất, và không có tầng nào kiểm tra lại để bắt được ngay.</a:t>
             </a:r>
             <a:endParaRPr lang="en-US" sz="1200" dirty="0"/>
           </a:p>
@@ -10037,7 +13044,7 @@
 </p:sld>
 </file>
 
-<file path=ppt/slides/slide6.xml><?xml version="1.0" encoding="utf-8"?>
+<file path=ppt/slides/slide8.xml><?xml version="1.0" encoding="utf-8"?>
 <p:sld xmlns:a="http://schemas.openxmlformats.org/drawingml/2006/main" xmlns:r="http://schemas.openxmlformats.org/officeDocument/2006/relationships" xmlns:p="http://schemas.openxmlformats.org/presentationml/2006/main">
   <p:cSld name="Slide 5">
     <p:bg>
@@ -11082,7 +14089,7 @@
 </p:sld>
 </file>
 
-<file path=ppt/slides/slide7.xml><?xml version="1.0" encoding="utf-8"?>
+<file path=ppt/slides/slide9.xml><?xml version="1.0" encoding="utf-8"?>
 <p:sld xmlns:a="http://schemas.openxmlformats.org/drawingml/2006/main" xmlns:r="http://schemas.openxmlformats.org/officeDocument/2006/relationships" xmlns:p="http://schemas.openxmlformats.org/presentationml/2006/main">
   <p:cSld name="Slide 6">
     <p:bg>
@@ -11609,2454 +14616,6 @@
               <a:t>Tuần 3 chỉ có thao tác ADD: người dùng nói N5 rồi N4 sẽ sinh hai bản active cùng slot, đúng thiết kế vì MemoryUpdater chưa tồn tại. Bật ràng buộc sớm sẽ làm gián đoạn pipeline. Từ tuần 4, mọi lỗi logic cập nhật được phát hiện ngay thay vì âm thầm làm sai số liệu. Đã có sẵn một test chứng minh ràng buộc bắt đúng lỗi.</a:t>
             </a:r>
             <a:endParaRPr lang="en-US" sz="1250" dirty="0"/>
-          </a:p>
-        </p:txBody>
-      </p:sp>
-    </p:spTree>
-  </p:cSld>
-  <p:clrMapOvr>
-    <a:masterClrMapping/>
-  </p:clrMapOvr>
-</p:sld>
-</file>
-
-<file path=ppt/slides/slide8.xml><?xml version="1.0" encoding="utf-8"?>
-<p:sld xmlns:a="http://schemas.openxmlformats.org/drawingml/2006/main" xmlns:r="http://schemas.openxmlformats.org/officeDocument/2006/relationships" xmlns:p="http://schemas.openxmlformats.org/presentationml/2006/main">
-  <p:cSld name="Slide 7">
-    <p:bg>
-      <p:bgPr>
-        <a:solidFill>
-          <a:srgbClr val="FFFFFF"/>
-        </a:solidFill>
-      </p:bgPr>
-    </p:bg>
-    <p:spTree>
-      <p:nvGrpSpPr>
-        <p:cNvPr id="1" name=""/>
-        <p:cNvGrpSpPr/>
-        <p:nvPr/>
-      </p:nvGrpSpPr>
-      <p:grpSpPr>
-        <a:xfrm>
-          <a:off x="0" y="0"/>
-          <a:ext cx="0" cy="0"/>
-          <a:chOff x="0" y="0"/>
-          <a:chExt cx="0" cy="0"/>
-        </a:xfrm>
-      </p:grpSpPr>
-      <p:sp>
-        <p:nvSpPr>
-          <p:cNvPr id="2" name="Text 0"/>
-          <p:cNvSpPr txBox="1"/>
-          <p:nvPr/>
-        </p:nvSpPr>
-        <p:spPr>
-          <a:xfrm>
-            <a:off x="566928" y="502920"/>
-            <a:ext cx="8229600" cy="283464"/>
-          </a:xfrm>
-          <a:prstGeom prst="rect">
-            <a:avLst/>
-          </a:prstGeom>
-          <a:noFill/>
-          <a:ln/>
-        </p:spPr>
-        <p:txBody>
-          <a:bodyPr wrap="square" lIns="0" tIns="0" rIns="0" bIns="0" rtlCol="0" anchor="t"/>
-          <a:lstStyle/>
-          <a:p>
-            <a:pPr indent="0" marL="0">
-              <a:buNone/>
-            </a:pPr>
-            <a:r>
-              <a:rPr lang="en-US" sz="1550" b="1" dirty="0">
-                <a:solidFill>
-                  <a:srgbClr val="3A36A0"/>
-                </a:solidFill>
-                <a:latin typeface="Calibri" pitchFamily="34" charset="0"/>
-                <a:ea typeface="Calibri" pitchFamily="34" charset="-122"/>
-                <a:cs typeface="Calibri" pitchFamily="34" charset="-120"/>
-              </a:rPr>
-              <a:t>KẾT QUẢ KIỂM THỬ</a:t>
-            </a:r>
-            <a:endParaRPr lang="en-US" sz="1200" dirty="0"/>
-          </a:p>
-        </p:txBody>
-      </p:sp>
-      <p:sp>
-        <p:nvSpPr>
-          <p:cNvPr id="3" name="Text 1"/>
-          <p:cNvSpPr txBox="1"/>
-          <p:nvPr/>
-        </p:nvSpPr>
-        <p:spPr>
-          <a:xfrm>
-            <a:off x="566928" y="822960"/>
-            <a:ext cx="11045952" cy="640080"/>
-          </a:xfrm>
-          <a:prstGeom prst="rect">
-            <a:avLst/>
-          </a:prstGeom>
-          <a:noFill/>
-          <a:ln/>
-        </p:spPr>
-        <p:txBody>
-          <a:bodyPr wrap="square" lIns="0" tIns="0" rIns="0" bIns="0" rtlCol="0" anchor="t"/>
-          <a:lstStyle/>
-          <a:p>
-            <a:pPr indent="0" marL="0">
-              <a:buNone/>
-            </a:pPr>
-            <a:r>
-              <a:rPr lang="en-US" sz="3000" b="1" dirty="0">
-                <a:solidFill>
-                  <a:srgbClr val="13123A"/>
-                </a:solidFill>
-                <a:latin typeface="Cambria" pitchFamily="34" charset="0"/>
-                <a:ea typeface="Cambria" pitchFamily="34" charset="-122"/>
-                <a:cs typeface="Cambria" pitchFamily="34" charset="-120"/>
-              </a:rPr>
-              <a:t>Kết quả kiểm thử: 16/16 test đạt</a:t>
-            </a:r>
-            <a:endParaRPr lang="en-US" sz="3000" dirty="0"/>
-          </a:p>
-        </p:txBody>
-      </p:sp>
-      <p:sp>
-        <p:nvSpPr>
-          <p:cNvPr id="4" name="Text 2"/>
-          <p:cNvSpPr txBox="1"/>
-          <p:nvPr/>
-        </p:nvSpPr>
-        <p:spPr>
-          <a:xfrm>
-            <a:off x="566928" y="6464808"/>
-            <a:ext cx="11045952" cy="329184"/>
-          </a:xfrm>
-          <a:prstGeom prst="rect">
-            <a:avLst/>
-          </a:prstGeom>
-          <a:noFill/>
-          <a:ln/>
-        </p:spPr>
-        <p:txBody>
-          <a:bodyPr wrap="square" lIns="0" tIns="0" rIns="0" bIns="0" rtlCol="0" anchor="t"/>
-          <a:lstStyle/>
-          <a:p>
-            <a:pPr indent="0" marL="0">
-              <a:buNone/>
-            </a:pPr>
-            <a:r>
-              <a:rPr lang="en-US" sz="1350" dirty="0">
-                <a:solidFill>
-                  <a:srgbClr val="6B6F82"/>
-                </a:solidFill>
-                <a:latin typeface="Calibri" pitchFamily="34" charset="0"/>
-                <a:ea typeface="Calibri" pitchFamily="34" charset="-122"/>
-                <a:cs typeface="Calibri" pitchFamily="34" charset="-120"/>
-              </a:rPr>
-              <a:t>Số liệu từ test_ledger.py: 16 test, dưới 1 giây, không gọi mạng. Test thất bại nghĩa là kiến trúc bị vi phạm.</a:t>
-            </a:r>
-            <a:endParaRPr lang="en-US" sz="1050" dirty="0"/>
-          </a:p>
-        </p:txBody>
-      </p:sp>
-      <p:sp>
-        <p:nvSpPr>
-          <p:cNvPr id="6" name="Shape 3"/>
-          <p:cNvSpPr/>
-          <p:nvPr/>
-        </p:nvSpPr>
-        <p:spPr>
-          <a:xfrm>
-            <a:off x="566928" y="1691640"/>
-            <a:ext cx="3291840" cy="4480560"/>
-          </a:xfrm>
-          <a:prstGeom prst="rect">
-            <a:avLst/>
-          </a:prstGeom>
-          <a:solidFill>
-            <a:srgbClr val="13123A"/>
-          </a:solidFill>
-          <a:ln w="12700">
-            <a:solidFill>
-              <a:srgbClr val="13123A"/>
-            </a:solidFill>
-            <a:prstDash val="solid"/>
-          </a:ln>
-        </p:spPr>
-        <p:txBody>
-          <a:bodyPr/>
-          <a:p/>
-        </p:txBody>
-      </p:sp>
-      <p:sp>
-        <p:nvSpPr>
-          <p:cNvPr id="7" name="Text 4"/>
-          <p:cNvSpPr txBox="1"/>
-          <p:nvPr/>
-        </p:nvSpPr>
-        <p:spPr>
-          <a:xfrm>
-            <a:off x="566928" y="2103120"/>
-            <a:ext cx="3291840" cy="1280160"/>
-          </a:xfrm>
-          <a:prstGeom prst="rect">
-            <a:avLst/>
-          </a:prstGeom>
-          <a:noFill/>
-          <a:ln/>
-        </p:spPr>
-        <p:txBody>
-          <a:bodyPr wrap="square" lIns="0" tIns="0" rIns="0" bIns="0" rtlCol="0" anchor="t"/>
-          <a:lstStyle/>
-          <a:p>
-            <a:pPr algn="ctr" indent="0" marL="0">
-              <a:buNone/>
-            </a:pPr>
-            <a:r>
-              <a:rPr lang="en-US" sz="8100" b="1" dirty="0">
-                <a:solidFill>
-                  <a:srgbClr val="FFFFFF"/>
-                </a:solidFill>
-                <a:latin typeface="Cambria" pitchFamily="34" charset="0"/>
-                <a:ea typeface="Cambria" pitchFamily="34" charset="-122"/>
-                <a:cs typeface="Cambria" pitchFamily="34" charset="-120"/>
-              </a:rPr>
-              <a:t>16</a:t>
-            </a:r>
-            <a:endParaRPr lang="en-US" sz="8800" dirty="0"/>
-          </a:p>
-        </p:txBody>
-      </p:sp>
-      <p:sp>
-        <p:nvSpPr>
-          <p:cNvPr id="8" name="Text 5"/>
-          <p:cNvSpPr txBox="1"/>
-          <p:nvPr/>
-        </p:nvSpPr>
-        <p:spPr>
-          <a:xfrm>
-            <a:off x="566928" y="3566160"/>
-            <a:ext cx="3291840" cy="365760"/>
-          </a:xfrm>
-          <a:prstGeom prst="rect">
-            <a:avLst/>
-          </a:prstGeom>
-          <a:noFill/>
-          <a:ln/>
-        </p:spPr>
-        <p:txBody>
-          <a:bodyPr wrap="square" lIns="0" tIns="0" rIns="0" bIns="0" rtlCol="0" anchor="t"/>
-          <a:lstStyle/>
-          <a:p>
-            <a:pPr algn="ctr" indent="0" marL="0">
-              <a:buNone/>
-            </a:pPr>
-            <a:r>
-              <a:rPr lang="en-US" sz="1700" b="1" dirty="0">
-                <a:solidFill>
-                  <a:srgbClr val="E9970B"/>
-                </a:solidFill>
-                <a:latin typeface="Calibri" pitchFamily="34" charset="0"/>
-                <a:ea typeface="Calibri" pitchFamily="34" charset="-122"/>
-                <a:cs typeface="Calibri" pitchFamily="34" charset="-120"/>
-              </a:rPr>
-              <a:t>test đạt toàn bộ</a:t>
-            </a:r>
-            <a:endParaRPr lang="en-US" sz="1600" dirty="0"/>
-          </a:p>
-        </p:txBody>
-      </p:sp>
-      <p:sp>
-        <p:nvSpPr>
-          <p:cNvPr id="9" name="Text 6"/>
-          <p:cNvSpPr txBox="1"/>
-          <p:nvPr/>
-        </p:nvSpPr>
-        <p:spPr>
-          <a:xfrm>
-            <a:off x="566928" y="4023360"/>
-            <a:ext cx="3291840" cy="320040"/>
-          </a:xfrm>
-          <a:prstGeom prst="rect">
-            <a:avLst/>
-          </a:prstGeom>
-          <a:noFill/>
-          <a:ln/>
-        </p:spPr>
-        <p:txBody>
-          <a:bodyPr wrap="square" lIns="0" tIns="0" rIns="0" bIns="0" rtlCol="0" anchor="t"/>
-          <a:lstStyle/>
-          <a:p>
-            <a:pPr algn="ctr" indent="0" marL="0">
-              <a:buNone/>
-            </a:pPr>
-            <a:r>
-              <a:rPr lang="en-US" sz="1700" dirty="0">
-                <a:solidFill>
-                  <a:srgbClr val="C7C9E6"/>
-                </a:solidFill>
-                <a:latin typeface="Calibri" pitchFamily="34" charset="0"/>
-                <a:ea typeface="Calibri" pitchFamily="34" charset="-122"/>
-                <a:cs typeface="Calibri" pitchFamily="34" charset="-120"/>
-              </a:rPr>
-              <a:t>dưới 1 giây · không gọi mạng</a:t>
-            </a:r>
-            <a:endParaRPr lang="en-US" sz="1300" dirty="0"/>
-          </a:p>
-        </p:txBody>
-      </p:sp>
-      <p:sp>
-        <p:nvSpPr>
-          <p:cNvPr id="10" name="Text 7"/>
-          <p:cNvSpPr txBox="1"/>
-          <p:nvPr/>
-        </p:nvSpPr>
-        <p:spPr>
-          <a:xfrm>
-            <a:off x="822960" y="5029200"/>
-            <a:ext cx="2779776" cy="822960"/>
-          </a:xfrm>
-          <a:prstGeom prst="rect">
-            <a:avLst/>
-          </a:prstGeom>
-          <a:noFill/>
-          <a:ln/>
-        </p:spPr>
-        <p:txBody>
-          <a:bodyPr wrap="square" lIns="0" tIns="0" rIns="0" bIns="0" rtlCol="0" anchor="t"/>
-          <a:lstStyle/>
-          <a:p>
-            <a:pPr algn="ctr" indent="0" marL="0">
-              <a:buNone/>
-            </a:pPr>
-            <a:r>
-              <a:rPr lang="en-US" sz="1550" dirty="0">
-                <a:solidFill>
-                  <a:srgbClr val="EFEFFA"/>
-                </a:solidFill>
-                <a:latin typeface="Calibri" pitchFamily="34" charset="0"/>
-                <a:ea typeface="Calibri" pitchFamily="34" charset="-122"/>
-                <a:cs typeface="Calibri" pitchFamily="34" charset="-120"/>
-              </a:rPr>
-              <a:t>Mỗi test kiểm chứng một bất biến đã cam kết trong tài liệu kiến trúc</a:t>
-            </a:r>
-            <a:endParaRPr lang="en-US" sz="1200" dirty="0"/>
-          </a:p>
-        </p:txBody>
-      </p:sp>
-      <p:sp>
-        <p:nvSpPr>
-          <p:cNvPr id="11" name="Shape 8"/>
-          <p:cNvSpPr/>
-          <p:nvPr/>
-        </p:nvSpPr>
-        <p:spPr>
-          <a:xfrm>
-            <a:off x="4114800" y="1691640"/>
-            <a:ext cx="7498080" cy="667512"/>
-          </a:xfrm>
-          <a:prstGeom prst="rect">
-            <a:avLst/>
-          </a:prstGeom>
-          <a:solidFill>
-            <a:srgbClr val="ECEBF7"/>
-          </a:solidFill>
-          <a:ln w="12700">
-            <a:solidFill>
-              <a:srgbClr val="ECEBF7"/>
-            </a:solidFill>
-            <a:prstDash val="solid"/>
-          </a:ln>
-        </p:spPr>
-        <p:txBody>
-          <a:bodyPr/>
-          <a:p/>
-        </p:txBody>
-      </p:sp>
-      <p:sp>
-        <p:nvSpPr>
-          <p:cNvPr id="12" name="Text 9"/>
-          <p:cNvSpPr txBox="1"/>
-          <p:nvPr/>
-        </p:nvSpPr>
-        <p:spPr>
-          <a:xfrm>
-            <a:off x="4297680" y="1691640"/>
-            <a:ext cx="1600200" cy="667512"/>
-          </a:xfrm>
-          <a:prstGeom prst="rect">
-            <a:avLst/>
-          </a:prstGeom>
-          <a:noFill/>
-          <a:ln/>
-        </p:spPr>
-        <p:txBody>
-          <a:bodyPr wrap="square" lIns="0" tIns="0" rIns="0" bIns="0" rtlCol="0" anchor="ctr"/>
-          <a:lstStyle/>
-          <a:p>
-            <a:pPr indent="0" marL="0">
-              <a:buNone/>
-            </a:pPr>
-            <a:r>
-              <a:rPr lang="en-US" sz="1600" b="1" dirty="0">
-                <a:solidFill>
-                  <a:srgbClr val="3A36A0"/>
-                </a:solidFill>
-                <a:latin typeface="Cambria" pitchFamily="34" charset="0"/>
-                <a:ea typeface="Cambria" pitchFamily="34" charset="-122"/>
-                <a:cs typeface="Cambria" pitchFamily="34" charset="-120"/>
-              </a:rPr>
-              <a:t>seq</a:t>
-            </a:r>
-            <a:endParaRPr lang="en-US" sz="1250" dirty="0"/>
-          </a:p>
-        </p:txBody>
-      </p:sp>
-      <p:sp>
-        <p:nvSpPr>
-          <p:cNvPr id="13" name="Text 10"/>
-          <p:cNvSpPr txBox="1"/>
-          <p:nvPr/>
-        </p:nvSpPr>
-        <p:spPr>
-          <a:xfrm>
-            <a:off x="5943600" y="1691640"/>
-            <a:ext cx="5532120" cy="667512"/>
-          </a:xfrm>
-          <a:prstGeom prst="rect">
-            <a:avLst/>
-          </a:prstGeom>
-          <a:noFill/>
-          <a:ln/>
-        </p:spPr>
-        <p:txBody>
-          <a:bodyPr wrap="square" lIns="0" tIns="0" rIns="0" bIns="0" rtlCol="0" anchor="ctr"/>
-          <a:lstStyle/>
-          <a:p>
-            <a:pPr indent="0" marL="0">
-              <a:buNone/>
-            </a:pPr>
-            <a:r>
-              <a:rPr lang="en-US" sz="1550" dirty="0">
-                <a:solidFill>
-                  <a:srgbClr val="4A4E63"/>
-                </a:solidFill>
-                <a:latin typeface="Calibri" pitchFamily="34" charset="0"/>
-                <a:ea typeface="Calibri" pitchFamily="34" charset="-122"/>
-                <a:cs typeface="Calibri" pitchFamily="34" charset="-120"/>
-              </a:rPr>
-              <a:t>tăng đơn điệu, không trùng lặp</a:t>
-            </a:r>
-            <a:endParaRPr lang="en-US" sz="1200" dirty="0"/>
-          </a:p>
-        </p:txBody>
-      </p:sp>
-      <p:sp>
-        <p:nvSpPr>
-          <p:cNvPr id="14" name="Shape 11"/>
-          <p:cNvSpPr/>
-          <p:nvPr/>
-        </p:nvSpPr>
-        <p:spPr>
-          <a:xfrm>
-            <a:off x="4114800" y="2450592"/>
-            <a:ext cx="7498080" cy="667512"/>
-          </a:xfrm>
-          <a:prstGeom prst="rect">
-            <a:avLst/>
-          </a:prstGeom>
-          <a:solidFill>
-            <a:srgbClr val="F7F7FB"/>
-          </a:solidFill>
-          <a:ln w="12700">
-            <a:solidFill>
-              <a:srgbClr val="F7F7FB"/>
-            </a:solidFill>
-            <a:prstDash val="solid"/>
-          </a:ln>
-        </p:spPr>
-        <p:txBody>
-          <a:bodyPr/>
-          <a:p/>
-        </p:txBody>
-      </p:sp>
-      <p:sp>
-        <p:nvSpPr>
-          <p:cNvPr id="15" name="Text 12"/>
-          <p:cNvSpPr txBox="1"/>
-          <p:nvPr/>
-        </p:nvSpPr>
-        <p:spPr>
-          <a:xfrm>
-            <a:off x="4297680" y="2450592"/>
-            <a:ext cx="1600200" cy="667512"/>
-          </a:xfrm>
-          <a:prstGeom prst="rect">
-            <a:avLst/>
-          </a:prstGeom>
-          <a:noFill/>
-          <a:ln/>
-        </p:spPr>
-        <p:txBody>
-          <a:bodyPr wrap="square" lIns="0" tIns="0" rIns="0" bIns="0" rtlCol="0" anchor="ctr"/>
-          <a:lstStyle/>
-          <a:p>
-            <a:pPr indent="0" marL="0">
-              <a:buNone/>
-            </a:pPr>
-            <a:r>
-              <a:rPr lang="en-US" sz="1600" b="1" dirty="0">
-                <a:solidFill>
-                  <a:srgbClr val="3A36A0"/>
-                </a:solidFill>
-                <a:latin typeface="Cambria" pitchFamily="34" charset="0"/>
-                <a:ea typeface="Cambria" pitchFamily="34" charset="-122"/>
-                <a:cs typeface="Cambria" pitchFamily="34" charset="-120"/>
-              </a:rPr>
-              <a:t>pending</a:t>
-            </a:r>
-            <a:endParaRPr lang="en-US" sz="1250" dirty="0"/>
-          </a:p>
-        </p:txBody>
-      </p:sp>
-      <p:sp>
-        <p:nvSpPr>
-          <p:cNvPr id="16" name="Text 13"/>
-          <p:cNvSpPr txBox="1"/>
-          <p:nvPr/>
-        </p:nvSpPr>
-        <p:spPr>
-          <a:xfrm>
-            <a:off x="5943600" y="2450592"/>
-            <a:ext cx="5532120" cy="667512"/>
-          </a:xfrm>
-          <a:prstGeom prst="rect">
-            <a:avLst/>
-          </a:prstGeom>
-          <a:noFill/>
-          <a:ln/>
-        </p:spPr>
-        <p:txBody>
-          <a:bodyPr wrap="square" lIns="0" tIns="0" rIns="0" bIns="0" rtlCol="0" anchor="ctr"/>
-          <a:lstStyle/>
-          <a:p>
-            <a:pPr indent="0" marL="0">
-              <a:buNone/>
-            </a:pPr>
-            <a:r>
-              <a:rPr lang="en-US" sz="1550" dirty="0">
-                <a:solidFill>
-                  <a:srgbClr val="4A4E63"/>
-                </a:solidFill>
-                <a:latin typeface="Calibri" pitchFamily="34" charset="0"/>
-                <a:ea typeface="Calibri" pitchFamily="34" charset="-122"/>
-                <a:cs typeface="Calibri" pitchFamily="34" charset="-120"/>
-              </a:rPr>
-              <a:t>fact từ lượt trợ lý không vào chỉ mục; chỉ hiển thị sau khi người dùng xác nhận</a:t>
-            </a:r>
-            <a:endParaRPr lang="en-US" sz="1200" dirty="0"/>
-          </a:p>
-        </p:txBody>
-      </p:sp>
-      <p:sp>
-        <p:nvSpPr>
-          <p:cNvPr id="17" name="Shape 14"/>
-          <p:cNvSpPr/>
-          <p:nvPr/>
-        </p:nvSpPr>
-        <p:spPr>
-          <a:xfrm>
-            <a:off x="4114800" y="3209544"/>
-            <a:ext cx="7498080" cy="667512"/>
-          </a:xfrm>
-          <a:prstGeom prst="rect">
-            <a:avLst/>
-          </a:prstGeom>
-          <a:solidFill>
-            <a:srgbClr val="ECEBF7"/>
-          </a:solidFill>
-          <a:ln w="12700">
-            <a:solidFill>
-              <a:srgbClr val="ECEBF7"/>
-            </a:solidFill>
-            <a:prstDash val="solid"/>
-          </a:ln>
-        </p:spPr>
-        <p:txBody>
-          <a:bodyPr/>
-          <a:p/>
-        </p:txBody>
-      </p:sp>
-      <p:sp>
-        <p:nvSpPr>
-          <p:cNvPr id="18" name="Text 15"/>
-          <p:cNvSpPr txBox="1"/>
-          <p:nvPr/>
-        </p:nvSpPr>
-        <p:spPr>
-          <a:xfrm>
-            <a:off x="4297680" y="3209544"/>
-            <a:ext cx="1600200" cy="667512"/>
-          </a:xfrm>
-          <a:prstGeom prst="rect">
-            <a:avLst/>
-          </a:prstGeom>
-          <a:noFill/>
-          <a:ln/>
-        </p:spPr>
-        <p:txBody>
-          <a:bodyPr wrap="square" lIns="0" tIns="0" rIns="0" bIns="0" rtlCol="0" anchor="ctr"/>
-          <a:lstStyle/>
-          <a:p>
-            <a:pPr indent="0" marL="0">
-              <a:buNone/>
-            </a:pPr>
-            <a:r>
-              <a:rPr lang="en-US" sz="1600" b="1" dirty="0">
-                <a:solidFill>
-                  <a:srgbClr val="3A36A0"/>
-                </a:solidFill>
-                <a:latin typeface="Cambria" pitchFamily="34" charset="0"/>
-                <a:ea typeface="Cambria" pitchFamily="34" charset="-122"/>
-                <a:cs typeface="Cambria" pitchFamily="34" charset="-120"/>
-              </a:rPr>
-              <a:t>max(seq)</a:t>
-            </a:r>
-            <a:endParaRPr lang="en-US" sz="1250" dirty="0"/>
-          </a:p>
-        </p:txBody>
-      </p:sp>
-      <p:sp>
-        <p:nvSpPr>
-          <p:cNvPr id="19" name="Text 16"/>
-          <p:cNvSpPr txBox="1"/>
-          <p:nvPr/>
-        </p:nvSpPr>
-        <p:spPr>
-          <a:xfrm>
-            <a:off x="5943600" y="3209544"/>
-            <a:ext cx="5532120" cy="667512"/>
-          </a:xfrm>
-          <a:prstGeom prst="rect">
-            <a:avLst/>
-          </a:prstGeom>
-          <a:noFill/>
-          <a:ln/>
-        </p:spPr>
-        <p:txBody>
-          <a:bodyPr wrap="square" lIns="0" tIns="0" rIns="0" bIns="0" rtlCol="0" anchor="ctr"/>
-          <a:lstStyle/>
-          <a:p>
-            <a:pPr indent="0" marL="0">
-              <a:buNone/>
-            </a:pPr>
-            <a:r>
-              <a:rPr lang="en-US" sz="1550" dirty="0">
-                <a:solidFill>
-                  <a:srgbClr val="4A4E63"/>
-                </a:solidFill>
-                <a:latin typeface="Calibri" pitchFamily="34" charset="0"/>
-                <a:ea typeface="Calibri" pitchFamily="34" charset="-122"/>
-                <a:cs typeface="Calibri" pitchFamily="34" charset="-120"/>
-              </a:rPr>
-              <a:t>mỗi slot chỉ trả một bản, loại bản deleted</a:t>
-            </a:r>
-            <a:endParaRPr lang="en-US" sz="1200" dirty="0"/>
-          </a:p>
-        </p:txBody>
-      </p:sp>
-      <p:sp>
-        <p:nvSpPr>
-          <p:cNvPr id="20" name="Shape 17"/>
-          <p:cNvSpPr/>
-          <p:nvPr/>
-        </p:nvSpPr>
-        <p:spPr>
-          <a:xfrm>
-            <a:off x="4114800" y="3968496"/>
-            <a:ext cx="7498080" cy="667512"/>
-          </a:xfrm>
-          <a:prstGeom prst="rect">
-            <a:avLst/>
-          </a:prstGeom>
-          <a:solidFill>
-            <a:srgbClr val="F7F7FB"/>
-          </a:solidFill>
-          <a:ln w="12700">
-            <a:solidFill>
-              <a:srgbClr val="F7F7FB"/>
-            </a:solidFill>
-            <a:prstDash val="solid"/>
-          </a:ln>
-        </p:spPr>
-        <p:txBody>
-          <a:bodyPr/>
-          <a:p/>
-        </p:txBody>
-      </p:sp>
-      <p:sp>
-        <p:nvSpPr>
-          <p:cNvPr id="21" name="Text 18"/>
-          <p:cNvSpPr txBox="1"/>
-          <p:nvPr/>
-        </p:nvSpPr>
-        <p:spPr>
-          <a:xfrm>
-            <a:off x="4297680" y="3968496"/>
-            <a:ext cx="1600200" cy="667512"/>
-          </a:xfrm>
-          <a:prstGeom prst="rect">
-            <a:avLst/>
-          </a:prstGeom>
-          <a:noFill/>
-          <a:ln/>
-        </p:spPr>
-        <p:txBody>
-          <a:bodyPr wrap="square" lIns="0" tIns="0" rIns="0" bIns="0" rtlCol="0" anchor="ctr"/>
-          <a:lstStyle/>
-          <a:p>
-            <a:pPr indent="0" marL="0">
-              <a:buNone/>
-            </a:pPr>
-            <a:r>
-              <a:rPr lang="en-US" sz="1600" b="1" dirty="0">
-                <a:solidFill>
-                  <a:srgbClr val="3A36A0"/>
-                </a:solidFill>
-                <a:latin typeface="Cambria" pitchFamily="34" charset="0"/>
-                <a:ea typeface="Cambria" pitchFamily="34" charset="-122"/>
-                <a:cs typeface="Cambria" pitchFamily="34" charset="-120"/>
-              </a:rPr>
-              <a:t>Khóa slot</a:t>
-            </a:r>
-            <a:endParaRPr lang="en-US" sz="1250" dirty="0"/>
-          </a:p>
-        </p:txBody>
-      </p:sp>
-      <p:sp>
-        <p:nvSpPr>
-          <p:cNvPr id="22" name="Text 19"/>
-          <p:cNvSpPr txBox="1"/>
-          <p:nvPr/>
-        </p:nvSpPr>
-        <p:spPr>
-          <a:xfrm>
-            <a:off x="5943600" y="3968496"/>
-            <a:ext cx="5532120" cy="667512"/>
-          </a:xfrm>
-          <a:prstGeom prst="rect">
-            <a:avLst/>
-          </a:prstGeom>
-          <a:noFill/>
-          <a:ln/>
-        </p:spPr>
-        <p:txBody>
-          <a:bodyPr wrap="square" lIns="0" tIns="0" rIns="0" bIns="0" rtlCol="0" anchor="ctr"/>
-          <a:lstStyle/>
-          <a:p>
-            <a:pPr indent="0" marL="0">
-              <a:buNone/>
-            </a:pPr>
-            <a:r>
-              <a:rPr lang="en-US" sz="1550" dirty="0">
-                <a:solidFill>
-                  <a:srgbClr val="4A4E63"/>
-                </a:solidFill>
-                <a:latin typeface="Calibri" pitchFamily="34" charset="0"/>
-                <a:ea typeface="Calibri" pitchFamily="34" charset="-122"/>
-                <a:cs typeface="Calibri" pitchFamily="34" charset="-120"/>
-              </a:rPr>
-              <a:t>trình_độ_tiếng_nhật → attribute_not_ascii; 2nd_language, Japanese Level → attribute_bad_format</a:t>
-            </a:r>
-            <a:endParaRPr lang="en-US" sz="1200" dirty="0"/>
-          </a:p>
-        </p:txBody>
-      </p:sp>
-      <p:sp>
-        <p:nvSpPr>
-          <p:cNvPr id="23" name="Shape 20"/>
-          <p:cNvSpPr/>
-          <p:nvPr/>
-        </p:nvSpPr>
-        <p:spPr>
-          <a:xfrm>
-            <a:off x="4114800" y="4727448"/>
-            <a:ext cx="7498080" cy="667512"/>
-          </a:xfrm>
-          <a:prstGeom prst="rect">
-            <a:avLst/>
-          </a:prstGeom>
-          <a:solidFill>
-            <a:srgbClr val="ECEBF7"/>
-          </a:solidFill>
-          <a:ln w="12700">
-            <a:solidFill>
-              <a:srgbClr val="ECEBF7"/>
-            </a:solidFill>
-            <a:prstDash val="solid"/>
-          </a:ln>
-        </p:spPr>
-        <p:txBody>
-          <a:bodyPr/>
-          <a:p/>
-        </p:txBody>
-      </p:sp>
-      <p:sp>
-        <p:nvSpPr>
-          <p:cNvPr id="24" name="Text 21"/>
-          <p:cNvSpPr txBox="1"/>
-          <p:nvPr/>
-        </p:nvSpPr>
-        <p:spPr>
-          <a:xfrm>
-            <a:off x="4297680" y="4727448"/>
-            <a:ext cx="1600200" cy="667512"/>
-          </a:xfrm>
-          <a:prstGeom prst="rect">
-            <a:avLst/>
-          </a:prstGeom>
-          <a:noFill/>
-          <a:ln/>
-        </p:spPr>
-        <p:txBody>
-          <a:bodyPr wrap="square" lIns="0" tIns="0" rIns="0" bIns="0" rtlCol="0" anchor="ctr"/>
-          <a:lstStyle/>
-          <a:p>
-            <a:pPr indent="0" marL="0">
-              <a:buNone/>
-            </a:pPr>
-            <a:r>
-              <a:rPr lang="en-US" sz="1600" b="1" dirty="0">
-                <a:solidFill>
-                  <a:srgbClr val="3A36A0"/>
-                </a:solidFill>
-                <a:latin typeface="Cambria" pitchFamily="34" charset="0"/>
-                <a:ea typeface="Cambria" pitchFamily="34" charset="-122"/>
-                <a:cs typeface="Cambria" pitchFamily="34" charset="-120"/>
-              </a:rPr>
-              <a:t>Nhật ký vết</a:t>
-            </a:r>
-            <a:endParaRPr lang="en-US" sz="1250" dirty="0"/>
-          </a:p>
-        </p:txBody>
-      </p:sp>
-      <p:sp>
-        <p:nvSpPr>
-          <p:cNvPr id="25" name="Text 22"/>
-          <p:cNvSpPr txBox="1"/>
-          <p:nvPr/>
-        </p:nvSpPr>
-        <p:spPr>
-          <a:xfrm>
-            <a:off x="5943600" y="4727448"/>
-            <a:ext cx="5532120" cy="667512"/>
-          </a:xfrm>
-          <a:prstGeom prst="rect">
-            <a:avLst/>
-          </a:prstGeom>
-          <a:noFill/>
-          <a:ln/>
-        </p:spPr>
-        <p:txBody>
-          <a:bodyPr wrap="square" lIns="0" tIns="0" rIns="0" bIns="0" rtlCol="0" anchor="ctr"/>
-          <a:lstStyle/>
-          <a:p>
-            <a:pPr indent="0" marL="0">
-              <a:buNone/>
-            </a:pPr>
-            <a:r>
-              <a:rPr lang="en-US" sz="1550" dirty="0">
-                <a:solidFill>
-                  <a:srgbClr val="4A4E63"/>
-                </a:solidFill>
-                <a:latin typeface="Calibri" pitchFamily="34" charset="0"/>
-                <a:ea typeface="Calibri" pitchFamily="34" charset="-122"/>
-                <a:cs typeface="Calibri" pitchFamily="34" charset="-120"/>
-              </a:rPr>
-              <a:t>mọi lần từ chối đều được ghi lại → tính được tỉ lệ khóa lỗi</a:t>
-            </a:r>
-            <a:endParaRPr lang="en-US" sz="1200" dirty="0"/>
-          </a:p>
-        </p:txBody>
-      </p:sp>
-      <p:sp>
-        <p:nvSpPr>
-          <p:cNvPr id="26" name="Shape 23"/>
-          <p:cNvSpPr/>
-          <p:nvPr/>
-        </p:nvSpPr>
-        <p:spPr>
-          <a:xfrm>
-            <a:off x="4114800" y="5486400"/>
-            <a:ext cx="7498080" cy="667512"/>
-          </a:xfrm>
-          <a:prstGeom prst="rect">
-            <a:avLst/>
-          </a:prstGeom>
-          <a:solidFill>
-            <a:srgbClr val="F7F7FB"/>
-          </a:solidFill>
-          <a:ln w="12700">
-            <a:solidFill>
-              <a:srgbClr val="F7F7FB"/>
-            </a:solidFill>
-            <a:prstDash val="solid"/>
-          </a:ln>
-        </p:spPr>
-        <p:txBody>
-          <a:bodyPr/>
-          <a:p/>
-        </p:txBody>
-      </p:sp>
-      <p:sp>
-        <p:nvSpPr>
-          <p:cNvPr id="27" name="Text 24"/>
-          <p:cNvSpPr txBox="1"/>
-          <p:nvPr/>
-        </p:nvSpPr>
-        <p:spPr>
-          <a:xfrm>
-            <a:off x="4297680" y="5486400"/>
-            <a:ext cx="1600200" cy="667512"/>
-          </a:xfrm>
-          <a:prstGeom prst="rect">
-            <a:avLst/>
-          </a:prstGeom>
-          <a:noFill/>
-          <a:ln/>
-        </p:spPr>
-        <p:txBody>
-          <a:bodyPr wrap="square" lIns="0" tIns="0" rIns="0" bIns="0" rtlCol="0" anchor="ctr"/>
-          <a:lstStyle/>
-          <a:p>
-            <a:pPr indent="0" marL="0">
-              <a:buNone/>
-            </a:pPr>
-            <a:r>
-              <a:rPr lang="en-US" sz="1600" b="1" dirty="0">
-                <a:solidFill>
-                  <a:srgbClr val="3A36A0"/>
-                </a:solidFill>
-                <a:latin typeface="Cambria" pitchFamily="34" charset="0"/>
-                <a:ea typeface="Cambria" pitchFamily="34" charset="-122"/>
-                <a:cs typeface="Cambria" pitchFamily="34" charset="-120"/>
-              </a:rPr>
-              <a:t>Song ngữ</a:t>
-            </a:r>
-            <a:endParaRPr lang="en-US" sz="1250" dirty="0"/>
-          </a:p>
-        </p:txBody>
-      </p:sp>
-      <p:sp>
-        <p:nvSpPr>
-          <p:cNvPr id="28" name="Text 25"/>
-          <p:cNvSpPr txBox="1"/>
-          <p:nvPr/>
-        </p:nvSpPr>
-        <p:spPr>
-          <a:xfrm>
-            <a:off x="5943600" y="5486400"/>
-            <a:ext cx="5532120" cy="667512"/>
-          </a:xfrm>
-          <a:prstGeom prst="rect">
-            <a:avLst/>
-          </a:prstGeom>
-          <a:noFill/>
-          <a:ln/>
-        </p:spPr>
-        <p:txBody>
-          <a:bodyPr wrap="square" lIns="0" tIns="0" rIns="0" bIns="0" rtlCol="0" anchor="ctr"/>
-          <a:lstStyle/>
-          <a:p>
-            <a:pPr indent="0" marL="0">
-              <a:buNone/>
-            </a:pPr>
-            <a:r>
-              <a:rPr lang="en-US" sz="1550" dirty="0">
-                <a:solidFill>
-                  <a:srgbClr val="4A4E63"/>
-                </a:solidFill>
-                <a:latin typeface="Calibri" pitchFamily="34" charset="0"/>
-                <a:ea typeface="Calibri" pitchFamily="34" charset="-122"/>
-                <a:cs typeface="Calibri" pitchFamily="34" charset="-120"/>
-              </a:rPr>
-              <a:t>chỉ mục nhúng text_canon (tiếng Anh), metadata vẫn giữ lang='vi'</a:t>
-            </a:r>
-            <a:endParaRPr lang="en-US" sz="1200" dirty="0"/>
-          </a:p>
-        </p:txBody>
-      </p:sp>
-    </p:spTree>
-  </p:cSld>
-  <p:clrMapOvr>
-    <a:masterClrMapping/>
-  </p:clrMapOvr>
-</p:sld>
-</file>
-
-<file path=ppt/slides/slide9.xml><?xml version="1.0" encoding="utf-8"?>
-<p:sld xmlns:a="http://schemas.openxmlformats.org/drawingml/2006/main" xmlns:r="http://schemas.openxmlformats.org/officeDocument/2006/relationships" xmlns:p="http://schemas.openxmlformats.org/presentationml/2006/main">
-  <p:cSld name="Slide 8">
-    <p:bg>
-      <p:bgPr>
-        <a:solidFill>
-          <a:srgbClr val="FFFFFF"/>
-        </a:solidFill>
-      </p:bgPr>
-    </p:bg>
-    <p:spTree>
-      <p:nvGrpSpPr>
-        <p:cNvPr id="1" name=""/>
-        <p:cNvGrpSpPr/>
-        <p:nvPr/>
-      </p:nvGrpSpPr>
-      <p:grpSpPr>
-        <a:xfrm>
-          <a:off x="0" y="0"/>
-          <a:ext cx="0" cy="0"/>
-          <a:chOff x="0" y="0"/>
-          <a:chExt cx="0" cy="0"/>
-        </a:xfrm>
-      </p:grpSpPr>
-      <p:sp>
-        <p:nvSpPr>
-          <p:cNvPr id="2" name="Text 0"/>
-          <p:cNvSpPr txBox="1"/>
-          <p:nvPr/>
-        </p:nvSpPr>
-        <p:spPr>
-          <a:xfrm>
-            <a:off x="566928" y="502920"/>
-            <a:ext cx="8229600" cy="283464"/>
-          </a:xfrm>
-          <a:prstGeom prst="rect">
-            <a:avLst/>
-          </a:prstGeom>
-          <a:noFill/>
-          <a:ln/>
-        </p:spPr>
-        <p:txBody>
-          <a:bodyPr wrap="square" lIns="0" tIns="0" rIns="0" bIns="0" rtlCol="0" anchor="t"/>
-          <a:lstStyle/>
-          <a:p>
-            <a:pPr indent="0" marL="0">
-              <a:buNone/>
-            </a:pPr>
-            <a:r>
-              <a:rPr lang="en-US" sz="1550" b="1" dirty="0">
-                <a:solidFill>
-                  <a:srgbClr val="3A36A0"/>
-                </a:solidFill>
-                <a:latin typeface="Calibri" pitchFamily="34" charset="0"/>
-                <a:ea typeface="Calibri" pitchFamily="34" charset="-122"/>
-                <a:cs typeface="Calibri" pitchFamily="34" charset="-120"/>
-              </a:rPr>
-              <a:t>KẾ HOẠCH THỰC THI</a:t>
-            </a:r>
-            <a:endParaRPr lang="en-US" sz="1200" dirty="0"/>
-          </a:p>
-        </p:txBody>
-      </p:sp>
-      <p:sp>
-        <p:nvSpPr>
-          <p:cNvPr id="3" name="Text 1"/>
-          <p:cNvSpPr txBox="1"/>
-          <p:nvPr/>
-        </p:nvSpPr>
-        <p:spPr>
-          <a:xfrm>
-            <a:off x="566928" y="822960"/>
-            <a:ext cx="11045952" cy="640080"/>
-          </a:xfrm>
-          <a:prstGeom prst="rect">
-            <a:avLst/>
-          </a:prstGeom>
-          <a:noFill/>
-          <a:ln/>
-        </p:spPr>
-        <p:txBody>
-          <a:bodyPr wrap="square" lIns="0" tIns="0" rIns="0" bIns="0" rtlCol="0" anchor="t"/>
-          <a:lstStyle/>
-          <a:p>
-            <a:pPr indent="0" marL="0">
-              <a:buNone/>
-            </a:pPr>
-            <a:r>
-              <a:rPr lang="en-US" sz="3000" b="1" dirty="0">
-                <a:solidFill>
-                  <a:srgbClr val="13123A"/>
-                </a:solidFill>
-                <a:latin typeface="Cambria" pitchFamily="34" charset="0"/>
-                <a:ea typeface="Cambria" pitchFamily="34" charset="-122"/>
-                <a:cs typeface="Cambria" pitchFamily="34" charset="-120"/>
-              </a:rPr>
-              <a:t>Kế hoạch thực thi 7 ngày</a:t>
-            </a:r>
-            <a:endParaRPr lang="en-US" sz="3000" dirty="0"/>
-          </a:p>
-        </p:txBody>
-      </p:sp>
-      <p:sp>
-        <p:nvSpPr>
-          <p:cNvPr id="4" name="Text 2"/>
-          <p:cNvSpPr txBox="1"/>
-          <p:nvPr/>
-        </p:nvSpPr>
-        <p:spPr>
-          <a:xfrm>
-            <a:off x="566928" y="6464808"/>
-            <a:ext cx="11045952" cy="329184"/>
-          </a:xfrm>
-          <a:prstGeom prst="rect">
-            <a:avLst/>
-          </a:prstGeom>
-          <a:noFill/>
-          <a:ln/>
-        </p:spPr>
-        <p:txBody>
-          <a:bodyPr wrap="square" lIns="0" tIns="0" rIns="0" bIns="0" rtlCol="0" anchor="t"/>
-          <a:lstStyle/>
-          <a:p>
-            <a:pPr indent="0" marL="0">
-              <a:buNone/>
-            </a:pPr>
-            <a:r>
-              <a:rPr lang="en-US" sz="1150" dirty="0">
-                <a:solidFill>
-                  <a:srgbClr val="6B6F82"/>
-                </a:solidFill>
-                <a:latin typeface="Calibri" pitchFamily="34" charset="0"/>
-                <a:ea typeface="Calibri" pitchFamily="34" charset="-122"/>
-                <a:cs typeface="Calibri" pitchFamily="34" charset="-120"/>
-              </a:rPr>
-              <a:t>Mục tiêu cuối tuần: 11 file mã nguồn — config, adapters (llm, embed, fake), vector, extractor, assembler, agent, eval (datasets, judge, run).</a:t>
-            </a:r>
-            <a:endParaRPr lang="en-US" sz="1050" dirty="0"/>
-          </a:p>
-        </p:txBody>
-      </p:sp>
-      <p:sp>
-        <p:nvSpPr>
-          <p:cNvPr id="6" name="Shape 3"/>
-          <p:cNvSpPr/>
-          <p:nvPr/>
-        </p:nvSpPr>
-        <p:spPr>
-          <a:xfrm>
-            <a:off x="566928" y="1645920"/>
-            <a:ext cx="11045952" cy="658368"/>
-          </a:xfrm>
-          <a:prstGeom prst="rect">
-            <a:avLst/>
-          </a:prstGeom>
-          <a:solidFill>
-            <a:srgbClr val="ECEBF7"/>
-          </a:solidFill>
-          <a:ln w="12700">
-            <a:solidFill>
-              <a:srgbClr val="ECEBF7"/>
-            </a:solidFill>
-            <a:prstDash val="solid"/>
-          </a:ln>
-        </p:spPr>
-        <p:txBody>
-          <a:bodyPr/>
-          <a:p/>
-        </p:txBody>
-      </p:sp>
-      <p:sp>
-        <p:nvSpPr>
-          <p:cNvPr id="7" name="Shape 4"/>
-          <p:cNvSpPr/>
-          <p:nvPr/>
-        </p:nvSpPr>
-        <p:spPr>
-          <a:xfrm>
-            <a:off x="566928" y="1645920"/>
-            <a:ext cx="1371600" cy="658368"/>
-          </a:xfrm>
-          <a:prstGeom prst="rect">
-            <a:avLst/>
-          </a:prstGeom>
-          <a:solidFill>
-            <a:srgbClr val="13123A"/>
-          </a:solidFill>
-          <a:ln w="12700">
-            <a:solidFill>
-              <a:srgbClr val="13123A"/>
-            </a:solidFill>
-            <a:prstDash val="solid"/>
-          </a:ln>
-        </p:spPr>
-        <p:txBody>
-          <a:bodyPr/>
-          <a:p/>
-        </p:txBody>
-      </p:sp>
-      <p:sp>
-        <p:nvSpPr>
-          <p:cNvPr id="8" name="Text 5"/>
-          <p:cNvSpPr txBox="1"/>
-          <p:nvPr/>
-        </p:nvSpPr>
-        <p:spPr>
-          <a:xfrm>
-            <a:off x="566928" y="1645920"/>
-            <a:ext cx="1371600" cy="658368"/>
-          </a:xfrm>
-          <a:prstGeom prst="rect">
-            <a:avLst/>
-          </a:prstGeom>
-          <a:noFill/>
-          <a:ln/>
-        </p:spPr>
-        <p:txBody>
-          <a:bodyPr wrap="square" lIns="0" tIns="0" rIns="0" bIns="0" rtlCol="0" anchor="ctr"/>
-          <a:lstStyle/>
-          <a:p>
-            <a:pPr algn="ctr" indent="0" marL="0">
-              <a:buNone/>
-            </a:pPr>
-            <a:r>
-              <a:rPr lang="en-US" sz="1550" b="1" dirty="0">
-                <a:solidFill>
-                  <a:srgbClr val="FFFFFF"/>
-                </a:solidFill>
-                <a:latin typeface="Calibri" pitchFamily="34" charset="0"/>
-                <a:ea typeface="Calibri" pitchFamily="34" charset="-122"/>
-                <a:cs typeface="Calibri" pitchFamily="34" charset="-120"/>
-              </a:rPr>
-              <a:t>NGÀY 1</a:t>
-            </a:r>
-            <a:endParaRPr lang="en-US" sz="1200" dirty="0"/>
-          </a:p>
-        </p:txBody>
-      </p:sp>
-      <p:sp>
-        <p:nvSpPr>
-          <p:cNvPr id="9" name="Text 6"/>
-          <p:cNvSpPr txBox="1"/>
-          <p:nvPr/>
-        </p:nvSpPr>
-        <p:spPr>
-          <a:xfrm>
-            <a:off x="2103120" y="1645920"/>
-            <a:ext cx="548640" cy="658368"/>
-          </a:xfrm>
-          <a:prstGeom prst="rect">
-            <a:avLst/>
-          </a:prstGeom>
-          <a:noFill/>
-          <a:ln/>
-        </p:spPr>
-        <p:txBody>
-          <a:bodyPr wrap="square" lIns="0" tIns="0" rIns="0" bIns="0" rtlCol="0" anchor="ctr"/>
-          <a:lstStyle/>
-          <a:p>
-            <a:pPr indent="0" marL="0">
-              <a:buNone/>
-            </a:pPr>
-            <a:r>
-              <a:rPr lang="en-US" sz="1700" b="1" dirty="0">
-                <a:solidFill>
-                  <a:srgbClr val="E9970B"/>
-                </a:solidFill>
-                <a:latin typeface="Calibri" pitchFamily="34" charset="0"/>
-                <a:ea typeface="Calibri" pitchFamily="34" charset="-122"/>
-                <a:cs typeface="Calibri" pitchFamily="34" charset="-120"/>
-              </a:rPr>
-              <a:t>A+B</a:t>
-            </a:r>
-            <a:endParaRPr lang="en-US" sz="1300" dirty="0"/>
-          </a:p>
-        </p:txBody>
-      </p:sp>
-      <p:sp>
-        <p:nvSpPr>
-          <p:cNvPr id="10" name="Text 7"/>
-          <p:cNvSpPr txBox="1"/>
-          <p:nvPr/>
-        </p:nvSpPr>
-        <p:spPr>
-          <a:xfrm>
-            <a:off x="2697480" y="1645920"/>
-            <a:ext cx="2651760" cy="658368"/>
-          </a:xfrm>
-          <a:prstGeom prst="rect">
-            <a:avLst/>
-          </a:prstGeom>
-          <a:noFill/>
-          <a:ln/>
-        </p:spPr>
-        <p:txBody>
-          <a:bodyPr wrap="square" lIns="0" tIns="0" rIns="0" bIns="0" rtlCol="0" anchor="ctr"/>
-          <a:lstStyle/>
-          <a:p>
-            <a:pPr indent="0" marL="0">
-              <a:buNone/>
-            </a:pPr>
-            <a:r>
-              <a:rPr lang="en-US" sz="1700" b="1" dirty="0">
-                <a:solidFill>
-                  <a:srgbClr val="13123A"/>
-                </a:solidFill>
-                <a:latin typeface="Cambria" pitchFamily="34" charset="0"/>
-                <a:ea typeface="Cambria" pitchFamily="34" charset="-122"/>
-                <a:cs typeface="Cambria" pitchFamily="34" charset="-120"/>
-              </a:rPr>
-              <a:t>Khung, adapter, chỉ mục</a:t>
-            </a:r>
-            <a:endParaRPr lang="en-US" sz="1300" dirty="0"/>
-          </a:p>
-        </p:txBody>
-      </p:sp>
-      <p:sp>
-        <p:nvSpPr>
-          <p:cNvPr id="11" name="Text 8"/>
-          <p:cNvSpPr txBox="1"/>
-          <p:nvPr/>
-        </p:nvSpPr>
-        <p:spPr>
-          <a:xfrm>
-            <a:off x="5394960" y="1645920"/>
-            <a:ext cx="6080760" cy="658368"/>
-          </a:xfrm>
-          <a:prstGeom prst="rect">
-            <a:avLst/>
-          </a:prstGeom>
-          <a:noFill/>
-          <a:ln/>
-        </p:spPr>
-        <p:txBody>
-          <a:bodyPr wrap="square" lIns="0" tIns="0" rIns="0" bIns="0" rtlCol="0" anchor="ctr"/>
-          <a:lstStyle/>
-          <a:p>
-            <a:pPr indent="0" marL="0">
-              <a:buNone/>
-            </a:pPr>
-            <a:r>
-              <a:rPr lang="en-US" sz="1500" dirty="0">
-                <a:solidFill>
-                  <a:srgbClr val="4A4E63"/>
-                </a:solidFill>
-                <a:latin typeface="Calibri" pitchFamily="34" charset="0"/>
-                <a:ea typeface="Calibri" pitchFamily="34" charset="-122"/>
-                <a:cs typeface="Calibri" pitchFamily="34" charset="-120"/>
-              </a:rPr>
-              <a:t>A: config · LLMAdapter · BGE-M3 có cache · FakeLLM   |   B: vector.py + rebuild()</a:t>
-            </a:r>
-            <a:endParaRPr lang="en-US" sz="1150" dirty="0"/>
-          </a:p>
-        </p:txBody>
-      </p:sp>
-      <p:sp>
-        <p:nvSpPr>
-          <p:cNvPr id="12" name="Shape 9"/>
-          <p:cNvSpPr/>
-          <p:nvPr/>
-        </p:nvSpPr>
-        <p:spPr>
-          <a:xfrm>
-            <a:off x="566928" y="2395728"/>
-            <a:ext cx="11045952" cy="658368"/>
-          </a:xfrm>
-          <a:prstGeom prst="rect">
-            <a:avLst/>
-          </a:prstGeom>
-          <a:solidFill>
-            <a:srgbClr val="F7F7FB"/>
-          </a:solidFill>
-          <a:ln w="12700">
-            <a:solidFill>
-              <a:srgbClr val="F7F7FB"/>
-            </a:solidFill>
-            <a:prstDash val="solid"/>
-          </a:ln>
-        </p:spPr>
-        <p:txBody>
-          <a:bodyPr/>
-          <a:p/>
-        </p:txBody>
-      </p:sp>
-      <p:sp>
-        <p:nvSpPr>
-          <p:cNvPr id="13" name="Shape 10"/>
-          <p:cNvSpPr/>
-          <p:nvPr/>
-        </p:nvSpPr>
-        <p:spPr>
-          <a:xfrm>
-            <a:off x="566928" y="2395728"/>
-            <a:ext cx="1371600" cy="658368"/>
-          </a:xfrm>
-          <a:prstGeom prst="rect">
-            <a:avLst/>
-          </a:prstGeom>
-          <a:solidFill>
-            <a:srgbClr val="13123A"/>
-          </a:solidFill>
-          <a:ln w="12700">
-            <a:solidFill>
-              <a:srgbClr val="13123A"/>
-            </a:solidFill>
-            <a:prstDash val="solid"/>
-          </a:ln>
-        </p:spPr>
-        <p:txBody>
-          <a:bodyPr/>
-          <a:p/>
-        </p:txBody>
-      </p:sp>
-      <p:sp>
-        <p:nvSpPr>
-          <p:cNvPr id="14" name="Text 11"/>
-          <p:cNvSpPr txBox="1"/>
-          <p:nvPr/>
-        </p:nvSpPr>
-        <p:spPr>
-          <a:xfrm>
-            <a:off x="566928" y="2395728"/>
-            <a:ext cx="1371600" cy="658368"/>
-          </a:xfrm>
-          <a:prstGeom prst="rect">
-            <a:avLst/>
-          </a:prstGeom>
-          <a:noFill/>
-          <a:ln/>
-        </p:spPr>
-        <p:txBody>
-          <a:bodyPr wrap="square" lIns="0" tIns="0" rIns="0" bIns="0" rtlCol="0" anchor="ctr"/>
-          <a:lstStyle/>
-          <a:p>
-            <a:pPr algn="ctr" indent="0" marL="0">
-              <a:buNone/>
-            </a:pPr>
-            <a:r>
-              <a:rPr lang="en-US" sz="1550" b="1" dirty="0">
-                <a:solidFill>
-                  <a:srgbClr val="FFFFFF"/>
-                </a:solidFill>
-                <a:latin typeface="Calibri" pitchFamily="34" charset="0"/>
-                <a:ea typeface="Calibri" pitchFamily="34" charset="-122"/>
-                <a:cs typeface="Calibri" pitchFamily="34" charset="-120"/>
-              </a:rPr>
-              <a:t>NGÀY 2–3</a:t>
-            </a:r>
-            <a:endParaRPr lang="en-US" sz="1200" dirty="0"/>
-          </a:p>
-        </p:txBody>
-      </p:sp>
-      <p:sp>
-        <p:nvSpPr>
-          <p:cNvPr id="15" name="Text 12"/>
-          <p:cNvSpPr txBox="1"/>
-          <p:nvPr/>
-        </p:nvSpPr>
-        <p:spPr>
-          <a:xfrm>
-            <a:off x="2103120" y="2395728"/>
-            <a:ext cx="548640" cy="658368"/>
-          </a:xfrm>
-          <a:prstGeom prst="rect">
-            <a:avLst/>
-          </a:prstGeom>
-          <a:noFill/>
-          <a:ln/>
-        </p:spPr>
-        <p:txBody>
-          <a:bodyPr wrap="square" lIns="0" tIns="0" rIns="0" bIns="0" rtlCol="0" anchor="ctr"/>
-          <a:lstStyle/>
-          <a:p>
-            <a:pPr indent="0" marL="0">
-              <a:buNone/>
-            </a:pPr>
-            <a:r>
-              <a:rPr lang="en-US" sz="1700" b="1" dirty="0">
-                <a:solidFill>
-                  <a:srgbClr val="E9970B"/>
-                </a:solidFill>
-                <a:latin typeface="Calibri" pitchFamily="34" charset="0"/>
-                <a:ea typeface="Calibri" pitchFamily="34" charset="-122"/>
-                <a:cs typeface="Calibri" pitchFamily="34" charset="-120"/>
-              </a:rPr>
-              <a:t>A</a:t>
-            </a:r>
-            <a:endParaRPr lang="en-US" sz="1300" dirty="0"/>
-          </a:p>
-        </p:txBody>
-      </p:sp>
-      <p:sp>
-        <p:nvSpPr>
-          <p:cNvPr id="16" name="Text 13"/>
-          <p:cNvSpPr txBox="1"/>
-          <p:nvPr/>
-        </p:nvSpPr>
-        <p:spPr>
-          <a:xfrm>
-            <a:off x="2697480" y="2395728"/>
-            <a:ext cx="2651760" cy="658368"/>
-          </a:xfrm>
-          <a:prstGeom prst="rect">
-            <a:avLst/>
-          </a:prstGeom>
-          <a:noFill/>
-          <a:ln/>
-        </p:spPr>
-        <p:txBody>
-          <a:bodyPr wrap="square" lIns="0" tIns="0" rIns="0" bIns="0" rtlCol="0" anchor="ctr"/>
-          <a:lstStyle/>
-          <a:p>
-            <a:pPr indent="0" marL="0">
-              <a:buNone/>
-            </a:pPr>
-            <a:r>
-              <a:rPr lang="en-US" sz="1700" b="1" dirty="0">
-                <a:solidFill>
-                  <a:srgbClr val="13123A"/>
-                </a:solidFill>
-                <a:latin typeface="Cambria" pitchFamily="34" charset="0"/>
-                <a:ea typeface="Cambria" pitchFamily="34" charset="-122"/>
-                <a:cs typeface="Cambria" pitchFamily="34" charset="-120"/>
-              </a:rPr>
-              <a:t>FactExtractor</a:t>
-            </a:r>
-            <a:endParaRPr lang="en-US" sz="1300" dirty="0"/>
-          </a:p>
-        </p:txBody>
-      </p:sp>
-      <p:sp>
-        <p:nvSpPr>
-          <p:cNvPr id="17" name="Text 14"/>
-          <p:cNvSpPr txBox="1"/>
-          <p:nvPr/>
-        </p:nvSpPr>
-        <p:spPr>
-          <a:xfrm>
-            <a:off x="5394960" y="2395728"/>
-            <a:ext cx="6080760" cy="658368"/>
-          </a:xfrm>
-          <a:prstGeom prst="rect">
-            <a:avLst/>
-          </a:prstGeom>
-          <a:noFill/>
-          <a:ln/>
-        </p:spPr>
-        <p:txBody>
-          <a:bodyPr wrap="square" lIns="0" tIns="0" rIns="0" bIns="0" rtlCol="0" anchor="ctr"/>
-          <a:lstStyle/>
-          <a:p>
-            <a:pPr indent="0" marL="0">
-              <a:buNone/>
-            </a:pPr>
-            <a:r>
-              <a:rPr lang="en-US" sz="1500" dirty="0">
-                <a:solidFill>
-                  <a:srgbClr val="4A4E63"/>
-                </a:solidFill>
-                <a:latin typeface="Calibri" pitchFamily="34" charset="0"/>
-                <a:ea typeface="Calibri" pitchFamily="34" charset="-122"/>
-                <a:cs typeface="Calibri" pitchFamily="34" charset="-120"/>
-              </a:rPr>
-              <a:t>1 lời gọi/lượt · cache sha1 · thử lại 1 lần · hoàn thành khi khóa đúng ≥ 90% trên 20 lượt</a:t>
-            </a:r>
-            <a:endParaRPr lang="en-US" sz="1150" dirty="0"/>
-          </a:p>
-        </p:txBody>
-      </p:sp>
-      <p:sp>
-        <p:nvSpPr>
-          <p:cNvPr id="18" name="Shape 15"/>
-          <p:cNvSpPr/>
-          <p:nvPr/>
-        </p:nvSpPr>
-        <p:spPr>
-          <a:xfrm>
-            <a:off x="566928" y="3145536"/>
-            <a:ext cx="11045952" cy="658368"/>
-          </a:xfrm>
-          <a:prstGeom prst="rect">
-            <a:avLst/>
-          </a:prstGeom>
-          <a:solidFill>
-            <a:srgbClr val="ECEBF7"/>
-          </a:solidFill>
-          <a:ln w="12700">
-            <a:solidFill>
-              <a:srgbClr val="ECEBF7"/>
-            </a:solidFill>
-            <a:prstDash val="solid"/>
-          </a:ln>
-        </p:spPr>
-        <p:txBody>
-          <a:bodyPr/>
-          <a:p/>
-        </p:txBody>
-      </p:sp>
-      <p:sp>
-        <p:nvSpPr>
-          <p:cNvPr id="19" name="Shape 16"/>
-          <p:cNvSpPr/>
-          <p:nvPr/>
-        </p:nvSpPr>
-        <p:spPr>
-          <a:xfrm>
-            <a:off x="566928" y="3145536"/>
-            <a:ext cx="1371600" cy="658368"/>
-          </a:xfrm>
-          <a:prstGeom prst="rect">
-            <a:avLst/>
-          </a:prstGeom>
-          <a:solidFill>
-            <a:srgbClr val="13123A"/>
-          </a:solidFill>
-          <a:ln w="12700">
-            <a:solidFill>
-              <a:srgbClr val="13123A"/>
-            </a:solidFill>
-            <a:prstDash val="solid"/>
-          </a:ln>
-        </p:spPr>
-        <p:txBody>
-          <a:bodyPr/>
-          <a:p/>
-        </p:txBody>
-      </p:sp>
-      <p:sp>
-        <p:nvSpPr>
-          <p:cNvPr id="20" name="Text 17"/>
-          <p:cNvSpPr txBox="1"/>
-          <p:nvPr/>
-        </p:nvSpPr>
-        <p:spPr>
-          <a:xfrm>
-            <a:off x="566928" y="3145536"/>
-            <a:ext cx="1371600" cy="658368"/>
-          </a:xfrm>
-          <a:prstGeom prst="rect">
-            <a:avLst/>
-          </a:prstGeom>
-          <a:noFill/>
-          <a:ln/>
-        </p:spPr>
-        <p:txBody>
-          <a:bodyPr wrap="square" lIns="0" tIns="0" rIns="0" bIns="0" rtlCol="0" anchor="ctr"/>
-          <a:lstStyle/>
-          <a:p>
-            <a:pPr algn="ctr" indent="0" marL="0">
-              <a:buNone/>
-            </a:pPr>
-            <a:r>
-              <a:rPr lang="en-US" sz="1550" b="1" dirty="0">
-                <a:solidFill>
-                  <a:srgbClr val="FFFFFF"/>
-                </a:solidFill>
-                <a:latin typeface="Calibri" pitchFamily="34" charset="0"/>
-                <a:ea typeface="Calibri" pitchFamily="34" charset="-122"/>
-                <a:cs typeface="Calibri" pitchFamily="34" charset="-120"/>
-              </a:rPr>
-              <a:t>NGÀY 3–4</a:t>
-            </a:r>
-            <a:endParaRPr lang="en-US" sz="1200" dirty="0"/>
-          </a:p>
-        </p:txBody>
-      </p:sp>
-      <p:sp>
-        <p:nvSpPr>
-          <p:cNvPr id="21" name="Text 18"/>
-          <p:cNvSpPr txBox="1"/>
-          <p:nvPr/>
-        </p:nvSpPr>
-        <p:spPr>
-          <a:xfrm>
-            <a:off x="2103120" y="3145536"/>
-            <a:ext cx="548640" cy="658368"/>
-          </a:xfrm>
-          <a:prstGeom prst="rect">
-            <a:avLst/>
-          </a:prstGeom>
-          <a:noFill/>
-          <a:ln/>
-        </p:spPr>
-        <p:txBody>
-          <a:bodyPr wrap="square" lIns="0" tIns="0" rIns="0" bIns="0" rtlCol="0" anchor="ctr"/>
-          <a:lstStyle/>
-          <a:p>
-            <a:pPr indent="0" marL="0">
-              <a:buNone/>
-            </a:pPr>
-            <a:r>
-              <a:rPr lang="en-US" sz="1700" b="1" dirty="0">
-                <a:solidFill>
-                  <a:srgbClr val="E9970B"/>
-                </a:solidFill>
-                <a:latin typeface="Calibri" pitchFamily="34" charset="0"/>
-                <a:ea typeface="Calibri" pitchFamily="34" charset="-122"/>
-                <a:cs typeface="Calibri" pitchFamily="34" charset="-120"/>
-              </a:rPr>
-              <a:t>B</a:t>
-            </a:r>
-            <a:endParaRPr lang="en-US" sz="1300" dirty="0"/>
-          </a:p>
-        </p:txBody>
-      </p:sp>
-      <p:sp>
-        <p:nvSpPr>
-          <p:cNvPr id="22" name="Text 19"/>
-          <p:cNvSpPr txBox="1"/>
-          <p:nvPr/>
-        </p:nvSpPr>
-        <p:spPr>
-          <a:xfrm>
-            <a:off x="2697480" y="3145536"/>
-            <a:ext cx="2651760" cy="658368"/>
-          </a:xfrm>
-          <a:prstGeom prst="rect">
-            <a:avLst/>
-          </a:prstGeom>
-          <a:noFill/>
-          <a:ln/>
-        </p:spPr>
-        <p:txBody>
-          <a:bodyPr wrap="square" lIns="0" tIns="0" rIns="0" bIns="0" rtlCol="0" anchor="ctr"/>
-          <a:lstStyle/>
-          <a:p>
-            <a:pPr indent="0" marL="0">
-              <a:buNone/>
-            </a:pPr>
-            <a:r>
-              <a:rPr lang="en-US" sz="1700" b="1" dirty="0">
-                <a:solidFill>
-                  <a:srgbClr val="13123A"/>
-                </a:solidFill>
-                <a:latin typeface="Cambria" pitchFamily="34" charset="0"/>
-                <a:ea typeface="Cambria" pitchFamily="34" charset="-122"/>
-                <a:cs typeface="Cambria" pitchFamily="34" charset="-120"/>
-              </a:rPr>
-              <a:t>Assembler &amp; agent</a:t>
-            </a:r>
-            <a:endParaRPr lang="en-US" sz="1300" dirty="0"/>
-          </a:p>
-        </p:txBody>
-      </p:sp>
-      <p:sp>
-        <p:nvSpPr>
-          <p:cNvPr id="23" name="Text 20"/>
-          <p:cNvSpPr txBox="1"/>
-          <p:nvPr/>
-        </p:nvSpPr>
-        <p:spPr>
-          <a:xfrm>
-            <a:off x="5394960" y="3145536"/>
-            <a:ext cx="6080760" cy="658368"/>
-          </a:xfrm>
-          <a:prstGeom prst="rect">
-            <a:avLst/>
-          </a:prstGeom>
-          <a:noFill/>
-          <a:ln/>
-        </p:spPr>
-        <p:txBody>
-          <a:bodyPr wrap="square" lIns="0" tIns="0" rIns="0" bIns="0" rtlCol="0" anchor="ctr"/>
-          <a:lstStyle/>
-          <a:p>
-            <a:pPr indent="0" marL="0">
-              <a:buNone/>
-            </a:pPr>
-            <a:r>
-              <a:rPr lang="en-US" sz="1500" dirty="0">
-                <a:solidFill>
-                  <a:srgbClr val="4A4E63"/>
-                </a:solidFill>
-                <a:latin typeface="Calibri" pitchFamily="34" charset="0"/>
-                <a:ea typeface="Calibri" pitchFamily="34" charset="-122"/>
-                <a:cs typeface="Calibri" pitchFamily="34" charset="-120"/>
-              </a:rPr>
-              <a:t>assembler chia hạn ngạch (đếm token bằng tokenizer thật) · agent.py với ingest_turn và answer</a:t>
-            </a:r>
-            <a:endParaRPr lang="en-US" sz="1150" dirty="0"/>
-          </a:p>
-        </p:txBody>
-      </p:sp>
-      <p:sp>
-        <p:nvSpPr>
-          <p:cNvPr id="24" name="Shape 21"/>
-          <p:cNvSpPr/>
-          <p:nvPr/>
-        </p:nvSpPr>
-        <p:spPr>
-          <a:xfrm>
-            <a:off x="566928" y="3895344"/>
-            <a:ext cx="11045952" cy="658368"/>
-          </a:xfrm>
-          <a:prstGeom prst="rect">
-            <a:avLst/>
-          </a:prstGeom>
-          <a:solidFill>
-            <a:srgbClr val="F7F7FB"/>
-          </a:solidFill>
-          <a:ln w="12700">
-            <a:solidFill>
-              <a:srgbClr val="F7F7FB"/>
-            </a:solidFill>
-            <a:prstDash val="solid"/>
-          </a:ln>
-        </p:spPr>
-        <p:txBody>
-          <a:bodyPr/>
-          <a:p/>
-        </p:txBody>
-      </p:sp>
-      <p:sp>
-        <p:nvSpPr>
-          <p:cNvPr id="25" name="Shape 22"/>
-          <p:cNvSpPr/>
-          <p:nvPr/>
-        </p:nvSpPr>
-        <p:spPr>
-          <a:xfrm>
-            <a:off x="566928" y="3895344"/>
-            <a:ext cx="1371600" cy="658368"/>
-          </a:xfrm>
-          <a:prstGeom prst="rect">
-            <a:avLst/>
-          </a:prstGeom>
-          <a:solidFill>
-            <a:srgbClr val="13123A"/>
-          </a:solidFill>
-          <a:ln w="12700">
-            <a:solidFill>
-              <a:srgbClr val="13123A"/>
-            </a:solidFill>
-            <a:prstDash val="solid"/>
-          </a:ln>
-        </p:spPr>
-        <p:txBody>
-          <a:bodyPr/>
-          <a:p/>
-        </p:txBody>
-      </p:sp>
-      <p:sp>
-        <p:nvSpPr>
-          <p:cNvPr id="26" name="Text 23"/>
-          <p:cNvSpPr txBox="1"/>
-          <p:nvPr/>
-        </p:nvSpPr>
-        <p:spPr>
-          <a:xfrm>
-            <a:off x="566928" y="3895344"/>
-            <a:ext cx="1371600" cy="658368"/>
-          </a:xfrm>
-          <a:prstGeom prst="rect">
-            <a:avLst/>
-          </a:prstGeom>
-          <a:noFill/>
-          <a:ln/>
-        </p:spPr>
-        <p:txBody>
-          <a:bodyPr wrap="square" lIns="0" tIns="0" rIns="0" bIns="0" rtlCol="0" anchor="ctr"/>
-          <a:lstStyle/>
-          <a:p>
-            <a:pPr algn="ctr" indent="0" marL="0">
-              <a:buNone/>
-            </a:pPr>
-            <a:r>
-              <a:rPr lang="en-US" sz="1550" b="1" dirty="0">
-                <a:solidFill>
-                  <a:srgbClr val="FFFFFF"/>
-                </a:solidFill>
-                <a:latin typeface="Calibri" pitchFamily="34" charset="0"/>
-                <a:ea typeface="Calibri" pitchFamily="34" charset="-122"/>
-                <a:cs typeface="Calibri" pitchFamily="34" charset="-120"/>
-              </a:rPr>
-              <a:t>NGÀY 4–5</a:t>
-            </a:r>
-            <a:endParaRPr lang="en-US" sz="1200" dirty="0"/>
-          </a:p>
-        </p:txBody>
-      </p:sp>
-      <p:sp>
-        <p:nvSpPr>
-          <p:cNvPr id="27" name="Text 24"/>
-          <p:cNvSpPr txBox="1"/>
-          <p:nvPr/>
-        </p:nvSpPr>
-        <p:spPr>
-          <a:xfrm>
-            <a:off x="2103120" y="3895344"/>
-            <a:ext cx="548640" cy="658368"/>
-          </a:xfrm>
-          <a:prstGeom prst="rect">
-            <a:avLst/>
-          </a:prstGeom>
-          <a:noFill/>
-          <a:ln/>
-        </p:spPr>
-        <p:txBody>
-          <a:bodyPr wrap="square" lIns="0" tIns="0" rIns="0" bIns="0" rtlCol="0" anchor="ctr"/>
-          <a:lstStyle/>
-          <a:p>
-            <a:pPr indent="0" marL="0">
-              <a:buNone/>
-            </a:pPr>
-            <a:r>
-              <a:rPr lang="en-US" sz="1700" b="1" dirty="0">
-                <a:solidFill>
-                  <a:srgbClr val="E9970B"/>
-                </a:solidFill>
-                <a:latin typeface="Calibri" pitchFamily="34" charset="0"/>
-                <a:ea typeface="Calibri" pitchFamily="34" charset="-122"/>
-                <a:cs typeface="Calibri" pitchFamily="34" charset="-120"/>
-              </a:rPr>
-              <a:t>A</a:t>
-            </a:r>
-            <a:endParaRPr lang="en-US" sz="1300" dirty="0"/>
-          </a:p>
-        </p:txBody>
-      </p:sp>
-      <p:sp>
-        <p:nvSpPr>
-          <p:cNvPr id="28" name="Text 25"/>
-          <p:cNvSpPr txBox="1"/>
-          <p:nvPr/>
-        </p:nvSpPr>
-        <p:spPr>
-          <a:xfrm>
-            <a:off x="2697480" y="3895344"/>
-            <a:ext cx="2651760" cy="658368"/>
-          </a:xfrm>
-          <a:prstGeom prst="rect">
-            <a:avLst/>
-          </a:prstGeom>
-          <a:noFill/>
-          <a:ln/>
-        </p:spPr>
-        <p:txBody>
-          <a:bodyPr wrap="square" lIns="0" tIns="0" rIns="0" bIns="0" rtlCol="0" anchor="ctr"/>
-          <a:lstStyle/>
-          <a:p>
-            <a:pPr indent="0" marL="0">
-              <a:buNone/>
-            </a:pPr>
-            <a:r>
-              <a:rPr lang="en-US" sz="1700" b="1" dirty="0">
-                <a:solidFill>
-                  <a:srgbClr val="13123A"/>
-                </a:solidFill>
-                <a:latin typeface="Cambria" pitchFamily="34" charset="0"/>
-                <a:ea typeface="Cambria" pitchFamily="34" charset="-122"/>
-                <a:cs typeface="Cambria" pitchFamily="34" charset="-120"/>
-              </a:rPr>
-              <a:t>Bộ đánh giá</a:t>
-            </a:r>
-            <a:endParaRPr lang="en-US" sz="1300" dirty="0"/>
-          </a:p>
-        </p:txBody>
-      </p:sp>
-      <p:sp>
-        <p:nvSpPr>
-          <p:cNvPr id="29" name="Text 26"/>
-          <p:cNvSpPr txBox="1"/>
-          <p:nvPr/>
-        </p:nvSpPr>
-        <p:spPr>
-          <a:xfrm>
-            <a:off x="5394960" y="3895344"/>
-            <a:ext cx="6080760" cy="658368"/>
-          </a:xfrm>
-          <a:prstGeom prst="rect">
-            <a:avLst/>
-          </a:prstGeom>
-          <a:noFill/>
-          <a:ln/>
-        </p:spPr>
-        <p:txBody>
-          <a:bodyPr wrap="square" lIns="0" tIns="0" rIns="0" bIns="0" rtlCol="0" anchor="ctr"/>
-          <a:lstStyle/>
-          <a:p>
-            <a:pPr indent="0" marL="0">
-              <a:buNone/>
-            </a:pPr>
-            <a:r>
-              <a:rPr lang="en-US" sz="1500" dirty="0">
-                <a:solidFill>
-                  <a:srgbClr val="4A4E63"/>
-                </a:solidFill>
-                <a:latin typeface="Calibri" pitchFamily="34" charset="0"/>
-                <a:ea typeface="Calibri" pitchFamily="34" charset="-122"/>
-                <a:cs typeface="Calibri" pitchFamily="34" charset="-120"/>
-              </a:rPr>
-              <a:t>datasets.py · judge.py (chốt prompt chấm) · run.py</a:t>
-            </a:r>
-            <a:endParaRPr lang="en-US" sz="1150" dirty="0"/>
-          </a:p>
-        </p:txBody>
-      </p:sp>
-      <p:sp>
-        <p:nvSpPr>
-          <p:cNvPr id="30" name="Shape 27"/>
-          <p:cNvSpPr/>
-          <p:nvPr/>
-        </p:nvSpPr>
-        <p:spPr>
-          <a:xfrm>
-            <a:off x="566928" y="4645152"/>
-            <a:ext cx="11045952" cy="658368"/>
-          </a:xfrm>
-          <a:prstGeom prst="rect">
-            <a:avLst/>
-          </a:prstGeom>
-          <a:solidFill>
-            <a:srgbClr val="ECEBF7"/>
-          </a:solidFill>
-          <a:ln w="12700">
-            <a:solidFill>
-              <a:srgbClr val="ECEBF7"/>
-            </a:solidFill>
-            <a:prstDash val="solid"/>
-          </a:ln>
-        </p:spPr>
-        <p:txBody>
-          <a:bodyPr/>
-          <a:p/>
-        </p:txBody>
-      </p:sp>
-      <p:sp>
-        <p:nvSpPr>
-          <p:cNvPr id="31" name="Shape 28"/>
-          <p:cNvSpPr/>
-          <p:nvPr/>
-        </p:nvSpPr>
-        <p:spPr>
-          <a:xfrm>
-            <a:off x="566928" y="4645152"/>
-            <a:ext cx="1371600" cy="658368"/>
-          </a:xfrm>
-          <a:prstGeom prst="rect">
-            <a:avLst/>
-          </a:prstGeom>
-          <a:solidFill>
-            <a:srgbClr val="13123A"/>
-          </a:solidFill>
-          <a:ln w="12700">
-            <a:solidFill>
-              <a:srgbClr val="13123A"/>
-            </a:solidFill>
-            <a:prstDash val="solid"/>
-          </a:ln>
-        </p:spPr>
-        <p:txBody>
-          <a:bodyPr/>
-          <a:p/>
-        </p:txBody>
-      </p:sp>
-      <p:sp>
-        <p:nvSpPr>
-          <p:cNvPr id="32" name="Text 29"/>
-          <p:cNvSpPr txBox="1"/>
-          <p:nvPr/>
-        </p:nvSpPr>
-        <p:spPr>
-          <a:xfrm>
-            <a:off x="566928" y="4645152"/>
-            <a:ext cx="1371600" cy="658368"/>
-          </a:xfrm>
-          <a:prstGeom prst="rect">
-            <a:avLst/>
-          </a:prstGeom>
-          <a:noFill/>
-          <a:ln/>
-        </p:spPr>
-        <p:txBody>
-          <a:bodyPr wrap="square" lIns="0" tIns="0" rIns="0" bIns="0" rtlCol="0" anchor="ctr"/>
-          <a:lstStyle/>
-          <a:p>
-            <a:pPr algn="ctr" indent="0" marL="0">
-              <a:buNone/>
-            </a:pPr>
-            <a:r>
-              <a:rPr lang="en-US" sz="1550" b="1" dirty="0">
-                <a:solidFill>
-                  <a:srgbClr val="FFFFFF"/>
-                </a:solidFill>
-                <a:latin typeface="Calibri" pitchFamily="34" charset="0"/>
-                <a:ea typeface="Calibri" pitchFamily="34" charset="-122"/>
-                <a:cs typeface="Calibri" pitchFamily="34" charset="-120"/>
-              </a:rPr>
-              <a:t>NGÀY 5–6</a:t>
-            </a:r>
-            <a:endParaRPr lang="en-US" sz="1200" dirty="0"/>
-          </a:p>
-        </p:txBody>
-      </p:sp>
-      <p:sp>
-        <p:nvSpPr>
-          <p:cNvPr id="33" name="Text 30"/>
-          <p:cNvSpPr txBox="1"/>
-          <p:nvPr/>
-        </p:nvSpPr>
-        <p:spPr>
-          <a:xfrm>
-            <a:off x="2103120" y="4645152"/>
-            <a:ext cx="548640" cy="658368"/>
-          </a:xfrm>
-          <a:prstGeom prst="rect">
-            <a:avLst/>
-          </a:prstGeom>
-          <a:noFill/>
-          <a:ln/>
-        </p:spPr>
-        <p:txBody>
-          <a:bodyPr wrap="square" lIns="0" tIns="0" rIns="0" bIns="0" rtlCol="0" anchor="ctr"/>
-          <a:lstStyle/>
-          <a:p>
-            <a:pPr indent="0" marL="0">
-              <a:buNone/>
-            </a:pPr>
-            <a:r>
-              <a:rPr lang="en-US" sz="1700" b="1" dirty="0">
-                <a:solidFill>
-                  <a:srgbClr val="E9970B"/>
-                </a:solidFill>
-                <a:latin typeface="Calibri" pitchFamily="34" charset="0"/>
-                <a:ea typeface="Calibri" pitchFamily="34" charset="-122"/>
-                <a:cs typeface="Calibri" pitchFamily="34" charset="-120"/>
-              </a:rPr>
-              <a:t>A+B</a:t>
-            </a:r>
-            <a:endParaRPr lang="en-US" sz="1300" dirty="0"/>
-          </a:p>
-        </p:txBody>
-      </p:sp>
-      <p:sp>
-        <p:nvSpPr>
-          <p:cNvPr id="34" name="Text 31"/>
-          <p:cNvSpPr txBox="1"/>
-          <p:nvPr/>
-        </p:nvSpPr>
-        <p:spPr>
-          <a:xfrm>
-            <a:off x="2697480" y="4645152"/>
-            <a:ext cx="2651760" cy="658368"/>
-          </a:xfrm>
-          <a:prstGeom prst="rect">
-            <a:avLst/>
-          </a:prstGeom>
-          <a:noFill/>
-          <a:ln/>
-        </p:spPr>
-        <p:txBody>
-          <a:bodyPr wrap="square" lIns="0" tIns="0" rIns="0" bIns="0" rtlCol="0" anchor="ctr"/>
-          <a:lstStyle/>
-          <a:p>
-            <a:pPr indent="0" marL="0">
-              <a:buNone/>
-            </a:pPr>
-            <a:r>
-              <a:rPr lang="en-US" sz="1700" b="1" dirty="0">
-                <a:solidFill>
-                  <a:srgbClr val="13123A"/>
-                </a:solidFill>
-                <a:latin typeface="Cambria" pitchFamily="34" charset="0"/>
-                <a:ea typeface="Cambria" pitchFamily="34" charset="-122"/>
-                <a:cs typeface="Cambria" pitchFamily="34" charset="-120"/>
-              </a:rPr>
-              <a:t>Thực nghiệm &amp; phân tích lỗi</a:t>
-            </a:r>
-            <a:endParaRPr lang="en-US" sz="1300" dirty="0"/>
-          </a:p>
-        </p:txBody>
-      </p:sp>
-      <p:sp>
-        <p:nvSpPr>
-          <p:cNvPr id="35" name="Text 32"/>
-          <p:cNvSpPr txBox="1"/>
-          <p:nvPr/>
-        </p:nvSpPr>
-        <p:spPr>
-          <a:xfrm>
-            <a:off x="5394960" y="4645152"/>
-            <a:ext cx="6080760" cy="658368"/>
-          </a:xfrm>
-          <a:prstGeom prst="rect">
-            <a:avLst/>
-          </a:prstGeom>
-          <a:noFill/>
-          <a:ln/>
-        </p:spPr>
-        <p:txBody>
-          <a:bodyPr wrap="square" lIns="0" tIns="0" rIns="0" bIns="0" rtlCol="0" anchor="ctr"/>
-          <a:lstStyle/>
-          <a:p>
-            <a:pPr indent="0" marL="0">
-              <a:buNone/>
-            </a:pPr>
-            <a:r>
-              <a:rPr lang="en-US" sz="1500" dirty="0">
-                <a:solidFill>
-                  <a:srgbClr val="4A4E63"/>
-                </a:solidFill>
-                <a:latin typeface="Calibri" pitchFamily="34" charset="0"/>
-                <a:ea typeface="Calibri" pitchFamily="34" charset="-122"/>
-                <a:cs typeface="Calibri" pitchFamily="34" charset="-120"/>
-              </a:rPr>
-              <a:t>chạy --n 100 trên dev · phân tích 10 câu sai đầu tiên · đo tỉ lệ token Việt/Anh bằng tokenizer thật</a:t>
-            </a:r>
-            <a:endParaRPr lang="en-US" sz="1150" dirty="0"/>
-          </a:p>
-        </p:txBody>
-      </p:sp>
-      <p:sp>
-        <p:nvSpPr>
-          <p:cNvPr id="36" name="Shape 33"/>
-          <p:cNvSpPr/>
-          <p:nvPr/>
-        </p:nvSpPr>
-        <p:spPr>
-          <a:xfrm>
-            <a:off x="566928" y="5394960"/>
-            <a:ext cx="11045952" cy="658368"/>
-          </a:xfrm>
-          <a:prstGeom prst="rect">
-            <a:avLst/>
-          </a:prstGeom>
-          <a:solidFill>
-            <a:srgbClr val="F7F7FB"/>
-          </a:solidFill>
-          <a:ln w="12700">
-            <a:solidFill>
-              <a:srgbClr val="F7F7FB"/>
-            </a:solidFill>
-            <a:prstDash val="solid"/>
-          </a:ln>
-        </p:spPr>
-        <p:txBody>
-          <a:bodyPr/>
-          <a:p/>
-        </p:txBody>
-      </p:sp>
-      <p:sp>
-        <p:nvSpPr>
-          <p:cNvPr id="37" name="Shape 34"/>
-          <p:cNvSpPr/>
-          <p:nvPr/>
-        </p:nvSpPr>
-        <p:spPr>
-          <a:xfrm>
-            <a:off x="566928" y="5394960"/>
-            <a:ext cx="1371600" cy="658368"/>
-          </a:xfrm>
-          <a:prstGeom prst="rect">
-            <a:avLst/>
-          </a:prstGeom>
-          <a:solidFill>
-            <a:srgbClr val="13123A"/>
-          </a:solidFill>
-          <a:ln w="12700">
-            <a:solidFill>
-              <a:srgbClr val="13123A"/>
-            </a:solidFill>
-            <a:prstDash val="solid"/>
-          </a:ln>
-        </p:spPr>
-        <p:txBody>
-          <a:bodyPr/>
-          <a:p/>
-        </p:txBody>
-      </p:sp>
-      <p:sp>
-        <p:nvSpPr>
-          <p:cNvPr id="38" name="Text 35"/>
-          <p:cNvSpPr txBox="1"/>
-          <p:nvPr/>
-        </p:nvSpPr>
-        <p:spPr>
-          <a:xfrm>
-            <a:off x="566928" y="5394960"/>
-            <a:ext cx="1371600" cy="658368"/>
-          </a:xfrm>
-          <a:prstGeom prst="rect">
-            <a:avLst/>
-          </a:prstGeom>
-          <a:noFill/>
-          <a:ln/>
-        </p:spPr>
-        <p:txBody>
-          <a:bodyPr wrap="square" lIns="0" tIns="0" rIns="0" bIns="0" rtlCol="0" anchor="ctr"/>
-          <a:lstStyle/>
-          <a:p>
-            <a:pPr algn="ctr" indent="0" marL="0">
-              <a:buNone/>
-            </a:pPr>
-            <a:r>
-              <a:rPr lang="en-US" sz="1550" b="1" dirty="0">
-                <a:solidFill>
-                  <a:srgbClr val="FFFFFF"/>
-                </a:solidFill>
-                <a:latin typeface="Calibri" pitchFamily="34" charset="0"/>
-                <a:ea typeface="Calibri" pitchFamily="34" charset="-122"/>
-                <a:cs typeface="Calibri" pitchFamily="34" charset="-120"/>
-              </a:rPr>
-              <a:t>NGÀY 7</a:t>
-            </a:r>
-            <a:endParaRPr lang="en-US" sz="1200" dirty="0"/>
-          </a:p>
-        </p:txBody>
-      </p:sp>
-      <p:sp>
-        <p:nvSpPr>
-          <p:cNvPr id="39" name="Text 36"/>
-          <p:cNvSpPr txBox="1"/>
-          <p:nvPr/>
-        </p:nvSpPr>
-        <p:spPr>
-          <a:xfrm>
-            <a:off x="2103120" y="5394960"/>
-            <a:ext cx="548640" cy="658368"/>
-          </a:xfrm>
-          <a:prstGeom prst="rect">
-            <a:avLst/>
-          </a:prstGeom>
-          <a:noFill/>
-          <a:ln/>
-        </p:spPr>
-        <p:txBody>
-          <a:bodyPr wrap="square" lIns="0" tIns="0" rIns="0" bIns="0" rtlCol="0" anchor="ctr"/>
-          <a:lstStyle/>
-          <a:p>
-            <a:pPr indent="0" marL="0">
-              <a:buNone/>
-            </a:pPr>
-            <a:r>
-              <a:rPr lang="en-US" sz="1700" b="1" dirty="0">
-                <a:solidFill>
-                  <a:srgbClr val="E9970B"/>
-                </a:solidFill>
-                <a:latin typeface="Calibri" pitchFamily="34" charset="0"/>
-                <a:ea typeface="Calibri" pitchFamily="34" charset="-122"/>
-                <a:cs typeface="Calibri" pitchFamily="34" charset="-120"/>
-              </a:rPr>
-              <a:t>A+B</a:t>
-            </a:r>
-            <a:endParaRPr lang="en-US" sz="1300" dirty="0"/>
-          </a:p>
-        </p:txBody>
-      </p:sp>
-      <p:sp>
-        <p:nvSpPr>
-          <p:cNvPr id="40" name="Text 37"/>
-          <p:cNvSpPr txBox="1"/>
-          <p:nvPr/>
-        </p:nvSpPr>
-        <p:spPr>
-          <a:xfrm>
-            <a:off x="2697480" y="5394960"/>
-            <a:ext cx="2651760" cy="658368"/>
-          </a:xfrm>
-          <a:prstGeom prst="rect">
-            <a:avLst/>
-          </a:prstGeom>
-          <a:noFill/>
-          <a:ln/>
-        </p:spPr>
-        <p:txBody>
-          <a:bodyPr wrap="square" lIns="0" tIns="0" rIns="0" bIns="0" rtlCol="0" anchor="ctr"/>
-          <a:lstStyle/>
-          <a:p>
-            <a:pPr indent="0" marL="0">
-              <a:buNone/>
-            </a:pPr>
-            <a:r>
-              <a:rPr lang="en-US" sz="1700" b="1" dirty="0">
-                <a:solidFill>
-                  <a:srgbClr val="13123A"/>
-                </a:solidFill>
-                <a:latin typeface="Cambria" pitchFamily="34" charset="0"/>
-                <a:ea typeface="Cambria" pitchFamily="34" charset="-122"/>
-                <a:cs typeface="Cambria" pitchFamily="34" charset="-120"/>
-              </a:rPr>
-              <a:t>Tổng hợp &amp; báo cáo</a:t>
-            </a:r>
-            <a:endParaRPr lang="en-US" sz="1300" dirty="0"/>
-          </a:p>
-        </p:txBody>
-      </p:sp>
-      <p:sp>
-        <p:nvSpPr>
-          <p:cNvPr id="41" name="Text 38"/>
-          <p:cNvSpPr txBox="1"/>
-          <p:nvPr/>
-        </p:nvSpPr>
-        <p:spPr>
-          <a:xfrm>
-            <a:off x="5394960" y="5394960"/>
-            <a:ext cx="6080760" cy="658368"/>
-          </a:xfrm>
-          <a:prstGeom prst="rect">
-            <a:avLst/>
-          </a:prstGeom>
-          <a:noFill/>
-          <a:ln/>
-        </p:spPr>
-        <p:txBody>
-          <a:bodyPr wrap="square" lIns="0" tIns="0" rIns="0" bIns="0" rtlCol="0" anchor="ctr"/>
-          <a:lstStyle/>
-          <a:p>
-            <a:pPr indent="0" marL="0">
-              <a:buNone/>
-            </a:pPr>
-            <a:r>
-              <a:rPr lang="en-US" sz="1500" dirty="0">
-                <a:solidFill>
-                  <a:srgbClr val="4A4E63"/>
-                </a:solidFill>
-                <a:latin typeface="Calibri" pitchFamily="34" charset="0"/>
-                <a:ea typeface="Calibri" pitchFamily="34" charset="-122"/>
-                <a:cs typeface="Calibri" pitchFamily="34" charset="-120"/>
-              </a:rPr>
-              <a:t>điền bảng số · báo cáo 1 trang · bảng phân loại lỗi</a:t>
-            </a:r>
-            <a:endParaRPr lang="en-US" sz="1150" dirty="0"/>
-          </a:p>
-        </p:txBody>
-      </p:sp>
-      <p:sp>
-        <p:nvSpPr>
-          <p:cNvPr id="42" name="Text 39"/>
-          <p:cNvSpPr txBox="1"/>
-          <p:nvPr/>
-        </p:nvSpPr>
-        <p:spPr>
-          <a:xfrm>
-            <a:off x="566928" y="6172200"/>
-            <a:ext cx="11045952" cy="256032"/>
-          </a:xfrm>
-          <a:prstGeom prst="rect">
-            <a:avLst/>
-          </a:prstGeom>
-          <a:noFill/>
-          <a:ln/>
-        </p:spPr>
-        <p:txBody>
-          <a:bodyPr wrap="square" lIns="0" tIns="0" rIns="0" bIns="0" rtlCol="0" anchor="t"/>
-          <a:lstStyle/>
-          <a:p>
-            <a:pPr indent="0" marL="0">
-              <a:buNone/>
-            </a:pPr>
-            <a:r>
-              <a:rPr lang="en-US" sz="1350" i="1" dirty="0">
-                <a:solidFill>
-                  <a:srgbClr val="6B6F82"/>
-                </a:solidFill>
-                <a:latin typeface="Calibri" pitchFamily="34" charset="0"/>
-                <a:ea typeface="Calibri" pitchFamily="34" charset="-122"/>
-                <a:cs typeface="Calibri" pitchFamily="34" charset="-120"/>
-              </a:rPr>
-              <a:t>A = trích xuất &amp; đánh giá · B = chỉ mục &amp; agent · giao diện giữa hai bên là dataclass Fact (đã cố định trong ledger.py)</a:t>
-            </a:r>
-            <a:endParaRPr lang="en-US" sz="1050" dirty="0"/>
           </a:p>
         </p:txBody>
       </p:sp>

--- a/Tuan 3/bao-cao-tuan-3.pptx
+++ b/Tuan 3/bao-cao-tuan-3.pptx
@@ -4,26 +4,25 @@
   <p:sldMasterIdLst>
     <p:sldMasterId id="2147483648" r:id="rId1"/>
   </p:sldMasterIdLst>
+  <p:notesMasterIdLst>
+    <p:notesMasterId r:id="rId16"/>
+  </p:notesMasterIdLst>
   <p:sldIdLst>
     <p:sldId id="256" r:id="rId2"/>
     <p:sldId id="257" r:id="rId3"/>
-    <p:sldId id="267" r:id="rId18"/>
-    <p:sldId id="269" r:id="rId20"/>
-    <p:sldId id="270" r:id="rId21"/>
-    <p:sldId id="258" r:id="rId4"/>
-    <p:sldId id="259" r:id="rId5"/>
-    <p:sldId id="260" r:id="rId6"/>
-    <p:sldId id="261" r:id="rId7"/>
-    <p:sldId id="262" r:id="rId8"/>
-    <p:sldId id="263" r:id="rId9"/>
-    <p:sldId id="264" r:id="rId10"/>
-    <p:sldId id="265" r:id="rId11"/>
-    <p:sldId id="268" r:id="rId19"/>
-    <p:sldId id="266" r:id="rId12"/>
+    <p:sldId id="267" r:id="rId4"/>
+    <p:sldId id="269" r:id="rId5"/>
+    <p:sldId id="270" r:id="rId6"/>
+    <p:sldId id="258" r:id="rId7"/>
+    <p:sldId id="259" r:id="rId8"/>
+    <p:sldId id="260" r:id="rId9"/>
+    <p:sldId id="261" r:id="rId10"/>
+    <p:sldId id="262" r:id="rId11"/>
+    <p:sldId id="264" r:id="rId12"/>
+    <p:sldId id="265" r:id="rId13"/>
+    <p:sldId id="268" r:id="rId14"/>
+    <p:sldId id="266" r:id="rId15"/>
   </p:sldIdLst>
-  <p:notesMasterIdLst>
-    <p:notesMasterId r:id="rId13"/>
-  </p:notesMasterIdLst>
   <p:sldSz cx="12192000" cy="6858000"/>
   <p:notesSz cx="6858000" cy="12192000"/>
   <p:defaultTextStyle>
@@ -118,6 +117,11 @@
       </a:defRPr>
     </a:lvl9pPr>
   </p:defaultTextStyle>
+  <p:extLst>
+    <p:ext uri="{EFAFB233-063F-42B5-8137-9DF3F51BA10A}">
+      <p15:sldGuideLst xmlns:p15="http://schemas.microsoft.com/office/powerpoint/2012/main"/>
+    </p:ext>
+  </p:extLst>
 </p:presentation>
 </file>
 
@@ -143,234 +147,10 @@
           <a:chExt cx="0" cy="0"/>
         </a:xfrm>
       </p:grpSpPr>
-      <p:sp>
-        <p:nvSpPr>
-          <p:cNvPr id="2" name="Header Placeholder 1"/>
-          <p:cNvSpPr>
-            <a:spLocks noGrp="1"/>
-          </p:cNvSpPr>
-          <p:nvPr>
-            <p:ph type="hdr" sz="quarter"/>
-          </p:nvPr>
-        </p:nvSpPr>
-        <p:spPr>
-          <a:xfrm>
-            <a:off x="0" y="0"/>
-            <a:ext cx="2971800" cy="458788"/>
-          </a:xfrm>
-          <a:prstGeom prst="rect">
-            <a:avLst/>
-          </a:prstGeom>
-        </p:spPr>
-        <p:txBody>
-          <a:bodyPr vert="horz" lIns="91440" tIns="45720" rIns="91440" bIns="45720" rtlCol="0"/>
-          <a:lstStyle>
-            <a:lvl1pPr algn="l">
-              <a:defRPr sz="1200"/>
-            </a:lvl1pPr>
-          </a:lstStyle>
-          <a:p>
-            <a:endParaRPr lang="en-US"/>
-          </a:p>
-        </p:txBody>
-      </p:sp>
-      <p:sp>
-        <p:nvSpPr>
-          <p:cNvPr id="3" name="Date Placeholder 2"/>
-          <p:cNvSpPr>
-            <a:spLocks noGrp="1"/>
-          </p:cNvSpPr>
-          <p:nvPr>
-            <p:ph type="dt" idx="1"/>
-          </p:nvPr>
-        </p:nvSpPr>
-        <p:spPr>
-          <a:xfrm>
-            <a:off x="3884613" y="0"/>
-            <a:ext cx="2971800" cy="458788"/>
-          </a:xfrm>
-          <a:prstGeom prst="rect">
-            <a:avLst/>
-          </a:prstGeom>
-        </p:spPr>
-        <p:txBody>
-          <a:bodyPr vert="horz" lIns="91440" tIns="45720" rIns="91440" bIns="45720" rtlCol="0"/>
-          <a:lstStyle>
-            <a:lvl1pPr algn="r">
-              <a:defRPr sz="1200"/>
-            </a:lvl1pPr>
-          </a:lstStyle>
-          <a:p>
-            <a:fld id="{5282F153-3F37-0F45-9E97-73ACFA13230C}" type="datetimeFigureOut">
-              <a:rPr lang="en-US"/>
-              <a:t>7/23/19</a:t>
-            </a:fld>
-            <a:endParaRPr lang="en-US"/>
-          </a:p>
-        </p:txBody>
-      </p:sp>
-      <p:sp>
-        <p:nvSpPr>
-          <p:cNvPr id="4" name="Slide Image Placeholder 3"/>
-          <p:cNvSpPr>
-            <a:spLocks noGrp="1" noRot="1" noChangeAspect="1"/>
-          </p:cNvSpPr>
-          <p:nvPr>
-            <p:ph type="sldImg" idx="2"/>
-          </p:nvPr>
-        </p:nvSpPr>
-        <p:spPr>
-          <a:xfrm>
-            <a:off x="685800" y="1143000"/>
-            <a:ext cx="5486400" cy="3086100"/>
-          </a:xfrm>
-          <a:prstGeom prst="rect">
-            <a:avLst/>
-          </a:prstGeom>
-          <a:noFill/>
-          <a:ln w="12700">
-            <a:solidFill>
-              <a:prstClr val="black"/>
-            </a:solidFill>
-          </a:ln>
-        </p:spPr>
-        <p:txBody>
-          <a:bodyPr vert="horz" lIns="91440" tIns="45720" rIns="91440" bIns="45720" rtlCol="0" anchor="ctr"/>
-          <a:lstStyle/>
-          <a:p>
-            <a:endParaRPr lang="en-US"/>
-          </a:p>
-        </p:txBody>
-      </p:sp>
-      <p:sp>
-        <p:nvSpPr>
-          <p:cNvPr id="5" name="Notes Placeholder 4"/>
-          <p:cNvSpPr>
-            <a:spLocks noGrp="1"/>
-          </p:cNvSpPr>
-          <p:nvPr>
-            <p:ph type="body" sz="quarter" idx="3"/>
-          </p:nvPr>
-        </p:nvSpPr>
-        <p:spPr>
-          <a:xfrm>
-            <a:off x="685800" y="4400550"/>
-            <a:ext cx="5486400" cy="3600450"/>
-          </a:xfrm>
-          <a:prstGeom prst="rect">
-            <a:avLst/>
-          </a:prstGeom>
-        </p:spPr>
-        <p:txBody>
-          <a:bodyPr vert="horz" lIns="91440" tIns="45720" rIns="91440" bIns="45720" rtlCol="0"/>
-          <a:lstStyle/>
-          <a:p>
-            <a:pPr lvl="0"/>
-            <a:r>
-              <a:rPr lang="en-US"/>
-              <a:t>Click to edit Master text styles</a:t>
-            </a:r>
-          </a:p>
-          <a:p>
-            <a:pPr lvl="1"/>
-            <a:r>
-              <a:rPr lang="en-US"/>
-              <a:t>Second level</a:t>
-            </a:r>
-          </a:p>
-          <a:p>
-            <a:pPr lvl="2"/>
-            <a:r>
-              <a:rPr lang="en-US"/>
-              <a:t>Third level</a:t>
-            </a:r>
-          </a:p>
-          <a:p>
-            <a:pPr lvl="3"/>
-            <a:r>
-              <a:rPr lang="en-US"/>
-              <a:t>Fourth level</a:t>
-            </a:r>
-          </a:p>
-          <a:p>
-            <a:pPr lvl="4"/>
-            <a:r>
-              <a:rPr lang="en-US"/>
-              <a:t>Fifth level</a:t>
-            </a:r>
-          </a:p>
-        </p:txBody>
-      </p:sp>
-      <p:sp>
-        <p:nvSpPr>
-          <p:cNvPr id="6" name="Footer Placeholder 5"/>
-          <p:cNvSpPr>
-            <a:spLocks noGrp="1"/>
-          </p:cNvSpPr>
-          <p:nvPr>
-            <p:ph type="ftr" sz="quarter" idx="4"/>
-          </p:nvPr>
-        </p:nvSpPr>
-        <p:spPr>
-          <a:xfrm>
-            <a:off x="0" y="8685213"/>
-            <a:ext cx="2971800" cy="458787"/>
-          </a:xfrm>
-          <a:prstGeom prst="rect">
-            <a:avLst/>
-          </a:prstGeom>
-        </p:spPr>
-        <p:txBody>
-          <a:bodyPr vert="horz" lIns="91440" tIns="45720" rIns="91440" bIns="45720" rtlCol="0" anchor="b"/>
-          <a:lstStyle>
-            <a:lvl1pPr algn="l">
-              <a:defRPr sz="1200"/>
-            </a:lvl1pPr>
-          </a:lstStyle>
-          <a:p>
-            <a:endParaRPr lang="en-US"/>
-          </a:p>
-        </p:txBody>
-      </p:sp>
-      <p:sp>
-        <p:nvSpPr>
-          <p:cNvPr id="7" name="Slide Number Placeholder 6"/>
-          <p:cNvSpPr>
-            <a:spLocks noGrp="1"/>
-          </p:cNvSpPr>
-          <p:nvPr>
-            <p:ph type="sldNum" sz="quarter" idx="5"/>
-          </p:nvPr>
-        </p:nvSpPr>
-        <p:spPr>
-          <a:xfrm>
-            <a:off x="3884613" y="8685213"/>
-            <a:ext cx="2971800" cy="458787"/>
-          </a:xfrm>
-          <a:prstGeom prst="rect">
-            <a:avLst/>
-          </a:prstGeom>
-        </p:spPr>
-        <p:txBody>
-          <a:bodyPr vert="horz" lIns="91440" tIns="45720" rIns="91440" bIns="45720" rtlCol="0" anchor="b"/>
-          <a:lstStyle>
-            <a:lvl1pPr algn="r">
-              <a:defRPr sz="1200"/>
-            </a:lvl1pPr>
-          </a:lstStyle>
-          <a:p>
-            <a:fld id="{CE5E9CC1-C706-0F49-92D6-E571CC5EEA8F}" type="slidenum">
-              <a:rPr lang="en-US"/>
-              <a:t>‹#›</a:t>
-            </a:fld>
-            <a:endParaRPr lang="en-US"/>
-          </a:p>
-        </p:txBody>
-      </p:sp>
     </p:spTree>
     <p:extLst>
       <p:ext uri="{BB962C8B-B14F-4D97-AF65-F5344CB8AC3E}">
-        <p14:creationId xmlns:p14="http://schemas.microsoft.com/office/powerpoint/2010/main" val="1024086991"/>
+        <p14:creationId xmlns:p14="http://schemas.microsoft.com/office/powerpoint/2010/main" val="300199657"/>
       </p:ext>
     </p:extLst>
   </p:cSld>
@@ -518,7 +298,9 @@
               <a:t>Em xin chào anh. Em xin trình bày báo cáo tuần 3 của đề tài xây dựng bộ nhớ dài hạn cho LLM Agent.</a:t>
             </a:r>
           </a:p>
-          <a:p/>
+          <a:p>
+            <a:endParaRPr/>
+          </a:p>
           <a:p>
             <a:r>
               <a:t>Tuần 2 nhóm đã khóa thiết kế. Tuần 3 là tuần chuyển từ thiết kế sang mã nguồn. Kết quả chính của tuần là kho ký ức SQLite đã hoàn thành kèm bộ kiểm thử, cùng ba notebook khảo sát dữ liệu, và một kế hoạch chi tiết để dựng pipeline chạy đầu–cuối trong phần còn lại của tuần. Năng lực nhắm tới là năng lực số 1: trích xuất và nhớ chính xác.</a:t>
@@ -607,7 +389,15 @@
           <a:lstStyle/>
           <a:p>
             <a:r>
-              <a:t>Bốn rủi ro riêng của tuần 3. Hạn mức Gemini 1.500 lượt mỗi ngày có thể cạn giữa lúc chạy eval: xử lý bằng cache trích xuất theo sha1 của lượt. Phiên trong LongMemEval-S rất dài nên trích xuất chậm: tuần này chạy 100 câu trước, đo tốc độ rồi mới quyết định mở rộng. Lần tải đầu của BGE-M3 nặng: tải sẵn và ghim phiên bản. Và hai người cùng sửa một file: kho ký ức và extractor ở hai thư mục riêng, giao diện là dataclass Fact đã cố định.</a:t>
+              <a:t>Kho ký ức có 16 test, đạt toàn bộ, chạy dưới một giây, không gọi mạng. Mỗi test kiểm chứng một bất biến đã cam kết trong tài liệu kiến trúc, nên test thất bại nghĩa là kiến trúc bị vi phạm chứ không phải lỗi vặt.</a:t>
+            </a:r>
+          </a:p>
+          <a:p>
+            <a:endParaRPr/>
+          </a:p>
+          <a:p>
+            <a:r>
+              <a:t>[Đọc lần lượt các dòng bên phải.] Seq tăng đơn điệu và không trùng. Fact từ lượt trợ lý không vào chỉ mục, chỉ hiển thị sau khi người dùng xác nhận. Mỗi slot chỉ trả về bản seq lớn nhất và loại bản đã xóa. Khóa tiếng Việt có dấu bị từ chối với lý do `attribute_not_ascii`; khóa như `Japanese Level` hay `2nd_language` bị từ chối với lý do `attribute_bad_format`. Mọi lần từ chối đều được ghi lại, nên tính được tỉ lệ khóa lỗi cho báo cáo. Cuối cùng, chỉ mục nhúng bản tiếng Anh chuẩn hóa nhưng metadata vẫn giữ ngôn ngữ gốc là tiếng Việt.</a:t>
             </a:r>
           </a:p>
         </p:txBody>
@@ -693,31 +483,15 @@
           <a:lstStyle/>
           <a:p>
             <a:r>
-              <a:t>Tổng kết tuần 3. Đã xong: kho ký ức SQLite với schema, lớp ledger và 16 test đạt; ba notebook trên LongMemEval-S gồm khảo sát và chia dev/test, nhúng BGE-M3 và đo Recall@k trên dev; và kế hoạch chi tiết bảy ngày cho 11 file mã nguồn. Còn lại trong tuần: adapter, FactExtractor, chỉ mục Chroma, agent, bộ đánh giá, rồi chạy 100 câu và phân loại lỗi để có đường cơ sở đầu tiên.</a:t>
-            </a:r>
-          </a:p>
-          <a:p/>
-          <a:p>
-            <a:r>
-              <a:t>Em có hai vấn đề xin ý kiến anh.</a:t>
-            </a:r>
-          </a:p>
-          <a:p/>
-          <a:p>
-            <a:r>
-              <a:t>Một, với đường cơ sở LongMemEval-S, tuần này nhóm chạy 100 câu trên tập dev. Anh thấy nên mở rộng ngay lên toàn bộ tập, hay giữ 100 câu cho đến khi có reranker ở tuần 6 rồi mới chạy toàn bộ?</a:t>
-            </a:r>
-          </a:p>
-          <a:p/>
-          <a:p>
-            <a:r>
-              <a:t>Hai, với cấu hình đối chứng llm-judge, tức để LLM tự chọn bản mới nhất thay cho seq lớn nhất, anh thấy có đáng dành thời gian chạy không, hay coi cơ chế tất định là hiển nhiên đúng và bỏ cấu hình này?</a:t>
-            </a:r>
-          </a:p>
-          <a:p/>
-          <a:p>
-            <a:r>
-              <a:t>Em xin hết phần báo cáo tuần 3 và mong nhận được góp ý của anh. Em xin cảm ơn.</a:t>
+              <a:t>Cuối tuần nhóm sẽ báo cáo sáu nhóm số. Accuracy theo từng loại câu hỏi của LongMemEval-S làm đường cơ sở. Tỉ lệ khóa slot bị từ chối, tách theo lý do, đo trực tiếp chất lượng prompt trích xuất. Số fact mỗi lượt và số slot phân biệt. Độ trễ p50 và p95 tách theo pha. Token mỗi truy vấn tách theo ngôn ngữ, vì gộp tiếng Việt với tiếng Anh là số vô nghĩa. Và phân loại mười câu sai đầu tiên để quyết định thứ tự ưu tiên tuần 4 đến 6.</a:t>
+            </a:r>
+          </a:p>
+          <a:p>
+            <a:endParaRPr/>
+          </a:p>
+          <a:p>
+            <a:r>
+              <a:t>[Chỉ ba thẻ bên dưới.] Ba nguyên tắc để tránh sai lệch. Một: không triển khai slot và seq trong tuần 3, dù schema đã có cột, vì làm sớm thì tuần 4 không còn gì để so sánh. Hai: cache ngay từ ngày đầu, nếu không mỗi lần chạy lại 100 câu phải làm từ đầu. Ba: chốt mô hình chấm và prompt chấm ngay tuần này, vì đổi giữa chừng làm mọi số đo trước đó mất giá trị so sánh, theo khuyến nghị của Zheng và cộng sự.</a:t>
             </a:r>
           </a:p>
         </p:txBody>
@@ -759,7 +533,7 @@
 </file>
 
 <file path=ppt/notesSlides/notesSlide12.xml><?xml version="1.0" encoding="utf-8"?>
-<p:notes xmlns:a="http://schemas.openxmlformats.org/drawingml/2006/main" xmlns:p="http://schemas.openxmlformats.org/presentationml/2006/main" xmlns:r="http://schemas.openxmlformats.org/officeDocument/2006/relationships">
+<p:notes xmlns:a="http://schemas.openxmlformats.org/drawingml/2006/main" xmlns:r="http://schemas.openxmlformats.org/officeDocument/2006/relationships" xmlns:p="http://schemas.openxmlformats.org/presentationml/2006/main">
   <p:cSld>
     <p:spTree>
       <p:nvGrpSpPr>
@@ -779,10 +553,10 @@
         <p:nvSpPr>
           <p:cNvPr id="2" name="Slide Image Placeholder 1"/>
           <p:cNvSpPr>
-            <a:spLocks noGrp="1"/>
+            <a:spLocks noGrp="1" noRot="1" noChangeAspect="1"/>
           </p:cNvSpPr>
           <p:nvPr>
-            <p:ph type="sldImg" idx="2"/>
+            <p:ph type="sldImg"/>
           </p:nvPr>
         </p:nvSpPr>
         <p:spPr/>
@@ -794,7 +568,7 @@
             <a:spLocks noGrp="1"/>
           </p:cNvSpPr>
           <p:nvPr>
-            <p:ph type="body" idx="3" sz="quarter"/>
+            <p:ph type="body" idx="1"/>
           </p:nvPr>
         </p:nvSpPr>
         <p:spPr/>
@@ -803,55 +577,7 @@
           <a:lstStyle/>
           <a:p>
             <a:r>
-              <a:t>Trước khi vào phần mã, em xin trình bày ba notebook khảo sát trên LongMemEval-S. Cả ba đều không tốn chi phí API.</a:t>
-            </a:r>
-          </a:p>
-          <a:p/>
-          <a:p>
-            <a:r>
-              <a:t>[Chỉ cột trái tối.] Notebook 01 chạy trên CPU: 500 câu hỏi, 6 loại, tổng cộng phải nạp 23.867 phiên — nếu đi qua API miễn phí sẽ mất khoảng 16 ngày, nên buộc phải nhúng bằng mô hình chạy local. 64,8% số câu cần bằng chứng ở nhiều hơn một phiên, và độ trùng từ vựng trung vị giữa câu hỏi với câu chứa đáp án là 50%. Cuối notebook, nhóm chia dev và test phân tầng theo loại câu hỏi với seed cố định: 150 câu dev để chỉnh tham số, 350 câu test khóa đến tuần 7. Notebook 02 chạy GPU Tesla T4 đúng một lần: nhúng toàn bộ 247.238 đoạn văn bản bằng BGE-M3, mất khoảng 22 phút, kiểm tra nhanh cho thấy cosine của câu chứa đáp án luôn cao hơn rõ rệt so với câu ngẫu nhiên. Notebook 03 chạy CPU, không nhúng lại, so ba đường truy xuất là vector, BM25 và RRF trên 149 câu của tập dev.</a:t>
-            </a:r>
-          </a:p>
-          <a:p/>
-          <a:p>
-            <a:r>
-              <a:t>[Chỉ bảng bên phải.] Mỗi phép đo trả lời một quyết định thiết kế.</a:t>
-            </a:r>
-          </a:p>
-          <a:p/>
-          <a:p>
-            <a:r>
-              <a:t>Thứ nhất, ngưỡng từ chối: độ chồng lấn cosine giữa câu chứa đáp án và lượt ngẫu nhiên là 12,1% — trung bình 0,59 so với 0,34. Chồng lấn không lớn nhưng vẫn còn, nên nhóm giữ quyết định đặt ngưỡng từ chối lên điểm reranker ở tuần 6 thay vì lên cosine thô.</a:t>
-            </a:r>
-          </a:p>
-          <a:p/>
-          <a:p>
-            <a:r>
-              <a:t>Thứ hai, BM25 và RRF: tại k bằng 30, RRF thấp hơn chỉ dùng vector 1,4 điểm nhưng cao hơn chỉ dùng BM25 6,3 điểm. Ở k bằng 10, tức giá trị nhóm định dùng thực tế, RRF cao nhất: 88,3% so với 86,7% của vector và 79,7% của BM25. Vì vậy nhóm vẫn giữ truy xuất lai.</a:t>
-            </a:r>
-          </a:p>
-          <a:p/>
-          <a:p>
-            <a:r>
-              <a:t>Thứ ba, tách truy vấn con: 64,8% số câu cần hơn một phiên bằng chứng, nên QueryPlanner ở tuần 5 là cần thiết.</a:t>
-            </a:r>
-          </a:p>
-          <a:p/>
-          <a:p>
-            <a:r>
-              <a:t>Thứ tư, giá trị k: recall bão hòa quanh k từ 20 đến 30 — vector đạt 95,4% tại k bằng 20, RRF đạt 95% tại k bằng 30.</a:t>
-            </a:r>
-          </a:p>
-          <a:p/>
-          <a:p>
-            <a:r>
-              <a:t>Thứ năm, ưu tiên cải thiện: loại multi-session có recall@10 thấp nhất, 78,6% với RRF, trong khi các loại còn lại đều trên 87%.</a:t>
-            </a:r>
-          </a:p>
-          <a:p/>
-          <a:p>
-            <a:r>
-              <a:t>Lưu ý quan trọng: đây là recall của tầng truy xuất, chưa phải accuracy cuối. Khoảng chênh giữa hai con số sẽ do baseline oracle đo ở tuần 7.</a:t>
+              <a:t>Bốn rủi ro riêng của tuần 3. Hạn mức Gemini 1.500 lượt mỗi ngày có thể cạn giữa lúc chạy eval: xử lý bằng cache trích xuất theo sha1 của lượt. Phiên trong LongMemEval-S rất dài nên trích xuất chậm: tuần này chạy 100 câu trước, đo tốc độ rồi mới quyết định mở rộng. Lần tải đầu của BGE-M3 nặng: tải sẵn và ghim phiên bản. Và hai người cùng sửa một file: kho ký ức và extractor ở hai thư mục riêng, giao diện là dataclass Fact đã cố định.</a:t>
             </a:r>
           </a:p>
         </p:txBody>
@@ -863,12 +589,28 @@
             <a:spLocks noGrp="1"/>
           </p:cNvSpPr>
           <p:nvPr>
-            <p:ph type="sldNum" idx="5" sz="quarter"/>
+            <p:ph type="sldNum" sz="quarter" idx="10"/>
           </p:nvPr>
         </p:nvSpPr>
         <p:spPr/>
+        <p:txBody>
+          <a:bodyPr/>
+          <a:lstStyle/>
+          <a:p>
+            <a:fld id="{F7021451-1387-4CA6-816F-3879F97B5CBC}" type="slidenum">
+              <a:rPr lang="en-US"/>
+              <a:t>12</a:t>
+            </a:fld>
+            <a:endParaRPr lang="en-US"/>
+          </a:p>
+        </p:txBody>
       </p:sp>
     </p:spTree>
+    <p:extLst>
+      <p:ext uri="{BB962C8B-B14F-4D97-AF65-F5344CB8AC3E}">
+        <p14:creationId xmlns:p14="http://schemas.microsoft.com/office/powerpoint/2010/main" val="1024086991"/>
+      </p:ext>
+    </p:extLst>
   </p:cSld>
   <p:clrMapOvr>
     <a:masterClrMapping/>
@@ -877,7 +619,7 @@
 </file>
 
 <file path=ppt/notesSlides/notesSlide13.xml><?xml version="1.0" encoding="utf-8"?>
-<p:notes xmlns:a="http://schemas.openxmlformats.org/drawingml/2006/main" xmlns:p="http://schemas.openxmlformats.org/presentationml/2006/main" xmlns:r="http://schemas.openxmlformats.org/officeDocument/2006/relationships">
+<p:notes xmlns:a="http://schemas.openxmlformats.org/drawingml/2006/main" xmlns:r="http://schemas.openxmlformats.org/officeDocument/2006/relationships" xmlns:p="http://schemas.openxmlformats.org/presentationml/2006/main">
   <p:cSld>
     <p:spTree>
       <p:nvGrpSpPr>
@@ -897,7 +639,7 @@
         <p:nvSpPr>
           <p:cNvPr id="2" name="Slide Image Placeholder 1"/>
           <p:cNvSpPr>
-            <a:spLocks noGrp="1"/>
+            <a:spLocks noGrp="1" noRot="1" noChangeAspect="1"/>
           </p:cNvSpPr>
           <p:nvPr>
             <p:ph type="sldImg" idx="2"/>
@@ -912,7 +654,7 @@
             <a:spLocks noGrp="1"/>
           </p:cNvSpPr>
           <p:nvPr>
-            <p:ph type="body" idx="3" sz="quarter"/>
+            <p:ph type="body" sz="quarter" idx="3"/>
           </p:nvPr>
         </p:nvSpPr>
         <p:spPr/>
@@ -933,7 +675,7 @@
             <a:spLocks noGrp="1"/>
           </p:cNvSpPr>
           <p:nvPr>
-            <p:ph type="sldNum" idx="5" sz="quarter"/>
+            <p:ph type="sldNum" sz="quarter" idx="5"/>
           </p:nvPr>
         </p:nvSpPr>
         <p:spPr/>
@@ -947,7 +689,7 @@
 </file>
 
 <file path=ppt/notesSlides/notesSlide14.xml><?xml version="1.0" encoding="utf-8"?>
-<p:notes xmlns:a="http://schemas.openxmlformats.org/drawingml/2006/main" xmlns:p="http://schemas.openxmlformats.org/presentationml/2006/main" xmlns:r="http://schemas.openxmlformats.org/officeDocument/2006/relationships">
+<p:notes xmlns:a="http://schemas.openxmlformats.org/drawingml/2006/main" xmlns:r="http://schemas.openxmlformats.org/officeDocument/2006/relationships" xmlns:p="http://schemas.openxmlformats.org/presentationml/2006/main">
   <p:cSld>
     <p:spTree>
       <p:nvGrpSpPr>
@@ -967,10 +709,10 @@
         <p:nvSpPr>
           <p:cNvPr id="2" name="Slide Image Placeholder 1"/>
           <p:cNvSpPr>
-            <a:spLocks noGrp="1"/>
+            <a:spLocks noGrp="1" noRot="1" noChangeAspect="1"/>
           </p:cNvSpPr>
           <p:nvPr>
-            <p:ph type="sldImg" idx="2"/>
+            <p:ph type="sldImg"/>
           </p:nvPr>
         </p:nvSpPr>
         <p:spPr/>
@@ -982,7 +724,7 @@
             <a:spLocks noGrp="1"/>
           </p:cNvSpPr>
           <p:nvPr>
-            <p:ph type="body" idx="3" sz="quarter"/>
+            <p:ph type="body" idx="1"/>
           </p:nvPr>
         </p:nvSpPr>
         <p:spPr/>
@@ -991,25 +733,39 @@
           <a:lstStyle/>
           <a:p>
             <a:r>
-              <a:t>[Slide bổ sung, không có trong kịch bản gốc — dùng khi mentor muốn xem số liệu thô.]</a:t>
-            </a:r>
-          </a:p>
-          <a:p/>
-          <a:p>
-            <a:r>
-              <a:t>Đây là hai biểu đồ thật, xuất trực tiếp từ notebook 03, không phải số minh họa.</a:t>
-            </a:r>
-          </a:p>
-          <a:p/>
-          <a:p>
-            <a:r>
-              <a:t>[Chỉ ảnh trái.] Phân bố cosine giữa câu hỏi và đoạn văn bản: cột tím là câu chứa đáp án, cột xám là lượt ngẫu nhiên. Hai phân bố có tách nhau nhưng vẫn chồng lấn 12,1%, nghĩa là không có một ngưỡng cosine nào cắt hoàn toàn đúng — sai ở phần đuôi là không tránh được. Đây là lý do nhóm dùng điểm reranker ở tuần 6 thay vì đặt ngưỡng cứng lên cosine.</a:t>
-            </a:r>
-          </a:p>
-          <a:p/>
-          <a:p>
-            <a:r>
-              <a:t>[Chỉ ảnh phải.] Recall@k của ba đường: vector, BM25, và hợp nhất RRF, trên 149 câu hỏi tập dev. Đường RRF (xanh ngọc) nằm trên cùng ở vùng k nhỏ — đúng vùng nhóm dùng thực tế (đường kẻ chấm đánh dấu k=10): 88,3% so với 86,7% của vector và 79,7% của BM25. Ở k lớn hơn (30 trở lên), vector bắt kịp và nhỉnh hơn RRF một chút, nhưng ở giá trị k thực dùng thì RRF vẫn tốt nhất.</a:t>
+              <a:t>Tổng kết tuần 3. Đã xong: kho ký ức SQLite với schema, lớp ledger và 16 test đạt; ba notebook trên LongMemEval-S gồm khảo sát và chia dev/test, nhúng BGE-M3 và đo Recall@k trên dev; và kế hoạch chi tiết bảy ngày cho 11 file mã nguồn. Còn lại trong tuần: adapter, FactExtractor, chỉ mục Chroma, agent, bộ đánh giá, rồi chạy 100 câu và phân loại lỗi để có đường cơ sở đầu tiên.</a:t>
+            </a:r>
+          </a:p>
+          <a:p>
+            <a:endParaRPr/>
+          </a:p>
+          <a:p>
+            <a:r>
+              <a:t>Em có hai vấn đề xin ý kiến anh.</a:t>
+            </a:r>
+          </a:p>
+          <a:p>
+            <a:endParaRPr/>
+          </a:p>
+          <a:p>
+            <a:r>
+              <a:t>Một, với đường cơ sở LongMemEval-S, tuần này nhóm chạy 100 câu trên tập dev. Anh thấy nên mở rộng ngay lên toàn bộ tập, hay giữ 100 câu cho đến khi có reranker ở tuần 6 rồi mới chạy toàn bộ?</a:t>
+            </a:r>
+          </a:p>
+          <a:p>
+            <a:endParaRPr/>
+          </a:p>
+          <a:p>
+            <a:r>
+              <a:t>Hai, với cấu hình đối chứng llm-judge, tức để LLM tự chọn bản mới nhất thay cho seq lớn nhất, anh thấy có đáng dành thời gian chạy không, hay coi cơ chế tất định là hiển nhiên đúng và bỏ cấu hình này?</a:t>
+            </a:r>
+          </a:p>
+          <a:p>
+            <a:endParaRPr/>
+          </a:p>
+          <a:p>
+            <a:r>
+              <a:t>Em xin hết phần báo cáo tuần 3 và mong nhận được góp ý của anh. Em xin cảm ơn.</a:t>
             </a:r>
           </a:p>
         </p:txBody>
@@ -1021,100 +777,28 @@
             <a:spLocks noGrp="1"/>
           </p:cNvSpPr>
           <p:nvPr>
-            <p:ph type="sldNum" idx="5" sz="quarter"/>
+            <p:ph type="sldNum" sz="quarter" idx="10"/>
           </p:nvPr>
         </p:nvSpPr>
         <p:spPr/>
+        <p:txBody>
+          <a:bodyPr/>
+          <a:lstStyle/>
+          <a:p>
+            <a:fld id="{F7021451-1387-4CA6-816F-3879F97B5CBC}" type="slidenum">
+              <a:rPr lang="en-US"/>
+              <a:t>14</a:t>
+            </a:fld>
+            <a:endParaRPr lang="en-US"/>
+          </a:p>
+        </p:txBody>
       </p:sp>
     </p:spTree>
-  </p:cSld>
-  <p:clrMapOvr>
-    <a:masterClrMapping/>
-  </p:clrMapOvr>
-</p:notes>
-</file>
-
-<file path=ppt/notesSlides/notesSlide15.xml><?xml version="1.0" encoding="utf-8"?>
-<p:notes xmlns:a="http://schemas.openxmlformats.org/drawingml/2006/main" xmlns:p="http://schemas.openxmlformats.org/presentationml/2006/main" xmlns:r="http://schemas.openxmlformats.org/officeDocument/2006/relationships">
-  <p:cSld>
-    <p:spTree>
-      <p:nvGrpSpPr>
-        <p:cNvPr id="1" name=""/>
-        <p:cNvGrpSpPr/>
-        <p:nvPr/>
-      </p:nvGrpSpPr>
-      <p:grpSpPr>
-        <a:xfrm>
-          <a:off x="0" y="0"/>
-          <a:ext cx="0" cy="0"/>
-          <a:chOff x="0" y="0"/>
-          <a:chExt cx="0" cy="0"/>
-        </a:xfrm>
-      </p:grpSpPr>
-      <p:sp>
-        <p:nvSpPr>
-          <p:cNvPr id="2" name="Slide Image Placeholder 1"/>
-          <p:cNvSpPr>
-            <a:spLocks noGrp="1"/>
-          </p:cNvSpPr>
-          <p:nvPr>
-            <p:ph type="sldImg" idx="2"/>
-          </p:nvPr>
-        </p:nvSpPr>
-        <p:spPr/>
-      </p:sp>
-      <p:sp>
-        <p:nvSpPr>
-          <p:cNvPr id="3" name="Notes Placeholder 2"/>
-          <p:cNvSpPr>
-            <a:spLocks noGrp="1"/>
-          </p:cNvSpPr>
-          <p:nvPr>
-            <p:ph type="body" idx="3" sz="quarter"/>
-          </p:nvPr>
-        </p:nvSpPr>
-        <p:spPr/>
-        <p:txBody>
-          <a:bodyPr/>
-          <a:lstStyle/>
-          <a:p>
-            <a:r>
-              <a:t>[Slide bổ sung, không có trong kịch bản gốc.]</a:t>
-            </a:r>
-          </a:p>
-          <a:p/>
-          <a:p>
-            <a:r>
-              <a:t>Hai biểu đồ này giải thích cho hai quyết định thiết kế nhóm đã nói ở slide trước.</a:t>
-            </a:r>
-          </a:p>
-          <a:p/>
-          <a:p>
-            <a:r>
-              <a:t>[Chỉ ảnh trái.] Phân bố 500 câu hỏi theo 6 loại: từ 6% (single-session-preference) đến 27% (temporal-reasoning và multi-session). Nếu tính một accuracy gộp, hai loại đông nhất sẽ quyết định phần lớn điểm số, che mất các loại ít câu hơn. Đó là lý do báo cáo dùng macro-average theo loại câu hỏi thay vì một con số chung.</a:t>
-            </a:r>
-          </a:p>
-          <a:p/>
-          <a:p>
-            <a:r>
-              <a:t>[Chỉ ảnh phải.] Recall@10 tách theo loại: năm trong sáu loại đạt trên 87%, riêng multi-session chỉ 78,6% với RRF — thấp nhất rõ rệt. Đây là căn cứ để nhóm ưu tiên cải thiện truy xuất cho loại câu hỏi đa phiên trong các tuần tới, thay vì cải thiện đều tay cho cả sáu loại.</a:t>
-            </a:r>
-          </a:p>
-        </p:txBody>
-      </p:sp>
-      <p:sp>
-        <p:nvSpPr>
-          <p:cNvPr id="4" name="Slide Number Placeholder 3"/>
-          <p:cNvSpPr>
-            <a:spLocks noGrp="1"/>
-          </p:cNvSpPr>
-          <p:nvPr>
-            <p:ph type="sldNum" idx="5" sz="quarter"/>
-          </p:nvPr>
-        </p:nvSpPr>
-        <p:spPr/>
-      </p:sp>
-    </p:spTree>
+    <p:extLst>
+      <p:ext uri="{BB962C8B-B14F-4D97-AF65-F5344CB8AC3E}">
+        <p14:creationId xmlns:p14="http://schemas.microsoft.com/office/powerpoint/2010/main" val="1024086991"/>
+      </p:ext>
+    </p:extLst>
   </p:cSld>
   <p:clrMapOvr>
     <a:masterClrMapping/>
@@ -1170,13 +854,17 @@
               <a:t>Trước hết em nhắc lại những quyết định tuần 2 đã khóa, và nhóm không mở lại trong tuần 3.</a:t>
             </a:r>
           </a:p>
-          <a:p/>
+          <a:p>
+            <a:endParaRPr/>
+          </a:p>
           <a:p>
             <a:r>
               <a:t>[Chỉ lần lượt từng thẻ.] Khung tám năng lực, mỗi năng lực gắn một benchmark, một thành phần và một tuần. Kiến trúc sáu lớp, trong đó điểm quan trọng nhất là tách kho ký ức SQLite khỏi chỉ mục Chroma và BM25. Song ngữ: mỗi ký ức lưu văn bản gốc, bản tiếng Anh chuẩn hóa và ngôn ngữ; khóa slot luôn bằng tiếng Anh. Đường truy xuất lai: dense cộng BM25, hợp nhất RRF, reranker, lọc bản mới nhất theo seq, rồi lắp ngữ cảnh. Cổng nguồn gốc: thông tin do trợ lý nói chỉ vào trạng thái pending, chờ người dùng xác nhận. Công nghệ đều miễn phí. Và phương pháp đánh giá ba trục, năm cấu hình, cùng mô hình nền, cùng k, cùng ngân sách token.</a:t>
             </a:r>
           </a:p>
-          <a:p/>
+          <a:p>
+            <a:endParaRPr/>
+          </a:p>
           <a:p>
             <a:r>
               <a:t>[Chỉ xuống khung dưới.] Tồn đọng của tuần 2 là hết tuần nhóm có thiết kế và dữ liệu khảo sát nhưng chưa có mã nguồn chạy được. Tuần 3 giải quyết việc này: bộ nạp dữ liệu chuẩn thay cho đọc thủ công trong notebook, và khung mã nguồn.</a:t>
@@ -1244,7 +932,7 @@
             <a:spLocks noGrp="1" noRot="1" noChangeAspect="1"/>
           </p:cNvSpPr>
           <p:nvPr>
-            <p:ph type="sldImg"/>
+            <p:ph type="sldImg" idx="2"/>
           </p:nvPr>
         </p:nvSpPr>
         <p:spPr/>
@@ -1256,7 +944,7 @@
             <a:spLocks noGrp="1"/>
           </p:cNvSpPr>
           <p:nvPr>
-            <p:ph type="body" idx="1"/>
+            <p:ph type="body" sz="quarter" idx="3"/>
           </p:nvPr>
         </p:nvSpPr>
         <p:spPr/>
@@ -1265,19 +953,71 @@
           <a:lstStyle/>
           <a:p>
             <a:r>
-              <a:t>Mục tiêu tuần 3 là dựng một pipeline mỏng nhưng thông suốt: nạp hội thoại, trích fact, ghi vào kho, nhúng, truy xuất, trả lời, chấm điểm. Chưa có logic slot và seq, chưa BM25, chưa reranker, vì mỗi thứ có tuần riêng.</a:t>
-            </a:r>
-          </a:p>
-          <a:p/>
-          <a:p>
-            <a:r>
-              <a:t>[Chỉ ô tối "Ghi vào kho".] Ô tối là phần đã hoàn thành.</a:t>
-            </a:r>
-          </a:p>
-          <a:p/>
-          <a:p>
-            <a:r>
-              <a:t>Tiêu chí hoàn thành là một lệnh chạy được trên tập dev và ra bảng số, kèm ba điều kiện. Một: bảng accuracy tách theo loại câu hỏi, không dùng một con số gộp. Hai: mọi lượt để lại một dòng trong nhật ký vết, để truy được vì sao một câu trả lời sai. Ba: pytest đạt toàn bộ, chạy offline bằng LLM giả lập, không tiêu hao hạn mức. Mục tiêu thực chất là đường cơ sở đầu tiên và hạ tầng cho các tuần 4 đến 7.</a:t>
+              <a:t>Trước khi vào phần mã, em xin trình bày ba notebook khảo sát trên LongMemEval-S. Cả ba đều không tốn chi phí API.</a:t>
+            </a:r>
+          </a:p>
+          <a:p>
+            <a:endParaRPr/>
+          </a:p>
+          <a:p>
+            <a:r>
+              <a:t>[Chỉ cột trái tối.] Notebook 01 chạy trên CPU: 500 câu hỏi, 6 loại, tổng cộng phải nạp 23.867 phiên — nếu đi qua API miễn phí sẽ mất khoảng 16 ngày, nên buộc phải nhúng bằng mô hình chạy local. 64,8% số câu cần bằng chứng ở nhiều hơn một phiên, và độ trùng từ vựng trung vị giữa câu hỏi với câu chứa đáp án là 50%. Cuối notebook, nhóm chia dev và test phân tầng theo loại câu hỏi với seed cố định: 150 câu dev để chỉnh tham số, 350 câu test khóa đến tuần 7. Notebook 02 chạy GPU Tesla T4 đúng một lần: nhúng toàn bộ 247.238 đoạn văn bản bằng BGE-M3, mất khoảng 22 phút, kiểm tra nhanh cho thấy cosine của câu chứa đáp án luôn cao hơn rõ rệt so với câu ngẫu nhiên. Notebook 03 chạy CPU, không nhúng lại, so ba đường truy xuất là vector, BM25 và RRF trên 149 câu của tập dev.</a:t>
+            </a:r>
+          </a:p>
+          <a:p>
+            <a:endParaRPr/>
+          </a:p>
+          <a:p>
+            <a:r>
+              <a:t>[Chỉ bảng bên phải.] Mỗi phép đo trả lời một quyết định thiết kế.</a:t>
+            </a:r>
+          </a:p>
+          <a:p>
+            <a:endParaRPr/>
+          </a:p>
+          <a:p>
+            <a:r>
+              <a:t>Thứ nhất, ngưỡng từ chối: độ chồng lấn cosine giữa câu chứa đáp án và lượt ngẫu nhiên là 12,1% — trung bình 0,59 so với 0,34. Chồng lấn không lớn nhưng vẫn còn, nên nhóm giữ quyết định đặt ngưỡng từ chối lên điểm reranker ở tuần 6 thay vì lên cosine thô.</a:t>
+            </a:r>
+          </a:p>
+          <a:p>
+            <a:endParaRPr/>
+          </a:p>
+          <a:p>
+            <a:r>
+              <a:t>Thứ hai, BM25 và RRF: tại k bằng 30, RRF thấp hơn chỉ dùng vector 1,4 điểm nhưng cao hơn chỉ dùng BM25 6,3 điểm. Ở k bằng 10, tức giá trị nhóm định dùng thực tế, RRF cao nhất: 88,3% so với 86,7% của vector và 79,7% của BM25. Vì vậy nhóm vẫn giữ truy xuất lai.</a:t>
+            </a:r>
+          </a:p>
+          <a:p>
+            <a:endParaRPr/>
+          </a:p>
+          <a:p>
+            <a:r>
+              <a:t>Thứ ba, tách truy vấn con: 64,8% số câu cần hơn một phiên bằng chứng, nên QueryPlanner ở tuần 5 là cần thiết.</a:t>
+            </a:r>
+          </a:p>
+          <a:p>
+            <a:endParaRPr/>
+          </a:p>
+          <a:p>
+            <a:r>
+              <a:t>Thứ tư, giá trị k: recall bão hòa quanh k từ 20 đến 30 — vector đạt 95,4% tại k bằng 20, RRF đạt 95% tại k bằng 30.</a:t>
+            </a:r>
+          </a:p>
+          <a:p>
+            <a:endParaRPr/>
+          </a:p>
+          <a:p>
+            <a:r>
+              <a:t>Thứ năm, ưu tiên cải thiện: loại multi-session có recall@10 thấp nhất, 78,6% với RRF, trong khi các loại còn lại đều trên 87%.</a:t>
+            </a:r>
+          </a:p>
+          <a:p>
+            <a:endParaRPr/>
+          </a:p>
+          <a:p>
+            <a:r>
+              <a:t>Lưu ý quan trọng: đây là recall của tầng truy xuất, chưa phải accuracy cuối. Khoảng chênh giữa hai con số sẽ do baseline oracle đo ở tuần 7.</a:t>
             </a:r>
           </a:p>
         </p:txBody>
@@ -1289,28 +1029,12 @@
             <a:spLocks noGrp="1"/>
           </p:cNvSpPr>
           <p:nvPr>
-            <p:ph type="sldNum" sz="quarter" idx="10"/>
+            <p:ph type="sldNum" sz="quarter" idx="5"/>
           </p:nvPr>
         </p:nvSpPr>
         <p:spPr/>
-        <p:txBody>
-          <a:bodyPr/>
-          <a:lstStyle/>
-          <a:p>
-            <a:fld id="{F7021451-1387-4CA6-816F-3879F97B5CBC}" type="slidenum">
-              <a:rPr lang="en-US"/>
-              <a:t>3</a:t>
-            </a:fld>
-            <a:endParaRPr lang="en-US"/>
-          </a:p>
-        </p:txBody>
       </p:sp>
     </p:spTree>
-    <p:extLst>
-      <p:ext uri="{BB962C8B-B14F-4D97-AF65-F5344CB8AC3E}">
-        <p14:creationId xmlns:p14="http://schemas.microsoft.com/office/powerpoint/2010/main" val="1024086991"/>
-      </p:ext>
-    </p:extLst>
   </p:cSld>
   <p:clrMapOvr>
     <a:masterClrMapping/>
@@ -1342,7 +1066,7 @@
             <a:spLocks noGrp="1" noRot="1" noChangeAspect="1"/>
           </p:cNvSpPr>
           <p:nvPr>
-            <p:ph type="sldImg"/>
+            <p:ph type="sldImg" idx="2"/>
           </p:nvPr>
         </p:nvSpPr>
         <p:spPr/>
@@ -1354,7 +1078,7 @@
             <a:spLocks noGrp="1"/>
           </p:cNvSpPr>
           <p:nvPr>
-            <p:ph type="body" idx="1"/>
+            <p:ph type="body" sz="quarter" idx="3"/>
           </p:nvPr>
         </p:nvSpPr>
         <p:spPr/>
@@ -1363,31 +1087,31 @@
           <a:lstStyle/>
           <a:p>
             <a:r>
-              <a:t>Nhóm chọn làm một module thật sâu thay vì dựng đủ mọi file ở mức sơ sài. Module đó là kho ký ức, một cơ sở dữ liệu SQLite ghi lại mọi fact mà agent học được, mỗi fact có số thứ tự seq và trạng thái. Có ba lý do.</a:t>
-            </a:r>
-          </a:p>
-          <a:p/>
-          <a:p>
-            <a:r>
-              <a:t>Một, đây là nơi yêu cầu chính xác tuyệt đối. Chroma trả sai một ứng viên thì reranker vẫn có thể loại bỏ; kho ký ức ghi sai một bản active thì mọi bước sau đều sai mà không có cách phát hiện.</a:t>
-            </a:r>
-          </a:p>
-          <a:p/>
-          <a:p>
-            <a:r>
-              <a:t>Hai, kho ký ức không gọi LLM, nên kiểm thử hoàn toàn offline, không tiêu hao hạn mức Gemini.</a:t>
-            </a:r>
-          </a:p>
-          <a:p/>
-          <a:p>
-            <a:r>
-              <a:t>Ba, toàn bộ logic cập nhật của tuần 4 chỉ là các thao tác ghi lên đúng bảng này, nên schema chốt từ tuần 3 giúp tuần 4 không phải nhập lại dữ liệu.</a:t>
-            </a:r>
-          </a:p>
-          <a:p/>
-          <a:p>
-            <a:r>
-              <a:t>[Chỉ khung dưới.] Hợp đồng với tầng chỉ mục: Chroma chỉ lưu id, vector và một ít metadata để lọc. Nội dung đưa cho LLM luôn được nạp lại từ kho ký ức. Nhờ vậy hai bên không thể mâu thuẫn về nội dung; trường hợp xấu nhất là chỉ mục lỗi thời, và hàm rebuild sửa được.</a:t>
+              <a:t>[Slide bổ sung, không có trong kịch bản gốc — dùng khi mentor muốn xem số liệu thô.]</a:t>
+            </a:r>
+          </a:p>
+          <a:p>
+            <a:endParaRPr/>
+          </a:p>
+          <a:p>
+            <a:r>
+              <a:t>Đây là hai biểu đồ thật, xuất trực tiếp từ notebook 03, không phải số minh họa.</a:t>
+            </a:r>
+          </a:p>
+          <a:p>
+            <a:endParaRPr/>
+          </a:p>
+          <a:p>
+            <a:r>
+              <a:t>[Chỉ ảnh trái.] Phân bố cosine giữa câu hỏi và đoạn văn bản: cột tím là câu chứa đáp án, cột xám là lượt ngẫu nhiên. Hai phân bố có tách nhau nhưng vẫn chồng lấn 12,1%, nghĩa là không có một ngưỡng cosine nào cắt hoàn toàn đúng — sai ở phần đuôi là không tránh được. Đây là lý do nhóm dùng điểm reranker ở tuần 6 thay vì đặt ngưỡng cứng lên cosine.</a:t>
+            </a:r>
+          </a:p>
+          <a:p>
+            <a:endParaRPr/>
+          </a:p>
+          <a:p>
+            <a:r>
+              <a:t>[Chỉ ảnh phải.] Recall@k của ba đường: vector, BM25, và hợp nhất RRF, trên 149 câu hỏi tập dev. Đường RRF (xanh ngọc) nằm trên cùng ở vùng k nhỏ — đúng vùng nhóm dùng thực tế (đường kẻ chấm đánh dấu k=10): 88,3% so với 86,7% của vector và 79,7% của BM25. Ở k lớn hơn (30 trở lên), vector bắt kịp và nhỉnh hơn RRF một chút, nhưng ở giá trị k thực dùng thì RRF vẫn tốt nhất.</a:t>
             </a:r>
           </a:p>
         </p:txBody>
@@ -1399,28 +1123,12 @@
             <a:spLocks noGrp="1"/>
           </p:cNvSpPr>
           <p:nvPr>
-            <p:ph type="sldNum" sz="quarter" idx="10"/>
+            <p:ph type="sldNum" sz="quarter" idx="5"/>
           </p:nvPr>
         </p:nvSpPr>
         <p:spPr/>
-        <p:txBody>
-          <a:bodyPr/>
-          <a:lstStyle/>
-          <a:p>
-            <a:fld id="{F7021451-1387-4CA6-816F-3879F97B5CBC}" type="slidenum">
-              <a:rPr lang="en-US"/>
-              <a:t>4</a:t>
-            </a:fld>
-            <a:endParaRPr lang="en-US"/>
-          </a:p>
-        </p:txBody>
       </p:sp>
     </p:spTree>
-    <p:extLst>
-      <p:ext uri="{BB962C8B-B14F-4D97-AF65-F5344CB8AC3E}">
-        <p14:creationId xmlns:p14="http://schemas.microsoft.com/office/powerpoint/2010/main" val="1024086991"/>
-      </p:ext>
-    </p:extLst>
   </p:cSld>
   <p:clrMapOvr>
     <a:masterClrMapping/>
@@ -1452,7 +1160,7 @@
             <a:spLocks noGrp="1" noRot="1" noChangeAspect="1"/>
           </p:cNvSpPr>
           <p:nvPr>
-            <p:ph type="sldImg"/>
+            <p:ph type="sldImg" idx="2"/>
           </p:nvPr>
         </p:nvSpPr>
         <p:spPr/>
@@ -1464,7 +1172,7 @@
             <a:spLocks noGrp="1"/>
           </p:cNvSpPr>
           <p:nvPr>
-            <p:ph type="body" idx="1"/>
+            <p:ph type="body" sz="quarter" idx="3"/>
           </p:nvPr>
         </p:nvSpPr>
         <p:spPr/>
@@ -1473,31 +1181,31 @@
           <a:lstStyle/>
           <a:p>
             <a:r>
-              <a:t>Đây là bốn lỗi dễ xảy ra âm thầm mà nhóm đã xử lý trong `ledger.py`.</a:t>
-            </a:r>
-          </a:p>
-          <a:p/>
-          <a:p>
-            <a:r>
-              <a:t>Một, `PRAGMA foreign_keys` mặc định tắt trong SQLite, nên `superseded_by` trỏ vào id không tồn tại vẫn ghi được. Nhóm bật cho từng kết nối trong hàm cấu hình.</a:t>
-            </a:r>
-          </a:p>
-          <a:p/>
-          <a:p>
-            <a:r>
-              <a:t>Hai, cấp phát seq. Cách select max cộng một có thể cấp trùng khi hai tiến trình eval chạy song song. Nhóm dùng `UPDATE ... RETURNING`, là phép nguyên tử.</a:t>
-            </a:r>
-          </a:p>
-          <a:p/>
-          <a:p>
-            <a:r>
-              <a:t>Ba, thứ tự của `get_by_ids`. Truy vấn `WHERE id IN` trả theo rowid, làm mất thứ hạng của reranker mà không báo lỗi. Nhóm sắp lại đúng thứ tự đầu vào.</a:t>
-            </a:r>
-          </a:p>
-          <a:p/>
-          <a:p>
-            <a:r>
-              <a:t>Bốn, `json.dumps` mặc định ép ký tự ASCII, làm vết tiếng Việt thành chuỗi escape, khó đọc khi gỡ lỗi. Nhóm đặt `ensure_ascii` bằng False.</a:t>
+              <a:t>[Slide bổ sung, không có trong kịch bản gốc.]</a:t>
+            </a:r>
+          </a:p>
+          <a:p>
+            <a:endParaRPr/>
+          </a:p>
+          <a:p>
+            <a:r>
+              <a:t>Hai biểu đồ này giải thích cho hai quyết định thiết kế nhóm đã nói ở slide trước.</a:t>
+            </a:r>
+          </a:p>
+          <a:p>
+            <a:endParaRPr/>
+          </a:p>
+          <a:p>
+            <a:r>
+              <a:t>[Chỉ ảnh trái.] Phân bố 500 câu hỏi theo 6 loại: từ 6% (single-session-preference) đến 27% (temporal-reasoning và multi-session). Nếu tính một accuracy gộp, hai loại đông nhất sẽ quyết định phần lớn điểm số, che mất các loại ít câu hơn. Đó là lý do báo cáo dùng macro-average theo loại câu hỏi thay vì một con số chung.</a:t>
+            </a:r>
+          </a:p>
+          <a:p>
+            <a:endParaRPr/>
+          </a:p>
+          <a:p>
+            <a:r>
+              <a:t>[Chỉ ảnh phải.] Recall@10 tách theo loại: năm trong sáu loại đạt trên 87%, riêng multi-session chỉ 78,6% với RRF — thấp nhất rõ rệt. Đây là căn cứ để nhóm ưu tiên cải thiện truy xuất cho loại câu hỏi đa phiên trong các tuần tới, thay vì cải thiện đều tay cho cả sáu loại.</a:t>
             </a:r>
           </a:p>
         </p:txBody>
@@ -1509,28 +1217,12 @@
             <a:spLocks noGrp="1"/>
           </p:cNvSpPr>
           <p:nvPr>
-            <p:ph type="sldNum" sz="quarter" idx="10"/>
+            <p:ph type="sldNum" sz="quarter" idx="5"/>
           </p:nvPr>
         </p:nvSpPr>
         <p:spPr/>
-        <p:txBody>
-          <a:bodyPr/>
-          <a:lstStyle/>
-          <a:p>
-            <a:fld id="{F7021451-1387-4CA6-816F-3879F97B5CBC}" type="slidenum">
-              <a:rPr lang="en-US"/>
-              <a:t>5</a:t>
-            </a:fld>
-            <a:endParaRPr lang="en-US"/>
-          </a:p>
-        </p:txBody>
       </p:sp>
     </p:spTree>
-    <p:extLst>
-      <p:ext uri="{BB962C8B-B14F-4D97-AF65-F5344CB8AC3E}">
-        <p14:creationId xmlns:p14="http://schemas.microsoft.com/office/powerpoint/2010/main" val="1024086991"/>
-      </p:ext>
-    </p:extLst>
   </p:cSld>
   <p:clrMapOvr>
     <a:masterClrMapping/>
@@ -1583,13 +1275,23 @@
           <a:lstStyle/>
           <a:p>
             <a:r>
-              <a:t>Việc lọc bản cũ được làm bằng SQL, không bằng LLM, đúng nguyên tắc số 1 của thiết kế: việc cần chính xác thì không giao cho mô hình. Với mỗi slot, một câu window function chỉ giữ bản có seq lớn nhất, tất định và giải thích được. Phương án nhờ LLM chọn bản mới nhất chính là cấu hình đối chứng llm-judge ở tuần 7, nên nhóm sẽ đo chênh lệch chứ không khẳng định suông.</a:t>
-            </a:r>
-          </a:p>
-          <a:p/>
-          <a:p>
-            <a:r>
-              <a:t>[Chỉ khung ràng buộc.] Có một ràng buộc nhóm cố ý chưa bật: unique index trên slot active. Tuần 3 chỉ có thao tác ADD, nên khi nạp LongMemEval, một người nói N5 rồi sau nói N4 sẽ sinh hai bản active cùng slot. Điều đó đúng thiết kế vì MemoryUpdater chưa tồn tại. Bật ràng buộc bây giờ sẽ làm gián đoạn pipeline. Tuần 4, sau khi có UPDATE, nhóm chạy đúng một dòng này, từ đó mọi lỗi logic cập nhật được phát hiện ngay thay vì âm thầm làm sai số liệu. Đã có sẵn một test chứng minh ràng buộc bắt đúng lỗi.</a:t>
+              <a:t>Mục tiêu tuần 3 là dựng một pipeline mỏng nhưng thông suốt: nạp hội thoại, trích fact, ghi vào kho, nhúng, truy xuất, trả lời, chấm điểm. Chưa có logic slot và seq, chưa BM25, chưa reranker, vì mỗi thứ có tuần riêng.</a:t>
+            </a:r>
+          </a:p>
+          <a:p>
+            <a:endParaRPr/>
+          </a:p>
+          <a:p>
+            <a:r>
+              <a:t>[Chỉ ô tối "Ghi vào kho".] Ô tối là phần đã hoàn thành.</a:t>
+            </a:r>
+          </a:p>
+          <a:p>
+            <a:endParaRPr/>
+          </a:p>
+          <a:p>
+            <a:r>
+              <a:t>Tiêu chí hoàn thành là một lệnh chạy được trên tập dev và ra bảng số, kèm ba điều kiện. Một: bảng accuracy tách theo loại câu hỏi, không dùng một con số gộp. Hai: mọi lượt để lại một dòng trong nhật ký vết, để truy được vì sao một câu trả lời sai. Ba: pytest đạt toàn bộ, chạy offline bằng LLM giả lập, không tiêu hao hạn mức. Mục tiêu thực chất là đường cơ sở đầu tiên và hạ tầng cho các tuần 4 đến 7.</a:t>
             </a:r>
           </a:p>
         </p:txBody>
@@ -1675,13 +1377,39 @@
           <a:lstStyle/>
           <a:p>
             <a:r>
-              <a:t>Kho ký ức có 16 test, đạt toàn bộ, chạy dưới một giây, không gọi mạng. Mỗi test kiểm chứng một bất biến đã cam kết trong tài liệu kiến trúc, nên test thất bại nghĩa là kiến trúc bị vi phạm chứ không phải lỗi vặt.</a:t>
-            </a:r>
-          </a:p>
-          <a:p/>
-          <a:p>
-            <a:r>
-              <a:t>[Đọc lần lượt các dòng bên phải.] Seq tăng đơn điệu và không trùng. Fact từ lượt trợ lý không vào chỉ mục, chỉ hiển thị sau khi người dùng xác nhận. Mỗi slot chỉ trả về bản seq lớn nhất và loại bản đã xóa. Khóa tiếng Việt có dấu bị từ chối với lý do `attribute_not_ascii`; khóa như `Japanese Level` hay `2nd_language` bị từ chối với lý do `attribute_bad_format`. Mọi lần từ chối đều được ghi lại, nên tính được tỉ lệ khóa lỗi cho báo cáo. Cuối cùng, chỉ mục nhúng bản tiếng Anh chuẩn hóa nhưng metadata vẫn giữ ngôn ngữ gốc là tiếng Việt.</a:t>
+              <a:t>Nhóm chọn làm một module thật sâu thay vì dựng đủ mọi file ở mức sơ sài. Module đó là kho ký ức, một cơ sở dữ liệu SQLite ghi lại mọi fact mà agent học được, mỗi fact có số thứ tự seq và trạng thái. Có ba lý do.</a:t>
+            </a:r>
+          </a:p>
+          <a:p>
+            <a:endParaRPr/>
+          </a:p>
+          <a:p>
+            <a:r>
+              <a:t>Một, đây là nơi yêu cầu chính xác tuyệt đối. Chroma trả sai một ứng viên thì reranker vẫn có thể loại bỏ; kho ký ức ghi sai một bản active thì mọi bước sau đều sai mà không có cách phát hiện.</a:t>
+            </a:r>
+          </a:p>
+          <a:p>
+            <a:endParaRPr/>
+          </a:p>
+          <a:p>
+            <a:r>
+              <a:t>Hai, kho ký ức không gọi LLM, nên kiểm thử hoàn toàn offline, không tiêu hao hạn mức Gemini.</a:t>
+            </a:r>
+          </a:p>
+          <a:p>
+            <a:endParaRPr/>
+          </a:p>
+          <a:p>
+            <a:r>
+              <a:t>Ba, toàn bộ logic cập nhật của tuần 4 chỉ là các thao tác ghi lên đúng bảng này, nên schema chốt từ tuần 3 giúp tuần 4 không phải nhập lại dữ liệu.</a:t>
+            </a:r>
+          </a:p>
+          <a:p>
+            <a:endParaRPr/>
+          </a:p>
+          <a:p>
+            <a:r>
+              <a:t>[Chỉ khung dưới.] Hợp đồng với tầng chỉ mục: Chroma chỉ lưu id, vector và một ít metadata để lọc. Nội dung đưa cho LLM luôn được nạp lại từ kho ký ức. Nhờ vậy hai bên không thể mâu thuẫn về nội dung; trường hợp xấu nhất là chỉ mục lỗi thời, và hàm rebuild sửa được.</a:t>
             </a:r>
           </a:p>
         </p:txBody>
@@ -1767,37 +1495,39 @@
           <a:lstStyle/>
           <a:p>
             <a:r>
-              <a:t>Kế hoạch bảy ngày chia cho hai người để không sửa chung một file. Giao diện giữa hai phần là dataclass Fact, đã cố định trong `ledger.py`. Mục tiêu cuối tuần là 11 file mã nguồn.</a:t>
-            </a:r>
-          </a:p>
-          <a:p/>
-          <a:p>
-            <a:r>
-              <a:t>Ngày 1, cả hai. Người A dựng khung repo và adapter: config tập trung một chỗ, giao diện LLMAdapter duy nhất để tuần 6 đổi sang Groq hay Ollama chỉ sửa một file, bọc BGE-M3 có cache với tên mô hình nằm trong khóa cache, và FakeLLM cho test offline. Người B viết ngay chỉ mục Chroma cùng hàm rebuild, vì phần này không phụ thuộc extractor.</a:t>
-            </a:r>
-          </a:p>
-          <a:p/>
-          <a:p>
-            <a:r>
-              <a:t>Ngày 2 đến 3, người A làm FactExtractor, thành phần duy nhất gọi LLM ở tầng ghi, nên chất lượng của nó quyết định trần điểm của hệ. Cache theo sha1 của lượt là bắt buộc để chạy lại eval không tốn hạn mức. Tiêu chí hoàn thành: trích tay 20 lượt, mười Việt mười Anh, tỉ lệ khóa đúng từ 90 phần trăm trở lên.</a:t>
-            </a:r>
-          </a:p>
-          <a:p/>
-          <a:p>
-            <a:r>
-              <a:t>Ngày 3 đến 4, người B làm bộ lắp ngữ cảnh có chia hạn ngạch, đếm token bằng tokenizer thật, và agent với hai hàm nạp lượt và trả lời.</a:t>
-            </a:r>
-          </a:p>
-          <a:p/>
-          <a:p>
-            <a:r>
-              <a:t>Ngày 4 đến 5, người A làm bộ đánh giá: loader dữ liệu, judge với prompt chấm chốt ngay tuần này, và vòng chạy với mỗi case một file DB riêng.</a:t>
-            </a:r>
-          </a:p>
-          <a:p/>
-          <a:p>
-            <a:r>
-              <a:t>Ngày 5 đến 6, cả hai chạy 100 câu trên tập dev, phân tích mười câu sai đầu tiên và đo tỉ lệ token Việt trên Anh bằng tokenizer thật. Ngày 7 tổng hợp số và viết báo cáo.</a:t>
+              <a:t>Đây là bốn lỗi dễ xảy ra âm thầm mà nhóm đã xử lý trong `ledger.py`.</a:t>
+            </a:r>
+          </a:p>
+          <a:p>
+            <a:endParaRPr/>
+          </a:p>
+          <a:p>
+            <a:r>
+              <a:t>Một, `PRAGMA foreign_keys` mặc định tắt trong SQLite, nên `superseded_by` trỏ vào id không tồn tại vẫn ghi được. Nhóm bật cho từng kết nối trong hàm cấu hình.</a:t>
+            </a:r>
+          </a:p>
+          <a:p>
+            <a:endParaRPr/>
+          </a:p>
+          <a:p>
+            <a:r>
+              <a:t>Hai, cấp phát seq. Cách select max cộng một có thể cấp trùng khi hai tiến trình eval chạy song song. Nhóm dùng `UPDATE ... RETURNING`, là phép nguyên tử.</a:t>
+            </a:r>
+          </a:p>
+          <a:p>
+            <a:endParaRPr/>
+          </a:p>
+          <a:p>
+            <a:r>
+              <a:t>Ba, thứ tự của `get_by_ids`. Truy vấn `WHERE id IN` trả theo rowid, làm mất thứ hạng của reranker mà không báo lỗi. Nhóm sắp lại đúng thứ tự đầu vào.</a:t>
+            </a:r>
+          </a:p>
+          <a:p>
+            <a:endParaRPr/>
+          </a:p>
+          <a:p>
+            <a:r>
+              <a:t>Bốn, `json.dumps` mặc định ép ký tự ASCII, làm vết tiếng Việt thành chuỗi escape, khó đọc khi gỡ lỗi. Nhóm đặt `ensure_ascii` bằng False.</a:t>
             </a:r>
           </a:p>
         </p:txBody>
@@ -1883,13 +1613,15 @@
           <a:lstStyle/>
           <a:p>
             <a:r>
-              <a:t>Cuối tuần nhóm sẽ báo cáo sáu nhóm số. Accuracy theo từng loại câu hỏi của LongMemEval-S làm đường cơ sở. Tỉ lệ khóa slot bị từ chối, tách theo lý do, đo trực tiếp chất lượng prompt trích xuất. Số fact mỗi lượt và số slot phân biệt. Độ trễ p50 và p95 tách theo pha. Token mỗi truy vấn tách theo ngôn ngữ, vì gộp tiếng Việt với tiếng Anh là số vô nghĩa. Và phân loại mười câu sai đầu tiên để quyết định thứ tự ưu tiên tuần 4 đến 6.</a:t>
-            </a:r>
-          </a:p>
-          <a:p/>
-          <a:p>
-            <a:r>
-              <a:t>[Chỉ ba thẻ bên dưới.] Ba nguyên tắc để tránh sai lệch. Một: không triển khai slot và seq trong tuần 3, dù schema đã có cột, vì làm sớm thì tuần 4 không còn gì để so sánh. Hai: cache ngay từ ngày đầu, nếu không mỗi lần chạy lại 100 câu phải làm từ đầu. Ba: chốt mô hình chấm và prompt chấm ngay tuần này, vì đổi giữa chừng làm mọi số đo trước đó mất giá trị so sánh, theo khuyến nghị của Zheng và cộng sự.</a:t>
+              <a:t>Việc lọc bản cũ được làm bằng SQL, không bằng LLM, đúng nguyên tắc số 1 của thiết kế: việc cần chính xác thì không giao cho mô hình. Với mỗi slot, một câu window function chỉ giữ bản có seq lớn nhất, tất định và giải thích được. Phương án nhờ LLM chọn bản mới nhất chính là cấu hình đối chứng llm-judge ở tuần 7, nên nhóm sẽ đo chênh lệch chứ không khẳng định suông.</a:t>
+            </a:r>
+          </a:p>
+          <a:p>
+            <a:endParaRPr/>
+          </a:p>
+          <a:p>
+            <a:r>
+              <a:t>[Chỉ khung ràng buộc.] Có một ràng buộc nhóm cố ý chưa bật: unique index trên slot active. Tuần 3 chỉ có thao tác ADD, nên khi nạp LongMemEval, một người nói N5 rồi sau nói N4 sẽ sinh hai bản active cùng slot. Điều đó đúng thiết kế vì MemoryUpdater chưa tồn tại. Bật ràng buộc bây giờ sẽ làm gián đoạn pipeline. Tuần 4, sau khi có UPDATE, nhóm chạy đúng một dòng này, từ đó mọi lỗi logic cập nhật được phát hiện ngay thay vì âm thầm làm sai số liệu. Đã có sẵn một test chứng minh ràng buộc bắt đúng lỗi.</a:t>
             </a:r>
           </a:p>
         </p:txBody>
@@ -1963,6 +1695,11 @@
 <file path=ppt/slideMasters/slideMaster1.xml><?xml version="1.0" encoding="utf-8"?>
 <p:sldMaster xmlns:a="http://schemas.openxmlformats.org/drawingml/2006/main" xmlns:r="http://schemas.openxmlformats.org/officeDocument/2006/relationships" xmlns:p="http://schemas.openxmlformats.org/presentationml/2006/main">
   <p:cSld>
+    <p:bg>
+      <p:bgRef idx="1001">
+        <a:schemeClr val="bg1"/>
+      </p:bgRef>
+    </p:bg>
     <p:spTree>
       <p:nvGrpSpPr>
         <p:cNvPr id="1" name=""/>
@@ -2245,6 +1982,7 @@
         <a:solidFill>
           <a:srgbClr val="13123A"/>
         </a:solidFill>
+        <a:effectLst/>
       </p:bgPr>
     </p:bg>
     <p:spTree>
@@ -2287,7 +2025,10 @@
         </p:spPr>
         <p:txBody>
           <a:bodyPr/>
-          <a:p/>
+          <a:lstStyle/>
+          <a:p>
+            <a:endParaRPr/>
+          </a:p>
         </p:txBody>
       </p:sp>
       <p:sp>
@@ -2316,7 +2057,10 @@
         </p:spPr>
         <p:txBody>
           <a:bodyPr/>
-          <a:p/>
+          <a:lstStyle/>
+          <a:p>
+            <a:endParaRPr/>
+          </a:p>
         </p:txBody>
       </p:sp>
       <p:sp>
@@ -2345,7 +2089,10 @@
         </p:spPr>
         <p:txBody>
           <a:bodyPr/>
-          <a:p/>
+          <a:lstStyle/>
+          <a:p>
+            <a:endParaRPr/>
+          </a:p>
         </p:txBody>
       </p:sp>
       <p:sp>
@@ -2369,7 +2116,7 @@
           <a:bodyPr wrap="square" lIns="0" tIns="0" rIns="0" bIns="0" rtlCol="0" anchor="ctr"/>
           <a:lstStyle/>
           <a:p>
-            <a:pPr algn="ctr" indent="0" marL="0">
+            <a:pPr marL="0" indent="0" algn="ctr">
               <a:buNone/>
             </a:pPr>
             <a:r>
@@ -2408,7 +2155,7 @@
           <a:bodyPr wrap="square" lIns="0" tIns="0" rIns="0" bIns="0" rtlCol="0" anchor="t"/>
           <a:lstStyle/>
           <a:p>
-            <a:pPr indent="0" marL="0">
+            <a:pPr marL="0" indent="0">
               <a:buNone/>
             </a:pPr>
             <a:r>
@@ -2425,7 +2172,7 @@
             <a:endParaRPr lang="en-US" sz="4600" dirty="0"/>
           </a:p>
           <a:p>
-            <a:pPr indent="0" marL="0">
+            <a:pPr marL="0" indent="0">
               <a:buNone/>
             </a:pPr>
             <a:r>
@@ -2464,7 +2211,7 @@
           <a:bodyPr wrap="square" lIns="0" tIns="0" rIns="0" bIns="0" rtlCol="0" anchor="t"/>
           <a:lstStyle/>
           <a:p>
-            <a:pPr indent="0" marL="0">
+            <a:pPr marL="0" indent="0">
               <a:buNone/>
             </a:pPr>
             <a:r>
@@ -2506,7 +2253,10 @@
         </p:spPr>
         <p:txBody>
           <a:bodyPr/>
-          <a:p/>
+          <a:lstStyle/>
+          <a:p>
+            <a:endParaRPr/>
+          </a:p>
         </p:txBody>
       </p:sp>
       <p:sp>
@@ -2530,7 +2280,7 @@
           <a:bodyPr wrap="square" lIns="0" tIns="0" rIns="0" bIns="0" rtlCol="0" anchor="t"/>
           <a:lstStyle/>
           <a:p>
-            <a:pPr indent="0" marL="0">
+            <a:pPr marL="0" indent="0">
               <a:buNone/>
             </a:pPr>
             <a:r>
@@ -2564,6 +2314,7 @@
         <a:solidFill>
           <a:srgbClr val="FFFFFF"/>
         </a:solidFill>
+        <a:effectLst/>
       </p:bgPr>
     </p:bg>
     <p:spTree>
@@ -2601,7 +2352,7 @@
           <a:bodyPr wrap="square" lIns="0" tIns="0" rIns="0" bIns="0" rtlCol="0" anchor="t"/>
           <a:lstStyle/>
           <a:p>
-            <a:pPr indent="0" marL="0">
+            <a:pPr marL="0" indent="0">
               <a:buNone/>
             </a:pPr>
             <a:r>
@@ -2640,7 +2391,7 @@
           <a:bodyPr wrap="square" lIns="0" tIns="0" rIns="0" bIns="0" rtlCol="0" anchor="t"/>
           <a:lstStyle/>
           <a:p>
-            <a:pPr indent="0" marL="0">
+            <a:pPr marL="0" indent="0">
               <a:buNone/>
             </a:pPr>
             <a:r>
@@ -2679,7 +2430,7 @@
           <a:bodyPr wrap="square" lIns="0" tIns="0" rIns="0" bIns="0" rtlCol="0" anchor="t"/>
           <a:lstStyle/>
           <a:p>
-            <a:pPr indent="0" marL="0">
+            <a:pPr marL="0" indent="0">
               <a:buNone/>
             </a:pPr>
             <a:r>
@@ -2723,7 +2474,10 @@
         </p:spPr>
         <p:txBody>
           <a:bodyPr/>
-          <a:p/>
+          <a:lstStyle/>
+          <a:p>
+            <a:endParaRPr/>
+          </a:p>
         </p:txBody>
       </p:sp>
       <p:sp>
@@ -2747,7 +2501,7 @@
           <a:bodyPr wrap="square" lIns="0" tIns="0" rIns="0" bIns="0" rtlCol="0" anchor="t"/>
           <a:lstStyle/>
           <a:p>
-            <a:pPr algn="ctr" indent="0" marL="0">
+            <a:pPr marL="0" indent="0" algn="ctr">
               <a:buNone/>
             </a:pPr>
             <a:r>
@@ -2786,7 +2540,7 @@
           <a:bodyPr wrap="square" lIns="0" tIns="0" rIns="0" bIns="0" rtlCol="0" anchor="t"/>
           <a:lstStyle/>
           <a:p>
-            <a:pPr algn="ctr" indent="0" marL="0">
+            <a:pPr marL="0" indent="0" algn="ctr">
               <a:buNone/>
             </a:pPr>
             <a:r>
@@ -2825,7 +2579,7 @@
           <a:bodyPr wrap="square" lIns="0" tIns="0" rIns="0" bIns="0" rtlCol="0" anchor="t"/>
           <a:lstStyle/>
           <a:p>
-            <a:pPr algn="ctr" indent="0" marL="0">
+            <a:pPr marL="0" indent="0" algn="ctr">
               <a:buNone/>
             </a:pPr>
             <a:r>
@@ -2864,7 +2618,7 @@
           <a:bodyPr wrap="square" lIns="0" tIns="0" rIns="0" bIns="0" rtlCol="0" anchor="t"/>
           <a:lstStyle/>
           <a:p>
-            <a:pPr algn="ctr" indent="0" marL="0">
+            <a:pPr marL="0" indent="0" algn="ctr">
               <a:buNone/>
             </a:pPr>
             <a:r>
@@ -2908,7 +2662,10 @@
         </p:spPr>
         <p:txBody>
           <a:bodyPr/>
-          <a:p/>
+          <a:lstStyle/>
+          <a:p>
+            <a:endParaRPr/>
+          </a:p>
         </p:txBody>
       </p:sp>
       <p:sp>
@@ -2932,7 +2689,7 @@
           <a:bodyPr wrap="square" lIns="0" tIns="0" rIns="0" bIns="0" rtlCol="0" anchor="ctr"/>
           <a:lstStyle/>
           <a:p>
-            <a:pPr indent="0" marL="0">
+            <a:pPr marL="0" indent="0">
               <a:buNone/>
             </a:pPr>
             <a:r>
@@ -2971,7 +2728,7 @@
           <a:bodyPr wrap="square" lIns="0" tIns="0" rIns="0" bIns="0" rtlCol="0" anchor="ctr"/>
           <a:lstStyle/>
           <a:p>
-            <a:pPr indent="0" marL="0">
+            <a:pPr marL="0" indent="0">
               <a:buNone/>
             </a:pPr>
             <a:r>
@@ -3015,7 +2772,10 @@
         </p:spPr>
         <p:txBody>
           <a:bodyPr/>
-          <a:p/>
+          <a:lstStyle/>
+          <a:p>
+            <a:endParaRPr/>
+          </a:p>
         </p:txBody>
       </p:sp>
       <p:sp>
@@ -3039,7 +2799,7 @@
           <a:bodyPr wrap="square" lIns="0" tIns="0" rIns="0" bIns="0" rtlCol="0" anchor="ctr"/>
           <a:lstStyle/>
           <a:p>
-            <a:pPr indent="0" marL="0">
+            <a:pPr marL="0" indent="0">
               <a:buNone/>
             </a:pPr>
             <a:r>
@@ -3078,7 +2838,7 @@
           <a:bodyPr wrap="square" lIns="0" tIns="0" rIns="0" bIns="0" rtlCol="0" anchor="ctr"/>
           <a:lstStyle/>
           <a:p>
-            <a:pPr indent="0" marL="0">
+            <a:pPr marL="0" indent="0">
               <a:buNone/>
             </a:pPr>
             <a:r>
@@ -3122,7 +2882,10 @@
         </p:spPr>
         <p:txBody>
           <a:bodyPr/>
-          <a:p/>
+          <a:lstStyle/>
+          <a:p>
+            <a:endParaRPr/>
+          </a:p>
         </p:txBody>
       </p:sp>
       <p:sp>
@@ -3146,7 +2909,7 @@
           <a:bodyPr wrap="square" lIns="0" tIns="0" rIns="0" bIns="0" rtlCol="0" anchor="ctr"/>
           <a:lstStyle/>
           <a:p>
-            <a:pPr indent="0" marL="0">
+            <a:pPr marL="0" indent="0">
               <a:buNone/>
             </a:pPr>
             <a:r>
@@ -3185,7 +2948,7 @@
           <a:bodyPr wrap="square" lIns="0" tIns="0" rIns="0" bIns="0" rtlCol="0" anchor="ctr"/>
           <a:lstStyle/>
           <a:p>
-            <a:pPr indent="0" marL="0">
+            <a:pPr marL="0" indent="0">
               <a:buNone/>
             </a:pPr>
             <a:r>
@@ -3229,7 +2992,10 @@
         </p:spPr>
         <p:txBody>
           <a:bodyPr/>
-          <a:p/>
+          <a:lstStyle/>
+          <a:p>
+            <a:endParaRPr/>
+          </a:p>
         </p:txBody>
       </p:sp>
       <p:sp>
@@ -3253,7 +3019,7 @@
           <a:bodyPr wrap="square" lIns="0" tIns="0" rIns="0" bIns="0" rtlCol="0" anchor="ctr"/>
           <a:lstStyle/>
           <a:p>
-            <a:pPr indent="0" marL="0">
+            <a:pPr marL="0" indent="0">
               <a:buNone/>
             </a:pPr>
             <a:r>
@@ -3292,7 +3058,7 @@
           <a:bodyPr wrap="square" lIns="0" tIns="0" rIns="0" bIns="0" rtlCol="0" anchor="ctr"/>
           <a:lstStyle/>
           <a:p>
-            <a:pPr indent="0" marL="0">
+            <a:pPr marL="0" indent="0">
               <a:buNone/>
             </a:pPr>
             <a:r>
@@ -3336,7 +3102,10 @@
         </p:spPr>
         <p:txBody>
           <a:bodyPr/>
-          <a:p/>
+          <a:lstStyle/>
+          <a:p>
+            <a:endParaRPr/>
+          </a:p>
         </p:txBody>
       </p:sp>
       <p:sp>
@@ -3360,7 +3129,7 @@
           <a:bodyPr wrap="square" lIns="0" tIns="0" rIns="0" bIns="0" rtlCol="0" anchor="ctr"/>
           <a:lstStyle/>
           <a:p>
-            <a:pPr indent="0" marL="0">
+            <a:pPr marL="0" indent="0">
               <a:buNone/>
             </a:pPr>
             <a:r>
@@ -3399,7 +3168,7 @@
           <a:bodyPr wrap="square" lIns="0" tIns="0" rIns="0" bIns="0" rtlCol="0" anchor="ctr"/>
           <a:lstStyle/>
           <a:p>
-            <a:pPr indent="0" marL="0">
+            <a:pPr marL="0" indent="0">
               <a:buNone/>
             </a:pPr>
             <a:r>
@@ -3443,7 +3212,10 @@
         </p:spPr>
         <p:txBody>
           <a:bodyPr/>
-          <a:p/>
+          <a:lstStyle/>
+          <a:p>
+            <a:endParaRPr/>
+          </a:p>
         </p:txBody>
       </p:sp>
       <p:sp>
@@ -3467,7 +3239,7 @@
           <a:bodyPr wrap="square" lIns="0" tIns="0" rIns="0" bIns="0" rtlCol="0" anchor="ctr"/>
           <a:lstStyle/>
           <a:p>
-            <a:pPr indent="0" marL="0">
+            <a:pPr marL="0" indent="0">
               <a:buNone/>
             </a:pPr>
             <a:r>
@@ -3506,7 +3278,7 @@
           <a:bodyPr wrap="square" lIns="0" tIns="0" rIns="0" bIns="0" rtlCol="0" anchor="ctr"/>
           <a:lstStyle/>
           <a:p>
-            <a:pPr indent="0" marL="0">
+            <a:pPr marL="0" indent="0">
               <a:buNone/>
             </a:pPr>
             <a:r>
@@ -3534,12 +3306,13 @@
 
 <file path=ppt/slides/slide11.xml><?xml version="1.0" encoding="utf-8"?>
 <p:sld xmlns:a="http://schemas.openxmlformats.org/drawingml/2006/main" xmlns:r="http://schemas.openxmlformats.org/officeDocument/2006/relationships" xmlns:p="http://schemas.openxmlformats.org/presentationml/2006/main">
-  <p:cSld name="Slide 8">
+  <p:cSld name="Slide 9">
     <p:bg>
       <p:bgPr>
         <a:solidFill>
           <a:srgbClr val="FFFFFF"/>
         </a:solidFill>
+        <a:effectLst/>
       </p:bgPr>
     </p:bg>
     <p:spTree>
@@ -3577,7 +3350,7 @@
           <a:bodyPr wrap="square" lIns="0" tIns="0" rIns="0" bIns="0" rtlCol="0" anchor="t"/>
           <a:lstStyle/>
           <a:p>
-            <a:pPr indent="0" marL="0">
+            <a:pPr marL="0" indent="0">
               <a:buNone/>
             </a:pPr>
             <a:r>
@@ -3589,7 +3362,7 @@
                 <a:ea typeface="Calibri" pitchFamily="34" charset="-122"/>
                 <a:cs typeface="Calibri" pitchFamily="34" charset="-120"/>
               </a:rPr>
-              <a:t>KẾ HOẠCH THỰC THI</a:t>
+              <a:t>CHỈ SỐ ĐÁNH GIÁ</a:t>
             </a:r>
             <a:endParaRPr lang="en-US" sz="1200" dirty="0"/>
           </a:p>
@@ -3616,7 +3389,7 @@
           <a:bodyPr wrap="square" lIns="0" tIns="0" rIns="0" bIns="0" rtlCol="0" anchor="t"/>
           <a:lstStyle/>
           <a:p>
-            <a:pPr indent="0" marL="0">
+            <a:pPr marL="0" indent="0">
               <a:buNone/>
             </a:pPr>
             <a:r>
@@ -3628,7 +3401,7 @@
                 <a:ea typeface="Cambria" pitchFamily="34" charset="-122"/>
                 <a:cs typeface="Cambria" pitchFamily="34" charset="-120"/>
               </a:rPr>
-              <a:t>Kế hoạch thực thi 7 ngày</a:t>
+              <a:t>Các chỉ số báo cáo và ba nguyên tắc đo</a:t>
             </a:r>
             <a:endParaRPr lang="en-US" sz="3000" dirty="0"/>
           </a:p>
@@ -3655,11 +3428,11 @@
           <a:bodyPr wrap="square" lIns="0" tIns="0" rIns="0" bIns="0" rtlCol="0" anchor="t"/>
           <a:lstStyle/>
           <a:p>
-            <a:pPr indent="0" marL="0">
-              <a:buNone/>
-            </a:pPr>
-            <a:r>
-              <a:rPr lang="en-US" sz="1150" dirty="0">
+            <a:pPr marL="0" indent="0">
+              <a:buNone/>
+            </a:pPr>
+            <a:r>
+              <a:rPr lang="en-US" sz="1350" dirty="0">
                 <a:solidFill>
                   <a:srgbClr val="6B6F82"/>
                 </a:solidFill>
@@ -3667,7 +3440,7 @@
                 <a:ea typeface="Calibri" pitchFamily="34" charset="-122"/>
                 <a:cs typeface="Calibri" pitchFamily="34" charset="-120"/>
               </a:rPr>
-              <a:t>Mục tiêu cuối tuần: 11 file mã nguồn — config, adapters (llm, embed, fake), vector, extractor, assembler, agent, eval (datasets, judge, run).</a:t>
+              <a:t>Prompt chấm và mô hình chấm được chốt trong tuần 3, không sửa về sau (Zheng et al., LLM-as-a-Judge, NeurIPS 2023).</a:t>
             </a:r>
             <a:endParaRPr lang="en-US" sz="1050" dirty="0"/>
           </a:p>
@@ -3675,14 +3448,53 @@
       </p:sp>
       <p:sp>
         <p:nvSpPr>
-          <p:cNvPr id="6" name="Shape 3"/>
+          <p:cNvPr id="6" name="Text 3"/>
+          <p:cNvSpPr txBox="1"/>
+          <p:nvPr/>
+        </p:nvSpPr>
+        <p:spPr>
+          <a:xfrm>
+            <a:off x="566928" y="1645920"/>
+            <a:ext cx="5486400" cy="237744"/>
+          </a:xfrm>
+          <a:prstGeom prst="rect">
+            <a:avLst/>
+          </a:prstGeom>
+          <a:noFill/>
+          <a:ln/>
+        </p:spPr>
+        <p:txBody>
+          <a:bodyPr wrap="square" lIns="0" tIns="0" rIns="0" bIns="0" rtlCol="0" anchor="t"/>
+          <a:lstStyle/>
+          <a:p>
+            <a:pPr marL="0" indent="0">
+              <a:buNone/>
+            </a:pPr>
+            <a:r>
+              <a:rPr lang="en-US" sz="1450" b="1" dirty="0">
+                <a:solidFill>
+                  <a:srgbClr val="3A36A0"/>
+                </a:solidFill>
+                <a:latin typeface="Calibri" pitchFamily="34" charset="0"/>
+                <a:ea typeface="Calibri" pitchFamily="34" charset="-122"/>
+                <a:cs typeface="Calibri" pitchFamily="34" charset="-120"/>
+              </a:rPr>
+              <a:t>CHỈ SỐ SẼ BÁO CÁO</a:t>
+            </a:r>
+            <a:endParaRPr lang="en-US" sz="1100" dirty="0"/>
+          </a:p>
+        </p:txBody>
+      </p:sp>
+      <p:sp>
+        <p:nvSpPr>
+          <p:cNvPr id="7" name="Shape 4"/>
           <p:cNvSpPr/>
           <p:nvPr/>
         </p:nvSpPr>
         <p:spPr>
           <a:xfrm>
-            <a:off x="566928" y="1645920"/>
-            <a:ext cx="11045952" cy="658368"/>
+            <a:off x="566928" y="1920240"/>
+            <a:ext cx="5358384" cy="4206240"/>
           </a:xfrm>
           <a:prstGeom prst="rect">
             <a:avLst/>
@@ -3699,36 +3511,10 @@
         </p:spPr>
         <p:txBody>
           <a:bodyPr/>
-          <a:p/>
-        </p:txBody>
-      </p:sp>
-      <p:sp>
-        <p:nvSpPr>
-          <p:cNvPr id="7" name="Shape 4"/>
-          <p:cNvSpPr/>
-          <p:nvPr/>
-        </p:nvSpPr>
-        <p:spPr>
-          <a:xfrm>
-            <a:off x="566928" y="1645920"/>
-            <a:ext cx="1371600" cy="658368"/>
-          </a:xfrm>
-          <a:prstGeom prst="rect">
-            <a:avLst/>
-          </a:prstGeom>
-          <a:solidFill>
-            <a:srgbClr val="13123A"/>
-          </a:solidFill>
-          <a:ln w="12700">
-            <a:solidFill>
-              <a:srgbClr val="13123A"/>
-            </a:solidFill>
-            <a:prstDash val="solid"/>
-          </a:ln>
-        </p:spPr>
-        <p:txBody>
-          <a:bodyPr/>
-          <a:p/>
+          <a:lstStyle/>
+          <a:p>
+            <a:endParaRPr/>
+          </a:p>
         </p:txBody>
       </p:sp>
       <p:sp>
@@ -3739,141 +3525,70 @@
         </p:nvSpPr>
         <p:spPr>
           <a:xfrm>
-            <a:off x="566928" y="1645920"/>
-            <a:ext cx="1371600" cy="658368"/>
-          </a:xfrm>
-          <a:prstGeom prst="rect">
-            <a:avLst/>
-          </a:prstGeom>
-          <a:noFill/>
-          <a:ln/>
-        </p:spPr>
-        <p:txBody>
-          <a:bodyPr wrap="square" lIns="0" tIns="0" rIns="0" bIns="0" rtlCol="0" anchor="ctr"/>
-          <a:lstStyle/>
-          <a:p>
-            <a:pPr algn="ctr" indent="0" marL="0">
-              <a:buNone/>
-            </a:pPr>
-            <a:r>
-              <a:rPr lang="en-US" sz="1550" b="1" dirty="0">
-                <a:solidFill>
-                  <a:srgbClr val="FFFFFF"/>
+            <a:off x="822960" y="2103120"/>
+            <a:ext cx="4846320" cy="3840480"/>
+          </a:xfrm>
+          <a:prstGeom prst="rect">
+            <a:avLst/>
+          </a:prstGeom>
+          <a:noFill/>
+          <a:ln/>
+        </p:spPr>
+        <p:txBody>
+          <a:bodyPr wrap="square" lIns="0" tIns="0" rIns="0" bIns="0" rtlCol="0" anchor="t"/>
+          <a:lstStyle/>
+          <a:p>
+            <a:pPr marL="342900" indent="-342900">
+              <a:spcAft>
+                <a:spcPts val="600"/>
+              </a:spcAft>
+              <a:buSzPct val="100000"/>
+              <a:buChar char="•"/>
+            </a:pPr>
+            <a:r>
+              <a:rPr lang="en-US" sz="1600" dirty="0">
+                <a:solidFill>
+                  <a:srgbClr val="4A4E63"/>
                 </a:solidFill>
                 <a:latin typeface="Calibri" pitchFamily="34" charset="0"/>
                 <a:ea typeface="Calibri" pitchFamily="34" charset="-122"/>
                 <a:cs typeface="Calibri" pitchFamily="34" charset="-120"/>
               </a:rPr>
-              <a:t>NGÀY 1</a:t>
-            </a:r>
-            <a:endParaRPr lang="en-US" sz="1200" dirty="0"/>
-          </a:p>
-        </p:txBody>
-      </p:sp>
-      <p:sp>
-        <p:nvSpPr>
-          <p:cNvPr id="9" name="Text 6"/>
-          <p:cNvSpPr txBox="1"/>
-          <p:nvPr/>
-        </p:nvSpPr>
-        <p:spPr>
-          <a:xfrm>
-            <a:off x="2103120" y="1645920"/>
-            <a:ext cx="548640" cy="658368"/>
-          </a:xfrm>
-          <a:prstGeom prst="rect">
-            <a:avLst/>
-          </a:prstGeom>
-          <a:noFill/>
-          <a:ln/>
-        </p:spPr>
-        <p:txBody>
-          <a:bodyPr wrap="square" lIns="0" tIns="0" rIns="0" bIns="0" rtlCol="0" anchor="ctr"/>
-          <a:lstStyle/>
-          <a:p>
-            <a:pPr indent="0" marL="0">
-              <a:buNone/>
-            </a:pPr>
-            <a:r>
-              <a:rPr lang="en-US" sz="1700" b="1" dirty="0">
-                <a:solidFill>
-                  <a:srgbClr val="E9970B"/>
+              <a:t>Accuracy theo từng loại câu hỏi LongMemEval-S — đường cơ sở</a:t>
+            </a:r>
+            <a:endParaRPr lang="en-US" sz="1250" dirty="0"/>
+          </a:p>
+          <a:p>
+            <a:pPr marL="342900" indent="-342900">
+              <a:spcAft>
+                <a:spcPts val="600"/>
+              </a:spcAft>
+              <a:buSzPct val="100000"/>
+              <a:buChar char="•"/>
+            </a:pPr>
+            <a:r>
+              <a:rPr lang="en-US" sz="1600" dirty="0">
+                <a:solidFill>
+                  <a:srgbClr val="4A4E63"/>
                 </a:solidFill>
                 <a:latin typeface="Calibri" pitchFamily="34" charset="0"/>
                 <a:ea typeface="Calibri" pitchFamily="34" charset="-122"/>
                 <a:cs typeface="Calibri" pitchFamily="34" charset="-120"/>
               </a:rPr>
-              <a:t>A+B</a:t>
-            </a:r>
-            <a:endParaRPr lang="en-US" sz="1300" dirty="0"/>
-          </a:p>
-        </p:txBody>
-      </p:sp>
-      <p:sp>
-        <p:nvSpPr>
-          <p:cNvPr id="10" name="Text 7"/>
-          <p:cNvSpPr txBox="1"/>
-          <p:nvPr/>
-        </p:nvSpPr>
-        <p:spPr>
-          <a:xfrm>
-            <a:off x="2697480" y="1645920"/>
-            <a:ext cx="2651760" cy="658368"/>
-          </a:xfrm>
-          <a:prstGeom prst="rect">
-            <a:avLst/>
-          </a:prstGeom>
-          <a:noFill/>
-          <a:ln/>
-        </p:spPr>
-        <p:txBody>
-          <a:bodyPr wrap="square" lIns="0" tIns="0" rIns="0" bIns="0" rtlCol="0" anchor="ctr"/>
-          <a:lstStyle/>
-          <a:p>
-            <a:pPr indent="0" marL="0">
-              <a:buNone/>
-            </a:pPr>
-            <a:r>
-              <a:rPr lang="en-US" sz="1700" b="1" dirty="0">
-                <a:solidFill>
-                  <a:srgbClr val="13123A"/>
-                </a:solidFill>
-                <a:latin typeface="Cambria" pitchFamily="34" charset="0"/>
-                <a:ea typeface="Cambria" pitchFamily="34" charset="-122"/>
-                <a:cs typeface="Cambria" pitchFamily="34" charset="-120"/>
-              </a:rPr>
-              <a:t>Khung, adapter, chỉ mục</a:t>
-            </a:r>
-            <a:endParaRPr lang="en-US" sz="1300" dirty="0"/>
-          </a:p>
-        </p:txBody>
-      </p:sp>
-      <p:sp>
-        <p:nvSpPr>
-          <p:cNvPr id="11" name="Text 8"/>
-          <p:cNvSpPr txBox="1"/>
-          <p:nvPr/>
-        </p:nvSpPr>
-        <p:spPr>
-          <a:xfrm>
-            <a:off x="5394960" y="1645920"/>
-            <a:ext cx="6080760" cy="658368"/>
-          </a:xfrm>
-          <a:prstGeom prst="rect">
-            <a:avLst/>
-          </a:prstGeom>
-          <a:noFill/>
-          <a:ln/>
-        </p:spPr>
-        <p:txBody>
-          <a:bodyPr wrap="square" lIns="0" tIns="0" rIns="0" bIns="0" rtlCol="0" anchor="ctr"/>
-          <a:lstStyle/>
-          <a:p>
-            <a:pPr indent="0" marL="0">
-              <a:buNone/>
-            </a:pPr>
-            <a:r>
-              <a:rPr lang="en-US" sz="1500" dirty="0">
+              <a:t>Tỉ lệ khóa slot bị từ chối, tách theo lý do</a:t>
+            </a:r>
+            <a:endParaRPr lang="en-US" sz="1250" dirty="0"/>
+          </a:p>
+          <a:p>
+            <a:pPr marL="342900" indent="-342900">
+              <a:spcAft>
+                <a:spcPts val="600"/>
+              </a:spcAft>
+              <a:buSzPct val="100000"/>
+              <a:buChar char="•"/>
+            </a:pPr>
+            <a:r>
+              <a:rPr lang="en-US" sz="1600" dirty="0">
                 <a:solidFill>
                   <a:srgbClr val="4A4E63"/>
                 </a:solidFill>
@@ -3881,22 +3596,124 @@
                 <a:ea typeface="Calibri" pitchFamily="34" charset="-122"/>
                 <a:cs typeface="Calibri" pitchFamily="34" charset="-120"/>
               </a:rPr>
-              <a:t>A: config · LLMAdapter · BGE-M3 có cache · FakeLLM   |   B: vector.py + rebuild()</a:t>
-            </a:r>
-            <a:endParaRPr lang="en-US" sz="1150" dirty="0"/>
-          </a:p>
-        </p:txBody>
-      </p:sp>
-      <p:sp>
-        <p:nvSpPr>
-          <p:cNvPr id="12" name="Shape 9"/>
+              <a:t>Số fact / lượt và số slot phân biệt</a:t>
+            </a:r>
+            <a:endParaRPr lang="en-US" sz="1250" dirty="0"/>
+          </a:p>
+          <a:p>
+            <a:pPr marL="342900" indent="-342900">
+              <a:spcAft>
+                <a:spcPts val="600"/>
+              </a:spcAft>
+              <a:buSzPct val="100000"/>
+              <a:buChar char="•"/>
+            </a:pPr>
+            <a:r>
+              <a:rPr lang="en-US" sz="1600" dirty="0">
+                <a:solidFill>
+                  <a:srgbClr val="4A4E63"/>
+                </a:solidFill>
+                <a:latin typeface="Calibri" pitchFamily="34" charset="0"/>
+                <a:ea typeface="Calibri" pitchFamily="34" charset="-122"/>
+                <a:cs typeface="Calibri" pitchFamily="34" charset="-120"/>
+              </a:rPr>
+              <a:t>p50/p95 tách pha: trích xuất · nhúng · truy xuất · sinh</a:t>
+            </a:r>
+            <a:endParaRPr lang="en-US" sz="1250" dirty="0"/>
+          </a:p>
+          <a:p>
+            <a:pPr marL="342900" indent="-342900">
+              <a:spcAft>
+                <a:spcPts val="600"/>
+              </a:spcAft>
+              <a:buSzPct val="100000"/>
+              <a:buChar char="•"/>
+            </a:pPr>
+            <a:r>
+              <a:rPr lang="en-US" sz="1600" dirty="0">
+                <a:solidFill>
+                  <a:srgbClr val="4A4E63"/>
+                </a:solidFill>
+                <a:latin typeface="Calibri" pitchFamily="34" charset="0"/>
+                <a:ea typeface="Calibri" pitchFamily="34" charset="-122"/>
+                <a:cs typeface="Calibri" pitchFamily="34" charset="-120"/>
+              </a:rPr>
+              <a:t>Token / truy vấn, tách theo lang (tiếng Việt ≈ gấp đôi)</a:t>
+            </a:r>
+            <a:endParaRPr lang="en-US" sz="1250" dirty="0"/>
+          </a:p>
+          <a:p>
+            <a:pPr marL="342900" indent="-342900">
+              <a:spcAft>
+                <a:spcPts val="600"/>
+              </a:spcAft>
+              <a:buSzPct val="100000"/>
+              <a:buChar char="•"/>
+            </a:pPr>
+            <a:r>
+              <a:rPr lang="en-US" sz="1600" dirty="0">
+                <a:solidFill>
+                  <a:srgbClr val="4A4E63"/>
+                </a:solidFill>
+                <a:latin typeface="Calibri" pitchFamily="34" charset="0"/>
+                <a:ea typeface="Calibri" pitchFamily="34" charset="-122"/>
+                <a:cs typeface="Calibri" pitchFamily="34" charset="-120"/>
+              </a:rPr>
+              <a:t>Phân loại 10 câu sai đầu tiên</a:t>
+            </a:r>
+            <a:endParaRPr lang="en-US" sz="1250" dirty="0"/>
+          </a:p>
+        </p:txBody>
+      </p:sp>
+      <p:sp>
+        <p:nvSpPr>
+          <p:cNvPr id="9" name="Text 6"/>
+          <p:cNvSpPr txBox="1"/>
+          <p:nvPr/>
+        </p:nvSpPr>
+        <p:spPr>
+          <a:xfrm>
+            <a:off x="6254496" y="1645920"/>
+            <a:ext cx="5486400" cy="237744"/>
+          </a:xfrm>
+          <a:prstGeom prst="rect">
+            <a:avLst/>
+          </a:prstGeom>
+          <a:noFill/>
+          <a:ln/>
+        </p:spPr>
+        <p:txBody>
+          <a:bodyPr wrap="square" lIns="0" tIns="0" rIns="0" bIns="0" rtlCol="0" anchor="t"/>
+          <a:lstStyle/>
+          <a:p>
+            <a:pPr marL="0" indent="0">
+              <a:buNone/>
+            </a:pPr>
+            <a:r>
+              <a:rPr lang="en-US" sz="1450" b="1" dirty="0">
+                <a:solidFill>
+                  <a:srgbClr val="E9970B"/>
+                </a:solidFill>
+                <a:latin typeface="Calibri" pitchFamily="34" charset="0"/>
+                <a:ea typeface="Calibri" pitchFamily="34" charset="-122"/>
+                <a:cs typeface="Calibri" pitchFamily="34" charset="-120"/>
+              </a:rPr>
+              <a:t>BA NGUYÊN TẮC ĐỂ TRÁNH SAI LỆCH</a:t>
+            </a:r>
+            <a:endParaRPr lang="en-US" sz="1100" dirty="0"/>
+          </a:p>
+        </p:txBody>
+      </p:sp>
+      <p:sp>
+        <p:nvSpPr>
+          <p:cNvPr id="10" name="Shape 7"/>
           <p:cNvSpPr/>
           <p:nvPr/>
         </p:nvSpPr>
         <p:spPr>
           <a:xfrm>
-            <a:off x="566928" y="2395728"/>
-            <a:ext cx="11045952" cy="658368"/>
+            <a:off x="6254496" y="1920240"/>
+            <a:ext cx="5358384" cy="1280160"/>
           </a:xfrm>
           <a:prstGeom prst="rect">
             <a:avLst/>
@@ -3913,72 +3730,124 @@
         </p:spPr>
         <p:txBody>
           <a:bodyPr/>
-          <a:p/>
-        </p:txBody>
-      </p:sp>
-      <p:sp>
-        <p:nvSpPr>
-          <p:cNvPr id="13" name="Shape 10"/>
-          <p:cNvSpPr/>
-          <p:nvPr/>
-        </p:nvSpPr>
-        <p:spPr>
-          <a:xfrm>
-            <a:off x="566928" y="2395728"/>
-            <a:ext cx="1371600" cy="658368"/>
-          </a:xfrm>
-          <a:prstGeom prst="rect">
-            <a:avLst/>
-          </a:prstGeom>
-          <a:solidFill>
-            <a:srgbClr val="13123A"/>
-          </a:solidFill>
-          <a:ln w="12700">
-            <a:solidFill>
-              <a:srgbClr val="13123A"/>
-            </a:solidFill>
-            <a:prstDash val="solid"/>
-          </a:ln>
-        </p:spPr>
-        <p:txBody>
-          <a:bodyPr/>
-          <a:p/>
-        </p:txBody>
-      </p:sp>
-      <p:sp>
-        <p:nvSpPr>
-          <p:cNvPr id="14" name="Text 11"/>
-          <p:cNvSpPr txBox="1"/>
-          <p:nvPr/>
-        </p:nvSpPr>
-        <p:spPr>
-          <a:xfrm>
-            <a:off x="566928" y="2395728"/>
-            <a:ext cx="1371600" cy="658368"/>
-          </a:xfrm>
-          <a:prstGeom prst="rect">
-            <a:avLst/>
-          </a:prstGeom>
-          <a:noFill/>
-          <a:ln/>
-        </p:spPr>
-        <p:txBody>
-          <a:bodyPr wrap="square" lIns="0" tIns="0" rIns="0" bIns="0" rtlCol="0" anchor="ctr"/>
-          <a:lstStyle/>
-          <a:p>
-            <a:pPr algn="ctr" indent="0" marL="0">
-              <a:buNone/>
-            </a:pPr>
-            <a:r>
-              <a:rPr lang="en-US" sz="1550" b="1" dirty="0">
-                <a:solidFill>
-                  <a:srgbClr val="FFFFFF"/>
+          <a:lstStyle/>
+          <a:p>
+            <a:endParaRPr/>
+          </a:p>
+        </p:txBody>
+      </p:sp>
+      <p:sp>
+        <p:nvSpPr>
+          <p:cNvPr id="11" name="Text 8"/>
+          <p:cNvSpPr txBox="1"/>
+          <p:nvPr/>
+        </p:nvSpPr>
+        <p:spPr>
+          <a:xfrm>
+            <a:off x="6446520" y="2029968"/>
+            <a:ext cx="457200" cy="548640"/>
+          </a:xfrm>
+          <a:prstGeom prst="rect">
+            <a:avLst/>
+          </a:prstGeom>
+          <a:noFill/>
+          <a:ln/>
+        </p:spPr>
+        <p:txBody>
+          <a:bodyPr wrap="square" lIns="0" tIns="0" rIns="0" bIns="0" rtlCol="0" anchor="t"/>
+          <a:lstStyle/>
+          <a:p>
+            <a:pPr marL="0" indent="0">
+              <a:buNone/>
+            </a:pPr>
+            <a:r>
+              <a:rPr lang="en-US" sz="2600" b="1" dirty="0">
+                <a:solidFill>
+                  <a:srgbClr val="E9970B"/>
+                </a:solidFill>
+                <a:latin typeface="Cambria" pitchFamily="34" charset="0"/>
+                <a:ea typeface="Cambria" pitchFamily="34" charset="-122"/>
+                <a:cs typeface="Cambria" pitchFamily="34" charset="-120"/>
+              </a:rPr>
+              <a:t>1</a:t>
+            </a:r>
+            <a:endParaRPr lang="en-US" sz="2600" dirty="0"/>
+          </a:p>
+        </p:txBody>
+      </p:sp>
+      <p:sp>
+        <p:nvSpPr>
+          <p:cNvPr id="12" name="Text 9"/>
+          <p:cNvSpPr txBox="1"/>
+          <p:nvPr/>
+        </p:nvSpPr>
+        <p:spPr>
+          <a:xfrm>
+            <a:off x="6995160" y="2084832"/>
+            <a:ext cx="4434840" cy="274320"/>
+          </a:xfrm>
+          <a:prstGeom prst="rect">
+            <a:avLst/>
+          </a:prstGeom>
+          <a:noFill/>
+          <a:ln/>
+        </p:spPr>
+        <p:txBody>
+          <a:bodyPr wrap="square" lIns="0" tIns="0" rIns="0" bIns="0" rtlCol="0" anchor="t"/>
+          <a:lstStyle/>
+          <a:p>
+            <a:pPr marL="0" indent="0">
+              <a:buNone/>
+            </a:pPr>
+            <a:r>
+              <a:rPr lang="en-US" sz="1700" b="1" dirty="0">
+                <a:solidFill>
+                  <a:srgbClr val="13123A"/>
+                </a:solidFill>
+                <a:latin typeface="Cambria" pitchFamily="34" charset="0"/>
+                <a:ea typeface="Cambria" pitchFamily="34" charset="-122"/>
+                <a:cs typeface="Cambria" pitchFamily="34" charset="-120"/>
+              </a:rPr>
+              <a:t>Tuần 3 chưa có logic cập nhật</a:t>
+            </a:r>
+            <a:endParaRPr lang="en-US" sz="1300" dirty="0"/>
+          </a:p>
+        </p:txBody>
+      </p:sp>
+      <p:sp>
+        <p:nvSpPr>
+          <p:cNvPr id="13" name="Text 10"/>
+          <p:cNvSpPr txBox="1"/>
+          <p:nvPr/>
+        </p:nvSpPr>
+        <p:spPr>
+          <a:xfrm>
+            <a:off x="6995160" y="2423160"/>
+            <a:ext cx="4434840" cy="731520"/>
+          </a:xfrm>
+          <a:prstGeom prst="rect">
+            <a:avLst/>
+          </a:prstGeom>
+          <a:noFill/>
+          <a:ln/>
+        </p:spPr>
+        <p:txBody>
+          <a:bodyPr wrap="square" lIns="0" tIns="0" rIns="0" bIns="0" rtlCol="0" anchor="t"/>
+          <a:lstStyle/>
+          <a:p>
+            <a:pPr marL="0" indent="0">
+              <a:buNone/>
+            </a:pPr>
+            <a:r>
+              <a:rPr lang="en-US" sz="1250" dirty="0">
+                <a:solidFill>
+                  <a:srgbClr val="4A4E63"/>
                 </a:solidFill>
                 <a:latin typeface="Calibri" pitchFamily="34" charset="0"/>
                 <a:ea typeface="Calibri" pitchFamily="34" charset="-122"/>
                 <a:cs typeface="Calibri" pitchFamily="34" charset="-120"/>
               </a:rPr>
-              <a:t>NGÀY 2–3</a:t>
+              <a:t>Tuần 3 đã có schema, cấp phát seq và cách đọc bản mới nhất. Tuần 4 mới triển khai logic ADD/UPDATE/DELETE/NOOP/CONFLICT và ràng buộc mỗi slot một bản active.</a:t>
             </a:r>
             <a:endParaRPr lang="en-US" sz="1200" dirty="0"/>
           </a:p>
@@ -3986,345 +3855,14 @@
       </p:sp>
       <p:sp>
         <p:nvSpPr>
-          <p:cNvPr id="15" name="Text 12"/>
-          <p:cNvSpPr txBox="1"/>
-          <p:nvPr/>
-        </p:nvSpPr>
-        <p:spPr>
-          <a:xfrm>
-            <a:off x="2103120" y="2395728"/>
-            <a:ext cx="548640" cy="658368"/>
-          </a:xfrm>
-          <a:prstGeom prst="rect">
-            <a:avLst/>
-          </a:prstGeom>
-          <a:noFill/>
-          <a:ln/>
-        </p:spPr>
-        <p:txBody>
-          <a:bodyPr wrap="square" lIns="0" tIns="0" rIns="0" bIns="0" rtlCol="0" anchor="ctr"/>
-          <a:lstStyle/>
-          <a:p>
-            <a:pPr indent="0" marL="0">
-              <a:buNone/>
-            </a:pPr>
-            <a:r>
-              <a:rPr lang="en-US" sz="1700" b="1" dirty="0">
-                <a:solidFill>
-                  <a:srgbClr val="E9970B"/>
-                </a:solidFill>
-                <a:latin typeface="Calibri" pitchFamily="34" charset="0"/>
-                <a:ea typeface="Calibri" pitchFamily="34" charset="-122"/>
-                <a:cs typeface="Calibri" pitchFamily="34" charset="-120"/>
-              </a:rPr>
-              <a:t>A</a:t>
-            </a:r>
-            <a:endParaRPr lang="en-US" sz="1300" dirty="0"/>
-          </a:p>
-        </p:txBody>
-      </p:sp>
-      <p:sp>
-        <p:nvSpPr>
-          <p:cNvPr id="16" name="Text 13"/>
-          <p:cNvSpPr txBox="1"/>
-          <p:nvPr/>
-        </p:nvSpPr>
-        <p:spPr>
-          <a:xfrm>
-            <a:off x="2697480" y="2395728"/>
-            <a:ext cx="2651760" cy="658368"/>
-          </a:xfrm>
-          <a:prstGeom prst="rect">
-            <a:avLst/>
-          </a:prstGeom>
-          <a:noFill/>
-          <a:ln/>
-        </p:spPr>
-        <p:txBody>
-          <a:bodyPr wrap="square" lIns="0" tIns="0" rIns="0" bIns="0" rtlCol="0" anchor="ctr"/>
-          <a:lstStyle/>
-          <a:p>
-            <a:pPr indent="0" marL="0">
-              <a:buNone/>
-            </a:pPr>
-            <a:r>
-              <a:rPr lang="en-US" sz="1700" b="1" dirty="0">
-                <a:solidFill>
-                  <a:srgbClr val="13123A"/>
-                </a:solidFill>
-                <a:latin typeface="Cambria" pitchFamily="34" charset="0"/>
-                <a:ea typeface="Cambria" pitchFamily="34" charset="-122"/>
-                <a:cs typeface="Cambria" pitchFamily="34" charset="-120"/>
-              </a:rPr>
-              <a:t>FactExtractor</a:t>
-            </a:r>
-            <a:endParaRPr lang="en-US" sz="1300" dirty="0"/>
-          </a:p>
-        </p:txBody>
-      </p:sp>
-      <p:sp>
-        <p:nvSpPr>
-          <p:cNvPr id="17" name="Text 14"/>
-          <p:cNvSpPr txBox="1"/>
-          <p:nvPr/>
-        </p:nvSpPr>
-        <p:spPr>
-          <a:xfrm>
-            <a:off x="5394960" y="2395728"/>
-            <a:ext cx="6080760" cy="658368"/>
-          </a:xfrm>
-          <a:prstGeom prst="rect">
-            <a:avLst/>
-          </a:prstGeom>
-          <a:noFill/>
-          <a:ln/>
-        </p:spPr>
-        <p:txBody>
-          <a:bodyPr wrap="square" lIns="0" tIns="0" rIns="0" bIns="0" rtlCol="0" anchor="ctr"/>
-          <a:lstStyle/>
-          <a:p>
-            <a:pPr indent="0" marL="0">
-              <a:buNone/>
-            </a:pPr>
-            <a:r>
-              <a:rPr lang="en-US" sz="1500" dirty="0">
-                <a:solidFill>
-                  <a:srgbClr val="4A4E63"/>
-                </a:solidFill>
-                <a:latin typeface="Calibri" pitchFamily="34" charset="0"/>
-                <a:ea typeface="Calibri" pitchFamily="34" charset="-122"/>
-                <a:cs typeface="Calibri" pitchFamily="34" charset="-120"/>
-              </a:rPr>
-              <a:t>1 lời gọi/lượt · cache sha1 · thử lại 1 lần · hoàn thành khi khóa đúng ≥ 90% trên 20 lượt</a:t>
-            </a:r>
-            <a:endParaRPr lang="en-US" sz="1150" dirty="0"/>
-          </a:p>
-        </p:txBody>
-      </p:sp>
-      <p:sp>
-        <p:nvSpPr>
-          <p:cNvPr id="18" name="Shape 15"/>
+          <p:cNvPr id="14" name="Shape 11"/>
           <p:cNvSpPr/>
           <p:nvPr/>
         </p:nvSpPr>
         <p:spPr>
           <a:xfrm>
-            <a:off x="566928" y="3145536"/>
-            <a:ext cx="11045952" cy="658368"/>
-          </a:xfrm>
-          <a:prstGeom prst="rect">
-            <a:avLst/>
-          </a:prstGeom>
-          <a:solidFill>
-            <a:srgbClr val="ECEBF7"/>
-          </a:solidFill>
-          <a:ln w="12700">
-            <a:solidFill>
-              <a:srgbClr val="ECEBF7"/>
-            </a:solidFill>
-            <a:prstDash val="solid"/>
-          </a:ln>
-        </p:spPr>
-        <p:txBody>
-          <a:bodyPr/>
-          <a:p/>
-        </p:txBody>
-      </p:sp>
-      <p:sp>
-        <p:nvSpPr>
-          <p:cNvPr id="19" name="Shape 16"/>
-          <p:cNvSpPr/>
-          <p:nvPr/>
-        </p:nvSpPr>
-        <p:spPr>
-          <a:xfrm>
-            <a:off x="566928" y="3145536"/>
-            <a:ext cx="1371600" cy="658368"/>
-          </a:xfrm>
-          <a:prstGeom prst="rect">
-            <a:avLst/>
-          </a:prstGeom>
-          <a:solidFill>
-            <a:srgbClr val="13123A"/>
-          </a:solidFill>
-          <a:ln w="12700">
-            <a:solidFill>
-              <a:srgbClr val="13123A"/>
-            </a:solidFill>
-            <a:prstDash val="solid"/>
-          </a:ln>
-        </p:spPr>
-        <p:txBody>
-          <a:bodyPr/>
-          <a:p/>
-        </p:txBody>
-      </p:sp>
-      <p:sp>
-        <p:nvSpPr>
-          <p:cNvPr id="20" name="Text 17"/>
-          <p:cNvSpPr txBox="1"/>
-          <p:nvPr/>
-        </p:nvSpPr>
-        <p:spPr>
-          <a:xfrm>
-            <a:off x="566928" y="3145536"/>
-            <a:ext cx="1371600" cy="658368"/>
-          </a:xfrm>
-          <a:prstGeom prst="rect">
-            <a:avLst/>
-          </a:prstGeom>
-          <a:noFill/>
-          <a:ln/>
-        </p:spPr>
-        <p:txBody>
-          <a:bodyPr wrap="square" lIns="0" tIns="0" rIns="0" bIns="0" rtlCol="0" anchor="ctr"/>
-          <a:lstStyle/>
-          <a:p>
-            <a:pPr algn="ctr" indent="0" marL="0">
-              <a:buNone/>
-            </a:pPr>
-            <a:r>
-              <a:rPr lang="en-US" sz="1550" b="1" dirty="0">
-                <a:solidFill>
-                  <a:srgbClr val="FFFFFF"/>
-                </a:solidFill>
-                <a:latin typeface="Calibri" pitchFamily="34" charset="0"/>
-                <a:ea typeface="Calibri" pitchFamily="34" charset="-122"/>
-                <a:cs typeface="Calibri" pitchFamily="34" charset="-120"/>
-              </a:rPr>
-              <a:t>NGÀY 3–4</a:t>
-            </a:r>
-            <a:endParaRPr lang="en-US" sz="1200" dirty="0"/>
-          </a:p>
-        </p:txBody>
-      </p:sp>
-      <p:sp>
-        <p:nvSpPr>
-          <p:cNvPr id="21" name="Text 18"/>
-          <p:cNvSpPr txBox="1"/>
-          <p:nvPr/>
-        </p:nvSpPr>
-        <p:spPr>
-          <a:xfrm>
-            <a:off x="2103120" y="3145536"/>
-            <a:ext cx="548640" cy="658368"/>
-          </a:xfrm>
-          <a:prstGeom prst="rect">
-            <a:avLst/>
-          </a:prstGeom>
-          <a:noFill/>
-          <a:ln/>
-        </p:spPr>
-        <p:txBody>
-          <a:bodyPr wrap="square" lIns="0" tIns="0" rIns="0" bIns="0" rtlCol="0" anchor="ctr"/>
-          <a:lstStyle/>
-          <a:p>
-            <a:pPr indent="0" marL="0">
-              <a:buNone/>
-            </a:pPr>
-            <a:r>
-              <a:rPr lang="en-US" sz="1700" b="1" dirty="0">
-                <a:solidFill>
-                  <a:srgbClr val="E9970B"/>
-                </a:solidFill>
-                <a:latin typeface="Calibri" pitchFamily="34" charset="0"/>
-                <a:ea typeface="Calibri" pitchFamily="34" charset="-122"/>
-                <a:cs typeface="Calibri" pitchFamily="34" charset="-120"/>
-              </a:rPr>
-              <a:t>B</a:t>
-            </a:r>
-            <a:endParaRPr lang="en-US" sz="1300" dirty="0"/>
-          </a:p>
-        </p:txBody>
-      </p:sp>
-      <p:sp>
-        <p:nvSpPr>
-          <p:cNvPr id="22" name="Text 19"/>
-          <p:cNvSpPr txBox="1"/>
-          <p:nvPr/>
-        </p:nvSpPr>
-        <p:spPr>
-          <a:xfrm>
-            <a:off x="2697480" y="3145536"/>
-            <a:ext cx="2651760" cy="658368"/>
-          </a:xfrm>
-          <a:prstGeom prst="rect">
-            <a:avLst/>
-          </a:prstGeom>
-          <a:noFill/>
-          <a:ln/>
-        </p:spPr>
-        <p:txBody>
-          <a:bodyPr wrap="square" lIns="0" tIns="0" rIns="0" bIns="0" rtlCol="0" anchor="ctr"/>
-          <a:lstStyle/>
-          <a:p>
-            <a:pPr indent="0" marL="0">
-              <a:buNone/>
-            </a:pPr>
-            <a:r>
-              <a:rPr lang="en-US" sz="1700" b="1" dirty="0">
-                <a:solidFill>
-                  <a:srgbClr val="13123A"/>
-                </a:solidFill>
-                <a:latin typeface="Cambria" pitchFamily="34" charset="0"/>
-                <a:ea typeface="Cambria" pitchFamily="34" charset="-122"/>
-                <a:cs typeface="Cambria" pitchFamily="34" charset="-120"/>
-              </a:rPr>
-              <a:t>Assembler &amp; agent</a:t>
-            </a:r>
-            <a:endParaRPr lang="en-US" sz="1300" dirty="0"/>
-          </a:p>
-        </p:txBody>
-      </p:sp>
-      <p:sp>
-        <p:nvSpPr>
-          <p:cNvPr id="23" name="Text 20"/>
-          <p:cNvSpPr txBox="1"/>
-          <p:nvPr/>
-        </p:nvSpPr>
-        <p:spPr>
-          <a:xfrm>
-            <a:off x="5394960" y="3145536"/>
-            <a:ext cx="6080760" cy="658368"/>
-          </a:xfrm>
-          <a:prstGeom prst="rect">
-            <a:avLst/>
-          </a:prstGeom>
-          <a:noFill/>
-          <a:ln/>
-        </p:spPr>
-        <p:txBody>
-          <a:bodyPr wrap="square" lIns="0" tIns="0" rIns="0" bIns="0" rtlCol="0" anchor="ctr"/>
-          <a:lstStyle/>
-          <a:p>
-            <a:pPr indent="0" marL="0">
-              <a:buNone/>
-            </a:pPr>
-            <a:r>
-              <a:rPr lang="en-US" sz="1500" dirty="0">
-                <a:solidFill>
-                  <a:srgbClr val="4A4E63"/>
-                </a:solidFill>
-                <a:latin typeface="Calibri" pitchFamily="34" charset="0"/>
-                <a:ea typeface="Calibri" pitchFamily="34" charset="-122"/>
-                <a:cs typeface="Calibri" pitchFamily="34" charset="-120"/>
-              </a:rPr>
-              <a:t>assembler chia hạn ngạch (đếm token bằng tokenizer thật) · agent.py với ingest_turn và answer</a:t>
-            </a:r>
-            <a:endParaRPr lang="en-US" sz="1150" dirty="0"/>
-          </a:p>
-        </p:txBody>
-      </p:sp>
-      <p:sp>
-        <p:nvSpPr>
-          <p:cNvPr id="24" name="Shape 21"/>
-          <p:cNvSpPr/>
-          <p:nvPr/>
-        </p:nvSpPr>
-        <p:spPr>
-          <a:xfrm>
-            <a:off x="566928" y="3895344"/>
-            <a:ext cx="11045952" cy="658368"/>
+            <a:off x="6254496" y="3337560"/>
+            <a:ext cx="5358384" cy="1280160"/>
           </a:xfrm>
           <a:prstGeom prst="rect">
             <a:avLst/>
@@ -4341,72 +3879,124 @@
         </p:spPr>
         <p:txBody>
           <a:bodyPr/>
-          <a:p/>
-        </p:txBody>
-      </p:sp>
-      <p:sp>
-        <p:nvSpPr>
-          <p:cNvPr id="25" name="Shape 22"/>
-          <p:cNvSpPr/>
-          <p:nvPr/>
-        </p:nvSpPr>
-        <p:spPr>
-          <a:xfrm>
-            <a:off x="566928" y="3895344"/>
-            <a:ext cx="1371600" cy="658368"/>
-          </a:xfrm>
-          <a:prstGeom prst="rect">
-            <a:avLst/>
-          </a:prstGeom>
-          <a:solidFill>
-            <a:srgbClr val="13123A"/>
-          </a:solidFill>
-          <a:ln w="12700">
-            <a:solidFill>
-              <a:srgbClr val="13123A"/>
-            </a:solidFill>
-            <a:prstDash val="solid"/>
-          </a:ln>
-        </p:spPr>
-        <p:txBody>
-          <a:bodyPr/>
-          <a:p/>
-        </p:txBody>
-      </p:sp>
-      <p:sp>
-        <p:nvSpPr>
-          <p:cNvPr id="26" name="Text 23"/>
-          <p:cNvSpPr txBox="1"/>
-          <p:nvPr/>
-        </p:nvSpPr>
-        <p:spPr>
-          <a:xfrm>
-            <a:off x="566928" y="3895344"/>
-            <a:ext cx="1371600" cy="658368"/>
-          </a:xfrm>
-          <a:prstGeom prst="rect">
-            <a:avLst/>
-          </a:prstGeom>
-          <a:noFill/>
-          <a:ln/>
-        </p:spPr>
-        <p:txBody>
-          <a:bodyPr wrap="square" lIns="0" tIns="0" rIns="0" bIns="0" rtlCol="0" anchor="ctr"/>
-          <a:lstStyle/>
-          <a:p>
-            <a:pPr algn="ctr" indent="0" marL="0">
-              <a:buNone/>
-            </a:pPr>
-            <a:r>
-              <a:rPr lang="en-US" sz="1550" b="1" dirty="0">
-                <a:solidFill>
-                  <a:srgbClr val="FFFFFF"/>
+          <a:lstStyle/>
+          <a:p>
+            <a:endParaRPr/>
+          </a:p>
+        </p:txBody>
+      </p:sp>
+      <p:sp>
+        <p:nvSpPr>
+          <p:cNvPr id="15" name="Text 12"/>
+          <p:cNvSpPr txBox="1"/>
+          <p:nvPr/>
+        </p:nvSpPr>
+        <p:spPr>
+          <a:xfrm>
+            <a:off x="6446520" y="3447288"/>
+            <a:ext cx="457200" cy="548640"/>
+          </a:xfrm>
+          <a:prstGeom prst="rect">
+            <a:avLst/>
+          </a:prstGeom>
+          <a:noFill/>
+          <a:ln/>
+        </p:spPr>
+        <p:txBody>
+          <a:bodyPr wrap="square" lIns="0" tIns="0" rIns="0" bIns="0" rtlCol="0" anchor="t"/>
+          <a:lstStyle/>
+          <a:p>
+            <a:pPr marL="0" indent="0">
+              <a:buNone/>
+            </a:pPr>
+            <a:r>
+              <a:rPr lang="en-US" sz="2600" b="1" dirty="0">
+                <a:solidFill>
+                  <a:srgbClr val="E9970B"/>
+                </a:solidFill>
+                <a:latin typeface="Cambria" pitchFamily="34" charset="0"/>
+                <a:ea typeface="Cambria" pitchFamily="34" charset="-122"/>
+                <a:cs typeface="Cambria" pitchFamily="34" charset="-120"/>
+              </a:rPr>
+              <a:t>2</a:t>
+            </a:r>
+            <a:endParaRPr lang="en-US" sz="2600" dirty="0"/>
+          </a:p>
+        </p:txBody>
+      </p:sp>
+      <p:sp>
+        <p:nvSpPr>
+          <p:cNvPr id="16" name="Text 13"/>
+          <p:cNvSpPr txBox="1"/>
+          <p:nvPr/>
+        </p:nvSpPr>
+        <p:spPr>
+          <a:xfrm>
+            <a:off x="6995160" y="3502152"/>
+            <a:ext cx="4434840" cy="274320"/>
+          </a:xfrm>
+          <a:prstGeom prst="rect">
+            <a:avLst/>
+          </a:prstGeom>
+          <a:noFill/>
+          <a:ln/>
+        </p:spPr>
+        <p:txBody>
+          <a:bodyPr wrap="square" lIns="0" tIns="0" rIns="0" bIns="0" rtlCol="0" anchor="t"/>
+          <a:lstStyle/>
+          <a:p>
+            <a:pPr marL="0" indent="0">
+              <a:buNone/>
+            </a:pPr>
+            <a:r>
+              <a:rPr lang="en-US" sz="1700" b="1" dirty="0">
+                <a:solidFill>
+                  <a:srgbClr val="13123A"/>
+                </a:solidFill>
+                <a:latin typeface="Cambria" pitchFamily="34" charset="0"/>
+                <a:ea typeface="Cambria" pitchFamily="34" charset="-122"/>
+                <a:cs typeface="Cambria" pitchFamily="34" charset="-120"/>
+              </a:rPr>
+              <a:t>Cache từ ngày đầu</a:t>
+            </a:r>
+            <a:endParaRPr lang="en-US" sz="1300" dirty="0"/>
+          </a:p>
+        </p:txBody>
+      </p:sp>
+      <p:sp>
+        <p:nvSpPr>
+          <p:cNvPr id="17" name="Text 14"/>
+          <p:cNvSpPr txBox="1"/>
+          <p:nvPr/>
+        </p:nvSpPr>
+        <p:spPr>
+          <a:xfrm>
+            <a:off x="6995160" y="3840480"/>
+            <a:ext cx="4434840" cy="731520"/>
+          </a:xfrm>
+          <a:prstGeom prst="rect">
+            <a:avLst/>
+          </a:prstGeom>
+          <a:noFill/>
+          <a:ln/>
+        </p:spPr>
+        <p:txBody>
+          <a:bodyPr wrap="square" lIns="0" tIns="0" rIns="0" bIns="0" rtlCol="0" anchor="t"/>
+          <a:lstStyle/>
+          <a:p>
+            <a:pPr marL="0" indent="0">
+              <a:buNone/>
+            </a:pPr>
+            <a:r>
+              <a:rPr lang="en-US" sz="1550" dirty="0">
+                <a:solidFill>
+                  <a:srgbClr val="4A4E63"/>
                 </a:solidFill>
                 <a:latin typeface="Calibri" pitchFamily="34" charset="0"/>
                 <a:ea typeface="Calibri" pitchFamily="34" charset="-122"/>
                 <a:cs typeface="Calibri" pitchFamily="34" charset="-120"/>
               </a:rPr>
-              <a:t>NGÀY 4–5</a:t>
+              <a:t>Không có cache thì mỗi lần chạy lại 100 câu phải làm từ đầu, khiến thí nghiệm khó lặp lại.</a:t>
             </a:r>
             <a:endParaRPr lang="en-US" sz="1200" dirty="0"/>
           </a:p>
@@ -4414,345 +4004,14 @@
       </p:sp>
       <p:sp>
         <p:nvSpPr>
-          <p:cNvPr id="27" name="Text 24"/>
-          <p:cNvSpPr txBox="1"/>
-          <p:nvPr/>
-        </p:nvSpPr>
-        <p:spPr>
-          <a:xfrm>
-            <a:off x="2103120" y="3895344"/>
-            <a:ext cx="548640" cy="658368"/>
-          </a:xfrm>
-          <a:prstGeom prst="rect">
-            <a:avLst/>
-          </a:prstGeom>
-          <a:noFill/>
-          <a:ln/>
-        </p:spPr>
-        <p:txBody>
-          <a:bodyPr wrap="square" lIns="0" tIns="0" rIns="0" bIns="0" rtlCol="0" anchor="ctr"/>
-          <a:lstStyle/>
-          <a:p>
-            <a:pPr indent="0" marL="0">
-              <a:buNone/>
-            </a:pPr>
-            <a:r>
-              <a:rPr lang="en-US" sz="1700" b="1" dirty="0">
-                <a:solidFill>
-                  <a:srgbClr val="E9970B"/>
-                </a:solidFill>
-                <a:latin typeface="Calibri" pitchFamily="34" charset="0"/>
-                <a:ea typeface="Calibri" pitchFamily="34" charset="-122"/>
-                <a:cs typeface="Calibri" pitchFamily="34" charset="-120"/>
-              </a:rPr>
-              <a:t>A</a:t>
-            </a:r>
-            <a:endParaRPr lang="en-US" sz="1300" dirty="0"/>
-          </a:p>
-        </p:txBody>
-      </p:sp>
-      <p:sp>
-        <p:nvSpPr>
-          <p:cNvPr id="28" name="Text 25"/>
-          <p:cNvSpPr txBox="1"/>
-          <p:nvPr/>
-        </p:nvSpPr>
-        <p:spPr>
-          <a:xfrm>
-            <a:off x="2697480" y="3895344"/>
-            <a:ext cx="2651760" cy="658368"/>
-          </a:xfrm>
-          <a:prstGeom prst="rect">
-            <a:avLst/>
-          </a:prstGeom>
-          <a:noFill/>
-          <a:ln/>
-        </p:spPr>
-        <p:txBody>
-          <a:bodyPr wrap="square" lIns="0" tIns="0" rIns="0" bIns="0" rtlCol="0" anchor="ctr"/>
-          <a:lstStyle/>
-          <a:p>
-            <a:pPr indent="0" marL="0">
-              <a:buNone/>
-            </a:pPr>
-            <a:r>
-              <a:rPr lang="en-US" sz="1700" b="1" dirty="0">
-                <a:solidFill>
-                  <a:srgbClr val="13123A"/>
-                </a:solidFill>
-                <a:latin typeface="Cambria" pitchFamily="34" charset="0"/>
-                <a:ea typeface="Cambria" pitchFamily="34" charset="-122"/>
-                <a:cs typeface="Cambria" pitchFamily="34" charset="-120"/>
-              </a:rPr>
-              <a:t>Bộ đánh giá</a:t>
-            </a:r>
-            <a:endParaRPr lang="en-US" sz="1300" dirty="0"/>
-          </a:p>
-        </p:txBody>
-      </p:sp>
-      <p:sp>
-        <p:nvSpPr>
-          <p:cNvPr id="29" name="Text 26"/>
-          <p:cNvSpPr txBox="1"/>
-          <p:nvPr/>
-        </p:nvSpPr>
-        <p:spPr>
-          <a:xfrm>
-            <a:off x="5394960" y="3895344"/>
-            <a:ext cx="6080760" cy="658368"/>
-          </a:xfrm>
-          <a:prstGeom prst="rect">
-            <a:avLst/>
-          </a:prstGeom>
-          <a:noFill/>
-          <a:ln/>
-        </p:spPr>
-        <p:txBody>
-          <a:bodyPr wrap="square" lIns="0" tIns="0" rIns="0" bIns="0" rtlCol="0" anchor="ctr"/>
-          <a:lstStyle/>
-          <a:p>
-            <a:pPr indent="0" marL="0">
-              <a:buNone/>
-            </a:pPr>
-            <a:r>
-              <a:rPr lang="en-US" sz="1500" dirty="0">
-                <a:solidFill>
-                  <a:srgbClr val="4A4E63"/>
-                </a:solidFill>
-                <a:latin typeface="Calibri" pitchFamily="34" charset="0"/>
-                <a:ea typeface="Calibri" pitchFamily="34" charset="-122"/>
-                <a:cs typeface="Calibri" pitchFamily="34" charset="-120"/>
-              </a:rPr>
-              <a:t>datasets.py · judge.py (chốt prompt chấm) · run.py</a:t>
-            </a:r>
-            <a:endParaRPr lang="en-US" sz="1150" dirty="0"/>
-          </a:p>
-        </p:txBody>
-      </p:sp>
-      <p:sp>
-        <p:nvSpPr>
-          <p:cNvPr id="30" name="Shape 27"/>
+          <p:cNvPr id="18" name="Shape 15"/>
           <p:cNvSpPr/>
           <p:nvPr/>
         </p:nvSpPr>
         <p:spPr>
           <a:xfrm>
-            <a:off x="566928" y="4645152"/>
-            <a:ext cx="11045952" cy="658368"/>
-          </a:xfrm>
-          <a:prstGeom prst="rect">
-            <a:avLst/>
-          </a:prstGeom>
-          <a:solidFill>
-            <a:srgbClr val="ECEBF7"/>
-          </a:solidFill>
-          <a:ln w="12700">
-            <a:solidFill>
-              <a:srgbClr val="ECEBF7"/>
-            </a:solidFill>
-            <a:prstDash val="solid"/>
-          </a:ln>
-        </p:spPr>
-        <p:txBody>
-          <a:bodyPr/>
-          <a:p/>
-        </p:txBody>
-      </p:sp>
-      <p:sp>
-        <p:nvSpPr>
-          <p:cNvPr id="31" name="Shape 28"/>
-          <p:cNvSpPr/>
-          <p:nvPr/>
-        </p:nvSpPr>
-        <p:spPr>
-          <a:xfrm>
-            <a:off x="566928" y="4645152"/>
-            <a:ext cx="1371600" cy="658368"/>
-          </a:xfrm>
-          <a:prstGeom prst="rect">
-            <a:avLst/>
-          </a:prstGeom>
-          <a:solidFill>
-            <a:srgbClr val="13123A"/>
-          </a:solidFill>
-          <a:ln w="12700">
-            <a:solidFill>
-              <a:srgbClr val="13123A"/>
-            </a:solidFill>
-            <a:prstDash val="solid"/>
-          </a:ln>
-        </p:spPr>
-        <p:txBody>
-          <a:bodyPr/>
-          <a:p/>
-        </p:txBody>
-      </p:sp>
-      <p:sp>
-        <p:nvSpPr>
-          <p:cNvPr id="32" name="Text 29"/>
-          <p:cNvSpPr txBox="1"/>
-          <p:nvPr/>
-        </p:nvSpPr>
-        <p:spPr>
-          <a:xfrm>
-            <a:off x="566928" y="4645152"/>
-            <a:ext cx="1371600" cy="658368"/>
-          </a:xfrm>
-          <a:prstGeom prst="rect">
-            <a:avLst/>
-          </a:prstGeom>
-          <a:noFill/>
-          <a:ln/>
-        </p:spPr>
-        <p:txBody>
-          <a:bodyPr wrap="square" lIns="0" tIns="0" rIns="0" bIns="0" rtlCol="0" anchor="ctr"/>
-          <a:lstStyle/>
-          <a:p>
-            <a:pPr algn="ctr" indent="0" marL="0">
-              <a:buNone/>
-            </a:pPr>
-            <a:r>
-              <a:rPr lang="en-US" sz="1550" b="1" dirty="0">
-                <a:solidFill>
-                  <a:srgbClr val="FFFFFF"/>
-                </a:solidFill>
-                <a:latin typeface="Calibri" pitchFamily="34" charset="0"/>
-                <a:ea typeface="Calibri" pitchFamily="34" charset="-122"/>
-                <a:cs typeface="Calibri" pitchFamily="34" charset="-120"/>
-              </a:rPr>
-              <a:t>NGÀY 5–6</a:t>
-            </a:r>
-            <a:endParaRPr lang="en-US" sz="1200" dirty="0"/>
-          </a:p>
-        </p:txBody>
-      </p:sp>
-      <p:sp>
-        <p:nvSpPr>
-          <p:cNvPr id="33" name="Text 30"/>
-          <p:cNvSpPr txBox="1"/>
-          <p:nvPr/>
-        </p:nvSpPr>
-        <p:spPr>
-          <a:xfrm>
-            <a:off x="2103120" y="4645152"/>
-            <a:ext cx="548640" cy="658368"/>
-          </a:xfrm>
-          <a:prstGeom prst="rect">
-            <a:avLst/>
-          </a:prstGeom>
-          <a:noFill/>
-          <a:ln/>
-        </p:spPr>
-        <p:txBody>
-          <a:bodyPr wrap="square" lIns="0" tIns="0" rIns="0" bIns="0" rtlCol="0" anchor="ctr"/>
-          <a:lstStyle/>
-          <a:p>
-            <a:pPr indent="0" marL="0">
-              <a:buNone/>
-            </a:pPr>
-            <a:r>
-              <a:rPr lang="en-US" sz="1700" b="1" dirty="0">
-                <a:solidFill>
-                  <a:srgbClr val="E9970B"/>
-                </a:solidFill>
-                <a:latin typeface="Calibri" pitchFamily="34" charset="0"/>
-                <a:ea typeface="Calibri" pitchFamily="34" charset="-122"/>
-                <a:cs typeface="Calibri" pitchFamily="34" charset="-120"/>
-              </a:rPr>
-              <a:t>A+B</a:t>
-            </a:r>
-            <a:endParaRPr lang="en-US" sz="1300" dirty="0"/>
-          </a:p>
-        </p:txBody>
-      </p:sp>
-      <p:sp>
-        <p:nvSpPr>
-          <p:cNvPr id="34" name="Text 31"/>
-          <p:cNvSpPr txBox="1"/>
-          <p:nvPr/>
-        </p:nvSpPr>
-        <p:spPr>
-          <a:xfrm>
-            <a:off x="2697480" y="4645152"/>
-            <a:ext cx="2651760" cy="658368"/>
-          </a:xfrm>
-          <a:prstGeom prst="rect">
-            <a:avLst/>
-          </a:prstGeom>
-          <a:noFill/>
-          <a:ln/>
-        </p:spPr>
-        <p:txBody>
-          <a:bodyPr wrap="square" lIns="0" tIns="0" rIns="0" bIns="0" rtlCol="0" anchor="ctr"/>
-          <a:lstStyle/>
-          <a:p>
-            <a:pPr indent="0" marL="0">
-              <a:buNone/>
-            </a:pPr>
-            <a:r>
-              <a:rPr lang="en-US" sz="1700" b="1" dirty="0">
-                <a:solidFill>
-                  <a:srgbClr val="13123A"/>
-                </a:solidFill>
-                <a:latin typeface="Cambria" pitchFamily="34" charset="0"/>
-                <a:ea typeface="Cambria" pitchFamily="34" charset="-122"/>
-                <a:cs typeface="Cambria" pitchFamily="34" charset="-120"/>
-              </a:rPr>
-              <a:t>Thực nghiệm &amp; phân tích lỗi</a:t>
-            </a:r>
-            <a:endParaRPr lang="en-US" sz="1300" dirty="0"/>
-          </a:p>
-        </p:txBody>
-      </p:sp>
-      <p:sp>
-        <p:nvSpPr>
-          <p:cNvPr id="35" name="Text 32"/>
-          <p:cNvSpPr txBox="1"/>
-          <p:nvPr/>
-        </p:nvSpPr>
-        <p:spPr>
-          <a:xfrm>
-            <a:off x="5394960" y="4645152"/>
-            <a:ext cx="6080760" cy="658368"/>
-          </a:xfrm>
-          <a:prstGeom prst="rect">
-            <a:avLst/>
-          </a:prstGeom>
-          <a:noFill/>
-          <a:ln/>
-        </p:spPr>
-        <p:txBody>
-          <a:bodyPr wrap="square" lIns="0" tIns="0" rIns="0" bIns="0" rtlCol="0" anchor="ctr"/>
-          <a:lstStyle/>
-          <a:p>
-            <a:pPr indent="0" marL="0">
-              <a:buNone/>
-            </a:pPr>
-            <a:r>
-              <a:rPr lang="en-US" sz="1500" dirty="0">
-                <a:solidFill>
-                  <a:srgbClr val="4A4E63"/>
-                </a:solidFill>
-                <a:latin typeface="Calibri" pitchFamily="34" charset="0"/>
-                <a:ea typeface="Calibri" pitchFamily="34" charset="-122"/>
-                <a:cs typeface="Calibri" pitchFamily="34" charset="-120"/>
-              </a:rPr>
-              <a:t>chạy --n 100 trên dev · phân tích 10 câu sai đầu tiên · đo tỉ lệ token Việt/Anh bằng tokenizer thật</a:t>
-            </a:r>
-            <a:endParaRPr lang="en-US" sz="1150" dirty="0"/>
-          </a:p>
-        </p:txBody>
-      </p:sp>
-      <p:sp>
-        <p:nvSpPr>
-          <p:cNvPr id="36" name="Shape 33"/>
-          <p:cNvSpPr/>
-          <p:nvPr/>
-        </p:nvSpPr>
-        <p:spPr>
-          <a:xfrm>
-            <a:off x="566928" y="5394960"/>
-            <a:ext cx="11045952" cy="658368"/>
+            <a:off x="6254496" y="4754880"/>
+            <a:ext cx="5358384" cy="1280160"/>
           </a:xfrm>
           <a:prstGeom prst="rect">
             <a:avLst/>
@@ -4769,230 +4028,126 @@
         </p:spPr>
         <p:txBody>
           <a:bodyPr/>
-          <a:p/>
-        </p:txBody>
-      </p:sp>
-      <p:sp>
-        <p:nvSpPr>
-          <p:cNvPr id="37" name="Shape 34"/>
-          <p:cNvSpPr/>
-          <p:nvPr/>
-        </p:nvSpPr>
-        <p:spPr>
-          <a:xfrm>
-            <a:off x="566928" y="5394960"/>
-            <a:ext cx="1371600" cy="658368"/>
-          </a:xfrm>
-          <a:prstGeom prst="rect">
-            <a:avLst/>
-          </a:prstGeom>
-          <a:solidFill>
-            <a:srgbClr val="13123A"/>
-          </a:solidFill>
-          <a:ln w="12700">
-            <a:solidFill>
-              <a:srgbClr val="13123A"/>
-            </a:solidFill>
-            <a:prstDash val="solid"/>
-          </a:ln>
-        </p:spPr>
-        <p:txBody>
-          <a:bodyPr/>
-          <a:p/>
-        </p:txBody>
-      </p:sp>
-      <p:sp>
-        <p:nvSpPr>
-          <p:cNvPr id="38" name="Text 35"/>
-          <p:cNvSpPr txBox="1"/>
-          <p:nvPr/>
-        </p:nvSpPr>
-        <p:spPr>
-          <a:xfrm>
-            <a:off x="566928" y="5394960"/>
-            <a:ext cx="1371600" cy="658368"/>
-          </a:xfrm>
-          <a:prstGeom prst="rect">
-            <a:avLst/>
-          </a:prstGeom>
-          <a:noFill/>
-          <a:ln/>
-        </p:spPr>
-        <p:txBody>
-          <a:bodyPr wrap="square" lIns="0" tIns="0" rIns="0" bIns="0" rtlCol="0" anchor="ctr"/>
-          <a:lstStyle/>
-          <a:p>
-            <a:pPr algn="ctr" indent="0" marL="0">
-              <a:buNone/>
-            </a:pPr>
-            <a:r>
-              <a:rPr lang="en-US" sz="1550" b="1" dirty="0">
-                <a:solidFill>
-                  <a:srgbClr val="FFFFFF"/>
+          <a:lstStyle/>
+          <a:p>
+            <a:endParaRPr/>
+          </a:p>
+        </p:txBody>
+      </p:sp>
+      <p:sp>
+        <p:nvSpPr>
+          <p:cNvPr id="19" name="Text 16"/>
+          <p:cNvSpPr txBox="1"/>
+          <p:nvPr/>
+        </p:nvSpPr>
+        <p:spPr>
+          <a:xfrm>
+            <a:off x="6446520" y="4864608"/>
+            <a:ext cx="457200" cy="548640"/>
+          </a:xfrm>
+          <a:prstGeom prst="rect">
+            <a:avLst/>
+          </a:prstGeom>
+          <a:noFill/>
+          <a:ln/>
+        </p:spPr>
+        <p:txBody>
+          <a:bodyPr wrap="square" lIns="0" tIns="0" rIns="0" bIns="0" rtlCol="0" anchor="t"/>
+          <a:lstStyle/>
+          <a:p>
+            <a:pPr marL="0" indent="0">
+              <a:buNone/>
+            </a:pPr>
+            <a:r>
+              <a:rPr lang="en-US" sz="2600" b="1" dirty="0">
+                <a:solidFill>
+                  <a:srgbClr val="E9970B"/>
+                </a:solidFill>
+                <a:latin typeface="Cambria" pitchFamily="34" charset="0"/>
+                <a:ea typeface="Cambria" pitchFamily="34" charset="-122"/>
+                <a:cs typeface="Cambria" pitchFamily="34" charset="-120"/>
+              </a:rPr>
+              <a:t>3</a:t>
+            </a:r>
+            <a:endParaRPr lang="en-US" sz="2600" dirty="0"/>
+          </a:p>
+        </p:txBody>
+      </p:sp>
+      <p:sp>
+        <p:nvSpPr>
+          <p:cNvPr id="20" name="Text 17"/>
+          <p:cNvSpPr txBox="1"/>
+          <p:nvPr/>
+        </p:nvSpPr>
+        <p:spPr>
+          <a:xfrm>
+            <a:off x="6995160" y="4919472"/>
+            <a:ext cx="4434840" cy="274320"/>
+          </a:xfrm>
+          <a:prstGeom prst="rect">
+            <a:avLst/>
+          </a:prstGeom>
+          <a:noFill/>
+          <a:ln/>
+        </p:spPr>
+        <p:txBody>
+          <a:bodyPr wrap="square" lIns="0" tIns="0" rIns="0" bIns="0" rtlCol="0" anchor="t"/>
+          <a:lstStyle/>
+          <a:p>
+            <a:pPr marL="0" indent="0">
+              <a:buNone/>
+            </a:pPr>
+            <a:r>
+              <a:rPr lang="en-US" sz="1700" b="1" dirty="0">
+                <a:solidFill>
+                  <a:srgbClr val="13123A"/>
+                </a:solidFill>
+                <a:latin typeface="Cambria" pitchFamily="34" charset="0"/>
+                <a:ea typeface="Cambria" pitchFamily="34" charset="-122"/>
+                <a:cs typeface="Cambria" pitchFamily="34" charset="-120"/>
+              </a:rPr>
+              <a:t>Chốt judge ngay tuần này</a:t>
+            </a:r>
+            <a:endParaRPr lang="en-US" sz="1300" dirty="0"/>
+          </a:p>
+        </p:txBody>
+      </p:sp>
+      <p:sp>
+        <p:nvSpPr>
+          <p:cNvPr id="21" name="Text 18"/>
+          <p:cNvSpPr txBox="1"/>
+          <p:nvPr/>
+        </p:nvSpPr>
+        <p:spPr>
+          <a:xfrm>
+            <a:off x="6995160" y="5257800"/>
+            <a:ext cx="4434840" cy="731520"/>
+          </a:xfrm>
+          <a:prstGeom prst="rect">
+            <a:avLst/>
+          </a:prstGeom>
+          <a:noFill/>
+          <a:ln/>
+        </p:spPr>
+        <p:txBody>
+          <a:bodyPr wrap="square" lIns="0" tIns="0" rIns="0" bIns="0" rtlCol="0" anchor="t"/>
+          <a:lstStyle/>
+          <a:p>
+            <a:pPr marL="0" indent="0">
+              <a:buNone/>
+            </a:pPr>
+            <a:r>
+              <a:rPr lang="en-US" sz="1550" dirty="0">
+                <a:solidFill>
+                  <a:srgbClr val="4A4E63"/>
                 </a:solidFill>
                 <a:latin typeface="Calibri" pitchFamily="34" charset="0"/>
                 <a:ea typeface="Calibri" pitchFamily="34" charset="-122"/>
                 <a:cs typeface="Calibri" pitchFamily="34" charset="-120"/>
               </a:rPr>
-              <a:t>NGÀY 7</a:t>
+              <a:t>Đổi prompt chấm giữa chừng làm mọi số đo trước đó mất giá trị so sánh.</a:t>
             </a:r>
             <a:endParaRPr lang="en-US" sz="1200" dirty="0"/>
-          </a:p>
-        </p:txBody>
-      </p:sp>
-      <p:sp>
-        <p:nvSpPr>
-          <p:cNvPr id="39" name="Text 36"/>
-          <p:cNvSpPr txBox="1"/>
-          <p:nvPr/>
-        </p:nvSpPr>
-        <p:spPr>
-          <a:xfrm>
-            <a:off x="2103120" y="5394960"/>
-            <a:ext cx="548640" cy="658368"/>
-          </a:xfrm>
-          <a:prstGeom prst="rect">
-            <a:avLst/>
-          </a:prstGeom>
-          <a:noFill/>
-          <a:ln/>
-        </p:spPr>
-        <p:txBody>
-          <a:bodyPr wrap="square" lIns="0" tIns="0" rIns="0" bIns="0" rtlCol="0" anchor="ctr"/>
-          <a:lstStyle/>
-          <a:p>
-            <a:pPr indent="0" marL="0">
-              <a:buNone/>
-            </a:pPr>
-            <a:r>
-              <a:rPr lang="en-US" sz="1700" b="1" dirty="0">
-                <a:solidFill>
-                  <a:srgbClr val="E9970B"/>
-                </a:solidFill>
-                <a:latin typeface="Calibri" pitchFamily="34" charset="0"/>
-                <a:ea typeface="Calibri" pitchFamily="34" charset="-122"/>
-                <a:cs typeface="Calibri" pitchFamily="34" charset="-120"/>
-              </a:rPr>
-              <a:t>A+B</a:t>
-            </a:r>
-            <a:endParaRPr lang="en-US" sz="1300" dirty="0"/>
-          </a:p>
-        </p:txBody>
-      </p:sp>
-      <p:sp>
-        <p:nvSpPr>
-          <p:cNvPr id="40" name="Text 37"/>
-          <p:cNvSpPr txBox="1"/>
-          <p:nvPr/>
-        </p:nvSpPr>
-        <p:spPr>
-          <a:xfrm>
-            <a:off x="2697480" y="5394960"/>
-            <a:ext cx="2651760" cy="658368"/>
-          </a:xfrm>
-          <a:prstGeom prst="rect">
-            <a:avLst/>
-          </a:prstGeom>
-          <a:noFill/>
-          <a:ln/>
-        </p:spPr>
-        <p:txBody>
-          <a:bodyPr wrap="square" lIns="0" tIns="0" rIns="0" bIns="0" rtlCol="0" anchor="ctr"/>
-          <a:lstStyle/>
-          <a:p>
-            <a:pPr indent="0" marL="0">
-              <a:buNone/>
-            </a:pPr>
-            <a:r>
-              <a:rPr lang="en-US" sz="1700" b="1" dirty="0">
-                <a:solidFill>
-                  <a:srgbClr val="13123A"/>
-                </a:solidFill>
-                <a:latin typeface="Cambria" pitchFamily="34" charset="0"/>
-                <a:ea typeface="Cambria" pitchFamily="34" charset="-122"/>
-                <a:cs typeface="Cambria" pitchFamily="34" charset="-120"/>
-              </a:rPr>
-              <a:t>Tổng hợp &amp; báo cáo</a:t>
-            </a:r>
-            <a:endParaRPr lang="en-US" sz="1300" dirty="0"/>
-          </a:p>
-        </p:txBody>
-      </p:sp>
-      <p:sp>
-        <p:nvSpPr>
-          <p:cNvPr id="41" name="Text 38"/>
-          <p:cNvSpPr txBox="1"/>
-          <p:nvPr/>
-        </p:nvSpPr>
-        <p:spPr>
-          <a:xfrm>
-            <a:off x="5394960" y="5394960"/>
-            <a:ext cx="6080760" cy="658368"/>
-          </a:xfrm>
-          <a:prstGeom prst="rect">
-            <a:avLst/>
-          </a:prstGeom>
-          <a:noFill/>
-          <a:ln/>
-        </p:spPr>
-        <p:txBody>
-          <a:bodyPr wrap="square" lIns="0" tIns="0" rIns="0" bIns="0" rtlCol="0" anchor="ctr"/>
-          <a:lstStyle/>
-          <a:p>
-            <a:pPr indent="0" marL="0">
-              <a:buNone/>
-            </a:pPr>
-            <a:r>
-              <a:rPr lang="en-US" sz="1500" dirty="0">
-                <a:solidFill>
-                  <a:srgbClr val="4A4E63"/>
-                </a:solidFill>
-                <a:latin typeface="Calibri" pitchFamily="34" charset="0"/>
-                <a:ea typeface="Calibri" pitchFamily="34" charset="-122"/>
-                <a:cs typeface="Calibri" pitchFamily="34" charset="-120"/>
-              </a:rPr>
-              <a:t>điền bảng số · báo cáo 1 trang · bảng phân loại lỗi</a:t>
-            </a:r>
-            <a:endParaRPr lang="en-US" sz="1150" dirty="0"/>
-          </a:p>
-        </p:txBody>
-      </p:sp>
-      <p:sp>
-        <p:nvSpPr>
-          <p:cNvPr id="42" name="Text 39"/>
-          <p:cNvSpPr txBox="1"/>
-          <p:nvPr/>
-        </p:nvSpPr>
-        <p:spPr>
-          <a:xfrm>
-            <a:off x="566928" y="6172200"/>
-            <a:ext cx="11045952" cy="256032"/>
-          </a:xfrm>
-          <a:prstGeom prst="rect">
-            <a:avLst/>
-          </a:prstGeom>
-          <a:noFill/>
-          <a:ln/>
-        </p:spPr>
-        <p:txBody>
-          <a:bodyPr wrap="square" lIns="0" tIns="0" rIns="0" bIns="0" rtlCol="0" anchor="t"/>
-          <a:lstStyle/>
-          <a:p>
-            <a:pPr indent="0" marL="0">
-              <a:buNone/>
-            </a:pPr>
-            <a:r>
-              <a:rPr lang="en-US" sz="1350" i="1" dirty="0">
-                <a:solidFill>
-                  <a:srgbClr val="6B6F82"/>
-                </a:solidFill>
-                <a:latin typeface="Calibri" pitchFamily="34" charset="0"/>
-                <a:ea typeface="Calibri" pitchFamily="34" charset="-122"/>
-                <a:cs typeface="Calibri" pitchFamily="34" charset="-120"/>
-              </a:rPr>
-              <a:t>A = trích xuất &amp; đánh giá · B = chỉ mục &amp; agent · giao diện giữa hai bên là dataclass Fact (đã cố định trong ledger.py)</a:t>
-            </a:r>
-            <a:endParaRPr lang="en-US" sz="1050" dirty="0"/>
           </a:p>
         </p:txBody>
       </p:sp>
@@ -5006,12 +4161,13 @@
 
 <file path=ppt/slides/slide12.xml><?xml version="1.0" encoding="utf-8"?>
 <p:sld xmlns:a="http://schemas.openxmlformats.org/drawingml/2006/main" xmlns:r="http://schemas.openxmlformats.org/officeDocument/2006/relationships" xmlns:p="http://schemas.openxmlformats.org/presentationml/2006/main">
-  <p:cSld name="Slide 9">
+  <p:cSld name="Slide 10">
     <p:bg>
       <p:bgPr>
         <a:solidFill>
           <a:srgbClr val="FFFFFF"/>
         </a:solidFill>
+        <a:effectLst/>
       </p:bgPr>
     </p:bg>
     <p:spTree>
@@ -5049,7 +4205,7 @@
           <a:bodyPr wrap="square" lIns="0" tIns="0" rIns="0" bIns="0" rtlCol="0" anchor="t"/>
           <a:lstStyle/>
           <a:p>
-            <a:pPr indent="0" marL="0">
+            <a:pPr marL="0" indent="0">
               <a:buNone/>
             </a:pPr>
             <a:r>
@@ -5061,7 +4217,7 @@
                 <a:ea typeface="Calibri" pitchFamily="34" charset="-122"/>
                 <a:cs typeface="Calibri" pitchFamily="34" charset="-120"/>
               </a:rPr>
-              <a:t>CHỈ SỐ ĐÁNH GIÁ</a:t>
+              <a:t>RỦI RO</a:t>
             </a:r>
             <a:endParaRPr lang="en-US" sz="1200" dirty="0"/>
           </a:p>
@@ -5088,7 +4244,7 @@
           <a:bodyPr wrap="square" lIns="0" tIns="0" rIns="0" bIns="0" rtlCol="0" anchor="t"/>
           <a:lstStyle/>
           <a:p>
-            <a:pPr indent="0" marL="0">
+            <a:pPr marL="0" indent="0">
               <a:buNone/>
             </a:pPr>
             <a:r>
@@ -5100,7 +4256,7 @@
                 <a:ea typeface="Cambria" pitchFamily="34" charset="-122"/>
                 <a:cs typeface="Cambria" pitchFamily="34" charset="-120"/>
               </a:rPr>
-              <a:t>Các chỉ số báo cáo và ba nguyên tắc đo</a:t>
+              <a:t>Rủi ro và biện pháp xử lý</a:t>
             </a:r>
             <a:endParaRPr lang="en-US" sz="3000" dirty="0"/>
           </a:p>
@@ -5127,7 +4283,7 @@
           <a:bodyPr wrap="square" lIns="0" tIns="0" rIns="0" bIns="0" rtlCol="0" anchor="t"/>
           <a:lstStyle/>
           <a:p>
-            <a:pPr indent="0" marL="0">
+            <a:pPr marL="0" indent="0">
               <a:buNone/>
             </a:pPr>
             <a:r>
@@ -5139,7 +4295,7 @@
                 <a:ea typeface="Calibri" pitchFamily="34" charset="-122"/>
                 <a:cs typeface="Calibri" pitchFamily="34" charset="-120"/>
               </a:rPr>
-              <a:t>Prompt chấm và mô hình chấm được chốt trong tuần 3, không sửa về sau (Zheng et al., LLM-as-a-Judge, NeurIPS 2023).</a:t>
+              <a:t>Hạn mức Gemini theo tài liệu Google AI for Developers; tuần 2 đã chọn adapter đổi được sang Groq/Ollama trong một file.</a:t>
             </a:r>
             <a:endParaRPr lang="en-US" sz="1050" dirty="0"/>
           </a:p>
@@ -5153,8 +4309,8 @@
         </p:nvSpPr>
         <p:spPr>
           <a:xfrm>
-            <a:off x="566928" y="1645920"/>
-            <a:ext cx="5486400" cy="237744"/>
+            <a:off x="822960" y="1664208"/>
+            <a:ext cx="4572000" cy="237744"/>
           </a:xfrm>
           <a:prstGeom prst="rect">
             <a:avLst/>
@@ -5166,19 +4322,19 @@
           <a:bodyPr wrap="square" lIns="0" tIns="0" rIns="0" bIns="0" rtlCol="0" anchor="t"/>
           <a:lstStyle/>
           <a:p>
-            <a:pPr indent="0" marL="0">
+            <a:pPr marL="0" indent="0">
               <a:buNone/>
             </a:pPr>
             <a:r>
               <a:rPr lang="en-US" sz="1450" b="1" dirty="0">
                 <a:solidFill>
-                  <a:srgbClr val="3A36A0"/>
+                  <a:srgbClr val="B4432E"/>
                 </a:solidFill>
                 <a:latin typeface="Calibri" pitchFamily="34" charset="0"/>
                 <a:ea typeface="Calibri" pitchFamily="34" charset="-122"/>
                 <a:cs typeface="Calibri" pitchFamily="34" charset="-120"/>
               </a:rPr>
-              <a:t>CHỈ SỐ SẼ BÁO CÁO</a:t>
+              <a:t>RỦI RO</a:t>
             </a:r>
             <a:endParaRPr lang="en-US" sz="1100" dirty="0"/>
           </a:p>
@@ -5186,14 +4342,85 @@
       </p:sp>
       <p:sp>
         <p:nvSpPr>
-          <p:cNvPr id="7" name="Shape 4"/>
+          <p:cNvPr id="7" name="Text 4"/>
+          <p:cNvSpPr txBox="1"/>
+          <p:nvPr/>
+        </p:nvSpPr>
+        <p:spPr>
+          <a:xfrm>
+            <a:off x="6766560" y="1664208"/>
+            <a:ext cx="4572000" cy="237744"/>
+          </a:xfrm>
+          <a:prstGeom prst="rect">
+            <a:avLst/>
+          </a:prstGeom>
+          <a:noFill/>
+          <a:ln/>
+        </p:spPr>
+        <p:txBody>
+          <a:bodyPr wrap="square" lIns="0" tIns="0" rIns="0" bIns="0" rtlCol="0" anchor="t"/>
+          <a:lstStyle/>
+          <a:p>
+            <a:pPr marL="0" indent="0">
+              <a:buNone/>
+            </a:pPr>
+            <a:r>
+              <a:rPr lang="en-US" sz="1450" b="1" dirty="0">
+                <a:solidFill>
+                  <a:srgbClr val="1FA6A6"/>
+                </a:solidFill>
+                <a:latin typeface="Calibri" pitchFamily="34" charset="0"/>
+                <a:ea typeface="Calibri" pitchFamily="34" charset="-122"/>
+                <a:cs typeface="Calibri" pitchFamily="34" charset="-120"/>
+              </a:rPr>
+              <a:t>XỬ LÝ</a:t>
+            </a:r>
+            <a:endParaRPr lang="en-US" sz="1100" dirty="0"/>
+          </a:p>
+        </p:txBody>
+      </p:sp>
+      <p:sp>
+        <p:nvSpPr>
+          <p:cNvPr id="8" name="Shape 5"/>
           <p:cNvSpPr/>
           <p:nvPr/>
         </p:nvSpPr>
         <p:spPr>
           <a:xfrm>
-            <a:off x="566928" y="1920240"/>
-            <a:ext cx="5358384" cy="4206240"/>
+            <a:off x="566928" y="1965960"/>
+            <a:ext cx="5943600" cy="960120"/>
+          </a:xfrm>
+          <a:prstGeom prst="rect">
+            <a:avLst/>
+          </a:prstGeom>
+          <a:solidFill>
+            <a:srgbClr val="F7F7FB"/>
+          </a:solidFill>
+          <a:ln w="12700">
+            <a:solidFill>
+              <a:srgbClr val="F7F7FB"/>
+            </a:solidFill>
+            <a:prstDash val="solid"/>
+          </a:ln>
+        </p:spPr>
+        <p:txBody>
+          <a:bodyPr/>
+          <a:lstStyle/>
+          <a:p>
+            <a:endParaRPr/>
+          </a:p>
+        </p:txBody>
+      </p:sp>
+      <p:sp>
+        <p:nvSpPr>
+          <p:cNvPr id="9" name="Shape 6"/>
+          <p:cNvSpPr/>
+          <p:nvPr/>
+        </p:nvSpPr>
+        <p:spPr>
+          <a:xfrm>
+            <a:off x="6620256" y="1965960"/>
+            <a:ext cx="4992624" cy="960120"/>
           </a:xfrm>
           <a:prstGeom prst="rect">
             <a:avLst/>
@@ -5210,57 +4437,74 @@
         </p:spPr>
         <p:txBody>
           <a:bodyPr/>
-          <a:p/>
-        </p:txBody>
-      </p:sp>
-      <p:sp>
-        <p:nvSpPr>
-          <p:cNvPr id="8" name="Text 5"/>
-          <p:cNvSpPr txBox="1"/>
-          <p:nvPr/>
-        </p:nvSpPr>
-        <p:spPr>
-          <a:xfrm>
-            <a:off x="822960" y="2103120"/>
-            <a:ext cx="4846320" cy="3840480"/>
-          </a:xfrm>
-          <a:prstGeom prst="rect">
-            <a:avLst/>
-          </a:prstGeom>
-          <a:noFill/>
-          <a:ln/>
-        </p:spPr>
-        <p:txBody>
-          <a:bodyPr wrap="square" lIns="0" tIns="0" rIns="0" bIns="0" rtlCol="0" anchor="t"/>
-          <a:lstStyle/>
-          <a:p>
-            <a:pPr marL="342900" indent="-342900">
-              <a:spcAft>
-                <a:spcPts val="600"/>
-              </a:spcAft>
-              <a:buSzPct val="100000"/>
-              <a:buChar char="•"/>
-            </a:pPr>
-            <a:r>
-              <a:rPr lang="en-US" sz="1600" dirty="0">
-                <a:solidFill>
-                  <a:srgbClr val="4A4E63"/>
+          <a:lstStyle/>
+          <a:p>
+            <a:endParaRPr/>
+          </a:p>
+        </p:txBody>
+      </p:sp>
+      <p:sp>
+        <p:nvSpPr>
+          <p:cNvPr id="10" name="Text 7"/>
+          <p:cNvSpPr txBox="1"/>
+          <p:nvPr/>
+        </p:nvSpPr>
+        <p:spPr>
+          <a:xfrm>
+            <a:off x="777240" y="1965960"/>
+            <a:ext cx="5532120" cy="960120"/>
+          </a:xfrm>
+          <a:prstGeom prst="rect">
+            <a:avLst/>
+          </a:prstGeom>
+          <a:noFill/>
+          <a:ln/>
+        </p:spPr>
+        <p:txBody>
+          <a:bodyPr wrap="square" lIns="0" tIns="0" rIns="0" bIns="0" rtlCol="0" anchor="ctr"/>
+          <a:lstStyle/>
+          <a:p>
+            <a:pPr marL="0" indent="0">
+              <a:buNone/>
+            </a:pPr>
+            <a:r>
+              <a:rPr lang="en-US" sz="1700" b="1" dirty="0">
+                <a:solidFill>
+                  <a:srgbClr val="13123A"/>
                 </a:solidFill>
                 <a:latin typeface="Calibri" pitchFamily="34" charset="0"/>
                 <a:ea typeface="Calibri" pitchFamily="34" charset="-122"/>
                 <a:cs typeface="Calibri" pitchFamily="34" charset="-120"/>
               </a:rPr>
-              <a:t>Accuracy theo từng loại câu hỏi LongMemEval-S — đường cơ sở</a:t>
-            </a:r>
-            <a:endParaRPr lang="en-US" sz="1250" dirty="0"/>
-          </a:p>
-          <a:p>
-            <a:pPr marL="342900" indent="-342900">
-              <a:spcAft>
-                <a:spcPts val="600"/>
-              </a:spcAft>
-              <a:buSzPct val="100000"/>
-              <a:buChar char="•"/>
+              <a:t>Hạn mức Gemini 1.500 lượt/ngày cạn giữa lúc chạy eval</a:t>
+            </a:r>
+            <a:endParaRPr lang="en-US" sz="1300" dirty="0"/>
+          </a:p>
+        </p:txBody>
+      </p:sp>
+      <p:sp>
+        <p:nvSpPr>
+          <p:cNvPr id="11" name="Text 8"/>
+          <p:cNvSpPr txBox="1"/>
+          <p:nvPr/>
+        </p:nvSpPr>
+        <p:spPr>
+          <a:xfrm>
+            <a:off x="6812280" y="1965960"/>
+            <a:ext cx="4617720" cy="960120"/>
+          </a:xfrm>
+          <a:prstGeom prst="rect">
+            <a:avLst/>
+          </a:prstGeom>
+          <a:noFill/>
+          <a:ln/>
+        </p:spPr>
+        <p:txBody>
+          <a:bodyPr wrap="square" lIns="0" tIns="0" rIns="0" bIns="0" rtlCol="0" anchor="ctr"/>
+          <a:lstStyle/>
+          <a:p>
+            <a:pPr marL="0" indent="0">
+              <a:buNone/>
             </a:pPr>
             <a:r>
               <a:rPr lang="en-US" sz="1600" dirty="0">
@@ -5271,145 +4515,22 @@
                 <a:ea typeface="Calibri" pitchFamily="34" charset="-122"/>
                 <a:cs typeface="Calibri" pitchFamily="34" charset="-120"/>
               </a:rPr>
-              <a:t>Tỉ lệ khóa slot bị từ chối, tách theo lý do</a:t>
+              <a:t>Cache trích xuất theo sha1(lượt); chạy lại eval không gọi lại LLM</a:t>
             </a:r>
             <a:endParaRPr lang="en-US" sz="1250" dirty="0"/>
           </a:p>
-          <a:p>
-            <a:pPr marL="342900" indent="-342900">
-              <a:spcAft>
-                <a:spcPts val="600"/>
-              </a:spcAft>
-              <a:buSzPct val="100000"/>
-              <a:buChar char="•"/>
-            </a:pPr>
-            <a:r>
-              <a:rPr lang="en-US" sz="1600" dirty="0">
-                <a:solidFill>
-                  <a:srgbClr val="4A4E63"/>
-                </a:solidFill>
-                <a:latin typeface="Calibri" pitchFamily="34" charset="0"/>
-                <a:ea typeface="Calibri" pitchFamily="34" charset="-122"/>
-                <a:cs typeface="Calibri" pitchFamily="34" charset="-120"/>
-              </a:rPr>
-              <a:t>Số fact / lượt và số slot phân biệt</a:t>
-            </a:r>
-            <a:endParaRPr lang="en-US" sz="1250" dirty="0"/>
-          </a:p>
-          <a:p>
-            <a:pPr marL="342900" indent="-342900">
-              <a:spcAft>
-                <a:spcPts val="600"/>
-              </a:spcAft>
-              <a:buSzPct val="100000"/>
-              <a:buChar char="•"/>
-            </a:pPr>
-            <a:r>
-              <a:rPr lang="en-US" sz="1600" dirty="0">
-                <a:solidFill>
-                  <a:srgbClr val="4A4E63"/>
-                </a:solidFill>
-                <a:latin typeface="Calibri" pitchFamily="34" charset="0"/>
-                <a:ea typeface="Calibri" pitchFamily="34" charset="-122"/>
-                <a:cs typeface="Calibri" pitchFamily="34" charset="-120"/>
-              </a:rPr>
-              <a:t>p50/p95 tách pha: trích xuất · nhúng · truy xuất · sinh</a:t>
-            </a:r>
-            <a:endParaRPr lang="en-US" sz="1250" dirty="0"/>
-          </a:p>
-          <a:p>
-            <a:pPr marL="342900" indent="-342900">
-              <a:spcAft>
-                <a:spcPts val="600"/>
-              </a:spcAft>
-              <a:buSzPct val="100000"/>
-              <a:buChar char="•"/>
-            </a:pPr>
-            <a:r>
-              <a:rPr lang="en-US" sz="1600" dirty="0">
-                <a:solidFill>
-                  <a:srgbClr val="4A4E63"/>
-                </a:solidFill>
-                <a:latin typeface="Calibri" pitchFamily="34" charset="0"/>
-                <a:ea typeface="Calibri" pitchFamily="34" charset="-122"/>
-                <a:cs typeface="Calibri" pitchFamily="34" charset="-120"/>
-              </a:rPr>
-              <a:t>Token / truy vấn, tách theo lang (tiếng Việt ≈ gấp đôi)</a:t>
-            </a:r>
-            <a:endParaRPr lang="en-US" sz="1250" dirty="0"/>
-          </a:p>
-          <a:p>
-            <a:pPr marL="342900" indent="-342900">
-              <a:spcAft>
-                <a:spcPts val="600"/>
-              </a:spcAft>
-              <a:buSzPct val="100000"/>
-              <a:buChar char="•"/>
-            </a:pPr>
-            <a:r>
-              <a:rPr lang="en-US" sz="1600" dirty="0">
-                <a:solidFill>
-                  <a:srgbClr val="4A4E63"/>
-                </a:solidFill>
-                <a:latin typeface="Calibri" pitchFamily="34" charset="0"/>
-                <a:ea typeface="Calibri" pitchFamily="34" charset="-122"/>
-                <a:cs typeface="Calibri" pitchFamily="34" charset="-120"/>
-              </a:rPr>
-              <a:t>Phân loại 10 câu sai đầu tiên</a:t>
-            </a:r>
-            <a:endParaRPr lang="en-US" sz="1250" dirty="0"/>
-          </a:p>
-        </p:txBody>
-      </p:sp>
-      <p:sp>
-        <p:nvSpPr>
-          <p:cNvPr id="9" name="Text 6"/>
-          <p:cNvSpPr txBox="1"/>
-          <p:nvPr/>
-        </p:nvSpPr>
-        <p:spPr>
-          <a:xfrm>
-            <a:off x="6254496" y="1645920"/>
-            <a:ext cx="5486400" cy="237744"/>
-          </a:xfrm>
-          <a:prstGeom prst="rect">
-            <a:avLst/>
-          </a:prstGeom>
-          <a:noFill/>
-          <a:ln/>
-        </p:spPr>
-        <p:txBody>
-          <a:bodyPr wrap="square" lIns="0" tIns="0" rIns="0" bIns="0" rtlCol="0" anchor="t"/>
-          <a:lstStyle/>
-          <a:p>
-            <a:pPr indent="0" marL="0">
-              <a:buNone/>
-            </a:pPr>
-            <a:r>
-              <a:rPr lang="en-US" sz="1450" b="1" dirty="0">
-                <a:solidFill>
-                  <a:srgbClr val="E9970B"/>
-                </a:solidFill>
-                <a:latin typeface="Calibri" pitchFamily="34" charset="0"/>
-                <a:ea typeface="Calibri" pitchFamily="34" charset="-122"/>
-                <a:cs typeface="Calibri" pitchFamily="34" charset="-120"/>
-              </a:rPr>
-              <a:t>BA NGUYÊN TẮC ĐỂ TRÁNH SAI LỆCH</a:t>
-            </a:r>
-            <a:endParaRPr lang="en-US" sz="1100" dirty="0"/>
-          </a:p>
-        </p:txBody>
-      </p:sp>
-      <p:sp>
-        <p:nvSpPr>
-          <p:cNvPr id="10" name="Shape 7"/>
+        </p:txBody>
+      </p:sp>
+      <p:sp>
+        <p:nvSpPr>
+          <p:cNvPr id="12" name="Shape 9"/>
           <p:cNvSpPr/>
           <p:nvPr/>
         </p:nvSpPr>
         <p:spPr>
           <a:xfrm>
-            <a:off x="6254496" y="1920240"/>
-            <a:ext cx="5358384" cy="1280160"/>
+            <a:off x="566928" y="3044952"/>
+            <a:ext cx="5943600" cy="960120"/>
           </a:xfrm>
           <a:prstGeom prst="rect">
             <a:avLst/>
@@ -5426,136 +4547,132 @@
         </p:spPr>
         <p:txBody>
           <a:bodyPr/>
-          <a:p/>
-        </p:txBody>
-      </p:sp>
-      <p:sp>
-        <p:nvSpPr>
-          <p:cNvPr id="11" name="Text 8"/>
-          <p:cNvSpPr txBox="1"/>
-          <p:nvPr/>
-        </p:nvSpPr>
-        <p:spPr>
-          <a:xfrm>
-            <a:off x="6446520" y="2029968"/>
-            <a:ext cx="457200" cy="548640"/>
-          </a:xfrm>
-          <a:prstGeom prst="rect">
-            <a:avLst/>
-          </a:prstGeom>
-          <a:noFill/>
-          <a:ln/>
-        </p:spPr>
-        <p:txBody>
-          <a:bodyPr wrap="square" lIns="0" tIns="0" rIns="0" bIns="0" rtlCol="0" anchor="t"/>
-          <a:lstStyle/>
-          <a:p>
-            <a:pPr indent="0" marL="0">
-              <a:buNone/>
-            </a:pPr>
-            <a:r>
-              <a:rPr lang="en-US" sz="2600" b="1" dirty="0">
-                <a:solidFill>
-                  <a:srgbClr val="E9970B"/>
-                </a:solidFill>
-                <a:latin typeface="Cambria" pitchFamily="34" charset="0"/>
-                <a:ea typeface="Cambria" pitchFamily="34" charset="-122"/>
-                <a:cs typeface="Cambria" pitchFamily="34" charset="-120"/>
-              </a:rPr>
-              <a:t>1</a:t>
-            </a:r>
-            <a:endParaRPr lang="en-US" sz="2600" dirty="0"/>
-          </a:p>
-        </p:txBody>
-      </p:sp>
-      <p:sp>
-        <p:nvSpPr>
-          <p:cNvPr id="12" name="Text 9"/>
-          <p:cNvSpPr txBox="1"/>
-          <p:nvPr/>
-        </p:nvSpPr>
-        <p:spPr>
-          <a:xfrm>
-            <a:off x="6995160" y="2084832"/>
-            <a:ext cx="4434840" cy="274320"/>
-          </a:xfrm>
-          <a:prstGeom prst="rect">
-            <a:avLst/>
-          </a:prstGeom>
-          <a:noFill/>
-          <a:ln/>
-        </p:spPr>
-        <p:txBody>
-          <a:bodyPr wrap="square" lIns="0" tIns="0" rIns="0" bIns="0" rtlCol="0" anchor="t"/>
-          <a:lstStyle/>
-          <a:p>
-            <a:pPr indent="0" marL="0">
+          <a:lstStyle/>
+          <a:p>
+            <a:endParaRPr/>
+          </a:p>
+        </p:txBody>
+      </p:sp>
+      <p:sp>
+        <p:nvSpPr>
+          <p:cNvPr id="13" name="Shape 10"/>
+          <p:cNvSpPr/>
+          <p:nvPr/>
+        </p:nvSpPr>
+        <p:spPr>
+          <a:xfrm>
+            <a:off x="6620256" y="3044952"/>
+            <a:ext cx="4992624" cy="960120"/>
+          </a:xfrm>
+          <a:prstGeom prst="rect">
+            <a:avLst/>
+          </a:prstGeom>
+          <a:solidFill>
+            <a:srgbClr val="ECEBF7"/>
+          </a:solidFill>
+          <a:ln w="12700">
+            <a:solidFill>
+              <a:srgbClr val="ECEBF7"/>
+            </a:solidFill>
+            <a:prstDash val="solid"/>
+          </a:ln>
+        </p:spPr>
+        <p:txBody>
+          <a:bodyPr/>
+          <a:lstStyle/>
+          <a:p>
+            <a:endParaRPr/>
+          </a:p>
+        </p:txBody>
+      </p:sp>
+      <p:sp>
+        <p:nvSpPr>
+          <p:cNvPr id="14" name="Text 11"/>
+          <p:cNvSpPr txBox="1"/>
+          <p:nvPr/>
+        </p:nvSpPr>
+        <p:spPr>
+          <a:xfrm>
+            <a:off x="777240" y="3044952"/>
+            <a:ext cx="5532120" cy="960120"/>
+          </a:xfrm>
+          <a:prstGeom prst="rect">
+            <a:avLst/>
+          </a:prstGeom>
+          <a:noFill/>
+          <a:ln/>
+        </p:spPr>
+        <p:txBody>
+          <a:bodyPr wrap="square" lIns="0" tIns="0" rIns="0" bIns="0" rtlCol="0" anchor="ctr"/>
+          <a:lstStyle/>
+          <a:p>
+            <a:pPr marL="0" indent="0">
               <a:buNone/>
             </a:pPr>
             <a:r>
               <a:rPr lang="en-US" sz="1700" b="1" dirty="0">
                 <a:solidFill>
                   <a:srgbClr val="13123A"/>
-                </a:solidFill>
-                <a:latin typeface="Cambria" pitchFamily="34" charset="0"/>
-                <a:ea typeface="Cambria" pitchFamily="34" charset="-122"/>
-                <a:cs typeface="Cambria" pitchFamily="34" charset="-120"/>
-              </a:rPr>
-              <a:t>Tuần 3 chưa có logic cập nhật</a:t>
-            </a:r>
-            <a:endParaRPr lang="en-US" sz="1300" dirty="0"/>
-          </a:p>
-        </p:txBody>
-      </p:sp>
-      <p:sp>
-        <p:nvSpPr>
-          <p:cNvPr id="13" name="Text 10"/>
-          <p:cNvSpPr txBox="1"/>
-          <p:nvPr/>
-        </p:nvSpPr>
-        <p:spPr>
-          <a:xfrm>
-            <a:off x="6995160" y="2423160"/>
-            <a:ext cx="4434840" cy="731520"/>
-          </a:xfrm>
-          <a:prstGeom prst="rect">
-            <a:avLst/>
-          </a:prstGeom>
-          <a:noFill/>
-          <a:ln/>
-        </p:spPr>
-        <p:txBody>
-          <a:bodyPr wrap="square" lIns="0" tIns="0" rIns="0" bIns="0" rtlCol="0" anchor="t"/>
-          <a:lstStyle/>
-          <a:p>
-            <a:pPr indent="0" marL="0">
-              <a:buNone/>
-            </a:pPr>
-            <a:r>
-              <a:rPr lang="en-US" sz="1250" dirty="0">
-                <a:solidFill>
-                  <a:srgbClr val="4A4E63"/>
                 </a:solidFill>
                 <a:latin typeface="Calibri" pitchFamily="34" charset="0"/>
                 <a:ea typeface="Calibri" pitchFamily="34" charset="-122"/>
                 <a:cs typeface="Calibri" pitchFamily="34" charset="-120"/>
               </a:rPr>
-              <a:t>Tuần 3 đã có schema, cấp phát seq và cách đọc bản mới nhất. Tuần 4 mới triển khai logic ADD/UPDATE/DELETE/NOOP/CONFLICT và ràng buộc mỗi slot một bản active.</a:t>
-            </a:r>
-            <a:endParaRPr lang="en-US" sz="1200" dirty="0"/>
-          </a:p>
-        </p:txBody>
-      </p:sp>
-      <p:sp>
-        <p:nvSpPr>
-          <p:cNvPr id="14" name="Shape 11"/>
+              <a:t>Phiên trong LongMemEval-S rất dài, trích xuất chậm</a:t>
+            </a:r>
+            <a:endParaRPr lang="en-US" sz="1300" dirty="0"/>
+          </a:p>
+        </p:txBody>
+      </p:sp>
+      <p:sp>
+        <p:nvSpPr>
+          <p:cNvPr id="15" name="Text 12"/>
+          <p:cNvSpPr txBox="1"/>
+          <p:nvPr/>
+        </p:nvSpPr>
+        <p:spPr>
+          <a:xfrm>
+            <a:off x="6812280" y="3044952"/>
+            <a:ext cx="4617720" cy="960120"/>
+          </a:xfrm>
+          <a:prstGeom prst="rect">
+            <a:avLst/>
+          </a:prstGeom>
+          <a:noFill/>
+          <a:ln/>
+        </p:spPr>
+        <p:txBody>
+          <a:bodyPr wrap="square" lIns="0" tIns="0" rIns="0" bIns="0" rtlCol="0" anchor="ctr"/>
+          <a:lstStyle/>
+          <a:p>
+            <a:pPr marL="0" indent="0">
+              <a:buNone/>
+            </a:pPr>
+            <a:r>
+              <a:rPr lang="en-US" sz="1600" dirty="0">
+                <a:solidFill>
+                  <a:srgbClr val="4A4E63"/>
+                </a:solidFill>
+                <a:latin typeface="Calibri" pitchFamily="34" charset="0"/>
+                <a:ea typeface="Calibri" pitchFamily="34" charset="-122"/>
+                <a:cs typeface="Calibri" pitchFamily="34" charset="-120"/>
+              </a:rPr>
+              <a:t>Chạy 100 câu trước; đo tốc độ rồi quyết định mở rộng</a:t>
+            </a:r>
+            <a:endParaRPr lang="en-US" sz="1250" dirty="0"/>
+          </a:p>
+        </p:txBody>
+      </p:sp>
+      <p:sp>
+        <p:nvSpPr>
+          <p:cNvPr id="16" name="Shape 13"/>
           <p:cNvSpPr/>
           <p:nvPr/>
         </p:nvSpPr>
         <p:spPr>
           <a:xfrm>
-            <a:off x="6254496" y="3337560"/>
-            <a:ext cx="5358384" cy="1280160"/>
+            <a:off x="566928" y="4123944"/>
+            <a:ext cx="5943600" cy="960120"/>
           </a:xfrm>
           <a:prstGeom prst="rect">
             <a:avLst/>
@@ -5572,136 +4689,132 @@
         </p:spPr>
         <p:txBody>
           <a:bodyPr/>
-          <a:p/>
-        </p:txBody>
-      </p:sp>
-      <p:sp>
-        <p:nvSpPr>
-          <p:cNvPr id="15" name="Text 12"/>
-          <p:cNvSpPr txBox="1"/>
-          <p:nvPr/>
-        </p:nvSpPr>
-        <p:spPr>
-          <a:xfrm>
-            <a:off x="6446520" y="3447288"/>
-            <a:ext cx="457200" cy="548640"/>
-          </a:xfrm>
-          <a:prstGeom prst="rect">
-            <a:avLst/>
-          </a:prstGeom>
-          <a:noFill/>
-          <a:ln/>
-        </p:spPr>
-        <p:txBody>
-          <a:bodyPr wrap="square" lIns="0" tIns="0" rIns="0" bIns="0" rtlCol="0" anchor="t"/>
-          <a:lstStyle/>
-          <a:p>
-            <a:pPr indent="0" marL="0">
-              <a:buNone/>
-            </a:pPr>
-            <a:r>
-              <a:rPr lang="en-US" sz="2600" b="1" dirty="0">
-                <a:solidFill>
-                  <a:srgbClr val="E9970B"/>
-                </a:solidFill>
-                <a:latin typeface="Cambria" pitchFamily="34" charset="0"/>
-                <a:ea typeface="Cambria" pitchFamily="34" charset="-122"/>
-                <a:cs typeface="Cambria" pitchFamily="34" charset="-120"/>
-              </a:rPr>
-              <a:t>2</a:t>
-            </a:r>
-            <a:endParaRPr lang="en-US" sz="2600" dirty="0"/>
-          </a:p>
-        </p:txBody>
-      </p:sp>
-      <p:sp>
-        <p:nvSpPr>
-          <p:cNvPr id="16" name="Text 13"/>
-          <p:cNvSpPr txBox="1"/>
-          <p:nvPr/>
-        </p:nvSpPr>
-        <p:spPr>
-          <a:xfrm>
-            <a:off x="6995160" y="3502152"/>
-            <a:ext cx="4434840" cy="274320"/>
-          </a:xfrm>
-          <a:prstGeom prst="rect">
-            <a:avLst/>
-          </a:prstGeom>
-          <a:noFill/>
-          <a:ln/>
-        </p:spPr>
-        <p:txBody>
-          <a:bodyPr wrap="square" lIns="0" tIns="0" rIns="0" bIns="0" rtlCol="0" anchor="t"/>
-          <a:lstStyle/>
-          <a:p>
-            <a:pPr indent="0" marL="0">
+          <a:lstStyle/>
+          <a:p>
+            <a:endParaRPr/>
+          </a:p>
+        </p:txBody>
+      </p:sp>
+      <p:sp>
+        <p:nvSpPr>
+          <p:cNvPr id="17" name="Shape 14"/>
+          <p:cNvSpPr/>
+          <p:nvPr/>
+        </p:nvSpPr>
+        <p:spPr>
+          <a:xfrm>
+            <a:off x="6620256" y="4123944"/>
+            <a:ext cx="4992624" cy="960120"/>
+          </a:xfrm>
+          <a:prstGeom prst="rect">
+            <a:avLst/>
+          </a:prstGeom>
+          <a:solidFill>
+            <a:srgbClr val="ECEBF7"/>
+          </a:solidFill>
+          <a:ln w="12700">
+            <a:solidFill>
+              <a:srgbClr val="ECEBF7"/>
+            </a:solidFill>
+            <a:prstDash val="solid"/>
+          </a:ln>
+        </p:spPr>
+        <p:txBody>
+          <a:bodyPr/>
+          <a:lstStyle/>
+          <a:p>
+            <a:endParaRPr/>
+          </a:p>
+        </p:txBody>
+      </p:sp>
+      <p:sp>
+        <p:nvSpPr>
+          <p:cNvPr id="18" name="Text 15"/>
+          <p:cNvSpPr txBox="1"/>
+          <p:nvPr/>
+        </p:nvSpPr>
+        <p:spPr>
+          <a:xfrm>
+            <a:off x="777240" y="4123944"/>
+            <a:ext cx="5532120" cy="960120"/>
+          </a:xfrm>
+          <a:prstGeom prst="rect">
+            <a:avLst/>
+          </a:prstGeom>
+          <a:noFill/>
+          <a:ln/>
+        </p:spPr>
+        <p:txBody>
+          <a:bodyPr wrap="square" lIns="0" tIns="0" rIns="0" bIns="0" rtlCol="0" anchor="ctr"/>
+          <a:lstStyle/>
+          <a:p>
+            <a:pPr marL="0" indent="0">
               <a:buNone/>
             </a:pPr>
             <a:r>
               <a:rPr lang="en-US" sz="1700" b="1" dirty="0">
                 <a:solidFill>
                   <a:srgbClr val="13123A"/>
-                </a:solidFill>
-                <a:latin typeface="Cambria" pitchFamily="34" charset="0"/>
-                <a:ea typeface="Cambria" pitchFamily="34" charset="-122"/>
-                <a:cs typeface="Cambria" pitchFamily="34" charset="-120"/>
-              </a:rPr>
-              <a:t>Cache từ ngày đầu</a:t>
-            </a:r>
-            <a:endParaRPr lang="en-US" sz="1300" dirty="0"/>
-          </a:p>
-        </p:txBody>
-      </p:sp>
-      <p:sp>
-        <p:nvSpPr>
-          <p:cNvPr id="17" name="Text 14"/>
-          <p:cNvSpPr txBox="1"/>
-          <p:nvPr/>
-        </p:nvSpPr>
-        <p:spPr>
-          <a:xfrm>
-            <a:off x="6995160" y="3840480"/>
-            <a:ext cx="4434840" cy="731520"/>
-          </a:xfrm>
-          <a:prstGeom prst="rect">
-            <a:avLst/>
-          </a:prstGeom>
-          <a:noFill/>
-          <a:ln/>
-        </p:spPr>
-        <p:txBody>
-          <a:bodyPr wrap="square" lIns="0" tIns="0" rIns="0" bIns="0" rtlCol="0" anchor="t"/>
-          <a:lstStyle/>
-          <a:p>
-            <a:pPr indent="0" marL="0">
-              <a:buNone/>
-            </a:pPr>
-            <a:r>
-              <a:rPr lang="en-US" sz="1550" dirty="0">
-                <a:solidFill>
-                  <a:srgbClr val="4A4E63"/>
                 </a:solidFill>
                 <a:latin typeface="Calibri" pitchFamily="34" charset="0"/>
                 <a:ea typeface="Calibri" pitchFamily="34" charset="-122"/>
                 <a:cs typeface="Calibri" pitchFamily="34" charset="-120"/>
               </a:rPr>
-              <a:t>Không có cache thì mỗi lần chạy lại 100 câu phải làm từ đầu, khiến thí nghiệm khó lặp lại.</a:t>
-            </a:r>
-            <a:endParaRPr lang="en-US" sz="1200" dirty="0"/>
-          </a:p>
-        </p:txBody>
-      </p:sp>
-      <p:sp>
-        <p:nvSpPr>
-          <p:cNvPr id="18" name="Shape 15"/>
+              <a:t>Lần tải đầu của BGE-M3 nặng</a:t>
+            </a:r>
+            <a:endParaRPr lang="en-US" sz="1300" dirty="0"/>
+          </a:p>
+        </p:txBody>
+      </p:sp>
+      <p:sp>
+        <p:nvSpPr>
+          <p:cNvPr id="19" name="Text 16"/>
+          <p:cNvSpPr txBox="1"/>
+          <p:nvPr/>
+        </p:nvSpPr>
+        <p:spPr>
+          <a:xfrm>
+            <a:off x="6812280" y="4123944"/>
+            <a:ext cx="4617720" cy="960120"/>
+          </a:xfrm>
+          <a:prstGeom prst="rect">
+            <a:avLst/>
+          </a:prstGeom>
+          <a:noFill/>
+          <a:ln/>
+        </p:spPr>
+        <p:txBody>
+          <a:bodyPr wrap="square" lIns="0" tIns="0" rIns="0" bIns="0" rtlCol="0" anchor="ctr"/>
+          <a:lstStyle/>
+          <a:p>
+            <a:pPr marL="0" indent="0">
+              <a:buNone/>
+            </a:pPr>
+            <a:r>
+              <a:rPr lang="en-US" sz="1600" dirty="0">
+                <a:solidFill>
+                  <a:srgbClr val="4A4E63"/>
+                </a:solidFill>
+                <a:latin typeface="Calibri" pitchFamily="34" charset="0"/>
+                <a:ea typeface="Calibri" pitchFamily="34" charset="-122"/>
+                <a:cs typeface="Calibri" pitchFamily="34" charset="-120"/>
+              </a:rPr>
+              <a:t>Tải sẵn về máy, ghim phiên bản trong requirements.txt</a:t>
+            </a:r>
+            <a:endParaRPr lang="en-US" sz="1250" dirty="0"/>
+          </a:p>
+        </p:txBody>
+      </p:sp>
+      <p:sp>
+        <p:nvSpPr>
+          <p:cNvPr id="20" name="Shape 17"/>
           <p:cNvSpPr/>
           <p:nvPr/>
         </p:nvSpPr>
         <p:spPr>
           <a:xfrm>
-            <a:off x="6254496" y="4754880"/>
-            <a:ext cx="5358384" cy="1280160"/>
+            <a:off x="566928" y="5202936"/>
+            <a:ext cx="5943600" cy="960120"/>
           </a:xfrm>
           <a:prstGeom prst="rect">
             <a:avLst/>
@@ -5718,123 +4831,119 @@
         </p:spPr>
         <p:txBody>
           <a:bodyPr/>
-          <a:p/>
-        </p:txBody>
-      </p:sp>
-      <p:sp>
-        <p:nvSpPr>
-          <p:cNvPr id="19" name="Text 16"/>
-          <p:cNvSpPr txBox="1"/>
-          <p:nvPr/>
-        </p:nvSpPr>
-        <p:spPr>
-          <a:xfrm>
-            <a:off x="6446520" y="4864608"/>
-            <a:ext cx="457200" cy="548640"/>
-          </a:xfrm>
-          <a:prstGeom prst="rect">
-            <a:avLst/>
-          </a:prstGeom>
-          <a:noFill/>
-          <a:ln/>
-        </p:spPr>
-        <p:txBody>
-          <a:bodyPr wrap="square" lIns="0" tIns="0" rIns="0" bIns="0" rtlCol="0" anchor="t"/>
-          <a:lstStyle/>
-          <a:p>
-            <a:pPr indent="0" marL="0">
-              <a:buNone/>
-            </a:pPr>
-            <a:r>
-              <a:rPr lang="en-US" sz="2600" b="1" dirty="0">
-                <a:solidFill>
-                  <a:srgbClr val="E9970B"/>
-                </a:solidFill>
-                <a:latin typeface="Cambria" pitchFamily="34" charset="0"/>
-                <a:ea typeface="Cambria" pitchFamily="34" charset="-122"/>
-                <a:cs typeface="Cambria" pitchFamily="34" charset="-120"/>
-              </a:rPr>
-              <a:t>3</a:t>
-            </a:r>
-            <a:endParaRPr lang="en-US" sz="2600" dirty="0"/>
-          </a:p>
-        </p:txBody>
-      </p:sp>
-      <p:sp>
-        <p:nvSpPr>
-          <p:cNvPr id="20" name="Text 17"/>
-          <p:cNvSpPr txBox="1"/>
-          <p:nvPr/>
-        </p:nvSpPr>
-        <p:spPr>
-          <a:xfrm>
-            <a:off x="6995160" y="4919472"/>
-            <a:ext cx="4434840" cy="274320"/>
-          </a:xfrm>
-          <a:prstGeom prst="rect">
-            <a:avLst/>
-          </a:prstGeom>
-          <a:noFill/>
-          <a:ln/>
-        </p:spPr>
-        <p:txBody>
-          <a:bodyPr wrap="square" lIns="0" tIns="0" rIns="0" bIns="0" rtlCol="0" anchor="t"/>
-          <a:lstStyle/>
-          <a:p>
-            <a:pPr indent="0" marL="0">
+          <a:lstStyle/>
+          <a:p>
+            <a:endParaRPr/>
+          </a:p>
+        </p:txBody>
+      </p:sp>
+      <p:sp>
+        <p:nvSpPr>
+          <p:cNvPr id="21" name="Shape 18"/>
+          <p:cNvSpPr/>
+          <p:nvPr/>
+        </p:nvSpPr>
+        <p:spPr>
+          <a:xfrm>
+            <a:off x="6620256" y="5202936"/>
+            <a:ext cx="4992624" cy="960120"/>
+          </a:xfrm>
+          <a:prstGeom prst="rect">
+            <a:avLst/>
+          </a:prstGeom>
+          <a:solidFill>
+            <a:srgbClr val="ECEBF7"/>
+          </a:solidFill>
+          <a:ln w="12700">
+            <a:solidFill>
+              <a:srgbClr val="ECEBF7"/>
+            </a:solidFill>
+            <a:prstDash val="solid"/>
+          </a:ln>
+        </p:spPr>
+        <p:txBody>
+          <a:bodyPr/>
+          <a:lstStyle/>
+          <a:p>
+            <a:endParaRPr/>
+          </a:p>
+        </p:txBody>
+      </p:sp>
+      <p:sp>
+        <p:nvSpPr>
+          <p:cNvPr id="22" name="Text 19"/>
+          <p:cNvSpPr txBox="1"/>
+          <p:nvPr/>
+        </p:nvSpPr>
+        <p:spPr>
+          <a:xfrm>
+            <a:off x="777240" y="5202936"/>
+            <a:ext cx="5532120" cy="960120"/>
+          </a:xfrm>
+          <a:prstGeom prst="rect">
+            <a:avLst/>
+          </a:prstGeom>
+          <a:noFill/>
+          <a:ln/>
+        </p:spPr>
+        <p:txBody>
+          <a:bodyPr wrap="square" lIns="0" tIns="0" rIns="0" bIns="0" rtlCol="0" anchor="ctr"/>
+          <a:lstStyle/>
+          <a:p>
+            <a:pPr marL="0" indent="0">
               <a:buNone/>
             </a:pPr>
             <a:r>
               <a:rPr lang="en-US" sz="1700" b="1" dirty="0">
                 <a:solidFill>
                   <a:srgbClr val="13123A"/>
-                </a:solidFill>
-                <a:latin typeface="Cambria" pitchFamily="34" charset="0"/>
-                <a:ea typeface="Cambria" pitchFamily="34" charset="-122"/>
-                <a:cs typeface="Cambria" pitchFamily="34" charset="-120"/>
-              </a:rPr>
-              <a:t>Chốt judge ngay tuần này</a:t>
-            </a:r>
-            <a:endParaRPr lang="en-US" sz="1300" dirty="0"/>
-          </a:p>
-        </p:txBody>
-      </p:sp>
-      <p:sp>
-        <p:nvSpPr>
-          <p:cNvPr id="21" name="Text 18"/>
-          <p:cNvSpPr txBox="1"/>
-          <p:nvPr/>
-        </p:nvSpPr>
-        <p:spPr>
-          <a:xfrm>
-            <a:off x="6995160" y="5257800"/>
-            <a:ext cx="4434840" cy="731520"/>
-          </a:xfrm>
-          <a:prstGeom prst="rect">
-            <a:avLst/>
-          </a:prstGeom>
-          <a:noFill/>
-          <a:ln/>
-        </p:spPr>
-        <p:txBody>
-          <a:bodyPr wrap="square" lIns="0" tIns="0" rIns="0" bIns="0" rtlCol="0" anchor="t"/>
-          <a:lstStyle/>
-          <a:p>
-            <a:pPr indent="0" marL="0">
-              <a:buNone/>
-            </a:pPr>
-            <a:r>
-              <a:rPr lang="en-US" sz="1550" dirty="0">
-                <a:solidFill>
-                  <a:srgbClr val="4A4E63"/>
                 </a:solidFill>
                 <a:latin typeface="Calibri" pitchFamily="34" charset="0"/>
                 <a:ea typeface="Calibri" pitchFamily="34" charset="-122"/>
                 <a:cs typeface="Calibri" pitchFamily="34" charset="-120"/>
               </a:rPr>
-              <a:t>Đổi prompt chấm giữa chừng làm mọi số đo trước đó mất giá trị so sánh.</a:t>
-            </a:r>
-            <a:endParaRPr lang="en-US" sz="1200" dirty="0"/>
+              <a:t>Hai người cùng sửa một file</a:t>
+            </a:r>
+            <a:endParaRPr lang="en-US" sz="1300" dirty="0"/>
+          </a:p>
+        </p:txBody>
+      </p:sp>
+      <p:sp>
+        <p:nvSpPr>
+          <p:cNvPr id="23" name="Text 20"/>
+          <p:cNvSpPr txBox="1"/>
+          <p:nvPr/>
+        </p:nvSpPr>
+        <p:spPr>
+          <a:xfrm>
+            <a:off x="6812280" y="5202936"/>
+            <a:ext cx="4617720" cy="960120"/>
+          </a:xfrm>
+          <a:prstGeom prst="rect">
+            <a:avLst/>
+          </a:prstGeom>
+          <a:noFill/>
+          <a:ln/>
+        </p:spPr>
+        <p:txBody>
+          <a:bodyPr wrap="square" lIns="0" tIns="0" rIns="0" bIns="0" rtlCol="0" anchor="ctr"/>
+          <a:lstStyle/>
+          <a:p>
+            <a:pPr marL="0" indent="0">
+              <a:buNone/>
+            </a:pPr>
+            <a:r>
+              <a:rPr lang="en-US" sz="1600" dirty="0">
+                <a:solidFill>
+                  <a:srgbClr val="4A4E63"/>
+                </a:solidFill>
+                <a:latin typeface="Calibri" pitchFamily="34" charset="0"/>
+                <a:ea typeface="Calibri" pitchFamily="34" charset="-122"/>
+                <a:cs typeface="Calibri" pitchFamily="34" charset="-120"/>
+              </a:rPr>
+              <a:t>Kho ký ức và extractor ở hai thư mục riêng; giao diện là dataclass Fact đã cố định</a:t>
+            </a:r>
+            <a:endParaRPr lang="en-US" sz="1250" dirty="0"/>
           </a:p>
         </p:txBody>
       </p:sp>
@@ -5848,12 +4957,13 @@
 
 <file path=ppt/slides/slide13.xml><?xml version="1.0" encoding="utf-8"?>
 <p:sld xmlns:a="http://schemas.openxmlformats.org/drawingml/2006/main" xmlns:r="http://schemas.openxmlformats.org/officeDocument/2006/relationships" xmlns:p="http://schemas.openxmlformats.org/presentationml/2006/main">
-  <p:cSld name="Slide 10">
+  <p:cSld>
     <p:bg>
       <p:bgPr>
         <a:solidFill>
           <a:srgbClr val="FFFFFF"/>
         </a:solidFill>
+        <a:effectLst/>
       </p:bgPr>
     </p:bg>
     <p:spTree>
@@ -5872,771 +4982,6 @@
       </p:grpSpPr>
       <p:sp>
         <p:nvSpPr>
-          <p:cNvPr id="2" name="Text 0"/>
-          <p:cNvSpPr txBox="1"/>
-          <p:nvPr/>
-        </p:nvSpPr>
-        <p:spPr>
-          <a:xfrm>
-            <a:off x="566928" y="502920"/>
-            <a:ext cx="8229600" cy="283464"/>
-          </a:xfrm>
-          <a:prstGeom prst="rect">
-            <a:avLst/>
-          </a:prstGeom>
-          <a:noFill/>
-          <a:ln/>
-        </p:spPr>
-        <p:txBody>
-          <a:bodyPr wrap="square" lIns="0" tIns="0" rIns="0" bIns="0" rtlCol="0" anchor="t"/>
-          <a:lstStyle/>
-          <a:p>
-            <a:pPr indent="0" marL="0">
-              <a:buNone/>
-            </a:pPr>
-            <a:r>
-              <a:rPr lang="en-US" sz="1550" b="1" dirty="0">
-                <a:solidFill>
-                  <a:srgbClr val="3A36A0"/>
-                </a:solidFill>
-                <a:latin typeface="Calibri" pitchFamily="34" charset="0"/>
-                <a:ea typeface="Calibri" pitchFamily="34" charset="-122"/>
-                <a:cs typeface="Calibri" pitchFamily="34" charset="-120"/>
-              </a:rPr>
-              <a:t>RỦI RO</a:t>
-            </a:r>
-            <a:endParaRPr lang="en-US" sz="1200" dirty="0"/>
-          </a:p>
-        </p:txBody>
-      </p:sp>
-      <p:sp>
-        <p:nvSpPr>
-          <p:cNvPr id="3" name="Text 1"/>
-          <p:cNvSpPr txBox="1"/>
-          <p:nvPr/>
-        </p:nvSpPr>
-        <p:spPr>
-          <a:xfrm>
-            <a:off x="566928" y="822960"/>
-            <a:ext cx="11045952" cy="640080"/>
-          </a:xfrm>
-          <a:prstGeom prst="rect">
-            <a:avLst/>
-          </a:prstGeom>
-          <a:noFill/>
-          <a:ln/>
-        </p:spPr>
-        <p:txBody>
-          <a:bodyPr wrap="square" lIns="0" tIns="0" rIns="0" bIns="0" rtlCol="0" anchor="t"/>
-          <a:lstStyle/>
-          <a:p>
-            <a:pPr indent="0" marL="0">
-              <a:buNone/>
-            </a:pPr>
-            <a:r>
-              <a:rPr lang="en-US" sz="3000" b="1" dirty="0">
-                <a:solidFill>
-                  <a:srgbClr val="13123A"/>
-                </a:solidFill>
-                <a:latin typeface="Cambria" pitchFamily="34" charset="0"/>
-                <a:ea typeface="Cambria" pitchFamily="34" charset="-122"/>
-                <a:cs typeface="Cambria" pitchFamily="34" charset="-120"/>
-              </a:rPr>
-              <a:t>Rủi ro và biện pháp xử lý</a:t>
-            </a:r>
-            <a:endParaRPr lang="en-US" sz="3000" dirty="0"/>
-          </a:p>
-        </p:txBody>
-      </p:sp>
-      <p:sp>
-        <p:nvSpPr>
-          <p:cNvPr id="4" name="Text 2"/>
-          <p:cNvSpPr txBox="1"/>
-          <p:nvPr/>
-        </p:nvSpPr>
-        <p:spPr>
-          <a:xfrm>
-            <a:off x="566928" y="6464808"/>
-            <a:ext cx="11045952" cy="329184"/>
-          </a:xfrm>
-          <a:prstGeom prst="rect">
-            <a:avLst/>
-          </a:prstGeom>
-          <a:noFill/>
-          <a:ln/>
-        </p:spPr>
-        <p:txBody>
-          <a:bodyPr wrap="square" lIns="0" tIns="0" rIns="0" bIns="0" rtlCol="0" anchor="t"/>
-          <a:lstStyle/>
-          <a:p>
-            <a:pPr indent="0" marL="0">
-              <a:buNone/>
-            </a:pPr>
-            <a:r>
-              <a:rPr lang="en-US" sz="1350" dirty="0">
-                <a:solidFill>
-                  <a:srgbClr val="6B6F82"/>
-                </a:solidFill>
-                <a:latin typeface="Calibri" pitchFamily="34" charset="0"/>
-                <a:ea typeface="Calibri" pitchFamily="34" charset="-122"/>
-                <a:cs typeface="Calibri" pitchFamily="34" charset="-120"/>
-              </a:rPr>
-              <a:t>Hạn mức Gemini theo tài liệu Google AI for Developers; tuần 2 đã chọn adapter đổi được sang Groq/Ollama trong một file.</a:t>
-            </a:r>
-            <a:endParaRPr lang="en-US" sz="1050" dirty="0"/>
-          </a:p>
-        </p:txBody>
-      </p:sp>
-      <p:sp>
-        <p:nvSpPr>
-          <p:cNvPr id="6" name="Text 3"/>
-          <p:cNvSpPr txBox="1"/>
-          <p:nvPr/>
-        </p:nvSpPr>
-        <p:spPr>
-          <a:xfrm>
-            <a:off x="822960" y="1664208"/>
-            <a:ext cx="4572000" cy="237744"/>
-          </a:xfrm>
-          <a:prstGeom prst="rect">
-            <a:avLst/>
-          </a:prstGeom>
-          <a:noFill/>
-          <a:ln/>
-        </p:spPr>
-        <p:txBody>
-          <a:bodyPr wrap="square" lIns="0" tIns="0" rIns="0" bIns="0" rtlCol="0" anchor="t"/>
-          <a:lstStyle/>
-          <a:p>
-            <a:pPr indent="0" marL="0">
-              <a:buNone/>
-            </a:pPr>
-            <a:r>
-              <a:rPr lang="en-US" sz="1450" b="1" dirty="0">
-                <a:solidFill>
-                  <a:srgbClr val="B4432E"/>
-                </a:solidFill>
-                <a:latin typeface="Calibri" pitchFamily="34" charset="0"/>
-                <a:ea typeface="Calibri" pitchFamily="34" charset="-122"/>
-                <a:cs typeface="Calibri" pitchFamily="34" charset="-120"/>
-              </a:rPr>
-              <a:t>RỦI RO</a:t>
-            </a:r>
-            <a:endParaRPr lang="en-US" sz="1100" dirty="0"/>
-          </a:p>
-        </p:txBody>
-      </p:sp>
-      <p:sp>
-        <p:nvSpPr>
-          <p:cNvPr id="7" name="Text 4"/>
-          <p:cNvSpPr txBox="1"/>
-          <p:nvPr/>
-        </p:nvSpPr>
-        <p:spPr>
-          <a:xfrm>
-            <a:off x="6766560" y="1664208"/>
-            <a:ext cx="4572000" cy="237744"/>
-          </a:xfrm>
-          <a:prstGeom prst="rect">
-            <a:avLst/>
-          </a:prstGeom>
-          <a:noFill/>
-          <a:ln/>
-        </p:spPr>
-        <p:txBody>
-          <a:bodyPr wrap="square" lIns="0" tIns="0" rIns="0" bIns="0" rtlCol="0" anchor="t"/>
-          <a:lstStyle/>
-          <a:p>
-            <a:pPr indent="0" marL="0">
-              <a:buNone/>
-            </a:pPr>
-            <a:r>
-              <a:rPr lang="en-US" sz="1450" b="1" dirty="0">
-                <a:solidFill>
-                  <a:srgbClr val="1FA6A6"/>
-                </a:solidFill>
-                <a:latin typeface="Calibri" pitchFamily="34" charset="0"/>
-                <a:ea typeface="Calibri" pitchFamily="34" charset="-122"/>
-                <a:cs typeface="Calibri" pitchFamily="34" charset="-120"/>
-              </a:rPr>
-              <a:t>XỬ LÝ</a:t>
-            </a:r>
-            <a:endParaRPr lang="en-US" sz="1100" dirty="0"/>
-          </a:p>
-        </p:txBody>
-      </p:sp>
-      <p:sp>
-        <p:nvSpPr>
-          <p:cNvPr id="8" name="Shape 5"/>
-          <p:cNvSpPr/>
-          <p:nvPr/>
-        </p:nvSpPr>
-        <p:spPr>
-          <a:xfrm>
-            <a:off x="566928" y="1965960"/>
-            <a:ext cx="5943600" cy="960120"/>
-          </a:xfrm>
-          <a:prstGeom prst="rect">
-            <a:avLst/>
-          </a:prstGeom>
-          <a:solidFill>
-            <a:srgbClr val="F7F7FB"/>
-          </a:solidFill>
-          <a:ln w="12700">
-            <a:solidFill>
-              <a:srgbClr val="F7F7FB"/>
-            </a:solidFill>
-            <a:prstDash val="solid"/>
-          </a:ln>
-        </p:spPr>
-        <p:txBody>
-          <a:bodyPr/>
-          <a:p/>
-        </p:txBody>
-      </p:sp>
-      <p:sp>
-        <p:nvSpPr>
-          <p:cNvPr id="9" name="Shape 6"/>
-          <p:cNvSpPr/>
-          <p:nvPr/>
-        </p:nvSpPr>
-        <p:spPr>
-          <a:xfrm>
-            <a:off x="6620256" y="1965960"/>
-            <a:ext cx="4992624" cy="960120"/>
-          </a:xfrm>
-          <a:prstGeom prst="rect">
-            <a:avLst/>
-          </a:prstGeom>
-          <a:solidFill>
-            <a:srgbClr val="ECEBF7"/>
-          </a:solidFill>
-          <a:ln w="12700">
-            <a:solidFill>
-              <a:srgbClr val="ECEBF7"/>
-            </a:solidFill>
-            <a:prstDash val="solid"/>
-          </a:ln>
-        </p:spPr>
-        <p:txBody>
-          <a:bodyPr/>
-          <a:p/>
-        </p:txBody>
-      </p:sp>
-      <p:sp>
-        <p:nvSpPr>
-          <p:cNvPr id="10" name="Text 7"/>
-          <p:cNvSpPr txBox="1"/>
-          <p:nvPr/>
-        </p:nvSpPr>
-        <p:spPr>
-          <a:xfrm>
-            <a:off x="777240" y="1965960"/>
-            <a:ext cx="5532120" cy="960120"/>
-          </a:xfrm>
-          <a:prstGeom prst="rect">
-            <a:avLst/>
-          </a:prstGeom>
-          <a:noFill/>
-          <a:ln/>
-        </p:spPr>
-        <p:txBody>
-          <a:bodyPr wrap="square" lIns="0" tIns="0" rIns="0" bIns="0" rtlCol="0" anchor="ctr"/>
-          <a:lstStyle/>
-          <a:p>
-            <a:pPr indent="0" marL="0">
-              <a:buNone/>
-            </a:pPr>
-            <a:r>
-              <a:rPr lang="en-US" sz="1700" b="1" dirty="0">
-                <a:solidFill>
-                  <a:srgbClr val="13123A"/>
-                </a:solidFill>
-                <a:latin typeface="Calibri" pitchFamily="34" charset="0"/>
-                <a:ea typeface="Calibri" pitchFamily="34" charset="-122"/>
-                <a:cs typeface="Calibri" pitchFamily="34" charset="-120"/>
-              </a:rPr>
-              <a:t>Hạn mức Gemini 1.500 lượt/ngày cạn giữa lúc chạy eval</a:t>
-            </a:r>
-            <a:endParaRPr lang="en-US" sz="1300" dirty="0"/>
-          </a:p>
-        </p:txBody>
-      </p:sp>
-      <p:sp>
-        <p:nvSpPr>
-          <p:cNvPr id="11" name="Text 8"/>
-          <p:cNvSpPr txBox="1"/>
-          <p:nvPr/>
-        </p:nvSpPr>
-        <p:spPr>
-          <a:xfrm>
-            <a:off x="6812280" y="1965960"/>
-            <a:ext cx="4617720" cy="960120"/>
-          </a:xfrm>
-          <a:prstGeom prst="rect">
-            <a:avLst/>
-          </a:prstGeom>
-          <a:noFill/>
-          <a:ln/>
-        </p:spPr>
-        <p:txBody>
-          <a:bodyPr wrap="square" lIns="0" tIns="0" rIns="0" bIns="0" rtlCol="0" anchor="ctr"/>
-          <a:lstStyle/>
-          <a:p>
-            <a:pPr indent="0" marL="0">
-              <a:buNone/>
-            </a:pPr>
-            <a:r>
-              <a:rPr lang="en-US" sz="1600" dirty="0">
-                <a:solidFill>
-                  <a:srgbClr val="4A4E63"/>
-                </a:solidFill>
-                <a:latin typeface="Calibri" pitchFamily="34" charset="0"/>
-                <a:ea typeface="Calibri" pitchFamily="34" charset="-122"/>
-                <a:cs typeface="Calibri" pitchFamily="34" charset="-120"/>
-              </a:rPr>
-              <a:t>Cache trích xuất theo sha1(lượt); chạy lại eval không gọi lại LLM</a:t>
-            </a:r>
-            <a:endParaRPr lang="en-US" sz="1250" dirty="0"/>
-          </a:p>
-        </p:txBody>
-      </p:sp>
-      <p:sp>
-        <p:nvSpPr>
-          <p:cNvPr id="12" name="Shape 9"/>
-          <p:cNvSpPr/>
-          <p:nvPr/>
-        </p:nvSpPr>
-        <p:spPr>
-          <a:xfrm>
-            <a:off x="566928" y="3044952"/>
-            <a:ext cx="5943600" cy="960120"/>
-          </a:xfrm>
-          <a:prstGeom prst="rect">
-            <a:avLst/>
-          </a:prstGeom>
-          <a:solidFill>
-            <a:srgbClr val="F7F7FB"/>
-          </a:solidFill>
-          <a:ln w="12700">
-            <a:solidFill>
-              <a:srgbClr val="F7F7FB"/>
-            </a:solidFill>
-            <a:prstDash val="solid"/>
-          </a:ln>
-        </p:spPr>
-        <p:txBody>
-          <a:bodyPr/>
-          <a:p/>
-        </p:txBody>
-      </p:sp>
-      <p:sp>
-        <p:nvSpPr>
-          <p:cNvPr id="13" name="Shape 10"/>
-          <p:cNvSpPr/>
-          <p:nvPr/>
-        </p:nvSpPr>
-        <p:spPr>
-          <a:xfrm>
-            <a:off x="6620256" y="3044952"/>
-            <a:ext cx="4992624" cy="960120"/>
-          </a:xfrm>
-          <a:prstGeom prst="rect">
-            <a:avLst/>
-          </a:prstGeom>
-          <a:solidFill>
-            <a:srgbClr val="ECEBF7"/>
-          </a:solidFill>
-          <a:ln w="12700">
-            <a:solidFill>
-              <a:srgbClr val="ECEBF7"/>
-            </a:solidFill>
-            <a:prstDash val="solid"/>
-          </a:ln>
-        </p:spPr>
-        <p:txBody>
-          <a:bodyPr/>
-          <a:p/>
-        </p:txBody>
-      </p:sp>
-      <p:sp>
-        <p:nvSpPr>
-          <p:cNvPr id="14" name="Text 11"/>
-          <p:cNvSpPr txBox="1"/>
-          <p:nvPr/>
-        </p:nvSpPr>
-        <p:spPr>
-          <a:xfrm>
-            <a:off x="777240" y="3044952"/>
-            <a:ext cx="5532120" cy="960120"/>
-          </a:xfrm>
-          <a:prstGeom prst="rect">
-            <a:avLst/>
-          </a:prstGeom>
-          <a:noFill/>
-          <a:ln/>
-        </p:spPr>
-        <p:txBody>
-          <a:bodyPr wrap="square" lIns="0" tIns="0" rIns="0" bIns="0" rtlCol="0" anchor="ctr"/>
-          <a:lstStyle/>
-          <a:p>
-            <a:pPr indent="0" marL="0">
-              <a:buNone/>
-            </a:pPr>
-            <a:r>
-              <a:rPr lang="en-US" sz="1700" b="1" dirty="0">
-                <a:solidFill>
-                  <a:srgbClr val="13123A"/>
-                </a:solidFill>
-                <a:latin typeface="Calibri" pitchFamily="34" charset="0"/>
-                <a:ea typeface="Calibri" pitchFamily="34" charset="-122"/>
-                <a:cs typeface="Calibri" pitchFamily="34" charset="-120"/>
-              </a:rPr>
-              <a:t>Phiên trong LongMemEval-S rất dài, trích xuất chậm</a:t>
-            </a:r>
-            <a:endParaRPr lang="en-US" sz="1300" dirty="0"/>
-          </a:p>
-        </p:txBody>
-      </p:sp>
-      <p:sp>
-        <p:nvSpPr>
-          <p:cNvPr id="15" name="Text 12"/>
-          <p:cNvSpPr txBox="1"/>
-          <p:nvPr/>
-        </p:nvSpPr>
-        <p:spPr>
-          <a:xfrm>
-            <a:off x="6812280" y="3044952"/>
-            <a:ext cx="4617720" cy="960120"/>
-          </a:xfrm>
-          <a:prstGeom prst="rect">
-            <a:avLst/>
-          </a:prstGeom>
-          <a:noFill/>
-          <a:ln/>
-        </p:spPr>
-        <p:txBody>
-          <a:bodyPr wrap="square" lIns="0" tIns="0" rIns="0" bIns="0" rtlCol="0" anchor="ctr"/>
-          <a:lstStyle/>
-          <a:p>
-            <a:pPr indent="0" marL="0">
-              <a:buNone/>
-            </a:pPr>
-            <a:r>
-              <a:rPr lang="en-US" sz="1600" dirty="0">
-                <a:solidFill>
-                  <a:srgbClr val="4A4E63"/>
-                </a:solidFill>
-                <a:latin typeface="Calibri" pitchFamily="34" charset="0"/>
-                <a:ea typeface="Calibri" pitchFamily="34" charset="-122"/>
-                <a:cs typeface="Calibri" pitchFamily="34" charset="-120"/>
-              </a:rPr>
-              <a:t>Chạy 100 câu trước; đo tốc độ rồi quyết định mở rộng</a:t>
-            </a:r>
-            <a:endParaRPr lang="en-US" sz="1250" dirty="0"/>
-          </a:p>
-        </p:txBody>
-      </p:sp>
-      <p:sp>
-        <p:nvSpPr>
-          <p:cNvPr id="16" name="Shape 13"/>
-          <p:cNvSpPr/>
-          <p:nvPr/>
-        </p:nvSpPr>
-        <p:spPr>
-          <a:xfrm>
-            <a:off x="566928" y="4123944"/>
-            <a:ext cx="5943600" cy="960120"/>
-          </a:xfrm>
-          <a:prstGeom prst="rect">
-            <a:avLst/>
-          </a:prstGeom>
-          <a:solidFill>
-            <a:srgbClr val="F7F7FB"/>
-          </a:solidFill>
-          <a:ln w="12700">
-            <a:solidFill>
-              <a:srgbClr val="F7F7FB"/>
-            </a:solidFill>
-            <a:prstDash val="solid"/>
-          </a:ln>
-        </p:spPr>
-        <p:txBody>
-          <a:bodyPr/>
-          <a:p/>
-        </p:txBody>
-      </p:sp>
-      <p:sp>
-        <p:nvSpPr>
-          <p:cNvPr id="17" name="Shape 14"/>
-          <p:cNvSpPr/>
-          <p:nvPr/>
-        </p:nvSpPr>
-        <p:spPr>
-          <a:xfrm>
-            <a:off x="6620256" y="4123944"/>
-            <a:ext cx="4992624" cy="960120"/>
-          </a:xfrm>
-          <a:prstGeom prst="rect">
-            <a:avLst/>
-          </a:prstGeom>
-          <a:solidFill>
-            <a:srgbClr val="ECEBF7"/>
-          </a:solidFill>
-          <a:ln w="12700">
-            <a:solidFill>
-              <a:srgbClr val="ECEBF7"/>
-            </a:solidFill>
-            <a:prstDash val="solid"/>
-          </a:ln>
-        </p:spPr>
-        <p:txBody>
-          <a:bodyPr/>
-          <a:p/>
-        </p:txBody>
-      </p:sp>
-      <p:sp>
-        <p:nvSpPr>
-          <p:cNvPr id="18" name="Text 15"/>
-          <p:cNvSpPr txBox="1"/>
-          <p:nvPr/>
-        </p:nvSpPr>
-        <p:spPr>
-          <a:xfrm>
-            <a:off x="777240" y="4123944"/>
-            <a:ext cx="5532120" cy="960120"/>
-          </a:xfrm>
-          <a:prstGeom prst="rect">
-            <a:avLst/>
-          </a:prstGeom>
-          <a:noFill/>
-          <a:ln/>
-        </p:spPr>
-        <p:txBody>
-          <a:bodyPr wrap="square" lIns="0" tIns="0" rIns="0" bIns="0" rtlCol="0" anchor="ctr"/>
-          <a:lstStyle/>
-          <a:p>
-            <a:pPr indent="0" marL="0">
-              <a:buNone/>
-            </a:pPr>
-            <a:r>
-              <a:rPr lang="en-US" sz="1700" b="1" dirty="0">
-                <a:solidFill>
-                  <a:srgbClr val="13123A"/>
-                </a:solidFill>
-                <a:latin typeface="Calibri" pitchFamily="34" charset="0"/>
-                <a:ea typeface="Calibri" pitchFamily="34" charset="-122"/>
-                <a:cs typeface="Calibri" pitchFamily="34" charset="-120"/>
-              </a:rPr>
-              <a:t>Lần tải đầu của BGE-M3 nặng</a:t>
-            </a:r>
-            <a:endParaRPr lang="en-US" sz="1300" dirty="0"/>
-          </a:p>
-        </p:txBody>
-      </p:sp>
-      <p:sp>
-        <p:nvSpPr>
-          <p:cNvPr id="19" name="Text 16"/>
-          <p:cNvSpPr txBox="1"/>
-          <p:nvPr/>
-        </p:nvSpPr>
-        <p:spPr>
-          <a:xfrm>
-            <a:off x="6812280" y="4123944"/>
-            <a:ext cx="4617720" cy="960120"/>
-          </a:xfrm>
-          <a:prstGeom prst="rect">
-            <a:avLst/>
-          </a:prstGeom>
-          <a:noFill/>
-          <a:ln/>
-        </p:spPr>
-        <p:txBody>
-          <a:bodyPr wrap="square" lIns="0" tIns="0" rIns="0" bIns="0" rtlCol="0" anchor="ctr"/>
-          <a:lstStyle/>
-          <a:p>
-            <a:pPr indent="0" marL="0">
-              <a:buNone/>
-            </a:pPr>
-            <a:r>
-              <a:rPr lang="en-US" sz="1600" dirty="0">
-                <a:solidFill>
-                  <a:srgbClr val="4A4E63"/>
-                </a:solidFill>
-                <a:latin typeface="Calibri" pitchFamily="34" charset="0"/>
-                <a:ea typeface="Calibri" pitchFamily="34" charset="-122"/>
-                <a:cs typeface="Calibri" pitchFamily="34" charset="-120"/>
-              </a:rPr>
-              <a:t>Tải sẵn về máy, ghim phiên bản trong requirements.txt</a:t>
-            </a:r>
-            <a:endParaRPr lang="en-US" sz="1250" dirty="0"/>
-          </a:p>
-        </p:txBody>
-      </p:sp>
-      <p:sp>
-        <p:nvSpPr>
-          <p:cNvPr id="20" name="Shape 17"/>
-          <p:cNvSpPr/>
-          <p:nvPr/>
-        </p:nvSpPr>
-        <p:spPr>
-          <a:xfrm>
-            <a:off x="566928" y="5202936"/>
-            <a:ext cx="5943600" cy="960120"/>
-          </a:xfrm>
-          <a:prstGeom prst="rect">
-            <a:avLst/>
-          </a:prstGeom>
-          <a:solidFill>
-            <a:srgbClr val="F7F7FB"/>
-          </a:solidFill>
-          <a:ln w="12700">
-            <a:solidFill>
-              <a:srgbClr val="F7F7FB"/>
-            </a:solidFill>
-            <a:prstDash val="solid"/>
-          </a:ln>
-        </p:spPr>
-        <p:txBody>
-          <a:bodyPr/>
-          <a:p/>
-        </p:txBody>
-      </p:sp>
-      <p:sp>
-        <p:nvSpPr>
-          <p:cNvPr id="21" name="Shape 18"/>
-          <p:cNvSpPr/>
-          <p:nvPr/>
-        </p:nvSpPr>
-        <p:spPr>
-          <a:xfrm>
-            <a:off x="6620256" y="5202936"/>
-            <a:ext cx="4992624" cy="960120"/>
-          </a:xfrm>
-          <a:prstGeom prst="rect">
-            <a:avLst/>
-          </a:prstGeom>
-          <a:solidFill>
-            <a:srgbClr val="ECEBF7"/>
-          </a:solidFill>
-          <a:ln w="12700">
-            <a:solidFill>
-              <a:srgbClr val="ECEBF7"/>
-            </a:solidFill>
-            <a:prstDash val="solid"/>
-          </a:ln>
-        </p:spPr>
-        <p:txBody>
-          <a:bodyPr/>
-          <a:p/>
-        </p:txBody>
-      </p:sp>
-      <p:sp>
-        <p:nvSpPr>
-          <p:cNvPr id="22" name="Text 19"/>
-          <p:cNvSpPr txBox="1"/>
-          <p:nvPr/>
-        </p:nvSpPr>
-        <p:spPr>
-          <a:xfrm>
-            <a:off x="777240" y="5202936"/>
-            <a:ext cx="5532120" cy="960120"/>
-          </a:xfrm>
-          <a:prstGeom prst="rect">
-            <a:avLst/>
-          </a:prstGeom>
-          <a:noFill/>
-          <a:ln/>
-        </p:spPr>
-        <p:txBody>
-          <a:bodyPr wrap="square" lIns="0" tIns="0" rIns="0" bIns="0" rtlCol="0" anchor="ctr"/>
-          <a:lstStyle/>
-          <a:p>
-            <a:pPr indent="0" marL="0">
-              <a:buNone/>
-            </a:pPr>
-            <a:r>
-              <a:rPr lang="en-US" sz="1700" b="1" dirty="0">
-                <a:solidFill>
-                  <a:srgbClr val="13123A"/>
-                </a:solidFill>
-                <a:latin typeface="Calibri" pitchFamily="34" charset="0"/>
-                <a:ea typeface="Calibri" pitchFamily="34" charset="-122"/>
-                <a:cs typeface="Calibri" pitchFamily="34" charset="-120"/>
-              </a:rPr>
-              <a:t>Hai người cùng sửa một file</a:t>
-            </a:r>
-            <a:endParaRPr lang="en-US" sz="1300" dirty="0"/>
-          </a:p>
-        </p:txBody>
-      </p:sp>
-      <p:sp>
-        <p:nvSpPr>
-          <p:cNvPr id="23" name="Text 20"/>
-          <p:cNvSpPr txBox="1"/>
-          <p:nvPr/>
-        </p:nvSpPr>
-        <p:spPr>
-          <a:xfrm>
-            <a:off x="6812280" y="5202936"/>
-            <a:ext cx="4617720" cy="960120"/>
-          </a:xfrm>
-          <a:prstGeom prst="rect">
-            <a:avLst/>
-          </a:prstGeom>
-          <a:noFill/>
-          <a:ln/>
-        </p:spPr>
-        <p:txBody>
-          <a:bodyPr wrap="square" lIns="0" tIns="0" rIns="0" bIns="0" rtlCol="0" anchor="ctr"/>
-          <a:lstStyle/>
-          <a:p>
-            <a:pPr indent="0" marL="0">
-              <a:buNone/>
-            </a:pPr>
-            <a:r>
-              <a:rPr lang="en-US" sz="1600" dirty="0">
-                <a:solidFill>
-                  <a:srgbClr val="4A4E63"/>
-                </a:solidFill>
-                <a:latin typeface="Calibri" pitchFamily="34" charset="0"/>
-                <a:ea typeface="Calibri" pitchFamily="34" charset="-122"/>
-                <a:cs typeface="Calibri" pitchFamily="34" charset="-120"/>
-              </a:rPr>
-              <a:t>Kho ký ức và extractor ở hai thư mục riêng; giao diện là dataclass Fact đã cố định</a:t>
-            </a:r>
-            <a:endParaRPr lang="en-US" sz="1250" dirty="0"/>
-          </a:p>
-        </p:txBody>
-      </p:sp>
-    </p:spTree>
-  </p:cSld>
-  <p:clrMapOvr>
-    <a:masterClrMapping/>
-  </p:clrMapOvr>
-</p:sld>
-</file>
-
-<file path=ppt/slides/slide14.xml><?xml version="1.0" encoding="utf-8"?>
-<p:sld xmlns:a="http://schemas.openxmlformats.org/drawingml/2006/main" xmlns:p="http://schemas.openxmlformats.org/presentationml/2006/main" xmlns:r="http://schemas.openxmlformats.org/officeDocument/2006/relationships">
-  <p:cSld>
-    <p:bg>
-      <p:bgPr>
-        <a:solidFill>
-          <a:srgbClr val="FFFFFF"/>
-        </a:solidFill>
-        <a:effectLst/>
-      </p:bgPr>
-    </p:bg>
-    <p:spTree>
-      <p:nvGrpSpPr>
-        <p:cNvPr id="1" name=""/>
-        <p:cNvGrpSpPr/>
-        <p:nvPr/>
-      </p:nvGrpSpPr>
-      <p:grpSpPr/>
-      <p:sp>
-        <p:nvSpPr>
           <p:cNvPr id="2" name="TextBox 1"/>
           <p:cNvSpPr txBox="1"/>
           <p:nvPr/>
@@ -6652,7 +4997,7 @@
           <a:noFill/>
         </p:spPr>
         <p:txBody>
-          <a:bodyPr wrap="square" lIns="0" rIns="0" tIns="0" bIns="0" anchor="t">
+          <a:bodyPr wrap="square" lIns="0" tIns="0" rIns="0" bIns="0" anchor="t">
             <a:spAutoFit/>
           </a:bodyPr>
           <a:lstStyle/>
@@ -6686,7 +5031,7 @@
           <a:noFill/>
         </p:spPr>
         <p:txBody>
-          <a:bodyPr wrap="square" lIns="0" rIns="0" tIns="0" bIns="0" anchor="t">
+          <a:bodyPr wrap="square" lIns="0" tIns="0" rIns="0" bIns="0" anchor="t">
             <a:spAutoFit/>
           </a:bodyPr>
           <a:lstStyle/>
@@ -6720,7 +5065,7 @@
           <a:noFill/>
         </p:spPr>
         <p:txBody>
-          <a:bodyPr wrap="square" lIns="0" rIns="0" tIns="0" bIns="0" anchor="t">
+          <a:bodyPr wrap="square" lIns="0" tIns="0" rIns="0" bIns="0" anchor="t">
             <a:spAutoFit/>
           </a:bodyPr>
           <a:lstStyle/>
@@ -6778,6 +5123,7 @@
           <a:lstStyle/>
           <a:p>
             <a:pPr algn="ctr"/>
+            <a:endParaRPr/>
           </a:p>
         </p:txBody>
       </p:sp>
@@ -6822,6 +5168,7 @@
           <a:lstStyle/>
           <a:p>
             <a:pPr algn="ctr"/>
+            <a:endParaRPr/>
           </a:p>
         </p:txBody>
       </p:sp>
@@ -6842,7 +5189,7 @@
           <a:noFill/>
         </p:spPr>
         <p:txBody>
-          <a:bodyPr wrap="square" lIns="0" rIns="0" tIns="0" bIns="0" anchor="ctr">
+          <a:bodyPr wrap="square" lIns="0" tIns="0" rIns="0" bIns="0" anchor="ctr">
             <a:spAutoFit/>
           </a:bodyPr>
           <a:lstStyle/>
@@ -6877,7 +5224,7 @@
           <a:noFill/>
         </p:spPr>
         <p:txBody>
-          <a:bodyPr wrap="square" lIns="0" rIns="0" tIns="0" bIns="0" anchor="ctr">
+          <a:bodyPr wrap="square" lIns="0" tIns="0" rIns="0" bIns="0" anchor="ctr">
             <a:spAutoFit/>
           </a:bodyPr>
           <a:lstStyle/>
@@ -6911,7 +5258,7 @@
           <a:noFill/>
         </p:spPr>
         <p:txBody>
-          <a:bodyPr wrap="square" lIns="0" rIns="0" tIns="0" bIns="0" anchor="t">
+          <a:bodyPr wrap="square" lIns="0" tIns="0" rIns="0" bIns="0" anchor="t">
             <a:spAutoFit/>
           </a:bodyPr>
           <a:lstStyle/>
@@ -6969,6 +5316,7 @@
           <a:lstStyle/>
           <a:p>
             <a:pPr algn="ctr"/>
+            <a:endParaRPr/>
           </a:p>
         </p:txBody>
       </p:sp>
@@ -7013,6 +5361,7 @@
           <a:lstStyle/>
           <a:p>
             <a:pPr algn="ctr"/>
+            <a:endParaRPr/>
           </a:p>
         </p:txBody>
       </p:sp>
@@ -7033,7 +5382,7 @@
           <a:noFill/>
         </p:spPr>
         <p:txBody>
-          <a:bodyPr wrap="square" lIns="0" rIns="0" tIns="0" bIns="0" anchor="ctr">
+          <a:bodyPr wrap="square" lIns="0" tIns="0" rIns="0" bIns="0" anchor="ctr">
             <a:spAutoFit/>
           </a:bodyPr>
           <a:lstStyle/>
@@ -7068,7 +5417,7 @@
           <a:noFill/>
         </p:spPr>
         <p:txBody>
-          <a:bodyPr wrap="square" lIns="0" rIns="0" tIns="0" bIns="0" anchor="ctr">
+          <a:bodyPr wrap="square" lIns="0" tIns="0" rIns="0" bIns="0" anchor="ctr">
             <a:spAutoFit/>
           </a:bodyPr>
           <a:lstStyle/>
@@ -7102,7 +5451,7 @@
           <a:noFill/>
         </p:spPr>
         <p:txBody>
-          <a:bodyPr wrap="square" lIns="0" rIns="0" tIns="0" bIns="0" anchor="t">
+          <a:bodyPr wrap="square" lIns="0" tIns="0" rIns="0" bIns="0" anchor="t">
             <a:spAutoFit/>
           </a:bodyPr>
           <a:lstStyle/>
@@ -7160,6 +5509,7 @@
           <a:lstStyle/>
           <a:p>
             <a:pPr algn="ctr"/>
+            <a:endParaRPr/>
           </a:p>
         </p:txBody>
       </p:sp>
@@ -7204,6 +5554,7 @@
           <a:lstStyle/>
           <a:p>
             <a:pPr algn="ctr"/>
+            <a:endParaRPr/>
           </a:p>
         </p:txBody>
       </p:sp>
@@ -7224,7 +5575,7 @@
           <a:noFill/>
         </p:spPr>
         <p:txBody>
-          <a:bodyPr wrap="square" lIns="0" rIns="0" tIns="0" bIns="0" anchor="ctr">
+          <a:bodyPr wrap="square" lIns="0" tIns="0" rIns="0" bIns="0" anchor="ctr">
             <a:spAutoFit/>
           </a:bodyPr>
           <a:lstStyle/>
@@ -7259,7 +5610,7 @@
           <a:noFill/>
         </p:spPr>
         <p:txBody>
-          <a:bodyPr wrap="square" lIns="0" rIns="0" tIns="0" bIns="0" anchor="ctr">
+          <a:bodyPr wrap="square" lIns="0" tIns="0" rIns="0" bIns="0" anchor="ctr">
             <a:spAutoFit/>
           </a:bodyPr>
           <a:lstStyle/>
@@ -7293,7 +5644,7 @@
           <a:noFill/>
         </p:spPr>
         <p:txBody>
-          <a:bodyPr wrap="square" lIns="0" rIns="0" tIns="0" bIns="0" anchor="t">
+          <a:bodyPr wrap="square" lIns="0" tIns="0" rIns="0" bIns="0" anchor="t">
             <a:spAutoFit/>
           </a:bodyPr>
           <a:lstStyle/>
@@ -7351,6 +5702,7 @@
           <a:lstStyle/>
           <a:p>
             <a:pPr algn="ctr"/>
+            <a:endParaRPr/>
           </a:p>
         </p:txBody>
       </p:sp>
@@ -7395,6 +5747,7 @@
           <a:lstStyle/>
           <a:p>
             <a:pPr algn="ctr"/>
+            <a:endParaRPr/>
           </a:p>
         </p:txBody>
       </p:sp>
@@ -7415,7 +5768,7 @@
           <a:noFill/>
         </p:spPr>
         <p:txBody>
-          <a:bodyPr wrap="square" lIns="0" rIns="0" tIns="0" bIns="0" anchor="ctr">
+          <a:bodyPr wrap="square" lIns="0" tIns="0" rIns="0" bIns="0" anchor="ctr">
             <a:spAutoFit/>
           </a:bodyPr>
           <a:lstStyle/>
@@ -7450,7 +5803,7 @@
           <a:noFill/>
         </p:spPr>
         <p:txBody>
-          <a:bodyPr wrap="square" lIns="0" rIns="0" tIns="0" bIns="0" anchor="ctr">
+          <a:bodyPr wrap="square" lIns="0" tIns="0" rIns="0" bIns="0" anchor="ctr">
             <a:spAutoFit/>
           </a:bodyPr>
           <a:lstStyle/>
@@ -7508,6 +5861,7 @@
           <a:lstStyle/>
           <a:p>
             <a:pPr algn="ctr"/>
+            <a:endParaRPr/>
           </a:p>
         </p:txBody>
       </p:sp>
@@ -7552,6 +5906,7 @@
           <a:lstStyle/>
           <a:p>
             <a:pPr algn="ctr"/>
+            <a:endParaRPr/>
           </a:p>
         </p:txBody>
       </p:sp>
@@ -7572,7 +5927,7 @@
           <a:noFill/>
         </p:spPr>
         <p:txBody>
-          <a:bodyPr wrap="square" lIns="0" rIns="0" tIns="0" bIns="0" anchor="ctr">
+          <a:bodyPr wrap="square" lIns="0" tIns="0" rIns="0" bIns="0" anchor="ctr">
             <a:spAutoFit/>
           </a:bodyPr>
           <a:lstStyle/>
@@ -7607,7 +5962,7 @@
           <a:noFill/>
         </p:spPr>
         <p:txBody>
-          <a:bodyPr wrap="square" lIns="0" rIns="0" tIns="0" bIns="0" anchor="ctr">
+          <a:bodyPr wrap="square" lIns="0" tIns="0" rIns="0" bIns="0" anchor="ctr">
             <a:spAutoFit/>
           </a:bodyPr>
           <a:lstStyle/>
@@ -7665,6 +6020,7 @@
           <a:lstStyle/>
           <a:p>
             <a:pPr algn="ctr"/>
+            <a:endParaRPr/>
           </a:p>
         </p:txBody>
       </p:sp>
@@ -7709,6 +6065,7 @@
           <a:lstStyle/>
           <a:p>
             <a:pPr algn="ctr"/>
+            <a:endParaRPr/>
           </a:p>
         </p:txBody>
       </p:sp>
@@ -7729,7 +6086,7 @@
           <a:noFill/>
         </p:spPr>
         <p:txBody>
-          <a:bodyPr wrap="square" lIns="0" rIns="0" tIns="0" bIns="0" anchor="ctr">
+          <a:bodyPr wrap="square" lIns="0" tIns="0" rIns="0" bIns="0" anchor="ctr">
             <a:spAutoFit/>
           </a:bodyPr>
           <a:lstStyle/>
@@ -7764,7 +6121,7 @@
           <a:noFill/>
         </p:spPr>
         <p:txBody>
-          <a:bodyPr wrap="square" lIns="0" rIns="0" tIns="0" bIns="0" anchor="ctr">
+          <a:bodyPr wrap="square" lIns="0" tIns="0" rIns="0" bIns="0" anchor="ctr">
             <a:spAutoFit/>
           </a:bodyPr>
           <a:lstStyle/>
@@ -7822,6 +6179,7 @@
           <a:lstStyle/>
           <a:p>
             <a:pPr algn="ctr"/>
+            <a:endParaRPr/>
           </a:p>
         </p:txBody>
       </p:sp>
@@ -7866,6 +6224,7 @@
           <a:lstStyle/>
           <a:p>
             <a:pPr algn="ctr"/>
+            <a:endParaRPr/>
           </a:p>
         </p:txBody>
       </p:sp>
@@ -7886,7 +6245,7 @@
           <a:noFill/>
         </p:spPr>
         <p:txBody>
-          <a:bodyPr wrap="square" lIns="0" rIns="0" tIns="0" bIns="0" anchor="ctr">
+          <a:bodyPr wrap="square" lIns="0" tIns="0" rIns="0" bIns="0" anchor="ctr">
             <a:spAutoFit/>
           </a:bodyPr>
           <a:lstStyle/>
@@ -7921,7 +6280,7 @@
           <a:noFill/>
         </p:spPr>
         <p:txBody>
-          <a:bodyPr wrap="square" lIns="0" rIns="0" tIns="0" bIns="0" anchor="ctr">
+          <a:bodyPr wrap="square" lIns="0" tIns="0" rIns="0" bIns="0" anchor="ctr">
             <a:spAutoFit/>
           </a:bodyPr>
           <a:lstStyle/>
@@ -7979,6 +6338,7 @@
           <a:lstStyle/>
           <a:p>
             <a:pPr algn="ctr"/>
+            <a:endParaRPr/>
           </a:p>
         </p:txBody>
       </p:sp>
@@ -8023,6 +6383,7 @@
           <a:lstStyle/>
           <a:p>
             <a:pPr algn="ctr"/>
+            <a:endParaRPr/>
           </a:p>
         </p:txBody>
       </p:sp>
@@ -8043,7 +6404,7 @@
           <a:noFill/>
         </p:spPr>
         <p:txBody>
-          <a:bodyPr wrap="square" lIns="0" rIns="0" tIns="0" bIns="0" anchor="ctr">
+          <a:bodyPr wrap="square" lIns="0" tIns="0" rIns="0" bIns="0" anchor="ctr">
             <a:spAutoFit/>
           </a:bodyPr>
           <a:lstStyle/>
@@ -8078,7 +6439,7 @@
           <a:noFill/>
         </p:spPr>
         <p:txBody>
-          <a:bodyPr wrap="square" lIns="0" rIns="0" tIns="0" bIns="0" anchor="ctr">
+          <a:bodyPr wrap="square" lIns="0" tIns="0" rIns="0" bIns="0" anchor="ctr">
             <a:spAutoFit/>
           </a:bodyPr>
           <a:lstStyle/>
@@ -8103,7 +6464,7 @@
 </p:sld>
 </file>
 
-<file path=ppt/slides/slide15.xml><?xml version="1.0" encoding="utf-8"?>
+<file path=ppt/slides/slide14.xml><?xml version="1.0" encoding="utf-8"?>
 <p:sld xmlns:a="http://schemas.openxmlformats.org/drawingml/2006/main" xmlns:r="http://schemas.openxmlformats.org/officeDocument/2006/relationships" xmlns:p="http://schemas.openxmlformats.org/presentationml/2006/main">
   <p:cSld name="Slide 11">
     <p:bg>
@@ -8111,6 +6472,7 @@
         <a:solidFill>
           <a:srgbClr val="FFFFFF"/>
         </a:solidFill>
+        <a:effectLst/>
       </p:bgPr>
     </p:bg>
     <p:spTree>
@@ -8148,7 +6510,7 @@
           <a:bodyPr wrap="square" lIns="0" tIns="0" rIns="0" bIns="0" rtlCol="0" anchor="t"/>
           <a:lstStyle/>
           <a:p>
-            <a:pPr indent="0" marL="0">
+            <a:pPr marL="0" indent="0">
               <a:buNone/>
             </a:pPr>
             <a:r>
@@ -8187,7 +6549,7 @@
           <a:bodyPr wrap="square" lIns="0" tIns="0" rIns="0" bIns="0" rtlCol="0" anchor="t"/>
           <a:lstStyle/>
           <a:p>
-            <a:pPr indent="0" marL="0">
+            <a:pPr marL="0" indent="0">
               <a:buNone/>
             </a:pPr>
             <a:r>
@@ -8231,7 +6593,10 @@
         </p:spPr>
         <p:txBody>
           <a:bodyPr/>
-          <a:p/>
+          <a:lstStyle/>
+          <a:p>
+            <a:endParaRPr/>
+          </a:p>
         </p:txBody>
       </p:sp>
       <p:sp>
@@ -8255,7 +6620,7 @@
           <a:bodyPr wrap="square" lIns="0" tIns="0" rIns="0" bIns="0" rtlCol="0" anchor="t"/>
           <a:lstStyle/>
           <a:p>
-            <a:pPr indent="0" marL="0">
+            <a:pPr marL="0" indent="0">
               <a:buNone/>
             </a:pPr>
             <a:r>
@@ -8393,7 +6758,10 @@
         </p:spPr>
         <p:txBody>
           <a:bodyPr/>
-          <a:p/>
+          <a:lstStyle/>
+          <a:p>
+            <a:endParaRPr/>
+          </a:p>
         </p:txBody>
       </p:sp>
       <p:sp>
@@ -8417,7 +6785,7 @@
           <a:bodyPr wrap="square" lIns="0" tIns="0" rIns="0" bIns="0" rtlCol="0" anchor="t"/>
           <a:lstStyle/>
           <a:p>
-            <a:pPr indent="0" marL="0">
+            <a:pPr marL="0" indent="0">
               <a:buNone/>
             </a:pPr>
             <a:r>
@@ -8545,6 +6913,7 @@
         <a:solidFill>
           <a:srgbClr val="FFFFFF"/>
         </a:solidFill>
+        <a:effectLst/>
       </p:bgPr>
     </p:bg>
     <p:spTree>
@@ -8582,7 +6951,7 @@
           <a:bodyPr wrap="square" lIns="0" tIns="0" rIns="0" bIns="0" rtlCol="0" anchor="t"/>
           <a:lstStyle/>
           <a:p>
-            <a:pPr indent="0" marL="0">
+            <a:pPr marL="0" indent="0">
               <a:buNone/>
             </a:pPr>
             <a:r>
@@ -8621,7 +6990,7 @@
           <a:bodyPr wrap="square" lIns="0" tIns="0" rIns="0" bIns="0" rtlCol="0" anchor="t"/>
           <a:lstStyle/>
           <a:p>
-            <a:pPr indent="0" marL="0">
+            <a:pPr marL="0" indent="0">
               <a:buNone/>
             </a:pPr>
             <a:r>
@@ -8660,7 +7029,7 @@
           <a:bodyPr wrap="square" lIns="0" tIns="0" rIns="0" bIns="0" rtlCol="0" anchor="t"/>
           <a:lstStyle/>
           <a:p>
-            <a:pPr indent="0" marL="0">
+            <a:pPr marL="0" indent="0">
               <a:buNone/>
             </a:pPr>
             <a:r>
@@ -8704,7 +7073,10 @@
         </p:spPr>
         <p:txBody>
           <a:bodyPr/>
-          <a:p/>
+          <a:lstStyle/>
+          <a:p>
+            <a:endParaRPr/>
+          </a:p>
         </p:txBody>
       </p:sp>
       <p:sp>
@@ -8728,7 +7100,7 @@
           <a:bodyPr wrap="square" lIns="0" tIns="0" rIns="0" bIns="0" rtlCol="0" anchor="ctr"/>
           <a:lstStyle/>
           <a:p>
-            <a:pPr indent="0" marL="0">
+            <a:pPr marL="0" indent="0">
               <a:buNone/>
             </a:pPr>
             <a:r>
@@ -8767,7 +7139,7 @@
           <a:bodyPr wrap="square" lIns="0" tIns="0" rIns="0" bIns="0" rtlCol="0" anchor="ctr"/>
           <a:lstStyle/>
           <a:p>
-            <a:pPr indent="0" marL="0">
+            <a:pPr marL="0" indent="0">
               <a:buNone/>
             </a:pPr>
             <a:r>
@@ -8811,7 +7183,10 @@
         </p:spPr>
         <p:txBody>
           <a:bodyPr/>
-          <a:p/>
+          <a:lstStyle/>
+          <a:p>
+            <a:endParaRPr/>
+          </a:p>
         </p:txBody>
       </p:sp>
       <p:sp>
@@ -8835,7 +7210,7 @@
           <a:bodyPr wrap="square" lIns="0" tIns="0" rIns="0" bIns="0" rtlCol="0" anchor="ctr"/>
           <a:lstStyle/>
           <a:p>
-            <a:pPr indent="0" marL="0">
+            <a:pPr marL="0" indent="0">
               <a:buNone/>
             </a:pPr>
             <a:r>
@@ -8874,7 +7249,7 @@
           <a:bodyPr wrap="square" lIns="0" tIns="0" rIns="0" bIns="0" rtlCol="0" anchor="ctr"/>
           <a:lstStyle/>
           <a:p>
-            <a:pPr indent="0" marL="0">
+            <a:pPr marL="0" indent="0">
               <a:buNone/>
             </a:pPr>
             <a:r>
@@ -8918,7 +7293,10 @@
         </p:spPr>
         <p:txBody>
           <a:bodyPr/>
-          <a:p/>
+          <a:lstStyle/>
+          <a:p>
+            <a:endParaRPr/>
+          </a:p>
         </p:txBody>
       </p:sp>
       <p:sp>
@@ -8942,7 +7320,7 @@
           <a:bodyPr wrap="square" lIns="0" tIns="0" rIns="0" bIns="0" rtlCol="0" anchor="ctr"/>
           <a:lstStyle/>
           <a:p>
-            <a:pPr indent="0" marL="0">
+            <a:pPr marL="0" indent="0">
               <a:buNone/>
             </a:pPr>
             <a:r>
@@ -8981,7 +7359,7 @@
           <a:bodyPr wrap="square" lIns="0" tIns="0" rIns="0" bIns="0" rtlCol="0" anchor="ctr"/>
           <a:lstStyle/>
           <a:p>
-            <a:pPr indent="0" marL="0">
+            <a:pPr marL="0" indent="0">
               <a:buNone/>
             </a:pPr>
             <a:r>
@@ -9025,7 +7403,10 @@
         </p:spPr>
         <p:txBody>
           <a:bodyPr/>
-          <a:p/>
+          <a:lstStyle/>
+          <a:p>
+            <a:endParaRPr/>
+          </a:p>
         </p:txBody>
       </p:sp>
       <p:sp>
@@ -9049,7 +7430,7 @@
           <a:bodyPr wrap="square" lIns="0" tIns="0" rIns="0" bIns="0" rtlCol="0" anchor="ctr"/>
           <a:lstStyle/>
           <a:p>
-            <a:pPr indent="0" marL="0">
+            <a:pPr marL="0" indent="0">
               <a:buNone/>
             </a:pPr>
             <a:r>
@@ -9088,7 +7469,7 @@
           <a:bodyPr wrap="square" lIns="0" tIns="0" rIns="0" bIns="0" rtlCol="0" anchor="ctr"/>
           <a:lstStyle/>
           <a:p>
-            <a:pPr indent="0" marL="0">
+            <a:pPr marL="0" indent="0">
               <a:buNone/>
             </a:pPr>
             <a:r>
@@ -9132,7 +7513,10 @@
         </p:spPr>
         <p:txBody>
           <a:bodyPr/>
-          <a:p/>
+          <a:lstStyle/>
+          <a:p>
+            <a:endParaRPr/>
+          </a:p>
         </p:txBody>
       </p:sp>
       <p:sp>
@@ -9156,7 +7540,7 @@
           <a:bodyPr wrap="square" lIns="0" tIns="0" rIns="0" bIns="0" rtlCol="0" anchor="ctr"/>
           <a:lstStyle/>
           <a:p>
-            <a:pPr indent="0" marL="0">
+            <a:pPr marL="0" indent="0">
               <a:buNone/>
             </a:pPr>
             <a:r>
@@ -9195,7 +7579,7 @@
           <a:bodyPr wrap="square" lIns="0" tIns="0" rIns="0" bIns="0" rtlCol="0" anchor="ctr"/>
           <a:lstStyle/>
           <a:p>
-            <a:pPr indent="0" marL="0">
+            <a:pPr marL="0" indent="0">
               <a:buNone/>
             </a:pPr>
             <a:r>
@@ -9239,7 +7623,10 @@
         </p:spPr>
         <p:txBody>
           <a:bodyPr/>
-          <a:p/>
+          <a:lstStyle/>
+          <a:p>
+            <a:endParaRPr/>
+          </a:p>
         </p:txBody>
       </p:sp>
       <p:sp>
@@ -9263,7 +7650,7 @@
           <a:bodyPr wrap="square" lIns="0" tIns="0" rIns="0" bIns="0" rtlCol="0" anchor="ctr"/>
           <a:lstStyle/>
           <a:p>
-            <a:pPr indent="0" marL="0">
+            <a:pPr marL="0" indent="0">
               <a:buNone/>
             </a:pPr>
             <a:r>
@@ -9302,7 +7689,7 @@
           <a:bodyPr wrap="square" lIns="0" tIns="0" rIns="0" bIns="0" rtlCol="0" anchor="ctr"/>
           <a:lstStyle/>
           <a:p>
-            <a:pPr indent="0" marL="0">
+            <a:pPr marL="0" indent="0">
               <a:buNone/>
             </a:pPr>
             <a:r>
@@ -9346,7 +7733,10 @@
         </p:spPr>
         <p:txBody>
           <a:bodyPr/>
-          <a:p/>
+          <a:lstStyle/>
+          <a:p>
+            <a:endParaRPr/>
+          </a:p>
         </p:txBody>
       </p:sp>
       <p:sp>
@@ -9370,7 +7760,7 @@
           <a:bodyPr wrap="square" lIns="0" tIns="0" rIns="0" bIns="0" rtlCol="0" anchor="ctr"/>
           <a:lstStyle/>
           <a:p>
-            <a:pPr indent="0" marL="0">
+            <a:pPr marL="0" indent="0">
               <a:buNone/>
             </a:pPr>
             <a:r>
@@ -9409,7 +7799,7 @@
           <a:bodyPr wrap="square" lIns="0" tIns="0" rIns="0" bIns="0" rtlCol="0" anchor="ctr"/>
           <a:lstStyle/>
           <a:p>
-            <a:pPr indent="0" marL="0">
+            <a:pPr marL="0" indent="0">
               <a:buNone/>
             </a:pPr>
             <a:r>
@@ -9453,7 +7843,10 @@
         </p:spPr>
         <p:txBody>
           <a:bodyPr/>
-          <a:p/>
+          <a:lstStyle/>
+          <a:p>
+            <a:endParaRPr/>
+          </a:p>
         </p:txBody>
       </p:sp>
       <p:sp>
@@ -9477,7 +7870,7 @@
           <a:bodyPr wrap="square" lIns="0" tIns="0" rIns="0" bIns="0" rtlCol="0" anchor="t"/>
           <a:lstStyle/>
           <a:p>
-            <a:pPr indent="0" marL="0">
+            <a:pPr marL="0" indent="0">
               <a:buNone/>
             </a:pPr>
             <a:r>
@@ -9516,7 +7909,7 @@
           <a:bodyPr wrap="square" lIns="0" tIns="0" rIns="0" bIns="0" rtlCol="0" anchor="t"/>
           <a:lstStyle/>
           <a:p>
-            <a:pPr indent="0" marL="0">
+            <a:pPr marL="0" indent="0">
               <a:buNone/>
             </a:pPr>
             <a:r>
@@ -9543,7 +7936,7 @@
 </file>
 
 <file path=ppt/slides/slide3.xml><?xml version="1.0" encoding="utf-8"?>
-<p:sld xmlns:a="http://schemas.openxmlformats.org/drawingml/2006/main" xmlns:p="http://schemas.openxmlformats.org/presentationml/2006/main" xmlns:r="http://schemas.openxmlformats.org/officeDocument/2006/relationships">
+<p:sld xmlns:a="http://schemas.openxmlformats.org/drawingml/2006/main" xmlns:r="http://schemas.openxmlformats.org/officeDocument/2006/relationships" xmlns:p="http://schemas.openxmlformats.org/presentationml/2006/main">
   <p:cSld>
     <p:bg>
       <p:bgPr>
@@ -9559,7 +7952,14 @@
         <p:cNvGrpSpPr/>
         <p:nvPr/>
       </p:nvGrpSpPr>
-      <p:grpSpPr/>
+      <p:grpSpPr>
+        <a:xfrm>
+          <a:off x="0" y="0"/>
+          <a:ext cx="0" cy="0"/>
+          <a:chOff x="0" y="0"/>
+          <a:chExt cx="0" cy="0"/>
+        </a:xfrm>
+      </p:grpSpPr>
       <p:sp>
         <p:nvSpPr>
           <p:cNvPr id="2" name="TextBox 1"/>
@@ -9577,7 +7977,7 @@
           <a:noFill/>
         </p:spPr>
         <p:txBody>
-          <a:bodyPr wrap="square" lIns="0" rIns="0" tIns="0" bIns="0" anchor="t">
+          <a:bodyPr wrap="square" lIns="0" tIns="0" rIns="0" bIns="0" anchor="t">
             <a:spAutoFit/>
           </a:bodyPr>
           <a:lstStyle/>
@@ -9611,7 +8011,7 @@
           <a:noFill/>
         </p:spPr>
         <p:txBody>
-          <a:bodyPr wrap="square" lIns="0" rIns="0" tIns="0" bIns="0" anchor="t">
+          <a:bodyPr wrap="square" lIns="0" tIns="0" rIns="0" bIns="0" anchor="t">
             <a:spAutoFit/>
           </a:bodyPr>
           <a:lstStyle/>
@@ -9645,7 +8045,7 @@
           <a:noFill/>
         </p:spPr>
         <p:txBody>
-          <a:bodyPr wrap="square" lIns="0" rIns="0" tIns="0" bIns="0" anchor="t">
+          <a:bodyPr wrap="square" lIns="0" tIns="0" rIns="0" bIns="0" anchor="t">
             <a:spAutoFit/>
           </a:bodyPr>
           <a:lstStyle/>
@@ -9703,6 +8103,7 @@
           <a:lstStyle/>
           <a:p>
             <a:pPr algn="ctr"/>
+            <a:endParaRPr/>
           </a:p>
         </p:txBody>
       </p:sp>
@@ -9723,7 +8124,7 @@
           <a:noFill/>
         </p:spPr>
         <p:txBody>
-          <a:bodyPr wrap="square" lIns="0" rIns="0" tIns="0" bIns="0" anchor="t">
+          <a:bodyPr wrap="square" lIns="0" tIns="0" rIns="0" bIns="0" anchor="t">
             <a:spAutoFit/>
           </a:bodyPr>
           <a:lstStyle/>
@@ -9757,7 +8158,7 @@
           <a:noFill/>
         </p:spPr>
         <p:txBody>
-          <a:bodyPr wrap="square" lIns="0" rIns="0" tIns="0" bIns="0" anchor="t">
+          <a:bodyPr wrap="square" lIns="0" tIns="0" rIns="0" bIns="0" anchor="t">
             <a:spAutoFit/>
           </a:bodyPr>
           <a:lstStyle/>
@@ -9791,7 +8192,7 @@
           <a:noFill/>
         </p:spPr>
         <p:txBody>
-          <a:bodyPr wrap="square" lIns="0" rIns="0" tIns="0" bIns="0" anchor="t">
+          <a:bodyPr wrap="square" lIns="0" tIns="0" rIns="0" bIns="0" anchor="t">
             <a:spAutoFit/>
           </a:bodyPr>
           <a:lstStyle/>
@@ -9825,7 +8226,7 @@
           <a:noFill/>
         </p:spPr>
         <p:txBody>
-          <a:bodyPr wrap="square" lIns="0" rIns="0" tIns="0" bIns="0" anchor="t">
+          <a:bodyPr wrap="square" lIns="0" tIns="0" rIns="0" bIns="0" anchor="t">
             <a:spAutoFit/>
           </a:bodyPr>
           <a:lstStyle/>
@@ -9859,7 +8260,7 @@
           <a:noFill/>
         </p:spPr>
         <p:txBody>
-          <a:bodyPr wrap="square" lIns="0" rIns="0" tIns="0" bIns="0" anchor="t">
+          <a:bodyPr wrap="square" lIns="0" tIns="0" rIns="0" bIns="0" anchor="t">
             <a:spAutoFit/>
           </a:bodyPr>
           <a:lstStyle/>
@@ -9893,7 +8294,7 @@
           <a:noFill/>
         </p:spPr>
         <p:txBody>
-          <a:bodyPr wrap="square" lIns="0" rIns="0" tIns="0" bIns="0" anchor="t">
+          <a:bodyPr wrap="square" lIns="0" tIns="0" rIns="0" bIns="0" anchor="t">
             <a:spAutoFit/>
           </a:bodyPr>
           <a:lstStyle/>
@@ -9927,7 +8328,7 @@
           <a:noFill/>
         </p:spPr>
         <p:txBody>
-          <a:bodyPr wrap="square" lIns="0" rIns="0" tIns="0" bIns="0" anchor="t">
+          <a:bodyPr wrap="square" lIns="0" tIns="0" rIns="0" bIns="0" anchor="t">
             <a:spAutoFit/>
           </a:bodyPr>
           <a:lstStyle/>
@@ -9985,6 +8386,7 @@
           <a:lstStyle/>
           <a:p>
             <a:pPr algn="ctr"/>
+            <a:endParaRPr/>
           </a:p>
         </p:txBody>
       </p:sp>
@@ -10005,7 +8407,7 @@
           <a:noFill/>
         </p:spPr>
         <p:txBody>
-          <a:bodyPr wrap="square" lIns="0" rIns="0" tIns="0" bIns="0" anchor="ctr">
+          <a:bodyPr wrap="square" lIns="0" tIns="0" rIns="0" bIns="0" anchor="ctr">
             <a:spAutoFit/>
           </a:bodyPr>
           <a:lstStyle/>
@@ -10039,7 +8441,7 @@
           <a:noFill/>
         </p:spPr>
         <p:txBody>
-          <a:bodyPr wrap="square" lIns="0" rIns="0" tIns="0" bIns="0" anchor="ctr">
+          <a:bodyPr wrap="square" lIns="0" tIns="0" rIns="0" bIns="0" anchor="ctr">
             <a:spAutoFit/>
           </a:bodyPr>
           <a:lstStyle/>
@@ -10097,6 +8499,7 @@
           <a:lstStyle/>
           <a:p>
             <a:pPr algn="ctr"/>
+            <a:endParaRPr/>
           </a:p>
         </p:txBody>
       </p:sp>
@@ -10117,7 +8520,7 @@
           <a:noFill/>
         </p:spPr>
         <p:txBody>
-          <a:bodyPr wrap="square" lIns="0" rIns="0" tIns="0" bIns="0" anchor="ctr">
+          <a:bodyPr wrap="square" lIns="0" tIns="0" rIns="0" bIns="0" anchor="ctr">
             <a:spAutoFit/>
           </a:bodyPr>
           <a:lstStyle/>
@@ -10151,7 +8554,7 @@
           <a:noFill/>
         </p:spPr>
         <p:txBody>
-          <a:bodyPr wrap="square" lIns="0" rIns="0" tIns="0" bIns="0" anchor="ctr">
+          <a:bodyPr wrap="square" lIns="0" tIns="0" rIns="0" bIns="0" anchor="ctr">
             <a:spAutoFit/>
           </a:bodyPr>
           <a:lstStyle/>
@@ -10209,6 +8612,7 @@
           <a:lstStyle/>
           <a:p>
             <a:pPr algn="ctr"/>
+            <a:endParaRPr/>
           </a:p>
         </p:txBody>
       </p:sp>
@@ -10229,7 +8633,7 @@
           <a:noFill/>
         </p:spPr>
         <p:txBody>
-          <a:bodyPr wrap="square" lIns="0" rIns="0" tIns="0" bIns="0" anchor="ctr">
+          <a:bodyPr wrap="square" lIns="0" tIns="0" rIns="0" bIns="0" anchor="ctr">
             <a:spAutoFit/>
           </a:bodyPr>
           <a:lstStyle/>
@@ -10263,7 +8667,7 @@
           <a:noFill/>
         </p:spPr>
         <p:txBody>
-          <a:bodyPr wrap="square" lIns="0" rIns="0" tIns="0" bIns="0" anchor="ctr">
+          <a:bodyPr wrap="square" lIns="0" tIns="0" rIns="0" bIns="0" anchor="ctr">
             <a:spAutoFit/>
           </a:bodyPr>
           <a:lstStyle/>
@@ -10321,6 +8725,7 @@
           <a:lstStyle/>
           <a:p>
             <a:pPr algn="ctr"/>
+            <a:endParaRPr/>
           </a:p>
         </p:txBody>
       </p:sp>
@@ -10341,7 +8746,7 @@
           <a:noFill/>
         </p:spPr>
         <p:txBody>
-          <a:bodyPr wrap="square" lIns="0" rIns="0" tIns="0" bIns="0" anchor="ctr">
+          <a:bodyPr wrap="square" lIns="0" tIns="0" rIns="0" bIns="0" anchor="ctr">
             <a:spAutoFit/>
           </a:bodyPr>
           <a:lstStyle/>
@@ -10375,7 +8780,7 @@
           <a:noFill/>
         </p:spPr>
         <p:txBody>
-          <a:bodyPr wrap="square" lIns="0" rIns="0" tIns="0" bIns="0" anchor="ctr">
+          <a:bodyPr wrap="square" lIns="0" tIns="0" rIns="0" bIns="0" anchor="ctr">
             <a:spAutoFit/>
           </a:bodyPr>
           <a:lstStyle/>
@@ -10433,6 +8838,7 @@
           <a:lstStyle/>
           <a:p>
             <a:pPr algn="ctr"/>
+            <a:endParaRPr/>
           </a:p>
         </p:txBody>
       </p:sp>
@@ -10453,7 +8859,7 @@
           <a:noFill/>
         </p:spPr>
         <p:txBody>
-          <a:bodyPr wrap="square" lIns="0" rIns="0" tIns="0" bIns="0" anchor="ctr">
+          <a:bodyPr wrap="square" lIns="0" tIns="0" rIns="0" bIns="0" anchor="ctr">
             <a:spAutoFit/>
           </a:bodyPr>
           <a:lstStyle/>
@@ -10487,7 +8893,7 @@
           <a:noFill/>
         </p:spPr>
         <p:txBody>
-          <a:bodyPr wrap="square" lIns="0" rIns="0" tIns="0" bIns="0" anchor="ctr">
+          <a:bodyPr wrap="square" lIns="0" tIns="0" rIns="0" bIns="0" anchor="ctr">
             <a:spAutoFit/>
           </a:bodyPr>
           <a:lstStyle/>
@@ -10521,7 +8927,7 @@
           <a:noFill/>
         </p:spPr>
         <p:txBody>
-          <a:bodyPr wrap="square" lIns="0" rIns="0" tIns="0" bIns="0" anchor="t">
+          <a:bodyPr wrap="square" lIns="0" tIns="0" rIns="0" bIns="0" anchor="t">
             <a:spAutoFit/>
           </a:bodyPr>
           <a:lstStyle/>
@@ -10547,7 +8953,7 @@
 </file>
 
 <file path=ppt/slides/slide4.xml><?xml version="1.0" encoding="utf-8"?>
-<p:sld xmlns:a="http://schemas.openxmlformats.org/drawingml/2006/main" xmlns:p="http://schemas.openxmlformats.org/presentationml/2006/main" xmlns:r="http://schemas.openxmlformats.org/officeDocument/2006/relationships">
+<p:sld xmlns:a="http://schemas.openxmlformats.org/drawingml/2006/main" xmlns:r="http://schemas.openxmlformats.org/officeDocument/2006/relationships" xmlns:p="http://schemas.openxmlformats.org/presentationml/2006/main">
   <p:cSld>
     <p:bg>
       <p:bgPr>
@@ -10563,7 +8969,14 @@
         <p:cNvGrpSpPr/>
         <p:nvPr/>
       </p:nvGrpSpPr>
-      <p:grpSpPr/>
+      <p:grpSpPr>
+        <a:xfrm>
+          <a:off x="0" y="0"/>
+          <a:ext cx="0" cy="0"/>
+          <a:chOff x="0" y="0"/>
+          <a:chExt cx="0" cy="0"/>
+        </a:xfrm>
+      </p:grpSpPr>
       <p:sp>
         <p:nvSpPr>
           <p:cNvPr id="2" name="TextBox 1"/>
@@ -10581,7 +8994,7 @@
           <a:noFill/>
         </p:spPr>
         <p:txBody>
-          <a:bodyPr wrap="square" lIns="0" rIns="0" tIns="0" bIns="0" anchor="t">
+          <a:bodyPr wrap="square" lIns="0" tIns="0" rIns="0" bIns="0" anchor="t">
             <a:spAutoFit/>
           </a:bodyPr>
           <a:lstStyle/>
@@ -10615,7 +9028,7 @@
           <a:noFill/>
         </p:spPr>
         <p:txBody>
-          <a:bodyPr wrap="square" lIns="0" rIns="0" tIns="0" bIns="0" anchor="t">
+          <a:bodyPr wrap="square" lIns="0" tIns="0" rIns="0" bIns="0" anchor="t">
             <a:spAutoFit/>
           </a:bodyPr>
           <a:lstStyle/>
@@ -10649,7 +9062,7 @@
           <a:noFill/>
         </p:spPr>
         <p:txBody>
-          <a:bodyPr wrap="square" lIns="0" rIns="0" tIns="0" bIns="0" anchor="t">
+          <a:bodyPr wrap="square" lIns="0" tIns="0" rIns="0" bIns="0" anchor="t">
             <a:spAutoFit/>
           </a:bodyPr>
           <a:lstStyle/>
@@ -10683,7 +9096,7 @@
           <a:noFill/>
         </p:spPr>
         <p:txBody>
-          <a:bodyPr wrap="square" lIns="0" rIns="0" tIns="0" bIns="0" anchor="t">
+          <a:bodyPr wrap="square" lIns="0" tIns="0" rIns="0" bIns="0" anchor="t">
             <a:spAutoFit/>
           </a:bodyPr>
           <a:lstStyle/>
@@ -10709,7 +9122,7 @@
           <p:nvPr/>
         </p:nvPicPr>
         <p:blipFill>
-          <a:blip r:embed="rId6"/>
+          <a:blip r:embed="rId3"/>
           <a:stretch>
             <a:fillRect/>
           </a:stretch>
@@ -10741,7 +9154,7 @@
           <a:noFill/>
         </p:spPr>
         <p:txBody>
-          <a:bodyPr wrap="square" lIns="0" rIns="0" tIns="0" bIns="0" anchor="t">
+          <a:bodyPr wrap="square" lIns="0" tIns="0" rIns="0" bIns="0" anchor="t">
             <a:spAutoFit/>
           </a:bodyPr>
           <a:lstStyle/>
@@ -10799,7 +9212,7 @@
           <a:noFill/>
         </p:spPr>
         <p:txBody>
-          <a:bodyPr wrap="square" lIns="0" rIns="0" tIns="0" bIns="0" anchor="t">
+          <a:bodyPr wrap="square" lIns="0" tIns="0" rIns="0" bIns="0" anchor="t">
             <a:spAutoFit/>
           </a:bodyPr>
           <a:lstStyle/>
@@ -10833,7 +9246,7 @@
           <a:noFill/>
         </p:spPr>
         <p:txBody>
-          <a:bodyPr wrap="square" lIns="0" rIns="0" tIns="0" bIns="0" anchor="t">
+          <a:bodyPr wrap="square" lIns="0" tIns="0" rIns="0" bIns="0" anchor="t">
             <a:spAutoFit/>
           </a:bodyPr>
           <a:lstStyle/>
@@ -10859,7 +9272,7 @@
 </file>
 
 <file path=ppt/slides/slide5.xml><?xml version="1.0" encoding="utf-8"?>
-<p:sld xmlns:a="http://schemas.openxmlformats.org/drawingml/2006/main" xmlns:p="http://schemas.openxmlformats.org/presentationml/2006/main" xmlns:r="http://schemas.openxmlformats.org/officeDocument/2006/relationships">
+<p:sld xmlns:a="http://schemas.openxmlformats.org/drawingml/2006/main" xmlns:r="http://schemas.openxmlformats.org/officeDocument/2006/relationships" xmlns:p="http://schemas.openxmlformats.org/presentationml/2006/main">
   <p:cSld>
     <p:bg>
       <p:bgPr>
@@ -10875,7 +9288,14 @@
         <p:cNvGrpSpPr/>
         <p:nvPr/>
       </p:nvGrpSpPr>
-      <p:grpSpPr/>
+      <p:grpSpPr>
+        <a:xfrm>
+          <a:off x="0" y="0"/>
+          <a:ext cx="0" cy="0"/>
+          <a:chOff x="0" y="0"/>
+          <a:chExt cx="0" cy="0"/>
+        </a:xfrm>
+      </p:grpSpPr>
       <p:sp>
         <p:nvSpPr>
           <p:cNvPr id="2" name="TextBox 1"/>
@@ -10893,7 +9313,7 @@
           <a:noFill/>
         </p:spPr>
         <p:txBody>
-          <a:bodyPr wrap="square" lIns="0" rIns="0" tIns="0" bIns="0" anchor="t">
+          <a:bodyPr wrap="square" lIns="0" tIns="0" rIns="0" bIns="0" anchor="t">
             <a:spAutoFit/>
           </a:bodyPr>
           <a:lstStyle/>
@@ -10927,7 +9347,7 @@
           <a:noFill/>
         </p:spPr>
         <p:txBody>
-          <a:bodyPr wrap="square" lIns="0" rIns="0" tIns="0" bIns="0" anchor="t">
+          <a:bodyPr wrap="square" lIns="0" tIns="0" rIns="0" bIns="0" anchor="t">
             <a:spAutoFit/>
           </a:bodyPr>
           <a:lstStyle/>
@@ -10953,7 +9373,7 @@
           <p:nvPr/>
         </p:nvPicPr>
         <p:blipFill>
-          <a:blip r:embed="rId5"/>
+          <a:blip r:embed="rId3"/>
           <a:stretch>
             <a:fillRect/>
           </a:stretch>
@@ -10985,7 +9405,7 @@
           <a:noFill/>
         </p:spPr>
         <p:txBody>
-          <a:bodyPr wrap="square" lIns="0" rIns="0" tIns="0" bIns="0" anchor="t">
+          <a:bodyPr wrap="square" lIns="0" tIns="0" rIns="0" bIns="0" anchor="t">
             <a:spAutoFit/>
           </a:bodyPr>
           <a:lstStyle/>
@@ -11011,7 +9431,7 @@
           <p:nvPr/>
         </p:nvPicPr>
         <p:blipFill>
-          <a:blip r:embed="rId6"/>
+          <a:blip r:embed="rId4"/>
           <a:stretch>
             <a:fillRect/>
           </a:stretch>
@@ -11043,7 +9463,7 @@
           <a:noFill/>
         </p:spPr>
         <p:txBody>
-          <a:bodyPr wrap="square" lIns="0" rIns="0" tIns="0" bIns="0" anchor="t">
+          <a:bodyPr wrap="square" lIns="0" tIns="0" rIns="0" bIns="0" anchor="t">
             <a:spAutoFit/>
           </a:bodyPr>
           <a:lstStyle/>
@@ -11077,7 +9497,7 @@
           <a:noFill/>
         </p:spPr>
         <p:txBody>
-          <a:bodyPr wrap="square" lIns="0" rIns="0" tIns="0" bIns="0" anchor="t">
+          <a:bodyPr wrap="square" lIns="0" tIns="0" rIns="0" bIns="0" anchor="t">
             <a:spAutoFit/>
           </a:bodyPr>
           <a:lstStyle/>
@@ -11110,6 +9530,7 @@
         <a:solidFill>
           <a:srgbClr val="FFFFFF"/>
         </a:solidFill>
+        <a:effectLst/>
       </p:bgPr>
     </p:bg>
     <p:spTree>
@@ -11147,7 +9568,7 @@
           <a:bodyPr wrap="square" lIns="0" tIns="0" rIns="0" bIns="0" rtlCol="0" anchor="t"/>
           <a:lstStyle/>
           <a:p>
-            <a:pPr indent="0" marL="0">
+            <a:pPr marL="0" indent="0">
               <a:buNone/>
             </a:pPr>
             <a:r>
@@ -11186,7 +9607,7 @@
           <a:bodyPr wrap="square" lIns="0" tIns="0" rIns="0" bIns="0" rtlCol="0" anchor="t"/>
           <a:lstStyle/>
           <a:p>
-            <a:pPr indent="0" marL="0">
+            <a:pPr marL="0" indent="0">
               <a:buNone/>
             </a:pPr>
             <a:r>
@@ -11225,7 +9646,7 @@
           <a:bodyPr wrap="square" lIns="0" tIns="0" rIns="0" bIns="0" rtlCol="0" anchor="t"/>
           <a:lstStyle/>
           <a:p>
-            <a:pPr indent="0" marL="0">
+            <a:pPr marL="0" indent="0">
               <a:buNone/>
             </a:pPr>
             <a:r>
@@ -11269,7 +9690,10 @@
         </p:spPr>
         <p:txBody>
           <a:bodyPr/>
-          <a:p/>
+          <a:lstStyle/>
+          <a:p>
+            <a:endParaRPr/>
+          </a:p>
         </p:txBody>
       </p:sp>
       <p:sp>
@@ -11293,7 +9717,7 @@
           <a:bodyPr wrap="square" lIns="0" tIns="0" rIns="0" bIns="0" rtlCol="0" anchor="ctr"/>
           <a:lstStyle/>
           <a:p>
-            <a:pPr algn="ctr" indent="0" marL="0">
+            <a:pPr marL="0" indent="0" algn="ctr">
               <a:buNone/>
             </a:pPr>
             <a:r>
@@ -11337,7 +9761,10 @@
         </p:spPr>
         <p:txBody>
           <a:bodyPr/>
-          <a:p/>
+          <a:lstStyle/>
+          <a:p>
+            <a:endParaRPr/>
+          </a:p>
         </p:txBody>
       </p:sp>
       <p:sp>
@@ -11361,7 +9788,7 @@
           <a:bodyPr wrap="square" lIns="0" tIns="0" rIns="0" bIns="0" rtlCol="0" anchor="ctr"/>
           <a:lstStyle/>
           <a:p>
-            <a:pPr algn="ctr" indent="0" marL="0">
+            <a:pPr marL="0" indent="0" algn="ctr">
               <a:buNone/>
             </a:pPr>
             <a:r>
@@ -11405,7 +9832,10 @@
         </p:spPr>
         <p:txBody>
           <a:bodyPr/>
-          <a:p/>
+          <a:lstStyle/>
+          <a:p>
+            <a:endParaRPr/>
+          </a:p>
         </p:txBody>
       </p:sp>
       <p:sp>
@@ -11429,7 +9859,7 @@
           <a:bodyPr wrap="square" lIns="0" tIns="0" rIns="0" bIns="0" rtlCol="0" anchor="ctr"/>
           <a:lstStyle/>
           <a:p>
-            <a:pPr algn="ctr" indent="0" marL="0">
+            <a:pPr marL="0" indent="0" algn="ctr">
               <a:buNone/>
             </a:pPr>
             <a:r>
@@ -11473,7 +9903,10 @@
         </p:spPr>
         <p:txBody>
           <a:bodyPr/>
-          <a:p/>
+          <a:lstStyle/>
+          <a:p>
+            <a:endParaRPr/>
+          </a:p>
         </p:txBody>
       </p:sp>
       <p:sp>
@@ -11497,7 +9930,7 @@
           <a:bodyPr wrap="square" lIns="0" tIns="0" rIns="0" bIns="0" rtlCol="0" anchor="ctr"/>
           <a:lstStyle/>
           <a:p>
-            <a:pPr algn="ctr" indent="0" marL="0">
+            <a:pPr marL="0" indent="0" algn="ctr">
               <a:buNone/>
             </a:pPr>
             <a:r>
@@ -11541,7 +9974,10 @@
         </p:spPr>
         <p:txBody>
           <a:bodyPr/>
-          <a:p/>
+          <a:lstStyle/>
+          <a:p>
+            <a:endParaRPr/>
+          </a:p>
         </p:txBody>
       </p:sp>
       <p:sp>
@@ -11565,7 +10001,7 @@
           <a:bodyPr wrap="square" lIns="0" tIns="0" rIns="0" bIns="0" rtlCol="0" anchor="ctr"/>
           <a:lstStyle/>
           <a:p>
-            <a:pPr algn="ctr" indent="0" marL="0">
+            <a:pPr marL="0" indent="0" algn="ctr">
               <a:buNone/>
             </a:pPr>
             <a:r>
@@ -11609,7 +10045,10 @@
         </p:spPr>
         <p:txBody>
           <a:bodyPr/>
-          <a:p/>
+          <a:lstStyle/>
+          <a:p>
+            <a:endParaRPr/>
+          </a:p>
         </p:txBody>
       </p:sp>
       <p:sp>
@@ -11633,7 +10072,7 @@
           <a:bodyPr wrap="square" lIns="0" tIns="0" rIns="0" bIns="0" rtlCol="0" anchor="ctr"/>
           <a:lstStyle/>
           <a:p>
-            <a:pPr algn="ctr" indent="0" marL="0">
+            <a:pPr marL="0" indent="0" algn="ctr">
               <a:buNone/>
             </a:pPr>
             <a:r>
@@ -11677,7 +10116,10 @@
         </p:spPr>
         <p:txBody>
           <a:bodyPr/>
-          <a:p/>
+          <a:lstStyle/>
+          <a:p>
+            <a:endParaRPr/>
+          </a:p>
         </p:txBody>
       </p:sp>
       <p:sp>
@@ -11701,7 +10143,7 @@
           <a:bodyPr wrap="square" lIns="0" tIns="0" rIns="0" bIns="0" rtlCol="0" anchor="ctr"/>
           <a:lstStyle/>
           <a:p>
-            <a:pPr algn="ctr" indent="0" marL="0">
+            <a:pPr marL="0" indent="0" algn="ctr">
               <a:buNone/>
             </a:pPr>
             <a:r>
@@ -11740,7 +10182,7 @@
           <a:bodyPr wrap="square" lIns="0" tIns="0" rIns="0" bIns="0" rtlCol="0" anchor="t"/>
           <a:lstStyle/>
           <a:p>
-            <a:pPr indent="0" marL="0">
+            <a:pPr marL="0" indent="0">
               <a:buNone/>
             </a:pPr>
             <a:r>
@@ -11779,7 +10221,7 @@
           <a:bodyPr wrap="square" lIns="0" tIns="0" rIns="0" bIns="0" rtlCol="0" anchor="t"/>
           <a:lstStyle/>
           <a:p>
-            <a:pPr indent="0" marL="0">
+            <a:pPr marL="0" indent="0">
               <a:buNone/>
             </a:pPr>
             <a:r>
@@ -11823,7 +10265,10 @@
         </p:spPr>
         <p:txBody>
           <a:bodyPr/>
-          <a:p/>
+          <a:lstStyle/>
+          <a:p>
+            <a:endParaRPr/>
+          </a:p>
         </p:txBody>
       </p:sp>
       <p:sp>
@@ -11847,7 +10292,7 @@
           <a:bodyPr wrap="square" lIns="0" tIns="0" rIns="0" bIns="0" rtlCol="0" anchor="t"/>
           <a:lstStyle/>
           <a:p>
-            <a:pPr indent="0" marL="0">
+            <a:pPr marL="0" indent="0">
               <a:buNone/>
             </a:pPr>
             <a:r>
@@ -11891,7 +10336,10 @@
         </p:spPr>
         <p:txBody>
           <a:bodyPr/>
-          <a:p/>
+          <a:lstStyle/>
+          <a:p>
+            <a:endParaRPr/>
+          </a:p>
         </p:txBody>
       </p:sp>
       <p:sp>
@@ -11915,7 +10363,7 @@
           <a:bodyPr wrap="square" lIns="0" tIns="0" rIns="0" bIns="0" rtlCol="0" anchor="t"/>
           <a:lstStyle/>
           <a:p>
-            <a:pPr indent="0" marL="0">
+            <a:pPr marL="0" indent="0">
               <a:buNone/>
             </a:pPr>
             <a:r>
@@ -11954,7 +10402,7 @@
           <a:bodyPr wrap="square" lIns="0" tIns="0" rIns="0" bIns="0" rtlCol="0" anchor="t"/>
           <a:lstStyle/>
           <a:p>
-            <a:pPr indent="0" marL="0">
+            <a:pPr marL="0" indent="0">
               <a:buNone/>
             </a:pPr>
             <a:r>
@@ -11993,7 +10441,7 @@
           <a:bodyPr wrap="square" lIns="0" tIns="0" rIns="0" bIns="0" rtlCol="0" anchor="t"/>
           <a:lstStyle/>
           <a:p>
-            <a:pPr indent="0" marL="0">
+            <a:pPr marL="0" indent="0">
               <a:buNone/>
             </a:pPr>
             <a:r>
@@ -12037,7 +10485,10 @@
         </p:spPr>
         <p:txBody>
           <a:bodyPr/>
-          <a:p/>
+          <a:lstStyle/>
+          <a:p>
+            <a:endParaRPr/>
+          </a:p>
         </p:txBody>
       </p:sp>
       <p:sp>
@@ -12061,7 +10512,7 @@
           <a:bodyPr wrap="square" lIns="0" tIns="0" rIns="0" bIns="0" rtlCol="0" anchor="t"/>
           <a:lstStyle/>
           <a:p>
-            <a:pPr indent="0" marL="0">
+            <a:pPr marL="0" indent="0">
               <a:buNone/>
             </a:pPr>
             <a:r>
@@ -12100,7 +10551,7 @@
           <a:bodyPr wrap="square" lIns="0" tIns="0" rIns="0" bIns="0" rtlCol="0" anchor="t"/>
           <a:lstStyle/>
           <a:p>
-            <a:pPr indent="0" marL="0">
+            <a:pPr marL="0" indent="0">
               <a:buNone/>
             </a:pPr>
             <a:r>
@@ -12139,7 +10590,7 @@
           <a:bodyPr wrap="square" lIns="0" tIns="0" rIns="0" bIns="0" rtlCol="0" anchor="t"/>
           <a:lstStyle/>
           <a:p>
-            <a:pPr indent="0" marL="0">
+            <a:pPr marL="0" indent="0">
               <a:buNone/>
             </a:pPr>
             <a:r>
@@ -12183,7 +10634,10 @@
         </p:spPr>
         <p:txBody>
           <a:bodyPr/>
-          <a:p/>
+          <a:lstStyle/>
+          <a:p>
+            <a:endParaRPr/>
+          </a:p>
         </p:txBody>
       </p:sp>
       <p:sp>
@@ -12207,7 +10661,7 @@
           <a:bodyPr wrap="square" lIns="0" tIns="0" rIns="0" bIns="0" rtlCol="0" anchor="t"/>
           <a:lstStyle/>
           <a:p>
-            <a:pPr indent="0" marL="0">
+            <a:pPr marL="0" indent="0">
               <a:buNone/>
             </a:pPr>
             <a:r>
@@ -12246,7 +10700,7 @@
           <a:bodyPr wrap="square" lIns="0" tIns="0" rIns="0" bIns="0" rtlCol="0" anchor="t"/>
           <a:lstStyle/>
           <a:p>
-            <a:pPr indent="0" marL="0">
+            <a:pPr marL="0" indent="0">
               <a:buNone/>
             </a:pPr>
             <a:r>
@@ -12285,7 +10739,7 @@
           <a:bodyPr wrap="square" lIns="0" tIns="0" rIns="0" bIns="0" rtlCol="0" anchor="t"/>
           <a:lstStyle/>
           <a:p>
-            <a:pPr indent="0" marL="0">
+            <a:pPr marL="0" indent="0">
               <a:buNone/>
             </a:pPr>
             <a:r>
@@ -12324,7 +10778,7 @@
           <a:bodyPr wrap="square" lIns="0" tIns="0" rIns="0" bIns="0" rtlCol="0" anchor="t"/>
           <a:lstStyle/>
           <a:p>
-            <a:pPr indent="0" marL="0">
+            <a:pPr marL="0" indent="0">
               <a:buNone/>
             </a:pPr>
             <a:r>
@@ -12358,6 +10812,7 @@
         <a:solidFill>
           <a:srgbClr val="FFFFFF"/>
         </a:solidFill>
+        <a:effectLst/>
       </p:bgPr>
     </p:bg>
     <p:spTree>
@@ -12395,7 +10850,7 @@
           <a:bodyPr wrap="square" lIns="0" tIns="0" rIns="0" bIns="0" rtlCol="0" anchor="t"/>
           <a:lstStyle/>
           <a:p>
-            <a:pPr indent="0" marL="0">
+            <a:pPr marL="0" indent="0">
               <a:buNone/>
             </a:pPr>
             <a:r>
@@ -12434,7 +10889,7 @@
           <a:bodyPr wrap="square" lIns="0" tIns="0" rIns="0" bIns="0" rtlCol="0" anchor="t"/>
           <a:lstStyle/>
           <a:p>
-            <a:pPr indent="0" marL="0">
+            <a:pPr marL="0" indent="0">
               <a:buNone/>
             </a:pPr>
             <a:r>
@@ -12473,7 +10928,7 @@
           <a:bodyPr wrap="square" lIns="0" tIns="0" rIns="0" bIns="0" rtlCol="0" anchor="t"/>
           <a:lstStyle/>
           <a:p>
-            <a:pPr indent="0" marL="0">
+            <a:pPr marL="0" indent="0">
               <a:buNone/>
             </a:pPr>
             <a:r>
@@ -12517,7 +10972,10 @@
         </p:spPr>
         <p:txBody>
           <a:bodyPr/>
-          <a:p/>
+          <a:lstStyle/>
+          <a:p>
+            <a:endParaRPr/>
+          </a:p>
         </p:txBody>
       </p:sp>
       <p:sp>
@@ -12541,7 +10999,7 @@
           <a:bodyPr wrap="square" lIns="0" tIns="0" rIns="0" bIns="0" rtlCol="0" anchor="t"/>
           <a:lstStyle/>
           <a:p>
-            <a:pPr indent="0" marL="0">
+            <a:pPr marL="0" indent="0">
               <a:buNone/>
             </a:pPr>
             <a:r>
@@ -12580,7 +11038,7 @@
           <a:bodyPr wrap="square" lIns="0" tIns="0" rIns="0" bIns="0" rtlCol="0" anchor="t"/>
           <a:lstStyle/>
           <a:p>
-            <a:pPr indent="0" marL="0">
+            <a:pPr marL="0" indent="0">
               <a:buNone/>
             </a:pPr>
             <a:r>
@@ -12619,7 +11077,7 @@
           <a:bodyPr wrap="square" lIns="0" tIns="0" rIns="0" bIns="0" rtlCol="0" anchor="t"/>
           <a:lstStyle/>
           <a:p>
-            <a:pPr indent="0" marL="0">
+            <a:pPr marL="0" indent="0">
               <a:buNone/>
             </a:pPr>
             <a:r>
@@ -12663,7 +11121,10 @@
         </p:spPr>
         <p:txBody>
           <a:bodyPr/>
-          <a:p/>
+          <a:lstStyle/>
+          <a:p>
+            <a:endParaRPr/>
+          </a:p>
         </p:txBody>
       </p:sp>
       <p:sp>
@@ -12687,7 +11148,7 @@
           <a:bodyPr wrap="square" lIns="0" tIns="0" rIns="0" bIns="0" rtlCol="0" anchor="t"/>
           <a:lstStyle/>
           <a:p>
-            <a:pPr indent="0" marL="0">
+            <a:pPr marL="0" indent="0">
               <a:buNone/>
             </a:pPr>
             <a:r>
@@ -12726,7 +11187,7 @@
           <a:bodyPr wrap="square" lIns="0" tIns="0" rIns="0" bIns="0" rtlCol="0" anchor="t"/>
           <a:lstStyle/>
           <a:p>
-            <a:pPr indent="0" marL="0">
+            <a:pPr marL="0" indent="0">
               <a:buNone/>
             </a:pPr>
             <a:r>
@@ -12765,7 +11226,7 @@
           <a:bodyPr wrap="square" lIns="0" tIns="0" rIns="0" bIns="0" rtlCol="0" anchor="t"/>
           <a:lstStyle/>
           <a:p>
-            <a:pPr indent="0" marL="0">
+            <a:pPr marL="0" indent="0">
               <a:buNone/>
             </a:pPr>
             <a:r>
@@ -12809,7 +11270,10 @@
         </p:spPr>
         <p:txBody>
           <a:bodyPr/>
-          <a:p/>
+          <a:lstStyle/>
+          <a:p>
+            <a:endParaRPr/>
+          </a:p>
         </p:txBody>
       </p:sp>
       <p:sp>
@@ -12833,7 +11297,7 @@
           <a:bodyPr wrap="square" lIns="0" tIns="0" rIns="0" bIns="0" rtlCol="0" anchor="t"/>
           <a:lstStyle/>
           <a:p>
-            <a:pPr indent="0" marL="0">
+            <a:pPr marL="0" indent="0">
               <a:buNone/>
             </a:pPr>
             <a:r>
@@ -12872,7 +11336,7 @@
           <a:bodyPr wrap="square" lIns="0" tIns="0" rIns="0" bIns="0" rtlCol="0" anchor="t"/>
           <a:lstStyle/>
           <a:p>
-            <a:pPr indent="0" marL="0">
+            <a:pPr marL="0" indent="0">
               <a:buNone/>
             </a:pPr>
             <a:r>
@@ -12911,7 +11375,7 @@
           <a:bodyPr wrap="square" lIns="0" tIns="0" rIns="0" bIns="0" rtlCol="0" anchor="t"/>
           <a:lstStyle/>
           <a:p>
-            <a:pPr indent="0" marL="0">
+            <a:pPr marL="0" indent="0">
               <a:buNone/>
             </a:pPr>
             <a:r>
@@ -12955,7 +11419,10 @@
         </p:spPr>
         <p:txBody>
           <a:bodyPr/>
-          <a:p/>
+          <a:lstStyle/>
+          <a:p>
+            <a:endParaRPr/>
+          </a:p>
         </p:txBody>
       </p:sp>
       <p:sp>
@@ -12979,7 +11446,7 @@
           <a:bodyPr wrap="square" lIns="0" tIns="0" rIns="0" bIns="0" rtlCol="0" anchor="t"/>
           <a:lstStyle/>
           <a:p>
-            <a:pPr indent="0" marL="0">
+            <a:pPr marL="0" indent="0">
               <a:buNone/>
             </a:pPr>
             <a:r>
@@ -13018,7 +11485,7 @@
           <a:bodyPr wrap="square" lIns="0" tIns="0" rIns="0" bIns="0" rtlCol="0" anchor="t"/>
           <a:lstStyle/>
           <a:p>
-            <a:pPr indent="0" marL="0">
+            <a:pPr marL="0" indent="0">
               <a:buNone/>
             </a:pPr>
             <a:r>
@@ -13052,6 +11519,7 @@
         <a:solidFill>
           <a:srgbClr val="FFFFFF"/>
         </a:solidFill>
+        <a:effectLst/>
       </p:bgPr>
     </p:bg>
     <p:spTree>
@@ -13089,7 +11557,7 @@
           <a:bodyPr wrap="square" lIns="0" tIns="0" rIns="0" bIns="0" rtlCol="0" anchor="t"/>
           <a:lstStyle/>
           <a:p>
-            <a:pPr indent="0" marL="0">
+            <a:pPr marL="0" indent="0">
               <a:buNone/>
             </a:pPr>
             <a:r>
@@ -13128,7 +11596,7 @@
           <a:bodyPr wrap="square" lIns="0" tIns="0" rIns="0" bIns="0" rtlCol="0" anchor="t"/>
           <a:lstStyle/>
           <a:p>
-            <a:pPr indent="0" marL="0">
+            <a:pPr marL="0" indent="0">
               <a:buNone/>
             </a:pPr>
             <a:r>
@@ -13167,7 +11635,7 @@
           <a:bodyPr wrap="square" lIns="0" tIns="0" rIns="0" bIns="0" rtlCol="0" anchor="t"/>
           <a:lstStyle/>
           <a:p>
-            <a:pPr indent="0" marL="0">
+            <a:pPr marL="0" indent="0">
               <a:buNone/>
             </a:pPr>
             <a:r>
@@ -13211,7 +11679,10 @@
         </p:spPr>
         <p:txBody>
           <a:bodyPr/>
-          <a:p/>
+          <a:lstStyle/>
+          <a:p>
+            <a:endParaRPr/>
+          </a:p>
         </p:txBody>
       </p:sp>
       <p:sp>
@@ -13235,7 +11706,7 @@
           <a:bodyPr wrap="square" lIns="0" tIns="0" rIns="0" bIns="0" rtlCol="0" anchor="t"/>
           <a:lstStyle/>
           <a:p>
-            <a:pPr indent="0" marL="0">
+            <a:pPr marL="0" indent="0">
               <a:buNone/>
             </a:pPr>
             <a:r>
@@ -13274,7 +11745,7 @@
           <a:bodyPr wrap="square" lIns="0" tIns="0" rIns="0" bIns="0" rtlCol="0" anchor="t"/>
           <a:lstStyle/>
           <a:p>
-            <a:pPr indent="0" marL="0">
+            <a:pPr marL="0" indent="0">
               <a:buNone/>
             </a:pPr>
             <a:r>
@@ -13313,7 +11784,7 @@
           <a:bodyPr wrap="square" lIns="0" tIns="0" rIns="0" bIns="0" rtlCol="0" anchor="t"/>
           <a:lstStyle/>
           <a:p>
-            <a:pPr indent="0" marL="0">
+            <a:pPr marL="0" indent="0">
               <a:buNone/>
             </a:pPr>
             <a:r>
@@ -13352,7 +11823,7 @@
           <a:bodyPr wrap="square" lIns="0" tIns="0" rIns="0" bIns="0" rtlCol="0" anchor="t"/>
           <a:lstStyle/>
           <a:p>
-            <a:pPr indent="0" marL="0">
+            <a:pPr marL="0" indent="0">
               <a:buNone/>
             </a:pPr>
             <a:r>
@@ -13391,7 +11862,7 @@
           <a:bodyPr wrap="square" lIns="0" tIns="0" rIns="0" bIns="0" rtlCol="0" anchor="t"/>
           <a:lstStyle/>
           <a:p>
-            <a:pPr indent="0" marL="0">
+            <a:pPr marL="0" indent="0">
               <a:buNone/>
             </a:pPr>
             <a:r>
@@ -13435,7 +11906,10 @@
         </p:spPr>
         <p:txBody>
           <a:bodyPr/>
-          <a:p/>
+          <a:lstStyle/>
+          <a:p>
+            <a:endParaRPr/>
+          </a:p>
         </p:txBody>
       </p:sp>
       <p:sp>
@@ -13459,7 +11933,7 @@
           <a:bodyPr wrap="square" lIns="0" tIns="0" rIns="0" bIns="0" rtlCol="0" anchor="t"/>
           <a:lstStyle/>
           <a:p>
-            <a:pPr indent="0" marL="0">
+            <a:pPr marL="0" indent="0">
               <a:buNone/>
             </a:pPr>
             <a:r>
@@ -13498,7 +11972,7 @@
           <a:bodyPr wrap="square" lIns="0" tIns="0" rIns="0" bIns="0" rtlCol="0" anchor="t"/>
           <a:lstStyle/>
           <a:p>
-            <a:pPr indent="0" marL="0">
+            <a:pPr marL="0" indent="0">
               <a:buNone/>
             </a:pPr>
             <a:r>
@@ -13537,7 +12011,7 @@
           <a:bodyPr wrap="square" lIns="0" tIns="0" rIns="0" bIns="0" rtlCol="0" anchor="t"/>
           <a:lstStyle/>
           <a:p>
-            <a:pPr indent="0" marL="0">
+            <a:pPr marL="0" indent="0">
               <a:buNone/>
             </a:pPr>
             <a:r>
@@ -13576,7 +12050,7 @@
           <a:bodyPr wrap="square" lIns="0" tIns="0" rIns="0" bIns="0" rtlCol="0" anchor="t"/>
           <a:lstStyle/>
           <a:p>
-            <a:pPr indent="0" marL="0">
+            <a:pPr marL="0" indent="0">
               <a:buNone/>
             </a:pPr>
             <a:r>
@@ -13615,7 +12089,7 @@
           <a:bodyPr wrap="square" lIns="0" tIns="0" rIns="0" bIns="0" rtlCol="0" anchor="t"/>
           <a:lstStyle/>
           <a:p>
-            <a:pPr indent="0" marL="0">
+            <a:pPr marL="0" indent="0">
               <a:buNone/>
             </a:pPr>
             <a:r>
@@ -13659,7 +12133,10 @@
         </p:spPr>
         <p:txBody>
           <a:bodyPr/>
-          <a:p/>
+          <a:lstStyle/>
+          <a:p>
+            <a:endParaRPr/>
+          </a:p>
         </p:txBody>
       </p:sp>
       <p:sp>
@@ -13683,7 +12160,7 @@
           <a:bodyPr wrap="square" lIns="0" tIns="0" rIns="0" bIns="0" rtlCol="0" anchor="t"/>
           <a:lstStyle/>
           <a:p>
-            <a:pPr indent="0" marL="0">
+            <a:pPr marL="0" indent="0">
               <a:buNone/>
             </a:pPr>
             <a:r>
@@ -13722,7 +12199,7 @@
           <a:bodyPr wrap="square" lIns="0" tIns="0" rIns="0" bIns="0" rtlCol="0" anchor="t"/>
           <a:lstStyle/>
           <a:p>
-            <a:pPr indent="0" marL="0">
+            <a:pPr marL="0" indent="0">
               <a:buNone/>
             </a:pPr>
             <a:r>
@@ -13761,7 +12238,7 @@
           <a:bodyPr wrap="square" lIns="0" tIns="0" rIns="0" bIns="0" rtlCol="0" anchor="t"/>
           <a:lstStyle/>
           <a:p>
-            <a:pPr indent="0" marL="0">
+            <a:pPr marL="0" indent="0">
               <a:buNone/>
             </a:pPr>
             <a:r>
@@ -13800,7 +12277,7 @@
           <a:bodyPr wrap="square" lIns="0" tIns="0" rIns="0" bIns="0" rtlCol="0" anchor="t"/>
           <a:lstStyle/>
           <a:p>
-            <a:pPr indent="0" marL="0">
+            <a:pPr marL="0" indent="0">
               <a:buNone/>
             </a:pPr>
             <a:r>
@@ -13839,7 +12316,7 @@
           <a:bodyPr wrap="square" lIns="0" tIns="0" rIns="0" bIns="0" rtlCol="0" anchor="t"/>
           <a:lstStyle/>
           <a:p>
-            <a:pPr indent="0" marL="0">
+            <a:pPr marL="0" indent="0">
               <a:buNone/>
             </a:pPr>
             <a:r>
@@ -13883,7 +12360,10 @@
         </p:spPr>
         <p:txBody>
           <a:bodyPr/>
-          <a:p/>
+          <a:lstStyle/>
+          <a:p>
+            <a:endParaRPr/>
+          </a:p>
         </p:txBody>
       </p:sp>
       <p:sp>
@@ -13907,7 +12387,7 @@
           <a:bodyPr wrap="square" lIns="0" tIns="0" rIns="0" bIns="0" rtlCol="0" anchor="t"/>
           <a:lstStyle/>
           <a:p>
-            <a:pPr indent="0" marL="0">
+            <a:pPr marL="0" indent="0">
               <a:buNone/>
             </a:pPr>
             <a:r>
@@ -13946,7 +12426,7 @@
           <a:bodyPr wrap="square" lIns="0" tIns="0" rIns="0" bIns="0" rtlCol="0" anchor="t"/>
           <a:lstStyle/>
           <a:p>
-            <a:pPr indent="0" marL="0">
+            <a:pPr marL="0" indent="0">
               <a:buNone/>
             </a:pPr>
             <a:r>
@@ -13985,7 +12465,7 @@
           <a:bodyPr wrap="square" lIns="0" tIns="0" rIns="0" bIns="0" rtlCol="0" anchor="t"/>
           <a:lstStyle/>
           <a:p>
-            <a:pPr indent="0" marL="0">
+            <a:pPr marL="0" indent="0">
               <a:buNone/>
             </a:pPr>
             <a:r>
@@ -14024,7 +12504,7 @@
           <a:bodyPr wrap="square" lIns="0" tIns="0" rIns="0" bIns="0" rtlCol="0" anchor="t"/>
           <a:lstStyle/>
           <a:p>
-            <a:pPr indent="0" marL="0">
+            <a:pPr marL="0" indent="0">
               <a:buNone/>
             </a:pPr>
             <a:r>
@@ -14063,7 +12543,7 @@
           <a:bodyPr wrap="square" lIns="0" tIns="0" rIns="0" bIns="0" rtlCol="0" anchor="t"/>
           <a:lstStyle/>
           <a:p>
-            <a:pPr indent="0" marL="0">
+            <a:pPr marL="0" indent="0">
               <a:buNone/>
             </a:pPr>
             <a:r>
@@ -14097,6 +12577,7 @@
         <a:solidFill>
           <a:srgbClr val="FFFFFF"/>
         </a:solidFill>
+        <a:effectLst/>
       </p:bgPr>
     </p:bg>
     <p:spTree>
@@ -14134,7 +12615,7 @@
           <a:bodyPr wrap="square" lIns="0" tIns="0" rIns="0" bIns="0" rtlCol="0" anchor="t"/>
           <a:lstStyle/>
           <a:p>
-            <a:pPr indent="0" marL="0">
+            <a:pPr marL="0" indent="0">
               <a:buNone/>
             </a:pPr>
             <a:r>
@@ -14173,7 +12654,7 @@
           <a:bodyPr wrap="square" lIns="0" tIns="0" rIns="0" bIns="0" rtlCol="0" anchor="t"/>
           <a:lstStyle/>
           <a:p>
-            <a:pPr indent="0" marL="0">
+            <a:pPr marL="0" indent="0">
               <a:buNone/>
             </a:pPr>
             <a:r>
@@ -14212,7 +12693,7 @@
           <a:bodyPr wrap="square" lIns="0" tIns="0" rIns="0" bIns="0" rtlCol="0" anchor="t"/>
           <a:lstStyle/>
           <a:p>
-            <a:pPr indent="0" marL="0">
+            <a:pPr marL="0" indent="0">
               <a:buNone/>
             </a:pPr>
             <a:r>
@@ -14251,7 +12732,7 @@
           <a:bodyPr wrap="square" lIns="0" tIns="0" rIns="0" bIns="0" rtlCol="0" anchor="t"/>
           <a:lstStyle/>
           <a:p>
-            <a:pPr indent="0" marL="0">
+            <a:pPr marL="0" indent="0">
               <a:buNone/>
             </a:pPr>
             <a:r>
@@ -14295,7 +12776,10 @@
         </p:spPr>
         <p:txBody>
           <a:bodyPr/>
-          <a:p/>
+          <a:lstStyle/>
+          <a:p>
+            <a:endParaRPr/>
+          </a:p>
         </p:txBody>
       </p:sp>
       <p:sp>
@@ -14319,7 +12803,7 @@
           <a:bodyPr wrap="square" lIns="0" tIns="0" rIns="0" bIns="0" rtlCol="0" anchor="t"/>
           <a:lstStyle/>
           <a:p>
-            <a:pPr indent="0" marL="0">
+            <a:pPr marL="0" indent="0">
               <a:buNone/>
             </a:pPr>
             <a:r>
@@ -14336,7 +12820,7 @@
             <a:endParaRPr lang="en-US" sz="1300" dirty="0"/>
           </a:p>
           <a:p>
-            <a:pPr indent="0" marL="0">
+            <a:pPr marL="0" indent="0">
               <a:buNone/>
             </a:pPr>
             <a:r>
@@ -14353,7 +12837,7 @@
             <a:endParaRPr lang="en-US" sz="1300" dirty="0"/>
           </a:p>
           <a:p>
-            <a:pPr indent="0" marL="0">
+            <a:pPr marL="0" indent="0">
               <a:buNone/>
             </a:pPr>
             <a:r>
@@ -14370,7 +12854,7 @@
             <a:endParaRPr lang="en-US" sz="1300" dirty="0"/>
           </a:p>
           <a:p>
-            <a:pPr indent="0" marL="0">
+            <a:pPr marL="0" indent="0">
               <a:buNone/>
             </a:pPr>
             <a:r>
@@ -14387,7 +12871,7 @@
             <a:endParaRPr lang="en-US" sz="1300" dirty="0"/>
           </a:p>
           <a:p>
-            <a:pPr indent="0" marL="0">
+            <a:pPr marL="0" indent="0">
               <a:buNone/>
             </a:pPr>
             <a:r>
@@ -14426,7 +12910,7 @@
           <a:bodyPr wrap="square" lIns="0" tIns="0" rIns="0" bIns="0" rtlCol="0" anchor="t"/>
           <a:lstStyle/>
           <a:p>
-            <a:pPr indent="0" marL="0">
+            <a:pPr marL="0" indent="0">
               <a:buNone/>
             </a:pPr>
             <a:r>
@@ -14470,7 +12954,10 @@
         </p:spPr>
         <p:txBody>
           <a:bodyPr/>
-          <a:p/>
+          <a:lstStyle/>
+          <a:p>
+            <a:endParaRPr/>
+          </a:p>
         </p:txBody>
       </p:sp>
       <p:sp>
@@ -14494,7 +12981,7 @@
           <a:bodyPr wrap="square" lIns="0" tIns="0" rIns="0" bIns="0" rtlCol="0" anchor="t"/>
           <a:lstStyle/>
           <a:p>
-            <a:pPr indent="0" marL="0">
+            <a:pPr marL="0" indent="0">
               <a:buNone/>
             </a:pPr>
             <a:r>
@@ -14538,7 +13025,10 @@
         </p:spPr>
         <p:txBody>
           <a:bodyPr/>
-          <a:p/>
+          <a:lstStyle/>
+          <a:p>
+            <a:endParaRPr/>
+          </a:p>
         </p:txBody>
       </p:sp>
       <p:sp>
@@ -14562,7 +13052,7 @@
           <a:bodyPr wrap="square" lIns="0" tIns="0" rIns="0" bIns="0" rtlCol="0" anchor="t"/>
           <a:lstStyle/>
           <a:p>
-            <a:pPr indent="0" marL="0">
+            <a:pPr marL="0" indent="0">
               <a:buNone/>
             </a:pPr>
             <a:r>
@@ -14601,7 +13091,7 @@
           <a:bodyPr wrap="square" lIns="0" tIns="0" rIns="0" bIns="0" rtlCol="0" anchor="t"/>
           <a:lstStyle/>
           <a:p>
-            <a:pPr indent="0" marL="0">
+            <a:pPr marL="0" indent="0">
               <a:buNone/>
             </a:pPr>
             <a:r>
@@ -14920,4 +13410,319 @@
     </a:ext>
   </a:extLst>
 </a:theme>
+</file>
+
+<file path=ppt/theme/theme2.xml><?xml version="1.0" encoding="utf-8"?>
+<a:theme xmlns:a="http://schemas.openxmlformats.org/drawingml/2006/main" name="Office Theme">
+  <a:themeElements>
+    <a:clrScheme name="Office">
+      <a:dk1>
+        <a:sysClr val="windowText" lastClr="000000"/>
+      </a:dk1>
+      <a:lt1>
+        <a:sysClr val="window" lastClr="FFFFFF"/>
+      </a:lt1>
+      <a:dk2>
+        <a:srgbClr val="0E2841"/>
+      </a:dk2>
+      <a:lt2>
+        <a:srgbClr val="E8E8E8"/>
+      </a:lt2>
+      <a:accent1>
+        <a:srgbClr val="156082"/>
+      </a:accent1>
+      <a:accent2>
+        <a:srgbClr val="E97132"/>
+      </a:accent2>
+      <a:accent3>
+        <a:srgbClr val="196B24"/>
+      </a:accent3>
+      <a:accent4>
+        <a:srgbClr val="0F9ED5"/>
+      </a:accent4>
+      <a:accent5>
+        <a:srgbClr val="A02B93"/>
+      </a:accent5>
+      <a:accent6>
+        <a:srgbClr val="4EA72E"/>
+      </a:accent6>
+      <a:hlink>
+        <a:srgbClr val="467886"/>
+      </a:hlink>
+      <a:folHlink>
+        <a:srgbClr val="96607D"/>
+      </a:folHlink>
+    </a:clrScheme>
+    <a:fontScheme name="Office">
+      <a:majorFont>
+        <a:latin typeface="Aptos Display" panose="02110004020202020204"/>
+        <a:ea typeface=""/>
+        <a:cs typeface=""/>
+        <a:font script="Jpan" typeface="游ゴシック Light"/>
+        <a:font script="Hang" typeface="맑은 고딕"/>
+        <a:font script="Hans" typeface="等线 Light"/>
+        <a:font script="Hant" typeface="新細明體"/>
+        <a:font script="Arab" typeface="Times New Roman"/>
+        <a:font script="Hebr" typeface="Times New Roman"/>
+        <a:font script="Thai" typeface="Angsana New"/>
+        <a:font script="Ethi" typeface="Nyala"/>
+        <a:font script="Beng" typeface="Vrinda"/>
+        <a:font script="Gujr" typeface="Shruti"/>
+        <a:font script="Khmr" typeface="MoolBoran"/>
+        <a:font script="Knda" typeface="Tunga"/>
+        <a:font script="Guru" typeface="Raavi"/>
+        <a:font script="Cans" typeface="Euphemia"/>
+        <a:font script="Cher" typeface="Plantagenet Cherokee"/>
+        <a:font script="Yiii" typeface="Microsoft Yi Baiti"/>
+        <a:font script="Tibt" typeface="Microsoft Himalaya"/>
+        <a:font script="Thaa" typeface="MV Boli"/>
+        <a:font script="Deva" typeface="Mangal"/>
+        <a:font script="Telu" typeface="Gautami"/>
+        <a:font script="Taml" typeface="Latha"/>
+        <a:font script="Syrc" typeface="Estrangelo Edessa"/>
+        <a:font script="Orya" typeface="Kalinga"/>
+        <a:font script="Mlym" typeface="Kartika"/>
+        <a:font script="Laoo" typeface="DokChampa"/>
+        <a:font script="Sinh" typeface="Iskoola Pota"/>
+        <a:font script="Mong" typeface="Mongolian Baiti"/>
+        <a:font script="Viet" typeface="Times New Roman"/>
+        <a:font script="Uigh" typeface="Microsoft Uighur"/>
+        <a:font script="Geor" typeface="Sylfaen"/>
+        <a:font script="Armn" typeface="Arial"/>
+        <a:font script="Bugi" typeface="Leelawadee UI"/>
+        <a:font script="Bopo" typeface="Microsoft JhengHei"/>
+        <a:font script="Java" typeface="Javanese Text"/>
+        <a:font script="Lisu" typeface="Segoe UI"/>
+        <a:font script="Mymr" typeface="Myanmar Text"/>
+        <a:font script="Nkoo" typeface="Ebrima"/>
+        <a:font script="Olck" typeface="Nirmala UI"/>
+        <a:font script="Osma" typeface="Ebrima"/>
+        <a:font script="Phag" typeface="Phagspa"/>
+        <a:font script="Syrn" typeface="Estrangelo Edessa"/>
+        <a:font script="Syrj" typeface="Estrangelo Edessa"/>
+        <a:font script="Syre" typeface="Estrangelo Edessa"/>
+        <a:font script="Sora" typeface="Nirmala UI"/>
+        <a:font script="Tale" typeface="Microsoft Tai Le"/>
+        <a:font script="Talu" typeface="Microsoft New Tai Lue"/>
+        <a:font script="Tfng" typeface="Ebrima"/>
+      </a:majorFont>
+      <a:minorFont>
+        <a:latin typeface="Aptos" panose="02110004020202020204"/>
+        <a:ea typeface=""/>
+        <a:cs typeface=""/>
+        <a:font script="Jpan" typeface="游ゴシック"/>
+        <a:font script="Hang" typeface="맑은 고딕"/>
+        <a:font script="Hans" typeface="等线"/>
+        <a:font script="Hant" typeface="新細明體"/>
+        <a:font script="Arab" typeface="Arial"/>
+        <a:font script="Hebr" typeface="Arial"/>
+        <a:font script="Thai" typeface="Cordia New"/>
+        <a:font script="Ethi" typeface="Nyala"/>
+        <a:font script="Beng" typeface="Vrinda"/>
+        <a:font script="Gujr" typeface="Shruti"/>
+        <a:font script="Khmr" typeface="DaunPenh"/>
+        <a:font script="Knda" typeface="Tunga"/>
+        <a:font script="Guru" typeface="Raavi"/>
+        <a:font script="Cans" typeface="Euphemia"/>
+        <a:font script="Cher" typeface="Plantagenet Cherokee"/>
+        <a:font script="Yiii" typeface="Microsoft Yi Baiti"/>
+        <a:font script="Tibt" typeface="Microsoft Himalaya"/>
+        <a:font script="Thaa" typeface="MV Boli"/>
+        <a:font script="Deva" typeface="Mangal"/>
+        <a:font script="Telu" typeface="Gautami"/>
+        <a:font script="Taml" typeface="Latha"/>
+        <a:font script="Syrc" typeface="Estrangelo Edessa"/>
+        <a:font script="Orya" typeface="Kalinga"/>
+        <a:font script="Mlym" typeface="Kartika"/>
+        <a:font script="Laoo" typeface="DokChampa"/>
+        <a:font script="Sinh" typeface="Iskoola Pota"/>
+        <a:font script="Mong" typeface="Mongolian Baiti"/>
+        <a:font script="Viet" typeface="Arial"/>
+        <a:font script="Uigh" typeface="Microsoft Uighur"/>
+        <a:font script="Geor" typeface="Sylfaen"/>
+        <a:font script="Armn" typeface="Arial"/>
+        <a:font script="Bugi" typeface="Leelawadee UI"/>
+        <a:font script="Bopo" typeface="Microsoft JhengHei"/>
+        <a:font script="Java" typeface="Javanese Text"/>
+        <a:font script="Lisu" typeface="Segoe UI"/>
+        <a:font script="Mymr" typeface="Myanmar Text"/>
+        <a:font script="Nkoo" typeface="Ebrima"/>
+        <a:font script="Olck" typeface="Nirmala UI"/>
+        <a:font script="Osma" typeface="Ebrima"/>
+        <a:font script="Phag" typeface="Phagspa"/>
+        <a:font script="Syrn" typeface="Estrangelo Edessa"/>
+        <a:font script="Syrj" typeface="Estrangelo Edessa"/>
+        <a:font script="Syre" typeface="Estrangelo Edessa"/>
+        <a:font script="Sora" typeface="Nirmala UI"/>
+        <a:font script="Tale" typeface="Microsoft Tai Le"/>
+        <a:font script="Talu" typeface="Microsoft New Tai Lue"/>
+        <a:font script="Tfng" typeface="Ebrima"/>
+      </a:minorFont>
+    </a:fontScheme>
+    <a:fmtScheme name="Office">
+      <a:fillStyleLst>
+        <a:solidFill>
+          <a:schemeClr val="phClr"/>
+        </a:solidFill>
+        <a:gradFill rotWithShape="1">
+          <a:gsLst>
+            <a:gs pos="0">
+              <a:schemeClr val="phClr">
+                <a:lumMod val="110000"/>
+                <a:satMod val="105000"/>
+                <a:tint val="67000"/>
+              </a:schemeClr>
+            </a:gs>
+            <a:gs pos="50000">
+              <a:schemeClr val="phClr">
+                <a:lumMod val="105000"/>
+                <a:satMod val="103000"/>
+                <a:tint val="73000"/>
+              </a:schemeClr>
+            </a:gs>
+            <a:gs pos="100000">
+              <a:schemeClr val="phClr">
+                <a:lumMod val="105000"/>
+                <a:satMod val="109000"/>
+                <a:tint val="81000"/>
+              </a:schemeClr>
+            </a:gs>
+          </a:gsLst>
+          <a:lin ang="5400000" scaled="0"/>
+        </a:gradFill>
+        <a:gradFill rotWithShape="1">
+          <a:gsLst>
+            <a:gs pos="0">
+              <a:schemeClr val="phClr">
+                <a:satMod val="103000"/>
+                <a:lumMod val="102000"/>
+                <a:tint val="94000"/>
+              </a:schemeClr>
+            </a:gs>
+            <a:gs pos="50000">
+              <a:schemeClr val="phClr">
+                <a:satMod val="110000"/>
+                <a:lumMod val="100000"/>
+                <a:shade val="100000"/>
+              </a:schemeClr>
+            </a:gs>
+            <a:gs pos="100000">
+              <a:schemeClr val="phClr">
+                <a:lumMod val="99000"/>
+                <a:satMod val="120000"/>
+                <a:shade val="78000"/>
+              </a:schemeClr>
+            </a:gs>
+          </a:gsLst>
+          <a:lin ang="5400000" scaled="0"/>
+        </a:gradFill>
+      </a:fillStyleLst>
+      <a:lnStyleLst>
+        <a:ln w="12700" cap="flat" cmpd="sng" algn="ctr">
+          <a:solidFill>
+            <a:schemeClr val="phClr"/>
+          </a:solidFill>
+          <a:prstDash val="solid"/>
+          <a:miter lim="800000"/>
+        </a:ln>
+        <a:ln w="19050" cap="flat" cmpd="sng" algn="ctr">
+          <a:solidFill>
+            <a:schemeClr val="phClr"/>
+          </a:solidFill>
+          <a:prstDash val="solid"/>
+          <a:miter lim="800000"/>
+        </a:ln>
+        <a:ln w="25400" cap="flat" cmpd="sng" algn="ctr">
+          <a:solidFill>
+            <a:schemeClr val="phClr"/>
+          </a:solidFill>
+          <a:prstDash val="solid"/>
+          <a:miter lim="800000"/>
+        </a:ln>
+      </a:lnStyleLst>
+      <a:effectStyleLst>
+        <a:effectStyle>
+          <a:effectLst/>
+        </a:effectStyle>
+        <a:effectStyle>
+          <a:effectLst/>
+        </a:effectStyle>
+        <a:effectStyle>
+          <a:effectLst>
+            <a:outerShdw blurRad="57150" dist="19050" dir="5400000" algn="ctr" rotWithShape="0">
+              <a:srgbClr val="000000">
+                <a:alpha val="63000"/>
+              </a:srgbClr>
+            </a:outerShdw>
+          </a:effectLst>
+        </a:effectStyle>
+      </a:effectStyleLst>
+      <a:bgFillStyleLst>
+        <a:solidFill>
+          <a:schemeClr val="phClr"/>
+        </a:solidFill>
+        <a:solidFill>
+          <a:schemeClr val="phClr">
+            <a:tint val="95000"/>
+            <a:satMod val="170000"/>
+          </a:schemeClr>
+        </a:solidFill>
+        <a:gradFill rotWithShape="1">
+          <a:gsLst>
+            <a:gs pos="0">
+              <a:schemeClr val="phClr">
+                <a:tint val="93000"/>
+                <a:satMod val="150000"/>
+                <a:shade val="98000"/>
+                <a:lumMod val="102000"/>
+              </a:schemeClr>
+            </a:gs>
+            <a:gs pos="50000">
+              <a:schemeClr val="phClr">
+                <a:tint val="98000"/>
+                <a:satMod val="130000"/>
+                <a:shade val="90000"/>
+                <a:lumMod val="103000"/>
+              </a:schemeClr>
+            </a:gs>
+            <a:gs pos="100000">
+              <a:schemeClr val="phClr">
+                <a:shade val="63000"/>
+                <a:satMod val="120000"/>
+              </a:schemeClr>
+            </a:gs>
+          </a:gsLst>
+          <a:lin ang="5400000" scaled="0"/>
+        </a:gradFill>
+      </a:bgFillStyleLst>
+    </a:fmtScheme>
+  </a:themeElements>
+  <a:objectDefaults>
+    <a:lnDef>
+      <a:spPr/>
+      <a:bodyPr/>
+      <a:lstStyle/>
+      <a:style>
+        <a:lnRef idx="2">
+          <a:schemeClr val="accent1"/>
+        </a:lnRef>
+        <a:fillRef idx="0">
+          <a:schemeClr val="accent1"/>
+        </a:fillRef>
+        <a:effectRef idx="1">
+          <a:schemeClr val="accent1"/>
+        </a:effectRef>
+        <a:fontRef idx="minor">
+          <a:schemeClr val="tx1"/>
+        </a:fontRef>
+      </a:style>
+    </a:lnDef>
+  </a:objectDefaults>
+  <a:extraClrSchemeLst/>
+  <a:extLst>
+    <a:ext uri="{05A4C25C-085E-4340-85A3-A5531E510DB2}">
+      <thm15:themeFamily xmlns:thm15="http://schemas.microsoft.com/office/thememl/2012/main" name="Office Theme" id="{2E142A2C-CD16-42D6-873A-C26D2A0506FA}" vid="{1BDDFF52-6CD6-40A5-AB3C-68EB2F1E4D0A}"/>
+    </a:ext>
+  </a:extLst>
+</a:theme>
 </file>
--- a/Tuan 3/bao-cao-tuan-3.pptx
+++ b/Tuan 3/bao-cao-tuan-3.pptx
@@ -20,7 +20,7 @@
     <p:sldId id="262" r:id="rId11"/>
     <p:sldId id="264" r:id="rId12"/>
     <p:sldId id="265" r:id="rId13"/>
-    <p:sldId id="268" r:id="rId14"/>
+    <p:sldId id="271" r:id="rId14"/>
     <p:sldId id="266" r:id="rId15"/>
   </p:sldIdLst>
   <p:sldSz cx="12192000" cy="6858000"/>
@@ -642,76 +642,6 @@
             <a:spLocks noGrp="1" noRot="1" noChangeAspect="1"/>
           </p:cNvSpPr>
           <p:nvPr>
-            <p:ph type="sldImg" idx="2"/>
-          </p:nvPr>
-        </p:nvSpPr>
-        <p:spPr/>
-      </p:sp>
-      <p:sp>
-        <p:nvSpPr>
-          <p:cNvPr id="3" name="Notes Placeholder 2"/>
-          <p:cNvSpPr>
-            <a:spLocks noGrp="1"/>
-          </p:cNvSpPr>
-          <p:nvPr>
-            <p:ph type="body" sz="quarter" idx="3"/>
-          </p:nvPr>
-        </p:nvSpPr>
-        <p:spPr/>
-        <p:txBody>
-          <a:bodyPr/>
-          <a:lstStyle/>
-          <a:p>
-            <a:r>
-              <a:t>Về lộ trình tám tuần, tuần 1 và 2 đã xong, tuần 3 là chặng hiện tại. Tuần 4 là slot, seq và các thao tác cập nhật cùng cổng pending. Tuần 5 là BM25, RRF, tách truy vấn con, khoảng hiệu lực và ký ức pinned. Tuần 6 là reranker, hiệu chỉnh ngưỡng từ chối, tóm tắt phiên và bộ test tiếng Việt. Tuần 7 chạy các cấu hình đánh giá và phân tích lỗi. Tuần 8 viết báo cáo và đóng gói. Lộ trình này giữ nguyên so với tuần 2.</a:t>
-            </a:r>
-          </a:p>
-        </p:txBody>
-      </p:sp>
-      <p:sp>
-        <p:nvSpPr>
-          <p:cNvPr id="4" name="Slide Number Placeholder 3"/>
-          <p:cNvSpPr>
-            <a:spLocks noGrp="1"/>
-          </p:cNvSpPr>
-          <p:nvPr>
-            <p:ph type="sldNum" sz="quarter" idx="5"/>
-          </p:nvPr>
-        </p:nvSpPr>
-        <p:spPr/>
-      </p:sp>
-    </p:spTree>
-  </p:cSld>
-  <p:clrMapOvr>
-    <a:masterClrMapping/>
-  </p:clrMapOvr>
-</p:notes>
-</file>
-
-<file path=ppt/notesSlides/notesSlide14.xml><?xml version="1.0" encoding="utf-8"?>
-<p:notes xmlns:a="http://schemas.openxmlformats.org/drawingml/2006/main" xmlns:r="http://schemas.openxmlformats.org/officeDocument/2006/relationships" xmlns:p="http://schemas.openxmlformats.org/presentationml/2006/main">
-  <p:cSld>
-    <p:spTree>
-      <p:nvGrpSpPr>
-        <p:cNvPr id="1" name=""/>
-        <p:cNvGrpSpPr/>
-        <p:nvPr/>
-      </p:nvGrpSpPr>
-      <p:grpSpPr>
-        <a:xfrm>
-          <a:off x="0" y="0"/>
-          <a:ext cx="0" cy="0"/>
-          <a:chOff x="0" y="0"/>
-          <a:chExt cx="0" cy="0"/>
-        </a:xfrm>
-      </p:grpSpPr>
-      <p:sp>
-        <p:nvSpPr>
-          <p:cNvPr id="2" name="Slide Image Placeholder 1"/>
-          <p:cNvSpPr>
-            <a:spLocks noGrp="1" noRot="1" noChangeAspect="1"/>
-          </p:cNvSpPr>
-          <p:nvPr>
             <p:ph type="sldImg"/>
           </p:nvPr>
         </p:nvSpPr>
@@ -1692,6 +1622,226 @@
 </p:sldLayout>
 </file>
 
+<file path=ppt/slideLayouts/slideLayout2.xml><?xml version="1.0" encoding="utf-8"?>
+<p:sldLayout xmlns:a="http://schemas.openxmlformats.org/drawingml/2006/main" xmlns:r="http://schemas.openxmlformats.org/officeDocument/2006/relationships" xmlns:p="http://schemas.openxmlformats.org/presentationml/2006/main" type="title">
+  <p:cSld name="Title Slide">
+    <p:spTree>
+      <p:nvGrpSpPr>
+        <p:cNvPr id="1" name=""/>
+        <p:cNvGrpSpPr/>
+        <p:nvPr/>
+      </p:nvGrpSpPr>
+      <p:grpSpPr>
+        <a:xfrm>
+          <a:off x="0" y="0"/>
+          <a:ext cx="0" cy="0"/>
+          <a:chOff x="0" y="0"/>
+          <a:chExt cx="0" cy="0"/>
+        </a:xfrm>
+      </p:grpSpPr>
+      <p:sp>
+        <p:nvSpPr>
+          <p:cNvPr id="2" name="Title 1">
+            <a:extLst>
+              <a:ext uri="{FF2B5EF4-FFF2-40B4-BE49-F238E27FC236}">
+                <a16:creationId xmlns:a16="http://schemas.microsoft.com/office/drawing/2014/main" id="{AFD3DB14-C994-A889-7A6A-AF632170ED81}"/>
+              </a:ext>
+            </a:extLst>
+          </p:cNvPr>
+          <p:cNvSpPr>
+            <a:spLocks noGrp="1"/>
+          </p:cNvSpPr>
+          <p:nvPr>
+            <p:ph type="ctrTitle"/>
+          </p:nvPr>
+        </p:nvSpPr>
+        <p:spPr>
+          <a:xfrm>
+            <a:off x="1524000" y="1122363"/>
+            <a:ext cx="9144000" cy="2387600"/>
+          </a:xfrm>
+        </p:spPr>
+        <p:txBody>
+          <a:bodyPr anchor="b"/>
+          <a:lstStyle>
+            <a:lvl1pPr algn="ctr">
+              <a:defRPr sz="6000"/>
+            </a:lvl1pPr>
+          </a:lstStyle>
+          <a:p>
+            <a:r>
+              <a:rPr lang="en-US"/>
+              <a:t>Click to edit Master title style</a:t>
+            </a:r>
+          </a:p>
+        </p:txBody>
+      </p:sp>
+      <p:sp>
+        <p:nvSpPr>
+          <p:cNvPr id="3" name="Subtitle 2">
+            <a:extLst>
+              <a:ext uri="{FF2B5EF4-FFF2-40B4-BE49-F238E27FC236}">
+                <a16:creationId xmlns:a16="http://schemas.microsoft.com/office/drawing/2014/main" id="{84589DC6-07E3-D318-0C89-19562A8268DD}"/>
+              </a:ext>
+            </a:extLst>
+          </p:cNvPr>
+          <p:cNvSpPr>
+            <a:spLocks noGrp="1"/>
+          </p:cNvSpPr>
+          <p:nvPr>
+            <p:ph type="subTitle" idx="1"/>
+          </p:nvPr>
+        </p:nvSpPr>
+        <p:spPr>
+          <a:xfrm>
+            <a:off x="1524000" y="3602038"/>
+            <a:ext cx="9144000" cy="1655762"/>
+          </a:xfrm>
+        </p:spPr>
+        <p:txBody>
+          <a:bodyPr/>
+          <a:lstStyle>
+            <a:lvl1pPr marL="0" indent="0" algn="ctr">
+              <a:buNone/>
+              <a:defRPr sz="2400"/>
+            </a:lvl1pPr>
+            <a:lvl2pPr marL="457200" indent="0" algn="ctr">
+              <a:buNone/>
+              <a:defRPr sz="2000"/>
+            </a:lvl2pPr>
+            <a:lvl3pPr marL="914400" indent="0" algn="ctr">
+              <a:buNone/>
+              <a:defRPr sz="1800"/>
+            </a:lvl3pPr>
+            <a:lvl4pPr marL="1371600" indent="0" algn="ctr">
+              <a:buNone/>
+              <a:defRPr sz="1600"/>
+            </a:lvl4pPr>
+            <a:lvl5pPr marL="1828800" indent="0" algn="ctr">
+              <a:buNone/>
+              <a:defRPr sz="1600"/>
+            </a:lvl5pPr>
+            <a:lvl6pPr marL="2286000" indent="0" algn="ctr">
+              <a:buNone/>
+              <a:defRPr sz="1600"/>
+            </a:lvl6pPr>
+            <a:lvl7pPr marL="2743200" indent="0" algn="ctr">
+              <a:buNone/>
+              <a:defRPr sz="1600"/>
+            </a:lvl7pPr>
+            <a:lvl8pPr marL="3200400" indent="0" algn="ctr">
+              <a:buNone/>
+              <a:defRPr sz="1600"/>
+            </a:lvl8pPr>
+            <a:lvl9pPr marL="3657600" indent="0" algn="ctr">
+              <a:buNone/>
+              <a:defRPr sz="1600"/>
+            </a:lvl9pPr>
+          </a:lstStyle>
+          <a:p>
+            <a:r>
+              <a:rPr lang="en-US"/>
+              <a:t>Click to edit Master subtitle style</a:t>
+            </a:r>
+          </a:p>
+        </p:txBody>
+      </p:sp>
+      <p:sp>
+        <p:nvSpPr>
+          <p:cNvPr id="4" name="Date Placeholder 3">
+            <a:extLst>
+              <a:ext uri="{FF2B5EF4-FFF2-40B4-BE49-F238E27FC236}">
+                <a16:creationId xmlns:a16="http://schemas.microsoft.com/office/drawing/2014/main" id="{ED5C040C-C656-45F5-8D40-0C03F11200CE}"/>
+              </a:ext>
+            </a:extLst>
+          </p:cNvPr>
+          <p:cNvSpPr>
+            <a:spLocks noGrp="1"/>
+          </p:cNvSpPr>
+          <p:nvPr>
+            <p:ph type="dt" sz="half" idx="10"/>
+          </p:nvPr>
+        </p:nvSpPr>
+        <p:spPr/>
+        <p:txBody>
+          <a:bodyPr/>
+          <a:lstStyle/>
+          <a:p>
+            <a:fld id="{38DCD071-F201-46E7-9901-581B29C07CD9}" type="datetimeFigureOut">
+              <a:rPr lang="en-US" smtClean="0"/>
+              <a:t>9/28/2026</a:t>
+            </a:fld>
+            <a:endParaRPr lang="en-US"/>
+          </a:p>
+        </p:txBody>
+      </p:sp>
+      <p:sp>
+        <p:nvSpPr>
+          <p:cNvPr id="5" name="Footer Placeholder 4">
+            <a:extLst>
+              <a:ext uri="{FF2B5EF4-FFF2-40B4-BE49-F238E27FC236}">
+                <a16:creationId xmlns:a16="http://schemas.microsoft.com/office/drawing/2014/main" id="{0B9B0860-6AC5-C573-D59D-2EEA6DB92F42}"/>
+              </a:ext>
+            </a:extLst>
+          </p:cNvPr>
+          <p:cNvSpPr>
+            <a:spLocks noGrp="1"/>
+          </p:cNvSpPr>
+          <p:nvPr>
+            <p:ph type="ftr" sz="quarter" idx="11"/>
+          </p:nvPr>
+        </p:nvSpPr>
+        <p:spPr/>
+        <p:txBody>
+          <a:bodyPr/>
+          <a:lstStyle/>
+          <a:p>
+            <a:endParaRPr lang="en-US"/>
+          </a:p>
+        </p:txBody>
+      </p:sp>
+      <p:sp>
+        <p:nvSpPr>
+          <p:cNvPr id="6" name="Slide Number Placeholder 5">
+            <a:extLst>
+              <a:ext uri="{FF2B5EF4-FFF2-40B4-BE49-F238E27FC236}">
+                <a16:creationId xmlns:a16="http://schemas.microsoft.com/office/drawing/2014/main" id="{0F0E1F59-0FA1-A5AC-15FA-0D385EFDD21B}"/>
+              </a:ext>
+            </a:extLst>
+          </p:cNvPr>
+          <p:cNvSpPr>
+            <a:spLocks noGrp="1"/>
+          </p:cNvSpPr>
+          <p:nvPr>
+            <p:ph type="sldNum" sz="quarter" idx="12"/>
+          </p:nvPr>
+        </p:nvSpPr>
+        <p:spPr/>
+        <p:txBody>
+          <a:bodyPr/>
+          <a:lstStyle/>
+          <a:p>
+            <a:fld id="{EAE8E209-B459-4278-8231-2A8EC236454F}" type="slidenum">
+              <a:rPr lang="en-US" smtClean="0"/>
+              <a:t>‹#›</a:t>
+            </a:fld>
+            <a:endParaRPr lang="en-US"/>
+          </a:p>
+        </p:txBody>
+      </p:sp>
+    </p:spTree>
+    <p:extLst>
+      <p:ext uri="{BB962C8B-B14F-4D97-AF65-F5344CB8AC3E}">
+        <p14:creationId xmlns:p14="http://schemas.microsoft.com/office/powerpoint/2010/main" val="1682884282"/>
+      </p:ext>
+    </p:extLst>
+  </p:cSld>
+  <p:clrMapOvr>
+    <a:masterClrMapping/>
+  </p:clrMapOvr>
+</p:sldLayout>
+</file>
+
 <file path=ppt/slideMasters/slideMaster1.xml><?xml version="1.0" encoding="utf-8"?>
 <p:sldMaster xmlns:a="http://schemas.openxmlformats.org/drawingml/2006/main" xmlns:r="http://schemas.openxmlformats.org/officeDocument/2006/relationships" xmlns:p="http://schemas.openxmlformats.org/presentationml/2006/main">
   <p:cSld>
@@ -1719,6 +1869,7 @@
   <p:clrMap bg1="lt1" tx1="dk1" bg2="lt2" tx2="dk2" accent1="accent1" accent2="accent2" accent3="accent3" accent4="accent4" accent5="accent5" accent6="accent6" hlink="hlink" folHlink="folHlink"/>
   <p:sldLayoutIdLst>
     <p:sldLayoutId id="2147483649" r:id="rId1"/>
+    <p:sldLayoutId id="2147483650" r:id="rId2"/>
   </p:sldLayoutIdLst>
   <p:hf sldNum="0" hdr="0" ftr="0" dt="0"/>
   <p:txStyles>
@@ -4958,14 +5109,6 @@
 <file path=ppt/slides/slide13.xml><?xml version="1.0" encoding="utf-8"?>
 <p:sld xmlns:a="http://schemas.openxmlformats.org/drawingml/2006/main" xmlns:r="http://schemas.openxmlformats.org/officeDocument/2006/relationships" xmlns:p="http://schemas.openxmlformats.org/presentationml/2006/main">
   <p:cSld>
-    <p:bg>
-      <p:bgPr>
-        <a:solidFill>
-          <a:srgbClr val="FFFFFF"/>
-        </a:solidFill>
-        <a:effectLst/>
-      </p:bgPr>
-    </p:bg>
     <p:spTree>
       <p:nvGrpSpPr>
         <p:cNvPr id="1" name=""/>
@@ -4982,1481 +5125,2071 @@
       </p:grpSpPr>
       <p:sp>
         <p:nvSpPr>
-          <p:cNvPr id="2" name="TextBox 1"/>
-          <p:cNvSpPr txBox="1"/>
-          <p:nvPr/>
-        </p:nvSpPr>
-        <p:spPr>
-          <a:xfrm>
-            <a:off x="571500" y="508000"/>
-            <a:ext cx="8229600" cy="279400"/>
-          </a:xfrm>
-          <a:prstGeom prst="rect">
-            <a:avLst/>
-          </a:prstGeom>
-          <a:noFill/>
-        </p:spPr>
-        <p:txBody>
-          <a:bodyPr wrap="square" lIns="0" tIns="0" rIns="0" bIns="0" anchor="t">
-            <a:spAutoFit/>
-          </a:bodyPr>
-          <a:lstStyle/>
-          <a:p>
-            <a:r>
-              <a:rPr sz="1550" b="1">
+          <p:cNvPr id="67" name="Text 0">
+            <a:extLst>
+              <a:ext uri="{FF2B5EF4-FFF2-40B4-BE49-F238E27FC236}">
+                <a16:creationId xmlns:a16="http://schemas.microsoft.com/office/drawing/2014/main" id="{3B4456BE-6B09-C93D-84B3-060739BCF9A0}"/>
+              </a:ext>
+            </a:extLst>
+          </p:cNvPr>
+          <p:cNvSpPr txBox="1"/>
+          <p:nvPr/>
+        </p:nvSpPr>
+        <p:spPr>
+          <a:xfrm>
+            <a:off x="566928" y="502920"/>
+            <a:ext cx="6345936" cy="283464"/>
+          </a:xfrm>
+          <a:prstGeom prst="rect">
+            <a:avLst/>
+          </a:prstGeom>
+          <a:noFill/>
+          <a:ln/>
+        </p:spPr>
+        <p:txBody>
+          <a:bodyPr wrap="square" lIns="0" tIns="0" rIns="0" bIns="0" rtlCol="0" anchor="ctr"/>
+          <a:lstStyle/>
+          <a:p>
+            <a:pPr marL="0" indent="0">
+              <a:buNone/>
+            </a:pPr>
+            <a:r>
+              <a:rPr lang="en-US" sz="1200" b="1" dirty="0">
                 <a:solidFill>
                   <a:srgbClr val="3A36A0"/>
                 </a:solidFill>
-                <a:latin typeface="Calibri"/>
+                <a:latin typeface="Calibri" pitchFamily="34" charset="0"/>
+                <a:ea typeface="Calibri" pitchFamily="34" charset="-122"/>
+                <a:cs typeface="Calibri" pitchFamily="34" charset="-120"/>
               </a:rPr>
               <a:t>KẾ HOẠCH THỰC HIỆN</a:t>
             </a:r>
-          </a:p>
-        </p:txBody>
-      </p:sp>
-      <p:sp>
-        <p:nvSpPr>
-          <p:cNvPr id="3" name="TextBox 2"/>
-          <p:cNvSpPr txBox="1"/>
-          <p:nvPr/>
-        </p:nvSpPr>
-        <p:spPr>
-          <a:xfrm>
-            <a:off x="571500" y="825500"/>
-            <a:ext cx="11049000" cy="635000"/>
-          </a:xfrm>
-          <a:prstGeom prst="rect">
-            <a:avLst/>
-          </a:prstGeom>
-          <a:noFill/>
-        </p:spPr>
-        <p:txBody>
-          <a:bodyPr wrap="square" lIns="0" tIns="0" rIns="0" bIns="0" anchor="t">
-            <a:spAutoFit/>
-          </a:bodyPr>
-          <a:lstStyle/>
-          <a:p>
-            <a:r>
-              <a:rPr sz="3000" b="1">
+            <a:endParaRPr lang="en-US" sz="1200" dirty="0"/>
+          </a:p>
+        </p:txBody>
+      </p:sp>
+      <p:sp>
+        <p:nvSpPr>
+          <p:cNvPr id="69" name="Text 1">
+            <a:extLst>
+              <a:ext uri="{FF2B5EF4-FFF2-40B4-BE49-F238E27FC236}">
+                <a16:creationId xmlns:a16="http://schemas.microsoft.com/office/drawing/2014/main" id="{C111DE67-7DAE-BAF7-251B-B24633BBF1AC}"/>
+              </a:ext>
+            </a:extLst>
+          </p:cNvPr>
+          <p:cNvSpPr txBox="1"/>
+          <p:nvPr/>
+        </p:nvSpPr>
+        <p:spPr>
+          <a:xfrm>
+            <a:off x="566928" y="822960"/>
+            <a:ext cx="11045952" cy="640080"/>
+          </a:xfrm>
+          <a:prstGeom prst="rect">
+            <a:avLst/>
+          </a:prstGeom>
+          <a:noFill/>
+          <a:ln/>
+        </p:spPr>
+        <p:txBody>
+          <a:bodyPr wrap="square" lIns="0" tIns="0" rIns="0" bIns="0" rtlCol="0" anchor="ctr"/>
+          <a:lstStyle/>
+          <a:p>
+            <a:pPr marL="0" indent="0">
+              <a:buNone/>
+            </a:pPr>
+            <a:r>
+              <a:rPr lang="en-US" sz="3000" b="1" dirty="0">
                 <a:solidFill>
                   <a:srgbClr val="13123A"/>
                 </a:solidFill>
-                <a:latin typeface="Cambria"/>
-              </a:rPr>
-              <a:t>Lộ trình 8 tuần — mỗi tuần gắn một nhóm năng lực</a:t>
-            </a:r>
-          </a:p>
-        </p:txBody>
-      </p:sp>
-      <p:sp>
-        <p:nvSpPr>
-          <p:cNvPr id="4" name="TextBox 3"/>
-          <p:cNvSpPr txBox="1"/>
-          <p:nvPr/>
-        </p:nvSpPr>
-        <p:spPr>
-          <a:xfrm>
-            <a:off x="571500" y="6464300"/>
-            <a:ext cx="11049000" cy="330200"/>
-          </a:xfrm>
-          <a:prstGeom prst="rect">
-            <a:avLst/>
-          </a:prstGeom>
-          <a:noFill/>
-        </p:spPr>
-        <p:txBody>
-          <a:bodyPr wrap="square" lIns="0" tIns="0" rIns="0" bIns="0" anchor="t">
-            <a:spAutoFit/>
-          </a:bodyPr>
-          <a:lstStyle/>
-          <a:p>
-            <a:r>
-              <a:rPr sz="1050" b="0">
-                <a:solidFill>
-                  <a:srgbClr val="6B6F82"/>
-                </a:solidFill>
-                <a:latin typeface="Calibri"/>
-              </a:rPr>
-              <a:t>Lộ trình do nhóm tự lập, đã điều chỉnh sau phản hồi tuần 1 để mỗi năng lực có một tuần chịu trách nhiệm. Tài liệu thiết kế có bảng cốt lõi / nên có / mở rộng định sẵn thứ tự cắt nếu thiếu thời gian.</a:t>
-            </a:r>
-          </a:p>
-        </p:txBody>
-      </p:sp>
-      <p:sp>
-        <p:nvSpPr>
-          <p:cNvPr id="5" name="Rectangle 4"/>
+                <a:latin typeface="Cambria" pitchFamily="34" charset="0"/>
+                <a:ea typeface="Cambria" pitchFamily="34" charset="-122"/>
+                <a:cs typeface="Cambria" pitchFamily="34" charset="-120"/>
+              </a:rPr>
+              <a:t>Lộ </a:t>
+            </a:r>
+            <a:r>
+              <a:rPr lang="en-US" sz="3000" b="1" dirty="0" err="1">
+                <a:solidFill>
+                  <a:srgbClr val="13123A"/>
+                </a:solidFill>
+                <a:latin typeface="Cambria" pitchFamily="34" charset="0"/>
+                <a:ea typeface="Cambria" pitchFamily="34" charset="-122"/>
+                <a:cs typeface="Cambria" pitchFamily="34" charset="-120"/>
+              </a:rPr>
+              <a:t>trình</a:t>
+            </a:r>
+            <a:r>
+              <a:rPr lang="en-US" sz="3000" b="1" dirty="0">
+                <a:solidFill>
+                  <a:srgbClr val="13123A"/>
+                </a:solidFill>
+                <a:latin typeface="Cambria" pitchFamily="34" charset="0"/>
+                <a:ea typeface="Cambria" pitchFamily="34" charset="-122"/>
+                <a:cs typeface="Cambria" pitchFamily="34" charset="-120"/>
+              </a:rPr>
+              <a:t> 7 </a:t>
+            </a:r>
+            <a:r>
+              <a:rPr lang="en-US" sz="3000" b="1" dirty="0" err="1">
+                <a:solidFill>
+                  <a:srgbClr val="13123A"/>
+                </a:solidFill>
+                <a:latin typeface="Cambria" pitchFamily="34" charset="0"/>
+                <a:ea typeface="Cambria" pitchFamily="34" charset="-122"/>
+                <a:cs typeface="Cambria" pitchFamily="34" charset="-120"/>
+              </a:rPr>
+              <a:t>tuần</a:t>
+            </a:r>
+            <a:endParaRPr lang="en-US" sz="3000" dirty="0"/>
+          </a:p>
+        </p:txBody>
+      </p:sp>
+      <p:sp>
+        <p:nvSpPr>
+          <p:cNvPr id="71" name="Shape 2">
+            <a:extLst>
+              <a:ext uri="{FF2B5EF4-FFF2-40B4-BE49-F238E27FC236}">
+                <a16:creationId xmlns:a16="http://schemas.microsoft.com/office/drawing/2014/main" id="{18397019-7095-1EF4-ECE2-368671FD39B8}"/>
+              </a:ext>
+            </a:extLst>
+          </p:cNvPr>
           <p:cNvSpPr/>
           <p:nvPr/>
         </p:nvSpPr>
         <p:spPr>
           <a:xfrm>
-            <a:off x="571500" y="1778000"/>
-            <a:ext cx="5334000" cy="927100"/>
-          </a:xfrm>
-          <a:prstGeom prst="rect">
-            <a:avLst/>
+            <a:off x="566928" y="1783080"/>
+            <a:ext cx="5340096" cy="932688"/>
+          </a:xfrm>
+          <a:prstGeom prst="roundRect">
+            <a:avLst>
+              <a:gd name="adj" fmla="val 4902"/>
+            </a:avLst>
           </a:prstGeom>
           <a:solidFill>
             <a:srgbClr val="F1F2FB"/>
           </a:solidFill>
-          <a:ln>
-            <a:noFill/>
+          <a:ln w="12700">
+            <a:solidFill>
+              <a:srgbClr val="F1F2FB"/>
+            </a:solidFill>
+            <a:prstDash val="solid"/>
           </a:ln>
-          <a:effectLst/>
-        </p:spPr>
-        <p:style>
-          <a:lnRef idx="1">
-            <a:schemeClr val="accent1"/>
-          </a:lnRef>
-          <a:fillRef idx="3">
-            <a:schemeClr val="accent1"/>
-          </a:fillRef>
-          <a:effectRef idx="2">
-            <a:schemeClr val="accent1"/>
-          </a:effectRef>
-          <a:fontRef idx="minor">
-            <a:schemeClr val="lt1"/>
-          </a:fontRef>
-        </p:style>
-        <p:txBody>
-          <a:bodyPr rtlCol="0" anchor="ctr"/>
-          <a:lstStyle/>
-          <a:p>
-            <a:pPr algn="ctr"/>
-            <a:endParaRPr/>
-          </a:p>
-        </p:txBody>
-      </p:sp>
-      <p:sp>
-        <p:nvSpPr>
-          <p:cNvPr id="6" name="Rectangle 5"/>
+        </p:spPr>
+        <p:txBody>
+          <a:bodyPr/>
+          <a:lstStyle/>
+          <a:p>
+            <a:endParaRPr lang="en-US"/>
+          </a:p>
+        </p:txBody>
+      </p:sp>
+      <p:sp>
+        <p:nvSpPr>
+          <p:cNvPr id="73" name="Shape 3">
+            <a:extLst>
+              <a:ext uri="{FF2B5EF4-FFF2-40B4-BE49-F238E27FC236}">
+                <a16:creationId xmlns:a16="http://schemas.microsoft.com/office/drawing/2014/main" id="{6C25C6DD-9C93-20AB-C976-E61C69E5730A}"/>
+              </a:ext>
+            </a:extLst>
+          </p:cNvPr>
           <p:cNvSpPr/>
           <p:nvPr/>
         </p:nvSpPr>
         <p:spPr>
           <a:xfrm>
-            <a:off x="749300" y="1955800"/>
-            <a:ext cx="965200" cy="571500"/>
-          </a:xfrm>
-          <a:prstGeom prst="rect">
-            <a:avLst/>
+            <a:off x="749808" y="1965960"/>
+            <a:ext cx="960120" cy="566928"/>
+          </a:xfrm>
+          <a:prstGeom prst="roundRect">
+            <a:avLst>
+              <a:gd name="adj" fmla="val 12903"/>
+            </a:avLst>
           </a:prstGeom>
           <a:solidFill>
             <a:srgbClr val="3A36A0"/>
           </a:solidFill>
-          <a:ln>
-            <a:noFill/>
+          <a:ln w="12700">
+            <a:solidFill>
+              <a:srgbClr val="3A36A0"/>
+            </a:solidFill>
+            <a:prstDash val="solid"/>
           </a:ln>
-          <a:effectLst/>
-        </p:spPr>
-        <p:style>
-          <a:lnRef idx="1">
-            <a:schemeClr val="accent1"/>
-          </a:lnRef>
-          <a:fillRef idx="3">
-            <a:schemeClr val="accent1"/>
-          </a:fillRef>
-          <a:effectRef idx="2">
-            <a:schemeClr val="accent1"/>
-          </a:effectRef>
-          <a:fontRef idx="minor">
-            <a:schemeClr val="lt1"/>
-          </a:fontRef>
-        </p:style>
-        <p:txBody>
-          <a:bodyPr rtlCol="0" anchor="ctr"/>
-          <a:lstStyle/>
-          <a:p>
-            <a:pPr algn="ctr"/>
-            <a:endParaRPr/>
-          </a:p>
-        </p:txBody>
-      </p:sp>
-      <p:sp>
-        <p:nvSpPr>
-          <p:cNvPr id="7" name="TextBox 6"/>
-          <p:cNvSpPr txBox="1"/>
-          <p:nvPr/>
-        </p:nvSpPr>
-        <p:spPr>
-          <a:xfrm>
-            <a:off x="749300" y="1955800"/>
-            <a:ext cx="965200" cy="571500"/>
-          </a:xfrm>
-          <a:prstGeom prst="rect">
-            <a:avLst/>
-          </a:prstGeom>
-          <a:noFill/>
-        </p:spPr>
-        <p:txBody>
-          <a:bodyPr wrap="square" lIns="0" tIns="0" rIns="0" bIns="0" anchor="ctr">
-            <a:spAutoFit/>
-          </a:bodyPr>
-          <a:lstStyle/>
-          <a:p>
-            <a:pPr algn="ctr"/>
-            <a:r>
-              <a:rPr sz="1700" b="1">
+        </p:spPr>
+        <p:txBody>
+          <a:bodyPr/>
+          <a:lstStyle/>
+          <a:p>
+            <a:endParaRPr lang="en-US"/>
+          </a:p>
+        </p:txBody>
+      </p:sp>
+      <p:sp>
+        <p:nvSpPr>
+          <p:cNvPr id="75" name="Text 4">
+            <a:extLst>
+              <a:ext uri="{FF2B5EF4-FFF2-40B4-BE49-F238E27FC236}">
+                <a16:creationId xmlns:a16="http://schemas.microsoft.com/office/drawing/2014/main" id="{71C2BA7B-2DD9-3B6C-E4B0-CF8090C060F2}"/>
+              </a:ext>
+            </a:extLst>
+          </p:cNvPr>
+          <p:cNvSpPr txBox="1"/>
+          <p:nvPr/>
+        </p:nvSpPr>
+        <p:spPr>
+          <a:xfrm>
+            <a:off x="749808" y="1965960"/>
+            <a:ext cx="960120" cy="566928"/>
+          </a:xfrm>
+          <a:prstGeom prst="rect">
+            <a:avLst/>
+          </a:prstGeom>
+          <a:noFill/>
+          <a:ln/>
+        </p:spPr>
+        <p:txBody>
+          <a:bodyPr wrap="square" lIns="0" tIns="0" rIns="0" bIns="0" rtlCol="0" anchor="ctr"/>
+          <a:lstStyle/>
+          <a:p>
+            <a:pPr marL="0" indent="0" algn="ctr">
+              <a:buNone/>
+            </a:pPr>
+            <a:r>
+              <a:rPr lang="en-US" sz="1400" b="1" dirty="0">
                 <a:solidFill>
                   <a:srgbClr val="FFFFFF"/>
                 </a:solidFill>
-                <a:latin typeface="Calibri"/>
+                <a:latin typeface="Calibri" pitchFamily="34" charset="0"/>
+                <a:ea typeface="Calibri" pitchFamily="34" charset="-122"/>
+                <a:cs typeface="Calibri" pitchFamily="34" charset="-120"/>
               </a:rPr>
               <a:t>Tuần 1</a:t>
             </a:r>
-          </a:p>
-        </p:txBody>
-      </p:sp>
-      <p:sp>
-        <p:nvSpPr>
-          <p:cNvPr id="8" name="TextBox 7"/>
-          <p:cNvSpPr txBox="1"/>
-          <p:nvPr/>
-        </p:nvSpPr>
-        <p:spPr>
-          <a:xfrm>
-            <a:off x="1866900" y="1892300"/>
-            <a:ext cx="2730500" cy="698500"/>
-          </a:xfrm>
-          <a:prstGeom prst="rect">
-            <a:avLst/>
-          </a:prstGeom>
-          <a:noFill/>
-        </p:spPr>
-        <p:txBody>
-          <a:bodyPr wrap="square" lIns="0" tIns="0" rIns="0" bIns="0" anchor="ctr">
-            <a:spAutoFit/>
-          </a:bodyPr>
-          <a:lstStyle/>
-          <a:p>
-            <a:r>
-              <a:rPr sz="1550" b="0">
+            <a:endParaRPr lang="en-US" sz="1400" dirty="0"/>
+          </a:p>
+        </p:txBody>
+      </p:sp>
+      <p:sp>
+        <p:nvSpPr>
+          <p:cNvPr id="77" name="Text 5">
+            <a:extLst>
+              <a:ext uri="{FF2B5EF4-FFF2-40B4-BE49-F238E27FC236}">
+                <a16:creationId xmlns:a16="http://schemas.microsoft.com/office/drawing/2014/main" id="{A55D4EB3-8A02-A972-42B8-FA8BE25FE379}"/>
+              </a:ext>
+            </a:extLst>
+          </p:cNvPr>
+          <p:cNvSpPr txBox="1"/>
+          <p:nvPr/>
+        </p:nvSpPr>
+        <p:spPr>
+          <a:xfrm>
+            <a:off x="1865376" y="1901952"/>
+            <a:ext cx="3886200" cy="731520"/>
+          </a:xfrm>
+          <a:prstGeom prst="rect">
+            <a:avLst/>
+          </a:prstGeom>
+          <a:noFill/>
+          <a:ln/>
+        </p:spPr>
+        <p:txBody>
+          <a:bodyPr wrap="square" lIns="0" tIns="0" rIns="0" bIns="0" rtlCol="0" anchor="ctr"/>
+          <a:lstStyle/>
+          <a:p>
+            <a:pPr marL="0" indent="0">
+              <a:lnSpc>
+                <a:spcPct val="95000"/>
+              </a:lnSpc>
+              <a:buNone/>
+            </a:pPr>
+            <a:r>
+              <a:rPr lang="en-US" sz="1180" dirty="0">
                 <a:solidFill>
                   <a:srgbClr val="20223A"/>
                 </a:solidFill>
-                <a:latin typeface="Calibri"/>
+                <a:latin typeface="Calibri" pitchFamily="34" charset="0"/>
+                <a:ea typeface="Calibri" pitchFamily="34" charset="-122"/>
+                <a:cs typeface="Calibri" pitchFamily="34" charset="-120"/>
               </a:rPr>
               <a:t>Nghiên cứu nền tảng &amp; khảo sát liên quan; đặt vấn đề, phạm vi.</a:t>
             </a:r>
-          </a:p>
-        </p:txBody>
-      </p:sp>
-      <p:sp>
-        <p:nvSpPr>
-          <p:cNvPr id="9" name="TextBox 8"/>
-          <p:cNvSpPr txBox="1"/>
-          <p:nvPr/>
-        </p:nvSpPr>
-        <p:spPr>
-          <a:xfrm>
-            <a:off x="4724400" y="2108200"/>
-            <a:ext cx="1079500" cy="279400"/>
-          </a:xfrm>
-          <a:prstGeom prst="rect">
-            <a:avLst/>
-          </a:prstGeom>
-          <a:noFill/>
-        </p:spPr>
-        <p:txBody>
-          <a:bodyPr wrap="square" lIns="0" tIns="0" rIns="0" bIns="0" anchor="t">
-            <a:spAutoFit/>
-          </a:bodyPr>
-          <a:lstStyle/>
-          <a:p>
-            <a:r>
-              <a:rPr sz="1250" b="1">
-                <a:solidFill>
-                  <a:srgbClr val="3A36A0"/>
-                </a:solidFill>
-                <a:latin typeface="Calibri"/>
-              </a:rPr>
-              <a:t>✓ xong</a:t>
-            </a:r>
-          </a:p>
-        </p:txBody>
-      </p:sp>
-      <p:sp>
-        <p:nvSpPr>
-          <p:cNvPr id="10" name="Rectangle 9"/>
+            <a:endParaRPr lang="en-US" sz="1180" dirty="0"/>
+          </a:p>
+        </p:txBody>
+      </p:sp>
+      <p:sp>
+        <p:nvSpPr>
+          <p:cNvPr id="79" name="Shape 6">
+            <a:extLst>
+              <a:ext uri="{FF2B5EF4-FFF2-40B4-BE49-F238E27FC236}">
+                <a16:creationId xmlns:a16="http://schemas.microsoft.com/office/drawing/2014/main" id="{F4DF2498-D7F9-E8AE-B6C9-27FD6B19F4EA}"/>
+              </a:ext>
+            </a:extLst>
+          </p:cNvPr>
           <p:cNvSpPr/>
           <p:nvPr/>
         </p:nvSpPr>
         <p:spPr>
           <a:xfrm>
-            <a:off x="571500" y="2806700"/>
-            <a:ext cx="5334000" cy="927100"/>
-          </a:xfrm>
-          <a:prstGeom prst="rect">
-            <a:avLst/>
+            <a:off x="587114" y="3835908"/>
+            <a:ext cx="5340096" cy="932688"/>
+          </a:xfrm>
+          <a:prstGeom prst="roundRect">
+            <a:avLst>
+              <a:gd name="adj" fmla="val 4902"/>
+            </a:avLst>
+          </a:prstGeom>
+          <a:solidFill>
+            <a:srgbClr val="13123A"/>
+          </a:solidFill>
+          <a:ln w="12700">
+            <a:solidFill>
+              <a:srgbClr val="13123A"/>
+            </a:solidFill>
+            <a:prstDash val="solid"/>
+          </a:ln>
+        </p:spPr>
+        <p:txBody>
+          <a:bodyPr/>
+          <a:lstStyle/>
+          <a:p>
+            <a:endParaRPr lang="en-US"/>
+          </a:p>
+        </p:txBody>
+      </p:sp>
+      <p:sp>
+        <p:nvSpPr>
+          <p:cNvPr id="81" name="Shape 7">
+            <a:extLst>
+              <a:ext uri="{FF2B5EF4-FFF2-40B4-BE49-F238E27FC236}">
+                <a16:creationId xmlns:a16="http://schemas.microsoft.com/office/drawing/2014/main" id="{2100271F-9E82-B0F3-C223-9DC057293237}"/>
+              </a:ext>
+            </a:extLst>
+          </p:cNvPr>
+          <p:cNvSpPr/>
+          <p:nvPr/>
+        </p:nvSpPr>
+        <p:spPr>
+          <a:xfrm>
+            <a:off x="769994" y="4018788"/>
+            <a:ext cx="960120" cy="566928"/>
+          </a:xfrm>
+          <a:prstGeom prst="roundRect">
+            <a:avLst>
+              <a:gd name="adj" fmla="val 12903"/>
+            </a:avLst>
+          </a:prstGeom>
+          <a:solidFill>
+            <a:srgbClr val="E9970B"/>
+          </a:solidFill>
+          <a:ln w="12700">
+            <a:solidFill>
+              <a:srgbClr val="E9970B"/>
+            </a:solidFill>
+            <a:prstDash val="solid"/>
+          </a:ln>
+        </p:spPr>
+        <p:txBody>
+          <a:bodyPr/>
+          <a:lstStyle/>
+          <a:p>
+            <a:endParaRPr lang="en-US"/>
+          </a:p>
+        </p:txBody>
+      </p:sp>
+      <p:sp>
+        <p:nvSpPr>
+          <p:cNvPr id="83" name="Text 8">
+            <a:extLst>
+              <a:ext uri="{FF2B5EF4-FFF2-40B4-BE49-F238E27FC236}">
+                <a16:creationId xmlns:a16="http://schemas.microsoft.com/office/drawing/2014/main" id="{EC26944B-09D0-9A65-DBF7-8670F8D1EECF}"/>
+              </a:ext>
+            </a:extLst>
+          </p:cNvPr>
+          <p:cNvSpPr txBox="1"/>
+          <p:nvPr/>
+        </p:nvSpPr>
+        <p:spPr>
+          <a:xfrm>
+            <a:off x="769994" y="4018788"/>
+            <a:ext cx="960120" cy="566928"/>
+          </a:xfrm>
+          <a:prstGeom prst="rect">
+            <a:avLst/>
+          </a:prstGeom>
+          <a:noFill/>
+          <a:ln/>
+        </p:spPr>
+        <p:txBody>
+          <a:bodyPr wrap="square" lIns="0" tIns="0" rIns="0" bIns="0" rtlCol="0" anchor="ctr"/>
+          <a:lstStyle/>
+          <a:p>
+            <a:pPr marL="0" indent="0" algn="ctr">
+              <a:buNone/>
+            </a:pPr>
+            <a:r>
+              <a:rPr lang="en-US" sz="1400" b="1" dirty="0" err="1">
+                <a:solidFill>
+                  <a:srgbClr val="13123A"/>
+                </a:solidFill>
+                <a:latin typeface="Calibri" pitchFamily="34" charset="0"/>
+                <a:ea typeface="Calibri" pitchFamily="34" charset="-122"/>
+                <a:cs typeface="Calibri" pitchFamily="34" charset="-120"/>
+              </a:rPr>
+              <a:t>Tuần</a:t>
+            </a:r>
+            <a:r>
+              <a:rPr lang="en-US" sz="1400" b="1" dirty="0">
+                <a:solidFill>
+                  <a:srgbClr val="13123A"/>
+                </a:solidFill>
+                <a:latin typeface="Calibri" pitchFamily="34" charset="0"/>
+                <a:ea typeface="Calibri" pitchFamily="34" charset="-122"/>
+                <a:cs typeface="Calibri" pitchFamily="34" charset="-120"/>
+              </a:rPr>
+              <a:t> 3</a:t>
+            </a:r>
+            <a:endParaRPr lang="en-US" sz="1400" dirty="0"/>
+          </a:p>
+        </p:txBody>
+      </p:sp>
+      <p:sp>
+        <p:nvSpPr>
+          <p:cNvPr id="85" name="Text 9">
+            <a:extLst>
+              <a:ext uri="{FF2B5EF4-FFF2-40B4-BE49-F238E27FC236}">
+                <a16:creationId xmlns:a16="http://schemas.microsoft.com/office/drawing/2014/main" id="{40D85231-48FE-1DA5-8E1E-30238E27FCF4}"/>
+              </a:ext>
+            </a:extLst>
+          </p:cNvPr>
+          <p:cNvSpPr txBox="1"/>
+          <p:nvPr/>
+        </p:nvSpPr>
+        <p:spPr>
+          <a:xfrm>
+            <a:off x="1885562" y="3954780"/>
+            <a:ext cx="2788920" cy="731520"/>
+          </a:xfrm>
+          <a:prstGeom prst="rect">
+            <a:avLst/>
+          </a:prstGeom>
+          <a:noFill/>
+          <a:ln/>
+        </p:spPr>
+        <p:txBody>
+          <a:bodyPr wrap="square" lIns="0" tIns="0" rIns="0" bIns="0" rtlCol="0" anchor="ctr"/>
+          <a:lstStyle/>
+          <a:p>
+            <a:pPr>
+              <a:lnSpc>
+                <a:spcPct val="95000"/>
+              </a:lnSpc>
+            </a:pPr>
+            <a:r>
+              <a:rPr lang="en-US" sz="1180" dirty="0" err="1">
+                <a:solidFill>
+                  <a:srgbClr val="E7E8FB"/>
+                </a:solidFill>
+                <a:latin typeface="Calibri" pitchFamily="34" charset="0"/>
+                <a:ea typeface="Calibri" pitchFamily="34" charset="-122"/>
+                <a:cs typeface="Calibri" pitchFamily="34" charset="-120"/>
+              </a:rPr>
+              <a:t>Thiết</a:t>
+            </a:r>
+            <a:r>
+              <a:rPr lang="en-US" sz="1180" dirty="0">
+                <a:solidFill>
+                  <a:srgbClr val="E7E8FB"/>
+                </a:solidFill>
+                <a:latin typeface="Calibri" pitchFamily="34" charset="0"/>
+                <a:ea typeface="Calibri" pitchFamily="34" charset="-122"/>
+                <a:cs typeface="Calibri" pitchFamily="34" charset="-120"/>
+              </a:rPr>
+              <a:t> </a:t>
+            </a:r>
+            <a:r>
+              <a:rPr lang="en-US" sz="1180" dirty="0" err="1">
+                <a:solidFill>
+                  <a:srgbClr val="E7E8FB"/>
+                </a:solidFill>
+                <a:latin typeface="Calibri" pitchFamily="34" charset="0"/>
+                <a:ea typeface="Calibri" pitchFamily="34" charset="-122"/>
+                <a:cs typeface="Calibri" pitchFamily="34" charset="-120"/>
+              </a:rPr>
+              <a:t>kế</a:t>
+            </a:r>
+            <a:r>
+              <a:rPr lang="en-US" sz="1180" dirty="0">
+                <a:solidFill>
+                  <a:srgbClr val="E7E8FB"/>
+                </a:solidFill>
+                <a:latin typeface="Calibri" pitchFamily="34" charset="0"/>
+                <a:ea typeface="Calibri" pitchFamily="34" charset="-122"/>
+                <a:cs typeface="Calibri" pitchFamily="34" charset="-120"/>
+              </a:rPr>
+              <a:t> </a:t>
+            </a:r>
+            <a:r>
+              <a:rPr lang="en-US" sz="1180" dirty="0" err="1">
+                <a:solidFill>
+                  <a:srgbClr val="E7E8FB"/>
+                </a:solidFill>
+                <a:latin typeface="Calibri" pitchFamily="34" charset="0"/>
+                <a:ea typeface="Calibri" pitchFamily="34" charset="-122"/>
+                <a:cs typeface="Calibri" pitchFamily="34" charset="-120"/>
+              </a:rPr>
+              <a:t>kiến</a:t>
+            </a:r>
+            <a:r>
+              <a:rPr lang="en-US" sz="1180" dirty="0">
+                <a:solidFill>
+                  <a:srgbClr val="E7E8FB"/>
+                </a:solidFill>
+                <a:latin typeface="Calibri" pitchFamily="34" charset="0"/>
+                <a:ea typeface="Calibri" pitchFamily="34" charset="-122"/>
+                <a:cs typeface="Calibri" pitchFamily="34" charset="-120"/>
+              </a:rPr>
+              <a:t> </a:t>
+            </a:r>
+            <a:r>
+              <a:rPr lang="en-US" sz="1180" dirty="0" err="1">
+                <a:solidFill>
+                  <a:srgbClr val="E7E8FB"/>
+                </a:solidFill>
+                <a:latin typeface="Calibri" pitchFamily="34" charset="0"/>
+                <a:ea typeface="Calibri" pitchFamily="34" charset="-122"/>
+                <a:cs typeface="Calibri" pitchFamily="34" charset="-120"/>
+              </a:rPr>
+              <a:t>trúc</a:t>
+            </a:r>
+            <a:r>
+              <a:rPr lang="en-US" sz="1180" dirty="0">
+                <a:solidFill>
+                  <a:srgbClr val="E7E8FB"/>
+                </a:solidFill>
+                <a:latin typeface="Calibri" pitchFamily="34" charset="0"/>
+                <a:ea typeface="Calibri" pitchFamily="34" charset="-122"/>
+                <a:cs typeface="Calibri" pitchFamily="34" charset="-120"/>
+              </a:rPr>
+              <a:t> chi </a:t>
+            </a:r>
+            <a:r>
+              <a:rPr lang="en-US" sz="1180" dirty="0" err="1">
+                <a:solidFill>
+                  <a:srgbClr val="E7E8FB"/>
+                </a:solidFill>
+                <a:latin typeface="Calibri" pitchFamily="34" charset="0"/>
+                <a:ea typeface="Calibri" pitchFamily="34" charset="-122"/>
+                <a:cs typeface="Calibri" pitchFamily="34" charset="-120"/>
+              </a:rPr>
+              <a:t>tiết</a:t>
+            </a:r>
+            <a:r>
+              <a:rPr lang="en-US" sz="1180" dirty="0">
+                <a:solidFill>
+                  <a:srgbClr val="E7E8FB"/>
+                </a:solidFill>
+                <a:latin typeface="Calibri" pitchFamily="34" charset="0"/>
+                <a:ea typeface="Calibri" pitchFamily="34" charset="-122"/>
+                <a:cs typeface="Calibri" pitchFamily="34" charset="-120"/>
+              </a:rPr>
+              <a:t>, </a:t>
+            </a:r>
+            <a:r>
+              <a:rPr lang="en-US" sz="1180" dirty="0" err="1">
+                <a:solidFill>
+                  <a:srgbClr val="E7E8FB"/>
+                </a:solidFill>
+                <a:latin typeface="Calibri" pitchFamily="34" charset="0"/>
+                <a:ea typeface="Calibri" pitchFamily="34" charset="-122"/>
+                <a:cs typeface="Calibri" pitchFamily="34" charset="-120"/>
+              </a:rPr>
+              <a:t>xây</a:t>
+            </a:r>
+            <a:r>
+              <a:rPr lang="en-US" sz="1180" dirty="0">
+                <a:solidFill>
+                  <a:srgbClr val="E7E8FB"/>
+                </a:solidFill>
+                <a:latin typeface="Calibri" pitchFamily="34" charset="0"/>
+                <a:ea typeface="Calibri" pitchFamily="34" charset="-122"/>
+                <a:cs typeface="Calibri" pitchFamily="34" charset="-120"/>
+              </a:rPr>
+              <a:t> </a:t>
+            </a:r>
+            <a:r>
+              <a:rPr lang="en-US" sz="1180" dirty="0" err="1">
+                <a:solidFill>
+                  <a:srgbClr val="E7E8FB"/>
+                </a:solidFill>
+                <a:latin typeface="Calibri" pitchFamily="34" charset="0"/>
+                <a:ea typeface="Calibri" pitchFamily="34" charset="-122"/>
+                <a:cs typeface="Calibri" pitchFamily="34" charset="-120"/>
+              </a:rPr>
+              <a:t>dựng</a:t>
+            </a:r>
+            <a:r>
+              <a:rPr lang="en-US" sz="1180" dirty="0">
+                <a:solidFill>
+                  <a:srgbClr val="E7E8FB"/>
+                </a:solidFill>
+                <a:latin typeface="Calibri" pitchFamily="34" charset="0"/>
+                <a:ea typeface="Calibri" pitchFamily="34" charset="-122"/>
+                <a:cs typeface="Calibri" pitchFamily="34" charset="-120"/>
+              </a:rPr>
+              <a:t> database SQLite, schema, pipeline </a:t>
+            </a:r>
+            <a:r>
+              <a:rPr lang="en-US" sz="1180" dirty="0" err="1">
+                <a:solidFill>
+                  <a:srgbClr val="E7E8FB"/>
+                </a:solidFill>
+                <a:latin typeface="Calibri" pitchFamily="34" charset="0"/>
+                <a:ea typeface="Calibri" pitchFamily="34" charset="-122"/>
+                <a:cs typeface="Calibri" pitchFamily="34" charset="-120"/>
+              </a:rPr>
+              <a:t>hoàn</a:t>
+            </a:r>
+            <a:r>
+              <a:rPr lang="en-US" sz="1180" dirty="0">
+                <a:solidFill>
+                  <a:srgbClr val="E7E8FB"/>
+                </a:solidFill>
+                <a:latin typeface="Calibri" pitchFamily="34" charset="0"/>
+                <a:ea typeface="Calibri" pitchFamily="34" charset="-122"/>
+                <a:cs typeface="Calibri" pitchFamily="34" charset="-120"/>
+              </a:rPr>
+              <a:t> </a:t>
+            </a:r>
+            <a:r>
+              <a:rPr lang="en-US" sz="1180" dirty="0" err="1">
+                <a:solidFill>
+                  <a:srgbClr val="E7E8FB"/>
+                </a:solidFill>
+                <a:latin typeface="Calibri" pitchFamily="34" charset="0"/>
+                <a:ea typeface="Calibri" pitchFamily="34" charset="-122"/>
+                <a:cs typeface="Calibri" pitchFamily="34" charset="-120"/>
+              </a:rPr>
+              <a:t>chỉnh</a:t>
+            </a:r>
+            <a:endParaRPr lang="en-US" sz="1180" dirty="0"/>
+          </a:p>
+        </p:txBody>
+      </p:sp>
+      <p:sp>
+        <p:nvSpPr>
+          <p:cNvPr id="87" name="Text 10">
+            <a:extLst>
+              <a:ext uri="{FF2B5EF4-FFF2-40B4-BE49-F238E27FC236}">
+                <a16:creationId xmlns:a16="http://schemas.microsoft.com/office/drawing/2014/main" id="{581D1718-B8A9-29E5-9C69-4FAB6BE99077}"/>
+              </a:ext>
+            </a:extLst>
+          </p:cNvPr>
+          <p:cNvSpPr txBox="1"/>
+          <p:nvPr/>
+        </p:nvSpPr>
+        <p:spPr>
+          <a:xfrm>
+            <a:off x="4747634" y="4165092"/>
+            <a:ext cx="1078992" cy="274320"/>
+          </a:xfrm>
+          <a:prstGeom prst="rect">
+            <a:avLst/>
+          </a:prstGeom>
+          <a:noFill/>
+          <a:ln/>
+        </p:spPr>
+        <p:txBody>
+          <a:bodyPr wrap="square" lIns="0" tIns="0" rIns="0" bIns="0" rtlCol="0" anchor="ctr"/>
+          <a:lstStyle/>
+          <a:p>
+            <a:pPr marL="0" indent="0">
+              <a:buNone/>
+            </a:pPr>
+            <a:r>
+              <a:rPr lang="en-US" sz="950" b="1" dirty="0">
+                <a:solidFill>
+                  <a:srgbClr val="E9970B"/>
+                </a:solidFill>
+                <a:latin typeface="Calibri" pitchFamily="34" charset="0"/>
+                <a:ea typeface="Calibri" pitchFamily="34" charset="-122"/>
+                <a:cs typeface="Calibri" pitchFamily="34" charset="-120"/>
+              </a:rPr>
+              <a:t>◀ đang ở đây</a:t>
+            </a:r>
+            <a:endParaRPr lang="en-US" sz="950" dirty="0"/>
+          </a:p>
+        </p:txBody>
+      </p:sp>
+      <p:sp>
+        <p:nvSpPr>
+          <p:cNvPr id="89" name="Shape 11">
+            <a:extLst>
+              <a:ext uri="{FF2B5EF4-FFF2-40B4-BE49-F238E27FC236}">
+                <a16:creationId xmlns:a16="http://schemas.microsoft.com/office/drawing/2014/main" id="{2803E927-4A04-E358-9E65-2EC54756AFFE}"/>
+              </a:ext>
+            </a:extLst>
+          </p:cNvPr>
+          <p:cNvSpPr/>
+          <p:nvPr/>
+        </p:nvSpPr>
+        <p:spPr>
+          <a:xfrm>
+            <a:off x="566928" y="2839816"/>
+            <a:ext cx="5340096" cy="932688"/>
+          </a:xfrm>
+          <a:prstGeom prst="roundRect">
+            <a:avLst>
+              <a:gd name="adj" fmla="val 4902"/>
+            </a:avLst>
           </a:prstGeom>
           <a:solidFill>
             <a:srgbClr val="F1F2FB"/>
           </a:solidFill>
-          <a:ln>
-            <a:noFill/>
+          <a:ln w="12700">
+            <a:solidFill>
+              <a:srgbClr val="F1F2FB"/>
+            </a:solidFill>
+            <a:prstDash val="solid"/>
           </a:ln>
-          <a:effectLst/>
-        </p:spPr>
-        <p:style>
-          <a:lnRef idx="1">
-            <a:schemeClr val="accent1"/>
-          </a:lnRef>
-          <a:fillRef idx="3">
-            <a:schemeClr val="accent1"/>
-          </a:fillRef>
-          <a:effectRef idx="2">
-            <a:schemeClr val="accent1"/>
-          </a:effectRef>
-          <a:fontRef idx="minor">
-            <a:schemeClr val="lt1"/>
-          </a:fontRef>
-        </p:style>
-        <p:txBody>
-          <a:bodyPr rtlCol="0" anchor="ctr"/>
-          <a:lstStyle/>
-          <a:p>
-            <a:pPr algn="ctr"/>
-            <a:endParaRPr/>
-          </a:p>
-        </p:txBody>
-      </p:sp>
-      <p:sp>
-        <p:nvSpPr>
-          <p:cNvPr id="11" name="Rectangle 10"/>
+        </p:spPr>
+        <p:txBody>
+          <a:bodyPr/>
+          <a:lstStyle/>
+          <a:p>
+            <a:endParaRPr lang="en-US"/>
+          </a:p>
+        </p:txBody>
+      </p:sp>
+      <p:sp>
+        <p:nvSpPr>
+          <p:cNvPr id="91" name="Shape 12">
+            <a:extLst>
+              <a:ext uri="{FF2B5EF4-FFF2-40B4-BE49-F238E27FC236}">
+                <a16:creationId xmlns:a16="http://schemas.microsoft.com/office/drawing/2014/main" id="{639628D0-CD50-3079-9383-FA3E6E0F1B19}"/>
+              </a:ext>
+            </a:extLst>
+          </p:cNvPr>
           <p:cNvSpPr/>
           <p:nvPr/>
         </p:nvSpPr>
         <p:spPr>
           <a:xfrm>
-            <a:off x="749300" y="2984500"/>
-            <a:ext cx="965200" cy="571500"/>
-          </a:xfrm>
-          <a:prstGeom prst="rect">
-            <a:avLst/>
+            <a:off x="749808" y="3022696"/>
+            <a:ext cx="960120" cy="566928"/>
+          </a:xfrm>
+          <a:prstGeom prst="roundRect">
+            <a:avLst>
+              <a:gd name="adj" fmla="val 12903"/>
+            </a:avLst>
           </a:prstGeom>
           <a:solidFill>
             <a:srgbClr val="3A36A0"/>
           </a:solidFill>
-          <a:ln>
-            <a:noFill/>
+          <a:ln w="12700">
+            <a:solidFill>
+              <a:srgbClr val="3A36A0"/>
+            </a:solidFill>
+            <a:prstDash val="solid"/>
           </a:ln>
-          <a:effectLst/>
-        </p:spPr>
-        <p:style>
-          <a:lnRef idx="1">
-            <a:schemeClr val="accent1"/>
-          </a:lnRef>
-          <a:fillRef idx="3">
-            <a:schemeClr val="accent1"/>
-          </a:fillRef>
-          <a:effectRef idx="2">
-            <a:schemeClr val="accent1"/>
-          </a:effectRef>
-          <a:fontRef idx="minor">
-            <a:schemeClr val="lt1"/>
-          </a:fontRef>
-        </p:style>
-        <p:txBody>
-          <a:bodyPr rtlCol="0" anchor="ctr"/>
-          <a:lstStyle/>
-          <a:p>
-            <a:pPr algn="ctr"/>
-            <a:endParaRPr/>
-          </a:p>
-        </p:txBody>
-      </p:sp>
-      <p:sp>
-        <p:nvSpPr>
-          <p:cNvPr id="12" name="TextBox 11"/>
-          <p:cNvSpPr txBox="1"/>
-          <p:nvPr/>
-        </p:nvSpPr>
-        <p:spPr>
-          <a:xfrm>
-            <a:off x="749300" y="2984500"/>
-            <a:ext cx="965200" cy="571500"/>
-          </a:xfrm>
-          <a:prstGeom prst="rect">
-            <a:avLst/>
-          </a:prstGeom>
-          <a:noFill/>
-        </p:spPr>
-        <p:txBody>
-          <a:bodyPr wrap="square" lIns="0" tIns="0" rIns="0" bIns="0" anchor="ctr">
-            <a:spAutoFit/>
-          </a:bodyPr>
-          <a:lstStyle/>
-          <a:p>
-            <a:pPr algn="ctr"/>
-            <a:r>
-              <a:rPr sz="1700" b="1">
+        </p:spPr>
+        <p:txBody>
+          <a:bodyPr/>
+          <a:lstStyle/>
+          <a:p>
+            <a:endParaRPr lang="en-US"/>
+          </a:p>
+        </p:txBody>
+      </p:sp>
+      <p:sp>
+        <p:nvSpPr>
+          <p:cNvPr id="93" name="Text 13">
+            <a:extLst>
+              <a:ext uri="{FF2B5EF4-FFF2-40B4-BE49-F238E27FC236}">
+                <a16:creationId xmlns:a16="http://schemas.microsoft.com/office/drawing/2014/main" id="{06F3CA37-D31F-5868-D5A6-CC4EEA147C5E}"/>
+              </a:ext>
+            </a:extLst>
+          </p:cNvPr>
+          <p:cNvSpPr txBox="1"/>
+          <p:nvPr/>
+        </p:nvSpPr>
+        <p:spPr>
+          <a:xfrm>
+            <a:off x="749808" y="3022696"/>
+            <a:ext cx="960120" cy="566928"/>
+          </a:xfrm>
+          <a:prstGeom prst="rect">
+            <a:avLst/>
+          </a:prstGeom>
+          <a:noFill/>
+          <a:ln/>
+        </p:spPr>
+        <p:txBody>
+          <a:bodyPr wrap="square" lIns="0" tIns="0" rIns="0" bIns="0" rtlCol="0" anchor="ctr"/>
+          <a:lstStyle/>
+          <a:p>
+            <a:pPr marL="0" indent="0" algn="ctr">
+              <a:buNone/>
+            </a:pPr>
+            <a:r>
+              <a:rPr lang="en-US" sz="1400" b="1" dirty="0" err="1">
                 <a:solidFill>
                   <a:srgbClr val="FFFFFF"/>
                 </a:solidFill>
-                <a:latin typeface="Calibri"/>
-              </a:rPr>
-              <a:t>Tuần 2</a:t>
-            </a:r>
-          </a:p>
-        </p:txBody>
-      </p:sp>
-      <p:sp>
-        <p:nvSpPr>
-          <p:cNvPr id="13" name="TextBox 12"/>
-          <p:cNvSpPr txBox="1"/>
-          <p:nvPr/>
-        </p:nvSpPr>
-        <p:spPr>
-          <a:xfrm>
-            <a:off x="1866900" y="2921000"/>
-            <a:ext cx="2730500" cy="698500"/>
-          </a:xfrm>
-          <a:prstGeom prst="rect">
-            <a:avLst/>
-          </a:prstGeom>
-          <a:noFill/>
-        </p:spPr>
-        <p:txBody>
-          <a:bodyPr wrap="square" lIns="0" tIns="0" rIns="0" bIns="0" anchor="ctr">
-            <a:spAutoFit/>
-          </a:bodyPr>
-          <a:lstStyle/>
-          <a:p>
-            <a:r>
-              <a:rPr sz="1500" b="0">
-                <a:solidFill>
-                  <a:srgbClr val="20223A"/>
-                </a:solidFill>
-                <a:latin typeface="Calibri"/>
-              </a:rPr>
-              <a:t>Rà soát benchmark; khung 8 năng lực; kiến trúc phân lớp; chốt công nghệ.</a:t>
-            </a:r>
-          </a:p>
-        </p:txBody>
-      </p:sp>
-      <p:sp>
-        <p:nvSpPr>
-          <p:cNvPr id="14" name="TextBox 13"/>
-          <p:cNvSpPr txBox="1"/>
-          <p:nvPr/>
-        </p:nvSpPr>
-        <p:spPr>
-          <a:xfrm>
-            <a:off x="4724400" y="3136900"/>
-            <a:ext cx="1079500" cy="279400"/>
-          </a:xfrm>
-          <a:prstGeom prst="rect">
-            <a:avLst/>
-          </a:prstGeom>
-          <a:noFill/>
-        </p:spPr>
-        <p:txBody>
-          <a:bodyPr wrap="square" lIns="0" tIns="0" rIns="0" bIns="0" anchor="t">
-            <a:spAutoFit/>
-          </a:bodyPr>
-          <a:lstStyle/>
-          <a:p>
-            <a:r>
-              <a:rPr sz="1250" b="1">
-                <a:solidFill>
-                  <a:srgbClr val="3A36A0"/>
-                </a:solidFill>
-                <a:latin typeface="Calibri"/>
-              </a:rPr>
-              <a:t>✓ xong</a:t>
-            </a:r>
-          </a:p>
-        </p:txBody>
-      </p:sp>
-      <p:sp>
-        <p:nvSpPr>
-          <p:cNvPr id="15" name="Rectangle 14"/>
+                <a:latin typeface="Calibri" pitchFamily="34" charset="0"/>
+                <a:ea typeface="Calibri" pitchFamily="34" charset="-122"/>
+                <a:cs typeface="Calibri" pitchFamily="34" charset="-120"/>
+              </a:rPr>
+              <a:t>Tuần</a:t>
+            </a:r>
+            <a:r>
+              <a:rPr lang="en-US" sz="1400" b="1" dirty="0">
+                <a:solidFill>
+                  <a:srgbClr val="FFFFFF"/>
+                </a:solidFill>
+                <a:latin typeface="Calibri" pitchFamily="34" charset="0"/>
+                <a:ea typeface="Calibri" pitchFamily="34" charset="-122"/>
+                <a:cs typeface="Calibri" pitchFamily="34" charset="-120"/>
+              </a:rPr>
+              <a:t> 2</a:t>
+            </a:r>
+            <a:endParaRPr lang="en-US" sz="1400" dirty="0"/>
+          </a:p>
+        </p:txBody>
+      </p:sp>
+      <p:sp>
+        <p:nvSpPr>
+          <p:cNvPr id="95" name="Text 14">
+            <a:extLst>
+              <a:ext uri="{FF2B5EF4-FFF2-40B4-BE49-F238E27FC236}">
+                <a16:creationId xmlns:a16="http://schemas.microsoft.com/office/drawing/2014/main" id="{435FA8AD-7761-F1F3-A1A1-B287FB6D3C3F}"/>
+              </a:ext>
+            </a:extLst>
+          </p:cNvPr>
+          <p:cNvSpPr txBox="1"/>
+          <p:nvPr/>
+        </p:nvSpPr>
+        <p:spPr>
+          <a:xfrm>
+            <a:off x="1865376" y="2958688"/>
+            <a:ext cx="3886200" cy="731520"/>
+          </a:xfrm>
+          <a:prstGeom prst="rect">
+            <a:avLst/>
+          </a:prstGeom>
+          <a:noFill/>
+          <a:ln/>
+        </p:spPr>
+        <p:txBody>
+          <a:bodyPr wrap="square" lIns="0" tIns="0" rIns="0" bIns="0" rtlCol="0" anchor="ctr"/>
+          <a:lstStyle/>
+          <a:p>
+            <a:pPr>
+              <a:lnSpc>
+                <a:spcPct val="95000"/>
+              </a:lnSpc>
+            </a:pPr>
+            <a:r>
+              <a:rPr lang="en-US" sz="1180" dirty="0" err="1">
+                <a:latin typeface="Calibri" pitchFamily="34" charset="0"/>
+                <a:ea typeface="Calibri" pitchFamily="34" charset="-122"/>
+                <a:cs typeface="Calibri" pitchFamily="34" charset="-120"/>
+              </a:rPr>
+              <a:t>Rà</a:t>
+            </a:r>
+            <a:r>
+              <a:rPr lang="en-US" sz="1180" dirty="0">
+                <a:latin typeface="Calibri" pitchFamily="34" charset="0"/>
+                <a:ea typeface="Calibri" pitchFamily="34" charset="-122"/>
+                <a:cs typeface="Calibri" pitchFamily="34" charset="-120"/>
+              </a:rPr>
+              <a:t> </a:t>
+            </a:r>
+            <a:r>
+              <a:rPr lang="en-US" sz="1180" dirty="0" err="1">
+                <a:latin typeface="Calibri" pitchFamily="34" charset="0"/>
+                <a:ea typeface="Calibri" pitchFamily="34" charset="-122"/>
+                <a:cs typeface="Calibri" pitchFamily="34" charset="-120"/>
+              </a:rPr>
+              <a:t>soát</a:t>
+            </a:r>
+            <a:r>
+              <a:rPr lang="en-US" sz="1180" dirty="0">
+                <a:latin typeface="Calibri" pitchFamily="34" charset="0"/>
+                <a:ea typeface="Calibri" pitchFamily="34" charset="-122"/>
+                <a:cs typeface="Calibri" pitchFamily="34" charset="-120"/>
+              </a:rPr>
+              <a:t> benchmark; </a:t>
+            </a:r>
+            <a:r>
+              <a:rPr lang="en-US" sz="1180" dirty="0" err="1">
+                <a:latin typeface="Calibri" pitchFamily="34" charset="0"/>
+                <a:ea typeface="Calibri" pitchFamily="34" charset="-122"/>
+                <a:cs typeface="Calibri" pitchFamily="34" charset="-120"/>
+              </a:rPr>
+              <a:t>khung</a:t>
+            </a:r>
+            <a:r>
+              <a:rPr lang="en-US" sz="1180" dirty="0">
+                <a:latin typeface="Calibri" pitchFamily="34" charset="0"/>
+                <a:ea typeface="Calibri" pitchFamily="34" charset="-122"/>
+                <a:cs typeface="Calibri" pitchFamily="34" charset="-120"/>
+              </a:rPr>
+              <a:t> </a:t>
+            </a:r>
+            <a:r>
+              <a:rPr lang="en-US" sz="1180" dirty="0" err="1">
+                <a:latin typeface="Calibri" pitchFamily="34" charset="0"/>
+                <a:ea typeface="Calibri" pitchFamily="34" charset="-122"/>
+                <a:cs typeface="Calibri" pitchFamily="34" charset="-120"/>
+              </a:rPr>
+              <a:t>năng</a:t>
+            </a:r>
+            <a:r>
+              <a:rPr lang="en-US" sz="1180" dirty="0">
+                <a:latin typeface="Calibri" pitchFamily="34" charset="0"/>
+                <a:ea typeface="Calibri" pitchFamily="34" charset="-122"/>
+                <a:cs typeface="Calibri" pitchFamily="34" charset="-120"/>
+              </a:rPr>
+              <a:t> </a:t>
+            </a:r>
+            <a:r>
+              <a:rPr lang="en-US" sz="1180" dirty="0" err="1">
+                <a:latin typeface="Calibri" pitchFamily="34" charset="0"/>
+                <a:ea typeface="Calibri" pitchFamily="34" charset="-122"/>
+                <a:cs typeface="Calibri" pitchFamily="34" charset="-120"/>
+              </a:rPr>
+              <a:t>lực</a:t>
+            </a:r>
+            <a:r>
+              <a:rPr lang="en-US" sz="1180" dirty="0">
+                <a:latin typeface="Calibri" pitchFamily="34" charset="0"/>
+                <a:ea typeface="Calibri" pitchFamily="34" charset="-122"/>
+                <a:cs typeface="Calibri" pitchFamily="34" charset="-120"/>
+              </a:rPr>
+              <a:t>; </a:t>
+            </a:r>
+            <a:r>
+              <a:rPr lang="en-US" sz="1180" dirty="0" err="1">
+                <a:latin typeface="Calibri" pitchFamily="34" charset="0"/>
+                <a:ea typeface="Calibri" pitchFamily="34" charset="-122"/>
+                <a:cs typeface="Calibri" pitchFamily="34" charset="-120"/>
+              </a:rPr>
+              <a:t>kiến</a:t>
+            </a:r>
+            <a:r>
+              <a:rPr lang="en-US" sz="1180" dirty="0">
+                <a:latin typeface="Calibri" pitchFamily="34" charset="0"/>
+                <a:ea typeface="Calibri" pitchFamily="34" charset="-122"/>
+                <a:cs typeface="Calibri" pitchFamily="34" charset="-120"/>
+              </a:rPr>
+              <a:t> </a:t>
+            </a:r>
+            <a:r>
+              <a:rPr lang="en-US" sz="1180" dirty="0" err="1">
+                <a:latin typeface="Calibri" pitchFamily="34" charset="0"/>
+                <a:ea typeface="Calibri" pitchFamily="34" charset="-122"/>
+                <a:cs typeface="Calibri" pitchFamily="34" charset="-120"/>
+              </a:rPr>
+              <a:t>trúc</a:t>
+            </a:r>
+            <a:r>
+              <a:rPr lang="en-US" sz="1180" dirty="0">
+                <a:latin typeface="Calibri" pitchFamily="34" charset="0"/>
+                <a:ea typeface="Calibri" pitchFamily="34" charset="-122"/>
+                <a:cs typeface="Calibri" pitchFamily="34" charset="-120"/>
+              </a:rPr>
+              <a:t> </a:t>
+            </a:r>
+            <a:r>
+              <a:rPr lang="en-US" sz="1180" dirty="0" err="1">
+                <a:latin typeface="Calibri" pitchFamily="34" charset="0"/>
+                <a:ea typeface="Calibri" pitchFamily="34" charset="-122"/>
+                <a:cs typeface="Calibri" pitchFamily="34" charset="-120"/>
+              </a:rPr>
+              <a:t>phân</a:t>
+            </a:r>
+            <a:r>
+              <a:rPr lang="en-US" sz="1180" dirty="0">
+                <a:latin typeface="Calibri" pitchFamily="34" charset="0"/>
+                <a:ea typeface="Calibri" pitchFamily="34" charset="-122"/>
+                <a:cs typeface="Calibri" pitchFamily="34" charset="-120"/>
+              </a:rPr>
+              <a:t> </a:t>
+            </a:r>
+            <a:r>
+              <a:rPr lang="en-US" sz="1180" dirty="0" err="1">
+                <a:latin typeface="Calibri" pitchFamily="34" charset="0"/>
+                <a:ea typeface="Calibri" pitchFamily="34" charset="-122"/>
+                <a:cs typeface="Calibri" pitchFamily="34" charset="-120"/>
+              </a:rPr>
+              <a:t>lớp</a:t>
+            </a:r>
+            <a:r>
+              <a:rPr lang="en-US" sz="1180" dirty="0">
+                <a:latin typeface="Calibri" pitchFamily="34" charset="0"/>
+                <a:ea typeface="Calibri" pitchFamily="34" charset="-122"/>
+                <a:cs typeface="Calibri" pitchFamily="34" charset="-120"/>
+              </a:rPr>
+              <a:t>; </a:t>
+            </a:r>
+            <a:r>
+              <a:rPr lang="en-US" sz="1180" dirty="0" err="1">
+                <a:latin typeface="Calibri" pitchFamily="34" charset="0"/>
+                <a:ea typeface="Calibri" pitchFamily="34" charset="-122"/>
+                <a:cs typeface="Calibri" pitchFamily="34" charset="-120"/>
+              </a:rPr>
+              <a:t>chốt</a:t>
+            </a:r>
+            <a:r>
+              <a:rPr lang="en-US" sz="1180" dirty="0">
+                <a:latin typeface="Calibri" pitchFamily="34" charset="0"/>
+                <a:ea typeface="Calibri" pitchFamily="34" charset="-122"/>
+                <a:cs typeface="Calibri" pitchFamily="34" charset="-120"/>
+              </a:rPr>
+              <a:t> </a:t>
+            </a:r>
+            <a:r>
+              <a:rPr lang="en-US" sz="1180" dirty="0" err="1">
+                <a:latin typeface="Calibri" pitchFamily="34" charset="0"/>
+                <a:ea typeface="Calibri" pitchFamily="34" charset="-122"/>
+                <a:cs typeface="Calibri" pitchFamily="34" charset="-120"/>
+              </a:rPr>
+              <a:t>công</a:t>
+            </a:r>
+            <a:r>
+              <a:rPr lang="en-US" sz="1180" dirty="0">
+                <a:latin typeface="Calibri" pitchFamily="34" charset="0"/>
+                <a:ea typeface="Calibri" pitchFamily="34" charset="-122"/>
+                <a:cs typeface="Calibri" pitchFamily="34" charset="-120"/>
+              </a:rPr>
+              <a:t> </a:t>
+            </a:r>
+            <a:r>
+              <a:rPr lang="en-US" sz="1180" dirty="0" err="1">
+                <a:latin typeface="Calibri" pitchFamily="34" charset="0"/>
+                <a:ea typeface="Calibri" pitchFamily="34" charset="-122"/>
+                <a:cs typeface="Calibri" pitchFamily="34" charset="-120"/>
+              </a:rPr>
+              <a:t>nghệ</a:t>
+            </a:r>
+            <a:r>
+              <a:rPr lang="en-US" sz="1180" dirty="0">
+                <a:latin typeface="Calibri" pitchFamily="34" charset="0"/>
+                <a:ea typeface="Calibri" pitchFamily="34" charset="-122"/>
+                <a:cs typeface="Calibri" pitchFamily="34" charset="-120"/>
+              </a:rPr>
+              <a:t>.</a:t>
+            </a:r>
+            <a:endParaRPr lang="en-US" sz="1180" dirty="0"/>
+          </a:p>
+        </p:txBody>
+      </p:sp>
+      <p:sp>
+        <p:nvSpPr>
+          <p:cNvPr id="97" name="Shape 15">
+            <a:extLst>
+              <a:ext uri="{FF2B5EF4-FFF2-40B4-BE49-F238E27FC236}">
+                <a16:creationId xmlns:a16="http://schemas.microsoft.com/office/drawing/2014/main" id="{C05A664E-EF36-2E26-0AB8-4FE3BA6E23B5}"/>
+              </a:ext>
+            </a:extLst>
+          </p:cNvPr>
           <p:cNvSpPr/>
           <p:nvPr/>
         </p:nvSpPr>
         <p:spPr>
           <a:xfrm>
-            <a:off x="571500" y="3835400"/>
-            <a:ext cx="5334000" cy="927100"/>
-          </a:xfrm>
-          <a:prstGeom prst="rect">
-            <a:avLst/>
-          </a:prstGeom>
-          <a:solidFill>
-            <a:srgbClr val="13123A"/>
-          </a:solidFill>
-          <a:ln>
-            <a:noFill/>
-          </a:ln>
-          <a:effectLst/>
-        </p:spPr>
-        <p:style>
-          <a:lnRef idx="1">
-            <a:schemeClr val="accent1"/>
-          </a:lnRef>
-          <a:fillRef idx="3">
-            <a:schemeClr val="accent1"/>
-          </a:fillRef>
-          <a:effectRef idx="2">
-            <a:schemeClr val="accent1"/>
-          </a:effectRef>
-          <a:fontRef idx="minor">
-            <a:schemeClr val="lt1"/>
-          </a:fontRef>
-        </p:style>
-        <p:txBody>
-          <a:bodyPr rtlCol="0" anchor="ctr"/>
-          <a:lstStyle/>
-          <a:p>
-            <a:pPr algn="ctr"/>
-            <a:endParaRPr/>
-          </a:p>
-        </p:txBody>
-      </p:sp>
-      <p:sp>
-        <p:nvSpPr>
-          <p:cNvPr id="16" name="Rectangle 15"/>
-          <p:cNvSpPr/>
-          <p:nvPr/>
-        </p:nvSpPr>
-        <p:spPr>
-          <a:xfrm>
-            <a:off x="749300" y="4013200"/>
-            <a:ext cx="965200" cy="571500"/>
-          </a:xfrm>
-          <a:prstGeom prst="rect">
-            <a:avLst/>
-          </a:prstGeom>
-          <a:solidFill>
-            <a:srgbClr val="E9970B"/>
-          </a:solidFill>
-          <a:ln>
-            <a:noFill/>
-          </a:ln>
-          <a:effectLst/>
-        </p:spPr>
-        <p:style>
-          <a:lnRef idx="1">
-            <a:schemeClr val="accent1"/>
-          </a:lnRef>
-          <a:fillRef idx="3">
-            <a:schemeClr val="accent1"/>
-          </a:fillRef>
-          <a:effectRef idx="2">
-            <a:schemeClr val="accent1"/>
-          </a:effectRef>
-          <a:fontRef idx="minor">
-            <a:schemeClr val="lt1"/>
-          </a:fontRef>
-        </p:style>
-        <p:txBody>
-          <a:bodyPr rtlCol="0" anchor="ctr"/>
-          <a:lstStyle/>
-          <a:p>
-            <a:pPr algn="ctr"/>
-            <a:endParaRPr/>
-          </a:p>
-        </p:txBody>
-      </p:sp>
-      <p:sp>
-        <p:nvSpPr>
-          <p:cNvPr id="17" name="TextBox 16"/>
-          <p:cNvSpPr txBox="1"/>
-          <p:nvPr/>
-        </p:nvSpPr>
-        <p:spPr>
-          <a:xfrm>
-            <a:off x="749300" y="4013200"/>
-            <a:ext cx="965200" cy="571500"/>
-          </a:xfrm>
-          <a:prstGeom prst="rect">
-            <a:avLst/>
-          </a:prstGeom>
-          <a:noFill/>
-        </p:spPr>
-        <p:txBody>
-          <a:bodyPr wrap="square" lIns="0" tIns="0" rIns="0" bIns="0" anchor="ctr">
-            <a:spAutoFit/>
-          </a:bodyPr>
-          <a:lstStyle/>
-          <a:p>
-            <a:pPr algn="ctr"/>
-            <a:r>
-              <a:rPr sz="1700" b="1">
-                <a:solidFill>
-                  <a:srgbClr val="13123A"/>
-                </a:solidFill>
-                <a:latin typeface="Calibri"/>
-              </a:rPr>
-              <a:t>Tuần 3</a:t>
-            </a:r>
-          </a:p>
-        </p:txBody>
-      </p:sp>
-      <p:sp>
-        <p:nvSpPr>
-          <p:cNvPr id="18" name="TextBox 17"/>
-          <p:cNvSpPr txBox="1"/>
-          <p:nvPr/>
-        </p:nvSpPr>
-        <p:spPr>
-          <a:xfrm>
-            <a:off x="1866900" y="3949700"/>
-            <a:ext cx="2794000" cy="698500"/>
-          </a:xfrm>
-          <a:prstGeom prst="rect">
-            <a:avLst/>
-          </a:prstGeom>
-          <a:noFill/>
-        </p:spPr>
-        <p:txBody>
-          <a:bodyPr wrap="square" lIns="0" tIns="0" rIns="0" bIns="0" anchor="ctr">
-            <a:spAutoFit/>
-          </a:bodyPr>
-          <a:lstStyle/>
-          <a:p>
-            <a:r>
-              <a:rPr sz="1500" b="0">
-                <a:solidFill>
-                  <a:srgbClr val="E7E8FB"/>
-                </a:solidFill>
-                <a:latin typeface="Calibri"/>
-              </a:rPr>
-              <a:t>Kho ký ức SQLite + chỉ mục dense; chạy đầu–cuối; dựng nhật ký vết.</a:t>
-            </a:r>
-          </a:p>
-        </p:txBody>
-      </p:sp>
-      <p:sp>
-        <p:nvSpPr>
-          <p:cNvPr id="19" name="TextBox 18"/>
-          <p:cNvSpPr txBox="1"/>
-          <p:nvPr/>
-        </p:nvSpPr>
-        <p:spPr>
-          <a:xfrm>
-            <a:off x="4724400" y="4165600"/>
-            <a:ext cx="1079500" cy="279400"/>
-          </a:xfrm>
-          <a:prstGeom prst="rect">
-            <a:avLst/>
-          </a:prstGeom>
-          <a:noFill/>
-        </p:spPr>
-        <p:txBody>
-          <a:bodyPr wrap="square" lIns="0" tIns="0" rIns="0" bIns="0" anchor="t">
-            <a:spAutoFit/>
-          </a:bodyPr>
-          <a:lstStyle/>
-          <a:p>
-            <a:r>
-              <a:rPr sz="1250" b="1">
-                <a:solidFill>
-                  <a:srgbClr val="E9970B"/>
-                </a:solidFill>
-                <a:latin typeface="Calibri"/>
-              </a:rPr>
-              <a:t>◀ đang ở đây</a:t>
-            </a:r>
-          </a:p>
-        </p:txBody>
-      </p:sp>
-      <p:sp>
-        <p:nvSpPr>
-          <p:cNvPr id="20" name="Rectangle 19"/>
-          <p:cNvSpPr/>
-          <p:nvPr/>
-        </p:nvSpPr>
-        <p:spPr>
-          <a:xfrm>
-            <a:off x="571500" y="4864100"/>
-            <a:ext cx="5334000" cy="927100"/>
-          </a:xfrm>
-          <a:prstGeom prst="rect">
-            <a:avLst/>
+            <a:off x="566928" y="4855464"/>
+            <a:ext cx="5340096" cy="932688"/>
+          </a:xfrm>
+          <a:prstGeom prst="roundRect">
+            <a:avLst>
+              <a:gd name="adj" fmla="val 4902"/>
+            </a:avLst>
           </a:prstGeom>
           <a:solidFill>
             <a:srgbClr val="F1F2FB"/>
           </a:solidFill>
-          <a:ln>
-            <a:noFill/>
+          <a:ln w="12700">
+            <a:solidFill>
+              <a:srgbClr val="F1F2FB"/>
+            </a:solidFill>
+            <a:prstDash val="solid"/>
           </a:ln>
-          <a:effectLst/>
-        </p:spPr>
-        <p:style>
-          <a:lnRef idx="1">
-            <a:schemeClr val="accent1"/>
-          </a:lnRef>
-          <a:fillRef idx="3">
-            <a:schemeClr val="accent1"/>
-          </a:fillRef>
-          <a:effectRef idx="2">
-            <a:schemeClr val="accent1"/>
-          </a:effectRef>
-          <a:fontRef idx="minor">
-            <a:schemeClr val="lt1"/>
-          </a:fontRef>
-        </p:style>
-        <p:txBody>
-          <a:bodyPr rtlCol="0" anchor="ctr"/>
-          <a:lstStyle/>
-          <a:p>
-            <a:pPr algn="ctr"/>
-            <a:endParaRPr/>
-          </a:p>
-        </p:txBody>
-      </p:sp>
-      <p:sp>
-        <p:nvSpPr>
-          <p:cNvPr id="21" name="Rectangle 20"/>
+        </p:spPr>
+        <p:txBody>
+          <a:bodyPr/>
+          <a:lstStyle/>
+          <a:p>
+            <a:endParaRPr lang="en-US"/>
+          </a:p>
+        </p:txBody>
+      </p:sp>
+      <p:sp>
+        <p:nvSpPr>
+          <p:cNvPr id="99" name="Shape 16">
+            <a:extLst>
+              <a:ext uri="{FF2B5EF4-FFF2-40B4-BE49-F238E27FC236}">
+                <a16:creationId xmlns:a16="http://schemas.microsoft.com/office/drawing/2014/main" id="{D43CEFE4-1CA0-A20D-B93C-EE955F11AF59}"/>
+              </a:ext>
+            </a:extLst>
+          </p:cNvPr>
           <p:cNvSpPr/>
           <p:nvPr/>
         </p:nvSpPr>
         <p:spPr>
           <a:xfrm>
-            <a:off x="749300" y="5041900"/>
-            <a:ext cx="965200" cy="571500"/>
-          </a:xfrm>
-          <a:prstGeom prst="rect">
-            <a:avLst/>
+            <a:off x="749808" y="5038344"/>
+            <a:ext cx="960120" cy="566928"/>
+          </a:xfrm>
+          <a:prstGeom prst="roundRect">
+            <a:avLst>
+              <a:gd name="adj" fmla="val 12903"/>
+            </a:avLst>
           </a:prstGeom>
           <a:solidFill>
             <a:srgbClr val="3A36A0"/>
           </a:solidFill>
-          <a:ln>
-            <a:noFill/>
+          <a:ln w="12700">
+            <a:solidFill>
+              <a:srgbClr val="3A36A0"/>
+            </a:solidFill>
+            <a:prstDash val="solid"/>
           </a:ln>
-          <a:effectLst/>
-        </p:spPr>
-        <p:style>
-          <a:lnRef idx="1">
-            <a:schemeClr val="accent1"/>
-          </a:lnRef>
-          <a:fillRef idx="3">
-            <a:schemeClr val="accent1"/>
-          </a:fillRef>
-          <a:effectRef idx="2">
-            <a:schemeClr val="accent1"/>
-          </a:effectRef>
-          <a:fontRef idx="minor">
-            <a:schemeClr val="lt1"/>
-          </a:fontRef>
-        </p:style>
-        <p:txBody>
-          <a:bodyPr rtlCol="0" anchor="ctr"/>
-          <a:lstStyle/>
-          <a:p>
-            <a:pPr algn="ctr"/>
-            <a:endParaRPr/>
-          </a:p>
-        </p:txBody>
-      </p:sp>
-      <p:sp>
-        <p:nvSpPr>
-          <p:cNvPr id="22" name="TextBox 21"/>
-          <p:cNvSpPr txBox="1"/>
-          <p:nvPr/>
-        </p:nvSpPr>
-        <p:spPr>
-          <a:xfrm>
-            <a:off x="749300" y="5041900"/>
-            <a:ext cx="965200" cy="571500"/>
-          </a:xfrm>
-          <a:prstGeom prst="rect">
-            <a:avLst/>
-          </a:prstGeom>
-          <a:noFill/>
-        </p:spPr>
-        <p:txBody>
-          <a:bodyPr wrap="square" lIns="0" tIns="0" rIns="0" bIns="0" anchor="ctr">
-            <a:spAutoFit/>
-          </a:bodyPr>
-          <a:lstStyle/>
-          <a:p>
-            <a:pPr algn="ctr"/>
-            <a:r>
-              <a:rPr sz="1700" b="1">
+        </p:spPr>
+        <p:txBody>
+          <a:bodyPr/>
+          <a:lstStyle/>
+          <a:p>
+            <a:endParaRPr lang="en-US"/>
+          </a:p>
+        </p:txBody>
+      </p:sp>
+      <p:sp>
+        <p:nvSpPr>
+          <p:cNvPr id="101" name="Text 17">
+            <a:extLst>
+              <a:ext uri="{FF2B5EF4-FFF2-40B4-BE49-F238E27FC236}">
+                <a16:creationId xmlns:a16="http://schemas.microsoft.com/office/drawing/2014/main" id="{BB5A8E87-AF13-3F96-6A5F-FFFF0AABD3B0}"/>
+              </a:ext>
+            </a:extLst>
+          </p:cNvPr>
+          <p:cNvSpPr txBox="1"/>
+          <p:nvPr/>
+        </p:nvSpPr>
+        <p:spPr>
+          <a:xfrm>
+            <a:off x="749808" y="5038344"/>
+            <a:ext cx="960120" cy="566928"/>
+          </a:xfrm>
+          <a:prstGeom prst="rect">
+            <a:avLst/>
+          </a:prstGeom>
+          <a:noFill/>
+          <a:ln/>
+        </p:spPr>
+        <p:txBody>
+          <a:bodyPr wrap="square" lIns="0" tIns="0" rIns="0" bIns="0" rtlCol="0" anchor="ctr"/>
+          <a:lstStyle/>
+          <a:p>
+            <a:pPr marL="0" indent="0" algn="ctr">
+              <a:buNone/>
+            </a:pPr>
+            <a:r>
+              <a:rPr lang="en-US" sz="1400" b="1" dirty="0">
                 <a:solidFill>
                   <a:srgbClr val="FFFFFF"/>
                 </a:solidFill>
-                <a:latin typeface="Calibri"/>
+                <a:latin typeface="Calibri" pitchFamily="34" charset="0"/>
+                <a:ea typeface="Calibri" pitchFamily="34" charset="-122"/>
+                <a:cs typeface="Calibri" pitchFamily="34" charset="-120"/>
               </a:rPr>
               <a:t>Tuần 4</a:t>
             </a:r>
-          </a:p>
-        </p:txBody>
-      </p:sp>
-      <p:sp>
-        <p:nvSpPr>
-          <p:cNvPr id="23" name="TextBox 22"/>
-          <p:cNvSpPr txBox="1"/>
-          <p:nvPr/>
-        </p:nvSpPr>
-        <p:spPr>
-          <a:xfrm>
-            <a:off x="1866900" y="4978400"/>
-            <a:ext cx="3886200" cy="698500"/>
-          </a:xfrm>
-          <a:prstGeom prst="rect">
-            <a:avLst/>
-          </a:prstGeom>
-          <a:noFill/>
-        </p:spPr>
-        <p:txBody>
-          <a:bodyPr wrap="square" lIns="0" tIns="0" rIns="0" bIns="0" anchor="ctr">
-            <a:spAutoFit/>
-          </a:bodyPr>
-          <a:lstStyle/>
-          <a:p>
-            <a:r>
-              <a:rPr sz="1300" b="0">
-                <a:solidFill>
-                  <a:srgbClr val="20223A"/>
-                </a:solidFill>
-                <a:latin typeface="Calibri"/>
-              </a:rPr>
-              <a:t>Logic cập nhật ADD/UPDATE/DELETE/NOOP/CONFLICT; bật ràng buộc một bản active mỗi slot; cổng nguồn gốc pending.</a:t>
-            </a:r>
-          </a:p>
-        </p:txBody>
-      </p:sp>
-      <p:sp>
-        <p:nvSpPr>
-          <p:cNvPr id="24" name="Rectangle 23"/>
+            <a:endParaRPr lang="en-US" sz="1400" dirty="0"/>
+          </a:p>
+        </p:txBody>
+      </p:sp>
+      <p:sp>
+        <p:nvSpPr>
+          <p:cNvPr id="103" name="Text 18">
+            <a:extLst>
+              <a:ext uri="{FF2B5EF4-FFF2-40B4-BE49-F238E27FC236}">
+                <a16:creationId xmlns:a16="http://schemas.microsoft.com/office/drawing/2014/main" id="{58FBE783-BB58-9BC8-910C-3BEE2FBC2B7E}"/>
+              </a:ext>
+            </a:extLst>
+          </p:cNvPr>
+          <p:cNvSpPr txBox="1"/>
+          <p:nvPr/>
+        </p:nvSpPr>
+        <p:spPr>
+          <a:xfrm>
+            <a:off x="1865376" y="4974336"/>
+            <a:ext cx="3886200" cy="731520"/>
+          </a:xfrm>
+          <a:prstGeom prst="rect">
+            <a:avLst/>
+          </a:prstGeom>
+          <a:noFill/>
+          <a:ln/>
+        </p:spPr>
+        <p:txBody>
+          <a:bodyPr wrap="square" lIns="0" tIns="0" rIns="0" bIns="0" rtlCol="0" anchor="ctr"/>
+          <a:lstStyle/>
+          <a:p>
+            <a:pPr>
+              <a:lnSpc>
+                <a:spcPct val="95000"/>
+              </a:lnSpc>
+            </a:pPr>
+            <a:r>
+              <a:rPr lang="en-US" sz="1180" dirty="0"/>
+              <a:t>Implement vector </a:t>
+            </a:r>
+            <a:r>
+              <a:rPr lang="en-US" sz="1180" dirty="0" err="1"/>
+              <a:t>db</a:t>
+            </a:r>
+            <a:r>
+              <a:rPr lang="en-US" sz="1180" dirty="0"/>
+              <a:t> </a:t>
+            </a:r>
+            <a:r>
+              <a:rPr lang="en-US" sz="1180" dirty="0" err="1"/>
+              <a:t>và</a:t>
+            </a:r>
+            <a:r>
+              <a:rPr lang="en-US" sz="1180" dirty="0"/>
+              <a:t> </a:t>
+            </a:r>
+            <a:r>
+              <a:rPr lang="en-US" sz="1180" dirty="0" err="1"/>
+              <a:t>các</a:t>
+            </a:r>
+            <a:r>
+              <a:rPr lang="en-US" sz="1180" dirty="0"/>
+              <a:t> tools </a:t>
+            </a:r>
+            <a:r>
+              <a:rPr lang="en-US" sz="1180" dirty="0" err="1"/>
+              <a:t>cho</a:t>
+            </a:r>
+            <a:r>
+              <a:rPr lang="en-US" sz="1180" dirty="0"/>
+              <a:t> agent, </a:t>
+            </a:r>
+            <a:r>
+              <a:rPr lang="en-US" sz="1180" dirty="0" err="1"/>
+              <a:t>chạy</a:t>
+            </a:r>
+            <a:r>
+              <a:rPr lang="en-US" sz="1180" dirty="0"/>
+              <a:t> </a:t>
+            </a:r>
+            <a:r>
+              <a:rPr lang="en-US" sz="1180" dirty="0" err="1"/>
+              <a:t>thử</a:t>
+            </a:r>
+            <a:r>
+              <a:rPr lang="en-US" sz="1180" dirty="0"/>
+              <a:t> </a:t>
+            </a:r>
+            <a:r>
+              <a:rPr lang="en-US" sz="1180" dirty="0" err="1"/>
+              <a:t>nghiệm</a:t>
+            </a:r>
+            <a:r>
+              <a:rPr lang="en-US" sz="1180" dirty="0"/>
+              <a:t> </a:t>
+            </a:r>
+            <a:r>
+              <a:rPr lang="en-US" sz="1180" dirty="0" err="1"/>
+              <a:t>các</a:t>
+            </a:r>
+            <a:r>
+              <a:rPr lang="en-US" sz="1180" dirty="0"/>
+              <a:t> paper </a:t>
+            </a:r>
+            <a:r>
+              <a:rPr lang="en-US" sz="1180" dirty="0" err="1"/>
+              <a:t>và</a:t>
+            </a:r>
+            <a:r>
+              <a:rPr lang="en-US" sz="1180" dirty="0"/>
+              <a:t> baseline </a:t>
+            </a:r>
+            <a:r>
+              <a:rPr lang="en-US" sz="1180" dirty="0" err="1"/>
+              <a:t>có</a:t>
+            </a:r>
+            <a:r>
+              <a:rPr lang="en-US" sz="1180" dirty="0"/>
+              <a:t> </a:t>
+            </a:r>
+            <a:r>
+              <a:rPr lang="en-US" sz="1180" dirty="0" err="1"/>
+              <a:t>sẵn</a:t>
+            </a:r>
+            <a:r>
+              <a:rPr lang="en-US" sz="1180" dirty="0"/>
+              <a:t>.</a:t>
+            </a:r>
+          </a:p>
+        </p:txBody>
+      </p:sp>
+      <p:sp>
+        <p:nvSpPr>
+          <p:cNvPr id="105" name="Shape 19">
+            <a:extLst>
+              <a:ext uri="{FF2B5EF4-FFF2-40B4-BE49-F238E27FC236}">
+                <a16:creationId xmlns:a16="http://schemas.microsoft.com/office/drawing/2014/main" id="{0B2D5611-F30E-1B61-1627-08A0011C8017}"/>
+              </a:ext>
+            </a:extLst>
+          </p:cNvPr>
           <p:cNvSpPr/>
           <p:nvPr/>
         </p:nvSpPr>
         <p:spPr>
           <a:xfrm>
-            <a:off x="6286500" y="1778000"/>
-            <a:ext cx="5334000" cy="927100"/>
-          </a:xfrm>
-          <a:prstGeom prst="rect">
-            <a:avLst/>
+            <a:off x="6281928" y="1783080"/>
+            <a:ext cx="5340096" cy="932688"/>
+          </a:xfrm>
+          <a:prstGeom prst="roundRect">
+            <a:avLst>
+              <a:gd name="adj" fmla="val 4902"/>
+            </a:avLst>
           </a:prstGeom>
           <a:solidFill>
             <a:srgbClr val="F1F2FB"/>
           </a:solidFill>
-          <a:ln>
-            <a:noFill/>
+          <a:ln w="12700">
+            <a:solidFill>
+              <a:srgbClr val="F1F2FB"/>
+            </a:solidFill>
+            <a:prstDash val="solid"/>
           </a:ln>
-          <a:effectLst/>
-        </p:spPr>
-        <p:style>
-          <a:lnRef idx="1">
-            <a:schemeClr val="accent1"/>
-          </a:lnRef>
-          <a:fillRef idx="3">
-            <a:schemeClr val="accent1"/>
-          </a:fillRef>
-          <a:effectRef idx="2">
-            <a:schemeClr val="accent1"/>
-          </a:effectRef>
-          <a:fontRef idx="minor">
-            <a:schemeClr val="lt1"/>
-          </a:fontRef>
-        </p:style>
-        <p:txBody>
-          <a:bodyPr rtlCol="0" anchor="ctr"/>
-          <a:lstStyle/>
-          <a:p>
-            <a:pPr algn="ctr"/>
-            <a:endParaRPr/>
-          </a:p>
-        </p:txBody>
-      </p:sp>
-      <p:sp>
-        <p:nvSpPr>
-          <p:cNvPr id="25" name="Rectangle 24"/>
+        </p:spPr>
+        <p:txBody>
+          <a:bodyPr/>
+          <a:lstStyle/>
+          <a:p>
+            <a:endParaRPr lang="en-US"/>
+          </a:p>
+        </p:txBody>
+      </p:sp>
+      <p:sp>
+        <p:nvSpPr>
+          <p:cNvPr id="107" name="Shape 20">
+            <a:extLst>
+              <a:ext uri="{FF2B5EF4-FFF2-40B4-BE49-F238E27FC236}">
+                <a16:creationId xmlns:a16="http://schemas.microsoft.com/office/drawing/2014/main" id="{C2C8FD23-B296-EDDE-72CF-622CBCDD3C52}"/>
+              </a:ext>
+            </a:extLst>
+          </p:cNvPr>
           <p:cNvSpPr/>
           <p:nvPr/>
         </p:nvSpPr>
         <p:spPr>
           <a:xfrm>
-            <a:off x="6464300" y="1955800"/>
-            <a:ext cx="965200" cy="571500"/>
-          </a:xfrm>
-          <a:prstGeom prst="rect">
-            <a:avLst/>
+            <a:off x="6464808" y="1965960"/>
+            <a:ext cx="960120" cy="566928"/>
+          </a:xfrm>
+          <a:prstGeom prst="roundRect">
+            <a:avLst>
+              <a:gd name="adj" fmla="val 12903"/>
+            </a:avLst>
           </a:prstGeom>
           <a:solidFill>
             <a:srgbClr val="3A36A0"/>
           </a:solidFill>
-          <a:ln>
-            <a:noFill/>
+          <a:ln w="12700">
+            <a:solidFill>
+              <a:srgbClr val="3A36A0"/>
+            </a:solidFill>
+            <a:prstDash val="solid"/>
           </a:ln>
-          <a:effectLst/>
-        </p:spPr>
-        <p:style>
-          <a:lnRef idx="1">
-            <a:schemeClr val="accent1"/>
-          </a:lnRef>
-          <a:fillRef idx="3">
-            <a:schemeClr val="accent1"/>
-          </a:fillRef>
-          <a:effectRef idx="2">
-            <a:schemeClr val="accent1"/>
-          </a:effectRef>
-          <a:fontRef idx="minor">
-            <a:schemeClr val="lt1"/>
-          </a:fontRef>
-        </p:style>
-        <p:txBody>
-          <a:bodyPr rtlCol="0" anchor="ctr"/>
-          <a:lstStyle/>
-          <a:p>
-            <a:pPr algn="ctr"/>
-            <a:endParaRPr/>
-          </a:p>
-        </p:txBody>
-      </p:sp>
-      <p:sp>
-        <p:nvSpPr>
-          <p:cNvPr id="26" name="TextBox 25"/>
-          <p:cNvSpPr txBox="1"/>
-          <p:nvPr/>
-        </p:nvSpPr>
-        <p:spPr>
-          <a:xfrm>
-            <a:off x="6464300" y="1955800"/>
-            <a:ext cx="965200" cy="571500"/>
-          </a:xfrm>
-          <a:prstGeom prst="rect">
-            <a:avLst/>
-          </a:prstGeom>
-          <a:noFill/>
-        </p:spPr>
-        <p:txBody>
-          <a:bodyPr wrap="square" lIns="0" tIns="0" rIns="0" bIns="0" anchor="ctr">
-            <a:spAutoFit/>
-          </a:bodyPr>
-          <a:lstStyle/>
-          <a:p>
-            <a:pPr algn="ctr"/>
-            <a:r>
-              <a:rPr sz="1700" b="1">
+        </p:spPr>
+        <p:txBody>
+          <a:bodyPr/>
+          <a:lstStyle/>
+          <a:p>
+            <a:endParaRPr lang="en-US"/>
+          </a:p>
+        </p:txBody>
+      </p:sp>
+      <p:sp>
+        <p:nvSpPr>
+          <p:cNvPr id="109" name="Text 21">
+            <a:extLst>
+              <a:ext uri="{FF2B5EF4-FFF2-40B4-BE49-F238E27FC236}">
+                <a16:creationId xmlns:a16="http://schemas.microsoft.com/office/drawing/2014/main" id="{EE2C758D-D608-1603-8637-36FEA19E4B5F}"/>
+              </a:ext>
+            </a:extLst>
+          </p:cNvPr>
+          <p:cNvSpPr txBox="1"/>
+          <p:nvPr/>
+        </p:nvSpPr>
+        <p:spPr>
+          <a:xfrm>
+            <a:off x="6464808" y="1965960"/>
+            <a:ext cx="960120" cy="566928"/>
+          </a:xfrm>
+          <a:prstGeom prst="rect">
+            <a:avLst/>
+          </a:prstGeom>
+          <a:noFill/>
+          <a:ln/>
+        </p:spPr>
+        <p:txBody>
+          <a:bodyPr wrap="square" lIns="0" tIns="0" rIns="0" bIns="0" rtlCol="0" anchor="ctr"/>
+          <a:lstStyle/>
+          <a:p>
+            <a:pPr marL="0" indent="0" algn="ctr">
+              <a:buNone/>
+            </a:pPr>
+            <a:r>
+              <a:rPr lang="en-US" sz="1400" b="1" dirty="0">
                 <a:solidFill>
                   <a:srgbClr val="FFFFFF"/>
                 </a:solidFill>
-                <a:latin typeface="Calibri"/>
+                <a:latin typeface="Calibri" pitchFamily="34" charset="0"/>
+                <a:ea typeface="Calibri" pitchFamily="34" charset="-122"/>
+                <a:cs typeface="Calibri" pitchFamily="34" charset="-120"/>
               </a:rPr>
               <a:t>Tuần 5</a:t>
             </a:r>
-          </a:p>
-        </p:txBody>
-      </p:sp>
-      <p:sp>
-        <p:nvSpPr>
-          <p:cNvPr id="27" name="TextBox 26"/>
-          <p:cNvSpPr txBox="1"/>
-          <p:nvPr/>
-        </p:nvSpPr>
-        <p:spPr>
-          <a:xfrm>
-            <a:off x="7581900" y="1892300"/>
-            <a:ext cx="3886200" cy="698500"/>
-          </a:xfrm>
-          <a:prstGeom prst="rect">
-            <a:avLst/>
-          </a:prstGeom>
-          <a:noFill/>
-        </p:spPr>
-        <p:txBody>
-          <a:bodyPr wrap="square" lIns="0" tIns="0" rIns="0" bIns="0" anchor="ctr">
-            <a:spAutoFit/>
-          </a:bodyPr>
-          <a:lstStyle/>
-          <a:p>
-            <a:r>
-              <a:rPr sz="1550" b="0">
-                <a:solidFill>
-                  <a:srgbClr val="20223A"/>
-                </a:solidFill>
-                <a:latin typeface="Calibri"/>
-              </a:rPr>
-              <a:t>BM25 + hợp nhất RRF; tách truy vấn con; khoảng hiệu lực; ký ức pinned.</a:t>
-            </a:r>
-          </a:p>
-        </p:txBody>
-      </p:sp>
-      <p:sp>
-        <p:nvSpPr>
-          <p:cNvPr id="28" name="Rectangle 27"/>
+            <a:endParaRPr lang="en-US" sz="1400" dirty="0"/>
+          </a:p>
+        </p:txBody>
+      </p:sp>
+      <p:sp>
+        <p:nvSpPr>
+          <p:cNvPr id="111" name="Text 22">
+            <a:extLst>
+              <a:ext uri="{FF2B5EF4-FFF2-40B4-BE49-F238E27FC236}">
+                <a16:creationId xmlns:a16="http://schemas.microsoft.com/office/drawing/2014/main" id="{5AAB0A85-0DEA-35F0-8FBA-F30EDBCD050F}"/>
+              </a:ext>
+            </a:extLst>
+          </p:cNvPr>
+          <p:cNvSpPr txBox="1"/>
+          <p:nvPr/>
+        </p:nvSpPr>
+        <p:spPr>
+          <a:xfrm>
+            <a:off x="7580376" y="1901952"/>
+            <a:ext cx="3886200" cy="731520"/>
+          </a:xfrm>
+          <a:prstGeom prst="rect">
+            <a:avLst/>
+          </a:prstGeom>
+          <a:noFill/>
+          <a:ln/>
+        </p:spPr>
+        <p:txBody>
+          <a:bodyPr wrap="square" lIns="0" tIns="0" rIns="0" bIns="0" rtlCol="0" anchor="ctr"/>
+          <a:lstStyle/>
+          <a:p>
+            <a:pPr>
+              <a:lnSpc>
+                <a:spcPct val="95000"/>
+              </a:lnSpc>
+            </a:pPr>
+            <a:r>
+              <a:rPr lang="en-US" sz="1180" dirty="0"/>
+              <a:t>Hoàn </a:t>
+            </a:r>
+            <a:r>
+              <a:rPr lang="en-US" sz="1180" dirty="0" err="1"/>
+              <a:t>thiện</a:t>
+            </a:r>
+            <a:r>
+              <a:rPr lang="en-US" sz="1180" dirty="0"/>
+              <a:t> </a:t>
+            </a:r>
+            <a:r>
+              <a:rPr lang="en-US" sz="1180" dirty="0" err="1"/>
+              <a:t>hệ</a:t>
+            </a:r>
+            <a:r>
+              <a:rPr lang="en-US" sz="1180" dirty="0"/>
+              <a:t> </a:t>
+            </a:r>
+            <a:r>
+              <a:rPr lang="en-US" sz="1180" dirty="0" err="1"/>
+              <a:t>thống</a:t>
+            </a:r>
+            <a:r>
+              <a:rPr lang="en-US" sz="1180" dirty="0"/>
+              <a:t>, </a:t>
+            </a:r>
+            <a:r>
+              <a:rPr lang="en-US" sz="1180" dirty="0" err="1"/>
+              <a:t>thử</a:t>
+            </a:r>
+            <a:r>
+              <a:rPr lang="en-US" sz="1180" dirty="0"/>
+              <a:t> benchmark </a:t>
+            </a:r>
+            <a:r>
+              <a:rPr lang="en-US" sz="1180" dirty="0" err="1"/>
+              <a:t>trên</a:t>
+            </a:r>
+            <a:r>
+              <a:rPr lang="en-US" sz="1180" dirty="0"/>
+              <a:t> </a:t>
+            </a:r>
+            <a:r>
+              <a:rPr lang="en-US" sz="1180" dirty="0" err="1"/>
+              <a:t>bộ</a:t>
+            </a:r>
+            <a:r>
+              <a:rPr lang="en-US" sz="1180" dirty="0"/>
+              <a:t> dev </a:t>
+            </a:r>
+            <a:r>
+              <a:rPr lang="en-US" sz="1180" dirty="0" err="1"/>
+              <a:t>để</a:t>
+            </a:r>
+            <a:r>
+              <a:rPr lang="en-US" sz="1180" dirty="0"/>
+              <a:t> </a:t>
+            </a:r>
+            <a:r>
+              <a:rPr lang="en-US" sz="1180" dirty="0" err="1"/>
+              <a:t>tối</a:t>
+            </a:r>
+            <a:r>
+              <a:rPr lang="en-US" sz="1180" dirty="0"/>
+              <a:t> </a:t>
+            </a:r>
+            <a:r>
+              <a:rPr lang="vi-VN" sz="1180" dirty="0"/>
+              <a:t>ư</a:t>
+            </a:r>
+            <a:r>
+              <a:rPr lang="en-US" sz="1180" dirty="0"/>
+              <a:t>u </a:t>
+            </a:r>
+            <a:r>
+              <a:rPr lang="en-US" sz="1180" dirty="0" err="1"/>
+              <a:t>tham</a:t>
+            </a:r>
+            <a:r>
+              <a:rPr lang="en-US" sz="1180" dirty="0"/>
+              <a:t> </a:t>
+            </a:r>
+            <a:r>
+              <a:rPr lang="en-US" sz="1180" dirty="0" err="1"/>
+              <a:t>số</a:t>
+            </a:r>
+            <a:r>
+              <a:rPr lang="en-US" sz="1180" dirty="0"/>
+              <a:t> </a:t>
+            </a:r>
+            <a:r>
+              <a:rPr lang="en-US" sz="1180" dirty="0" err="1"/>
+              <a:t>và</a:t>
+            </a:r>
+            <a:r>
+              <a:rPr lang="en-US" sz="1180" dirty="0"/>
+              <a:t> </a:t>
+            </a:r>
+            <a:r>
+              <a:rPr lang="en-US" sz="1180" dirty="0" err="1"/>
+              <a:t>độ</a:t>
+            </a:r>
+            <a:r>
+              <a:rPr lang="en-US" sz="1180" dirty="0"/>
+              <a:t> </a:t>
+            </a:r>
+            <a:r>
+              <a:rPr lang="en-US" sz="1180" dirty="0" err="1"/>
+              <a:t>chính</a:t>
+            </a:r>
+            <a:r>
+              <a:rPr lang="en-US" sz="1180" dirty="0"/>
+              <a:t> </a:t>
+            </a:r>
+            <a:r>
+              <a:rPr lang="en-US" sz="1180" dirty="0" err="1"/>
+              <a:t>xác</a:t>
+            </a:r>
+            <a:r>
+              <a:rPr lang="en-US" sz="1180"/>
+              <a:t>.</a:t>
+            </a:r>
+            <a:endParaRPr lang="en-US" sz="1180" dirty="0"/>
+          </a:p>
+        </p:txBody>
+      </p:sp>
+      <p:sp>
+        <p:nvSpPr>
+          <p:cNvPr id="113" name="Shape 23">
+            <a:extLst>
+              <a:ext uri="{FF2B5EF4-FFF2-40B4-BE49-F238E27FC236}">
+                <a16:creationId xmlns:a16="http://schemas.microsoft.com/office/drawing/2014/main" id="{578B9B87-5047-7816-C9D8-E42A4CF9EF73}"/>
+              </a:ext>
+            </a:extLst>
+          </p:cNvPr>
           <p:cNvSpPr/>
           <p:nvPr/>
         </p:nvSpPr>
         <p:spPr>
           <a:xfrm>
-            <a:off x="6286500" y="2806700"/>
-            <a:ext cx="5334000" cy="927100"/>
-          </a:xfrm>
-          <a:prstGeom prst="rect">
-            <a:avLst/>
+            <a:off x="6281928" y="2807208"/>
+            <a:ext cx="5340096" cy="932688"/>
+          </a:xfrm>
+          <a:prstGeom prst="roundRect">
+            <a:avLst>
+              <a:gd name="adj" fmla="val 4902"/>
+            </a:avLst>
           </a:prstGeom>
           <a:solidFill>
             <a:srgbClr val="F1F2FB"/>
           </a:solidFill>
-          <a:ln>
-            <a:noFill/>
+          <a:ln w="12700">
+            <a:solidFill>
+              <a:srgbClr val="F1F2FB"/>
+            </a:solidFill>
+            <a:prstDash val="solid"/>
           </a:ln>
-          <a:effectLst/>
-        </p:spPr>
-        <p:style>
-          <a:lnRef idx="1">
-            <a:schemeClr val="accent1"/>
-          </a:lnRef>
-          <a:fillRef idx="3">
-            <a:schemeClr val="accent1"/>
-          </a:fillRef>
-          <a:effectRef idx="2">
-            <a:schemeClr val="accent1"/>
-          </a:effectRef>
-          <a:fontRef idx="minor">
-            <a:schemeClr val="lt1"/>
-          </a:fontRef>
-        </p:style>
-        <p:txBody>
-          <a:bodyPr rtlCol="0" anchor="ctr"/>
-          <a:lstStyle/>
-          <a:p>
-            <a:pPr algn="ctr"/>
-            <a:endParaRPr/>
-          </a:p>
-        </p:txBody>
-      </p:sp>
-      <p:sp>
-        <p:nvSpPr>
-          <p:cNvPr id="29" name="Rectangle 28"/>
+        </p:spPr>
+        <p:txBody>
+          <a:bodyPr/>
+          <a:lstStyle/>
+          <a:p>
+            <a:endParaRPr lang="en-US"/>
+          </a:p>
+        </p:txBody>
+      </p:sp>
+      <p:sp>
+        <p:nvSpPr>
+          <p:cNvPr id="115" name="Shape 24">
+            <a:extLst>
+              <a:ext uri="{FF2B5EF4-FFF2-40B4-BE49-F238E27FC236}">
+                <a16:creationId xmlns:a16="http://schemas.microsoft.com/office/drawing/2014/main" id="{B48B56D0-AB11-4C88-DB2F-B227E2A41144}"/>
+              </a:ext>
+            </a:extLst>
+          </p:cNvPr>
           <p:cNvSpPr/>
           <p:nvPr/>
         </p:nvSpPr>
         <p:spPr>
           <a:xfrm>
-            <a:off x="6464300" y="2984500"/>
-            <a:ext cx="965200" cy="571500"/>
-          </a:xfrm>
-          <a:prstGeom prst="rect">
-            <a:avLst/>
+            <a:off x="6464808" y="2990088"/>
+            <a:ext cx="960120" cy="566928"/>
+          </a:xfrm>
+          <a:prstGeom prst="roundRect">
+            <a:avLst>
+              <a:gd name="adj" fmla="val 12903"/>
+            </a:avLst>
           </a:prstGeom>
           <a:solidFill>
             <a:srgbClr val="3A36A0"/>
           </a:solidFill>
-          <a:ln>
-            <a:noFill/>
+          <a:ln w="12700">
+            <a:solidFill>
+              <a:srgbClr val="3A36A0"/>
+            </a:solidFill>
+            <a:prstDash val="solid"/>
           </a:ln>
-          <a:effectLst/>
-        </p:spPr>
-        <p:style>
-          <a:lnRef idx="1">
-            <a:schemeClr val="accent1"/>
-          </a:lnRef>
-          <a:fillRef idx="3">
-            <a:schemeClr val="accent1"/>
-          </a:fillRef>
-          <a:effectRef idx="2">
-            <a:schemeClr val="accent1"/>
-          </a:effectRef>
-          <a:fontRef idx="minor">
-            <a:schemeClr val="lt1"/>
-          </a:fontRef>
-        </p:style>
-        <p:txBody>
-          <a:bodyPr rtlCol="0" anchor="ctr"/>
-          <a:lstStyle/>
-          <a:p>
-            <a:pPr algn="ctr"/>
-            <a:endParaRPr/>
-          </a:p>
-        </p:txBody>
-      </p:sp>
-      <p:sp>
-        <p:nvSpPr>
-          <p:cNvPr id="30" name="TextBox 29"/>
-          <p:cNvSpPr txBox="1"/>
-          <p:nvPr/>
-        </p:nvSpPr>
-        <p:spPr>
-          <a:xfrm>
-            <a:off x="6464300" y="2984500"/>
-            <a:ext cx="965200" cy="571500"/>
-          </a:xfrm>
-          <a:prstGeom prst="rect">
-            <a:avLst/>
-          </a:prstGeom>
-          <a:noFill/>
-        </p:spPr>
-        <p:txBody>
-          <a:bodyPr wrap="square" lIns="0" tIns="0" rIns="0" bIns="0" anchor="ctr">
-            <a:spAutoFit/>
-          </a:bodyPr>
-          <a:lstStyle/>
-          <a:p>
-            <a:pPr algn="ctr"/>
-            <a:r>
-              <a:rPr sz="1700" b="1">
+        </p:spPr>
+        <p:txBody>
+          <a:bodyPr/>
+          <a:lstStyle/>
+          <a:p>
+            <a:endParaRPr lang="en-US"/>
+          </a:p>
+        </p:txBody>
+      </p:sp>
+      <p:sp>
+        <p:nvSpPr>
+          <p:cNvPr id="117" name="Text 25">
+            <a:extLst>
+              <a:ext uri="{FF2B5EF4-FFF2-40B4-BE49-F238E27FC236}">
+                <a16:creationId xmlns:a16="http://schemas.microsoft.com/office/drawing/2014/main" id="{6E9D9832-3D5C-77A5-2A58-6FB65F62A894}"/>
+              </a:ext>
+            </a:extLst>
+          </p:cNvPr>
+          <p:cNvSpPr txBox="1"/>
+          <p:nvPr/>
+        </p:nvSpPr>
+        <p:spPr>
+          <a:xfrm>
+            <a:off x="6464808" y="2990088"/>
+            <a:ext cx="960120" cy="566928"/>
+          </a:xfrm>
+          <a:prstGeom prst="rect">
+            <a:avLst/>
+          </a:prstGeom>
+          <a:noFill/>
+          <a:ln/>
+        </p:spPr>
+        <p:txBody>
+          <a:bodyPr wrap="square" lIns="0" tIns="0" rIns="0" bIns="0" rtlCol="0" anchor="ctr"/>
+          <a:lstStyle/>
+          <a:p>
+            <a:pPr marL="0" indent="0" algn="ctr">
+              <a:buNone/>
+            </a:pPr>
+            <a:r>
+              <a:rPr lang="en-US" sz="1400" b="1" dirty="0">
                 <a:solidFill>
                   <a:srgbClr val="FFFFFF"/>
                 </a:solidFill>
-                <a:latin typeface="Calibri"/>
+                <a:latin typeface="Calibri" pitchFamily="34" charset="0"/>
+                <a:ea typeface="Calibri" pitchFamily="34" charset="-122"/>
+                <a:cs typeface="Calibri" pitchFamily="34" charset="-120"/>
               </a:rPr>
               <a:t>Tuần 6</a:t>
             </a:r>
-          </a:p>
-        </p:txBody>
-      </p:sp>
-      <p:sp>
-        <p:nvSpPr>
-          <p:cNvPr id="31" name="TextBox 30"/>
-          <p:cNvSpPr txBox="1"/>
-          <p:nvPr/>
-        </p:nvSpPr>
-        <p:spPr>
-          <a:xfrm>
-            <a:off x="7581900" y="2921000"/>
-            <a:ext cx="3886200" cy="698500"/>
-          </a:xfrm>
-          <a:prstGeom prst="rect">
-            <a:avLst/>
-          </a:prstGeom>
-          <a:noFill/>
-        </p:spPr>
-        <p:txBody>
-          <a:bodyPr wrap="square" lIns="0" tIns="0" rIns="0" bIns="0" anchor="ctr">
-            <a:spAutoFit/>
-          </a:bodyPr>
-          <a:lstStyle/>
-          <a:p>
-            <a:r>
-              <a:rPr sz="1550" b="0">
-                <a:solidFill>
-                  <a:srgbClr val="20223A"/>
-                </a:solidFill>
-                <a:latin typeface="Calibri"/>
-              </a:rPr>
-              <a:t>Reranker; hiệu chỉnh ngưỡng từ chối; tóm tắt phiên; bộ test tiếng Việt.</a:t>
-            </a:r>
-          </a:p>
-        </p:txBody>
-      </p:sp>
-      <p:sp>
-        <p:nvSpPr>
-          <p:cNvPr id="32" name="Rectangle 31"/>
+            <a:endParaRPr lang="en-US" sz="1400" dirty="0"/>
+          </a:p>
+        </p:txBody>
+      </p:sp>
+      <p:sp>
+        <p:nvSpPr>
+          <p:cNvPr id="119" name="Text 26">
+            <a:extLst>
+              <a:ext uri="{FF2B5EF4-FFF2-40B4-BE49-F238E27FC236}">
+                <a16:creationId xmlns:a16="http://schemas.microsoft.com/office/drawing/2014/main" id="{9A699246-53E2-FBFC-FDBA-C95A24F288FD}"/>
+              </a:ext>
+            </a:extLst>
+          </p:cNvPr>
+          <p:cNvSpPr txBox="1"/>
+          <p:nvPr/>
+        </p:nvSpPr>
+        <p:spPr>
+          <a:xfrm>
+            <a:off x="7580376" y="2926080"/>
+            <a:ext cx="3886200" cy="731520"/>
+          </a:xfrm>
+          <a:prstGeom prst="rect">
+            <a:avLst/>
+          </a:prstGeom>
+          <a:noFill/>
+          <a:ln/>
+        </p:spPr>
+        <p:txBody>
+          <a:bodyPr wrap="square" lIns="0" tIns="0" rIns="0" bIns="0" rtlCol="0" anchor="ctr"/>
+          <a:lstStyle/>
+          <a:p>
+            <a:pPr>
+              <a:lnSpc>
+                <a:spcPct val="95000"/>
+              </a:lnSpc>
+            </a:pPr>
+            <a:r>
+              <a:rPr lang="en-US" sz="1180" dirty="0"/>
+              <a:t>So </a:t>
+            </a:r>
+            <a:r>
+              <a:rPr lang="en-US" sz="1180" dirty="0" err="1"/>
+              <a:t>sánh</a:t>
+            </a:r>
+            <a:r>
+              <a:rPr lang="en-US" sz="1180" dirty="0"/>
+              <a:t> </a:t>
+            </a:r>
+            <a:r>
+              <a:rPr lang="en-US" sz="1180" dirty="0" err="1"/>
+              <a:t>kết</a:t>
+            </a:r>
+            <a:r>
+              <a:rPr lang="en-US" sz="1180" dirty="0"/>
+              <a:t> </a:t>
+            </a:r>
+            <a:r>
+              <a:rPr lang="en-US" sz="1180" dirty="0" err="1"/>
+              <a:t>quả</a:t>
+            </a:r>
+            <a:r>
+              <a:rPr lang="en-US" sz="1180" dirty="0"/>
+              <a:t> </a:t>
+            </a:r>
+            <a:r>
+              <a:rPr lang="en-US" sz="1180" dirty="0" err="1"/>
+              <a:t>giữa</a:t>
+            </a:r>
+            <a:r>
+              <a:rPr lang="en-US" sz="1180" dirty="0"/>
+              <a:t> </a:t>
+            </a:r>
+            <a:r>
+              <a:rPr lang="en-US" sz="1180" dirty="0" err="1"/>
+              <a:t>hệ</a:t>
+            </a:r>
+            <a:r>
+              <a:rPr lang="en-US" sz="1180" dirty="0"/>
+              <a:t> </a:t>
+            </a:r>
+            <a:r>
+              <a:rPr lang="en-US" sz="1180" dirty="0" err="1"/>
+              <a:t>thống</a:t>
+            </a:r>
+            <a:r>
+              <a:rPr lang="en-US" sz="1180" dirty="0"/>
+              <a:t> </a:t>
+            </a:r>
+            <a:r>
+              <a:rPr lang="en-US" sz="1180" dirty="0" err="1"/>
+              <a:t>thiết</a:t>
+            </a:r>
+            <a:r>
+              <a:rPr lang="en-US" sz="1180" dirty="0"/>
+              <a:t> </a:t>
+            </a:r>
+            <a:r>
+              <a:rPr lang="en-US" sz="1180" dirty="0" err="1"/>
+              <a:t>kế</a:t>
+            </a:r>
+            <a:r>
+              <a:rPr lang="en-US" sz="1180" dirty="0"/>
+              <a:t> </a:t>
+            </a:r>
+            <a:r>
+              <a:rPr lang="en-US" sz="1180" dirty="0" err="1"/>
+              <a:t>và</a:t>
+            </a:r>
+            <a:r>
+              <a:rPr lang="en-US" sz="1180" dirty="0"/>
+              <a:t> </a:t>
+            </a:r>
+            <a:r>
+              <a:rPr lang="en-US" sz="1180" dirty="0" err="1"/>
+              <a:t>các</a:t>
+            </a:r>
+            <a:r>
+              <a:rPr lang="en-US" sz="1180" dirty="0"/>
+              <a:t> paper </a:t>
+            </a:r>
+            <a:r>
+              <a:rPr lang="en-US" sz="1180" dirty="0" err="1"/>
+              <a:t>gốc</a:t>
+            </a:r>
+            <a:r>
+              <a:rPr lang="en-US" sz="1180" dirty="0"/>
+              <a:t> </a:t>
+            </a:r>
+            <a:r>
+              <a:rPr lang="en-US" sz="1180" dirty="0" err="1"/>
+              <a:t>cũng</a:t>
+            </a:r>
+            <a:r>
+              <a:rPr lang="en-US" sz="1180" dirty="0"/>
+              <a:t> </a:t>
+            </a:r>
+            <a:r>
+              <a:rPr lang="en-US" sz="1180" dirty="0" err="1"/>
+              <a:t>nh</a:t>
+            </a:r>
+            <a:r>
+              <a:rPr lang="vi-VN" sz="1180" dirty="0"/>
+              <a:t>ư</a:t>
+            </a:r>
+            <a:r>
+              <a:rPr lang="en-US" sz="1180" dirty="0"/>
+              <a:t> baseline </a:t>
+            </a:r>
+            <a:r>
+              <a:rPr lang="en-US" sz="1180" dirty="0" err="1"/>
+              <a:t>trên</a:t>
+            </a:r>
+            <a:r>
+              <a:rPr lang="en-US" sz="1180" dirty="0"/>
+              <a:t> </a:t>
+            </a:r>
+            <a:r>
+              <a:rPr lang="en-US" sz="1180" dirty="0" err="1"/>
+              <a:t>tập</a:t>
+            </a:r>
+            <a:r>
+              <a:rPr lang="en-US" sz="1180" dirty="0"/>
+              <a:t> test</a:t>
+            </a:r>
+          </a:p>
+        </p:txBody>
+      </p:sp>
+      <p:sp>
+        <p:nvSpPr>
+          <p:cNvPr id="121" name="Shape 27">
+            <a:extLst>
+              <a:ext uri="{FF2B5EF4-FFF2-40B4-BE49-F238E27FC236}">
+                <a16:creationId xmlns:a16="http://schemas.microsoft.com/office/drawing/2014/main" id="{3B0D0647-7094-EA55-75BB-5FDACFB5E9E7}"/>
+              </a:ext>
+            </a:extLst>
+          </p:cNvPr>
           <p:cNvSpPr/>
           <p:nvPr/>
         </p:nvSpPr>
         <p:spPr>
           <a:xfrm>
-            <a:off x="6286500" y="3835400"/>
-            <a:ext cx="5334000" cy="927100"/>
-          </a:xfrm>
-          <a:prstGeom prst="rect">
-            <a:avLst/>
+            <a:off x="6281928" y="3831336"/>
+            <a:ext cx="5340096" cy="932688"/>
+          </a:xfrm>
+          <a:prstGeom prst="roundRect">
+            <a:avLst>
+              <a:gd name="adj" fmla="val 4902"/>
+            </a:avLst>
           </a:prstGeom>
           <a:solidFill>
             <a:srgbClr val="F1F2FB"/>
           </a:solidFill>
-          <a:ln>
-            <a:noFill/>
+          <a:ln w="12700">
+            <a:solidFill>
+              <a:srgbClr val="F1F2FB"/>
+            </a:solidFill>
+            <a:prstDash val="solid"/>
           </a:ln>
-          <a:effectLst/>
-        </p:spPr>
-        <p:style>
-          <a:lnRef idx="1">
-            <a:schemeClr val="accent1"/>
-          </a:lnRef>
-          <a:fillRef idx="3">
-            <a:schemeClr val="accent1"/>
-          </a:fillRef>
-          <a:effectRef idx="2">
-            <a:schemeClr val="accent1"/>
-          </a:effectRef>
-          <a:fontRef idx="minor">
-            <a:schemeClr val="lt1"/>
-          </a:fontRef>
-        </p:style>
-        <p:txBody>
-          <a:bodyPr rtlCol="0" anchor="ctr"/>
-          <a:lstStyle/>
-          <a:p>
-            <a:pPr algn="ctr"/>
-            <a:endParaRPr/>
-          </a:p>
-        </p:txBody>
-      </p:sp>
-      <p:sp>
-        <p:nvSpPr>
-          <p:cNvPr id="33" name="Rectangle 32"/>
+        </p:spPr>
+        <p:txBody>
+          <a:bodyPr/>
+          <a:lstStyle/>
+          <a:p>
+            <a:endParaRPr lang="en-US"/>
+          </a:p>
+        </p:txBody>
+      </p:sp>
+      <p:sp>
+        <p:nvSpPr>
+          <p:cNvPr id="123" name="Shape 28">
+            <a:extLst>
+              <a:ext uri="{FF2B5EF4-FFF2-40B4-BE49-F238E27FC236}">
+                <a16:creationId xmlns:a16="http://schemas.microsoft.com/office/drawing/2014/main" id="{0266C35C-31FC-B190-0F97-9D163081C6EB}"/>
+              </a:ext>
+            </a:extLst>
+          </p:cNvPr>
           <p:cNvSpPr/>
           <p:nvPr/>
         </p:nvSpPr>
         <p:spPr>
           <a:xfrm>
-            <a:off x="6464300" y="4013200"/>
-            <a:ext cx="965200" cy="571500"/>
-          </a:xfrm>
-          <a:prstGeom prst="rect">
-            <a:avLst/>
+            <a:off x="6464808" y="4014216"/>
+            <a:ext cx="960120" cy="566928"/>
+          </a:xfrm>
+          <a:prstGeom prst="roundRect">
+            <a:avLst>
+              <a:gd name="adj" fmla="val 12903"/>
+            </a:avLst>
           </a:prstGeom>
           <a:solidFill>
             <a:srgbClr val="3A36A0"/>
           </a:solidFill>
-          <a:ln>
-            <a:noFill/>
+          <a:ln w="12700">
+            <a:solidFill>
+              <a:srgbClr val="3A36A0"/>
+            </a:solidFill>
+            <a:prstDash val="solid"/>
           </a:ln>
-          <a:effectLst/>
-        </p:spPr>
-        <p:style>
-          <a:lnRef idx="1">
-            <a:schemeClr val="accent1"/>
-          </a:lnRef>
-          <a:fillRef idx="3">
-            <a:schemeClr val="accent1"/>
-          </a:fillRef>
-          <a:effectRef idx="2">
-            <a:schemeClr val="accent1"/>
-          </a:effectRef>
-          <a:fontRef idx="minor">
-            <a:schemeClr val="lt1"/>
-          </a:fontRef>
-        </p:style>
-        <p:txBody>
-          <a:bodyPr rtlCol="0" anchor="ctr"/>
-          <a:lstStyle/>
-          <a:p>
-            <a:pPr algn="ctr"/>
-            <a:endParaRPr/>
-          </a:p>
-        </p:txBody>
-      </p:sp>
-      <p:sp>
-        <p:nvSpPr>
-          <p:cNvPr id="34" name="TextBox 33"/>
-          <p:cNvSpPr txBox="1"/>
-          <p:nvPr/>
-        </p:nvSpPr>
-        <p:spPr>
-          <a:xfrm>
-            <a:off x="6464300" y="4013200"/>
-            <a:ext cx="965200" cy="571500"/>
-          </a:xfrm>
-          <a:prstGeom prst="rect">
-            <a:avLst/>
-          </a:prstGeom>
-          <a:noFill/>
-        </p:spPr>
-        <p:txBody>
-          <a:bodyPr wrap="square" lIns="0" tIns="0" rIns="0" bIns="0" anchor="ctr">
-            <a:spAutoFit/>
-          </a:bodyPr>
-          <a:lstStyle/>
-          <a:p>
-            <a:pPr algn="ctr"/>
-            <a:r>
-              <a:rPr sz="1700" b="1">
+        </p:spPr>
+        <p:txBody>
+          <a:bodyPr/>
+          <a:lstStyle/>
+          <a:p>
+            <a:endParaRPr lang="en-US"/>
+          </a:p>
+        </p:txBody>
+      </p:sp>
+      <p:sp>
+        <p:nvSpPr>
+          <p:cNvPr id="125" name="Text 29">
+            <a:extLst>
+              <a:ext uri="{FF2B5EF4-FFF2-40B4-BE49-F238E27FC236}">
+                <a16:creationId xmlns:a16="http://schemas.microsoft.com/office/drawing/2014/main" id="{AF6B7E6B-0C4C-4612-2D76-C48F9E4112B7}"/>
+              </a:ext>
+            </a:extLst>
+          </p:cNvPr>
+          <p:cNvSpPr txBox="1"/>
+          <p:nvPr/>
+        </p:nvSpPr>
+        <p:spPr>
+          <a:xfrm>
+            <a:off x="6464808" y="4014216"/>
+            <a:ext cx="960120" cy="566928"/>
+          </a:xfrm>
+          <a:prstGeom prst="rect">
+            <a:avLst/>
+          </a:prstGeom>
+          <a:noFill/>
+          <a:ln/>
+        </p:spPr>
+        <p:txBody>
+          <a:bodyPr wrap="square" lIns="0" tIns="0" rIns="0" bIns="0" rtlCol="0" anchor="ctr"/>
+          <a:lstStyle/>
+          <a:p>
+            <a:pPr marL="0" indent="0" algn="ctr">
+              <a:buNone/>
+            </a:pPr>
+            <a:r>
+              <a:rPr lang="en-US" sz="1400" b="1" dirty="0">
                 <a:solidFill>
                   <a:srgbClr val="FFFFFF"/>
                 </a:solidFill>
-                <a:latin typeface="Calibri"/>
+                <a:latin typeface="Calibri" pitchFamily="34" charset="0"/>
+                <a:ea typeface="Calibri" pitchFamily="34" charset="-122"/>
+                <a:cs typeface="Calibri" pitchFamily="34" charset="-120"/>
               </a:rPr>
               <a:t>Tuần 7</a:t>
             </a:r>
-          </a:p>
-        </p:txBody>
-      </p:sp>
-      <p:sp>
-        <p:nvSpPr>
-          <p:cNvPr id="35" name="TextBox 34"/>
-          <p:cNvSpPr txBox="1"/>
-          <p:nvPr/>
-        </p:nvSpPr>
-        <p:spPr>
-          <a:xfrm>
-            <a:off x="7581900" y="3949700"/>
-            <a:ext cx="3886200" cy="698500"/>
-          </a:xfrm>
-          <a:prstGeom prst="rect">
-            <a:avLst/>
-          </a:prstGeom>
-          <a:noFill/>
-        </p:spPr>
-        <p:txBody>
-          <a:bodyPr wrap="square" lIns="0" tIns="0" rIns="0" bIns="0" anchor="ctr">
-            <a:spAutoFit/>
-          </a:bodyPr>
-          <a:lstStyle/>
-          <a:p>
-            <a:r>
-              <a:rPr sz="1550" b="0">
+            <a:endParaRPr lang="en-US" sz="1400" dirty="0"/>
+          </a:p>
+        </p:txBody>
+      </p:sp>
+      <p:sp>
+        <p:nvSpPr>
+          <p:cNvPr id="127" name="Text 30">
+            <a:extLst>
+              <a:ext uri="{FF2B5EF4-FFF2-40B4-BE49-F238E27FC236}">
+                <a16:creationId xmlns:a16="http://schemas.microsoft.com/office/drawing/2014/main" id="{FB39F4A2-D7C1-EDAC-7158-94ABA5A39A77}"/>
+              </a:ext>
+            </a:extLst>
+          </p:cNvPr>
+          <p:cNvSpPr txBox="1"/>
+          <p:nvPr/>
+        </p:nvSpPr>
+        <p:spPr>
+          <a:xfrm>
+            <a:off x="7580376" y="3950208"/>
+            <a:ext cx="3886200" cy="731520"/>
+          </a:xfrm>
+          <a:prstGeom prst="rect">
+            <a:avLst/>
+          </a:prstGeom>
+          <a:noFill/>
+          <a:ln/>
+        </p:spPr>
+        <p:txBody>
+          <a:bodyPr wrap="square" lIns="0" tIns="0" rIns="0" bIns="0" rtlCol="0" anchor="ctr"/>
+          <a:lstStyle/>
+          <a:p>
+            <a:pPr>
+              <a:lnSpc>
+                <a:spcPct val="95000"/>
+              </a:lnSpc>
+            </a:pPr>
+            <a:r>
+              <a:rPr lang="en-US" sz="1180">
                 <a:solidFill>
                   <a:srgbClr val="20223A"/>
                 </a:solidFill>
-                <a:latin typeface="Calibri"/>
-              </a:rPr>
-              <a:t>Chạy 5 cấu hình × 3 trục; phân tích lỗi từ nhật ký vết; tối ưu; demo.</a:t>
-            </a:r>
-          </a:p>
-        </p:txBody>
-      </p:sp>
-      <p:sp>
-        <p:nvSpPr>
-          <p:cNvPr id="36" name="Rectangle 35"/>
-          <p:cNvSpPr/>
-          <p:nvPr/>
-        </p:nvSpPr>
-        <p:spPr>
-          <a:xfrm>
-            <a:off x="6286500" y="4864100"/>
-            <a:ext cx="5334000" cy="927100"/>
-          </a:xfrm>
-          <a:prstGeom prst="rect">
-            <a:avLst/>
-          </a:prstGeom>
-          <a:solidFill>
-            <a:srgbClr val="F1F2FB"/>
-          </a:solidFill>
-          <a:ln>
-            <a:noFill/>
-          </a:ln>
-          <a:effectLst/>
-        </p:spPr>
-        <p:style>
-          <a:lnRef idx="1">
-            <a:schemeClr val="accent1"/>
-          </a:lnRef>
-          <a:fillRef idx="3">
-            <a:schemeClr val="accent1"/>
-          </a:fillRef>
-          <a:effectRef idx="2">
-            <a:schemeClr val="accent1"/>
-          </a:effectRef>
-          <a:fontRef idx="minor">
-            <a:schemeClr val="lt1"/>
-          </a:fontRef>
-        </p:style>
-        <p:txBody>
-          <a:bodyPr rtlCol="0" anchor="ctr"/>
-          <a:lstStyle/>
-          <a:p>
-            <a:pPr algn="ctr"/>
-            <a:endParaRPr/>
-          </a:p>
-        </p:txBody>
-      </p:sp>
-      <p:sp>
-        <p:nvSpPr>
-          <p:cNvPr id="37" name="Rectangle 36"/>
-          <p:cNvSpPr/>
-          <p:nvPr/>
-        </p:nvSpPr>
-        <p:spPr>
-          <a:xfrm>
-            <a:off x="6464300" y="5041900"/>
-            <a:ext cx="965200" cy="571500"/>
-          </a:xfrm>
-          <a:prstGeom prst="rect">
-            <a:avLst/>
-          </a:prstGeom>
-          <a:solidFill>
-            <a:srgbClr val="3A36A0"/>
-          </a:solidFill>
-          <a:ln>
-            <a:noFill/>
-          </a:ln>
-          <a:effectLst/>
-        </p:spPr>
-        <p:style>
-          <a:lnRef idx="1">
-            <a:schemeClr val="accent1"/>
-          </a:lnRef>
-          <a:fillRef idx="3">
-            <a:schemeClr val="accent1"/>
-          </a:fillRef>
-          <a:effectRef idx="2">
-            <a:schemeClr val="accent1"/>
-          </a:effectRef>
-          <a:fontRef idx="minor">
-            <a:schemeClr val="lt1"/>
-          </a:fontRef>
-        </p:style>
-        <p:txBody>
-          <a:bodyPr rtlCol="0" anchor="ctr"/>
-          <a:lstStyle/>
-          <a:p>
-            <a:pPr algn="ctr"/>
-            <a:endParaRPr/>
-          </a:p>
-        </p:txBody>
-      </p:sp>
-      <p:sp>
-        <p:nvSpPr>
-          <p:cNvPr id="38" name="TextBox 37"/>
-          <p:cNvSpPr txBox="1"/>
-          <p:nvPr/>
-        </p:nvSpPr>
-        <p:spPr>
-          <a:xfrm>
-            <a:off x="6464300" y="5041900"/>
-            <a:ext cx="965200" cy="571500"/>
-          </a:xfrm>
-          <a:prstGeom prst="rect">
-            <a:avLst/>
-          </a:prstGeom>
-          <a:noFill/>
-        </p:spPr>
-        <p:txBody>
-          <a:bodyPr wrap="square" lIns="0" tIns="0" rIns="0" bIns="0" anchor="ctr">
-            <a:spAutoFit/>
-          </a:bodyPr>
-          <a:lstStyle/>
-          <a:p>
-            <a:pPr algn="ctr"/>
-            <a:r>
-              <a:rPr sz="1700" b="1">
-                <a:solidFill>
-                  <a:srgbClr val="FFFFFF"/>
-                </a:solidFill>
-                <a:latin typeface="Calibri"/>
-              </a:rPr>
-              <a:t>Tuần 8</a:t>
-            </a:r>
-          </a:p>
-        </p:txBody>
-      </p:sp>
-      <p:sp>
-        <p:nvSpPr>
-          <p:cNvPr id="39" name="TextBox 38"/>
-          <p:cNvSpPr txBox="1"/>
-          <p:nvPr/>
-        </p:nvSpPr>
-        <p:spPr>
-          <a:xfrm>
-            <a:off x="7581900" y="4978400"/>
-            <a:ext cx="3886200" cy="698500"/>
-          </a:xfrm>
-          <a:prstGeom prst="rect">
-            <a:avLst/>
-          </a:prstGeom>
-          <a:noFill/>
-        </p:spPr>
-        <p:txBody>
-          <a:bodyPr wrap="square" lIns="0" tIns="0" rIns="0" bIns="0" anchor="ctr">
-            <a:spAutoFit/>
-          </a:bodyPr>
-          <a:lstStyle/>
-          <a:p>
-            <a:r>
-              <a:rPr sz="1550" b="0">
-                <a:solidFill>
-                  <a:srgbClr val="20223A"/>
-                </a:solidFill>
-                <a:latin typeface="Calibri"/>
+                <a:latin typeface="Calibri" pitchFamily="34" charset="0"/>
+                <a:ea typeface="Calibri" pitchFamily="34" charset="-122"/>
+                <a:cs typeface="Calibri" pitchFamily="34" charset="-120"/>
               </a:rPr>
               <a:t>Viết báo cáo &amp; tài liệu; đóng gói mã nguồn; chuẩn bị trình bày cuối.</a:t>
             </a:r>
+            <a:endParaRPr lang="en-US" sz="1180" dirty="0"/>
           </a:p>
         </p:txBody>
       </p:sp>
     </p:spTree>
+    <p:extLst>
+      <p:ext uri="{BB962C8B-B14F-4D97-AF65-F5344CB8AC3E}">
+        <p14:creationId xmlns:p14="http://schemas.microsoft.com/office/powerpoint/2010/main" val="2888009574"/>
+      </p:ext>
+    </p:extLst>
   </p:cSld>
   <p:clrMapOvr>
     <a:masterClrMapping/>
